--- a/paper/presentations/heavy_tail_backup_refined/heavy_tail_backup_refined_theatrical.pptx
+++ b/paper/presentations/heavy_tail_backup_refined/heavy_tail_backup_refined_theatrical.pptx
@@ -2,18 +2,18 @@
 <file path=ppt/presentation.xml><?xml version="1.0" encoding="utf-8"?>
 <p:presentation xmlns:p="http://schemas.openxmlformats.org/presentationml/2006/main">
   <p:sldMasterIdLst>
-    <p:sldMasterId xmlns:r="http://schemas.openxmlformats.org/officeDocument/2006/relationships" id="2147483648" r:id="R801a61b07e084d45"/>
+    <p:sldMasterId xmlns:r="http://schemas.openxmlformats.org/officeDocument/2006/relationships" id="2147483648" r:id="R5a18bec4a1394975"/>
   </p:sldMasterIdLst>
   <p:notesMasterIdLst>
-    <p:notesMasterId xmlns:r="http://schemas.openxmlformats.org/officeDocument/2006/relationships" r:id="R05808b97761f4784"/>
+    <p:notesMasterId xmlns:r="http://schemas.openxmlformats.org/officeDocument/2006/relationships" r:id="R00254bc545634734"/>
   </p:notesMasterIdLst>
   <p:sldIdLst>
-    <p:sldId xmlns:r="http://schemas.openxmlformats.org/officeDocument/2006/relationships" id="256" r:id="R2c83297ec2e64c1a"/>
-    <p:sldId xmlns:r="http://schemas.openxmlformats.org/officeDocument/2006/relationships" id="257" r:id="Re5baeaf1217e4f95"/>
-    <p:sldId xmlns:r="http://schemas.openxmlformats.org/officeDocument/2006/relationships" id="258" r:id="R3206cb14d8bc49cb"/>
-    <p:sldId xmlns:r="http://schemas.openxmlformats.org/officeDocument/2006/relationships" id="259" r:id="Ra3ebb68e00524650"/>
-    <p:sldId xmlns:r="http://schemas.openxmlformats.org/officeDocument/2006/relationships" id="260" r:id="Rcc1ff1518b8841c7"/>
-    <p:sldId xmlns:r="http://schemas.openxmlformats.org/officeDocument/2006/relationships" id="261" r:id="R5e560417c1fe4a16"/>
+    <p:sldId xmlns:r="http://schemas.openxmlformats.org/officeDocument/2006/relationships" id="256" r:id="Rd6ad887767db4909"/>
+    <p:sldId xmlns:r="http://schemas.openxmlformats.org/officeDocument/2006/relationships" id="257" r:id="Rca8b4e8df2a6447c"/>
+    <p:sldId xmlns:r="http://schemas.openxmlformats.org/officeDocument/2006/relationships" id="258" r:id="R551a1678e2c14e5a"/>
+    <p:sldId xmlns:r="http://schemas.openxmlformats.org/officeDocument/2006/relationships" id="259" r:id="Rd1c2d65452ad42b2"/>
+    <p:sldId xmlns:r="http://schemas.openxmlformats.org/officeDocument/2006/relationships" id="260" r:id="R1910a477759b4b33"/>
+    <p:sldId xmlns:r="http://schemas.openxmlformats.org/officeDocument/2006/relationships" id="261" r:id="Rcf9f763cc09543ec"/>
   </p:sldIdLst>
   <p:sldSz cx="12192000" cy="6858000"/>
   <p:notesSz cx="6858000" cy="9144000"/>
@@ -890,7 +890,7 @@
   </p:cSld>
   <p:clrMap bg1="lt1" tx1="dk1" bg2="lt2" tx2="dk2" accent1="accent1" accent2="accent2" accent3="accent3" accent4="accent4" accent5="accent5" accent6="accent6" hlink="hlink" folHlink="folHlink"/>
   <p:sldLayoutIdLst>
-    <p:sldLayoutId xmlns:r="http://schemas.openxmlformats.org/officeDocument/2006/relationships" id="2147483649" r:id="R7cde2412736c43cd"/>
+    <p:sldLayoutId xmlns:r="http://schemas.openxmlformats.org/officeDocument/2006/relationships" id="2147483649" r:id="R25d7214542b94328"/>
   </p:sldLayoutIdLst>
   <p:txStyles>
     <p:titleStyle>
@@ -1189,7 +1189,7 @@
           <p:cNvPr id="1" name="">
             <a:extLst xmlns:a="http://schemas.openxmlformats.org/drawingml/2006/main">
               <a:ext uri="{FF2B5EF4-FFF2-40B4-BE49-F238E27FC236}">
-                <a16:creationId xmlns:a16="http://schemas.microsoft.com/office/drawing/2014/main" id="{D9FA49E9-3C1E-46E4-A555-72457A1C9E82}"/>
+                <a16:creationId xmlns:a16="http://schemas.microsoft.com/office/drawing/2014/main" id="{17C5B61F-DB0C-49C8-936E-4F09785BD7B4}"/>
               </a:ext>
             </a:extLst>
           </p:cNvPr>
@@ -1224,7 +1224,7 @@
           <p:cNvPr id="2" name="">
             <a:extLst xmlns:a="http://schemas.openxmlformats.org/drawingml/2006/main">
               <a:ext uri="{FF2B5EF4-FFF2-40B4-BE49-F238E27FC236}">
-                <a16:creationId xmlns:a16="http://schemas.microsoft.com/office/drawing/2014/main" id="{EFA19001-F6E2-48D8-B671-94C7348583F9}"/>
+                <a16:creationId xmlns:a16="http://schemas.microsoft.com/office/drawing/2014/main" id="{AFEF956F-5AB9-4BDE-AF8E-F97EE94E4F0B}"/>
               </a:ext>
             </a:extLst>
           </p:cNvPr>
@@ -1259,7 +1259,7 @@
           <p:cNvPr id="3" name="">
             <a:extLst xmlns:a="http://schemas.openxmlformats.org/drawingml/2006/main">
               <a:ext uri="{FF2B5EF4-FFF2-40B4-BE49-F238E27FC236}">
-                <a16:creationId xmlns:a16="http://schemas.microsoft.com/office/drawing/2014/main" id="{EC44C5C1-72A5-488D-8691-8216F253BC6D}"/>
+                <a16:creationId xmlns:a16="http://schemas.microsoft.com/office/drawing/2014/main" id="{2E49E276-C77D-4965-A097-3117EBC3B4FA}"/>
               </a:ext>
             </a:extLst>
           </p:cNvPr>
@@ -1294,7 +1294,7 @@
           <p:cNvPr id="4" name="">
             <a:extLst xmlns:a="http://schemas.openxmlformats.org/drawingml/2006/main">
               <a:ext uri="{FF2B5EF4-FFF2-40B4-BE49-F238E27FC236}">
-                <a16:creationId xmlns:a16="http://schemas.microsoft.com/office/drawing/2014/main" id="{446A638D-F8D1-4CD7-BE9F-35A99E8D1875}"/>
+                <a16:creationId xmlns:a16="http://schemas.microsoft.com/office/drawing/2014/main" id="{3B92D47F-28BF-435C-9859-F93B53985C95}"/>
               </a:ext>
             </a:extLst>
           </p:cNvPr>
@@ -1329,7 +1329,7 @@
           <p:cNvPr id="5" name="">
             <a:extLst xmlns:a="http://schemas.openxmlformats.org/drawingml/2006/main">
               <a:ext uri="{FF2B5EF4-FFF2-40B4-BE49-F238E27FC236}">
-                <a16:creationId xmlns:a16="http://schemas.microsoft.com/office/drawing/2014/main" id="{29F57CC8-4C13-44D9-B07C-001209DB82DE}"/>
+                <a16:creationId xmlns:a16="http://schemas.microsoft.com/office/drawing/2014/main" id="{692C507A-7574-4ECD-B27E-60E3B108776E}"/>
               </a:ext>
             </a:extLst>
           </p:cNvPr>
@@ -1364,7 +1364,7 @@
           <p:cNvPr id="6" name="">
             <a:extLst xmlns:a="http://schemas.openxmlformats.org/drawingml/2006/main">
               <a:ext uri="{FF2B5EF4-FFF2-40B4-BE49-F238E27FC236}">
-                <a16:creationId xmlns:a16="http://schemas.microsoft.com/office/drawing/2014/main" id="{262B1160-B31D-41DC-8DB6-AF1052905DD5}"/>
+                <a16:creationId xmlns:a16="http://schemas.microsoft.com/office/drawing/2014/main" id="{FEB1194A-4C0A-4879-990F-4E1DEA72CAF5}"/>
               </a:ext>
             </a:extLst>
           </p:cNvPr>
@@ -1399,7 +1399,7 @@
           <p:cNvPr id="7" name="">
             <a:extLst xmlns:a="http://schemas.openxmlformats.org/drawingml/2006/main">
               <a:ext uri="{FF2B5EF4-FFF2-40B4-BE49-F238E27FC236}">
-                <a16:creationId xmlns:a16="http://schemas.microsoft.com/office/drawing/2014/main" id="{FAC84349-9909-45A0-B1F3-8547EAF2E138}"/>
+                <a16:creationId xmlns:a16="http://schemas.microsoft.com/office/drawing/2014/main" id="{B6E0E73F-7133-4958-A468-97B0CAA80251}"/>
               </a:ext>
             </a:extLst>
           </p:cNvPr>
@@ -1434,7 +1434,7 @@
           <p:cNvPr id="8" name="">
             <a:extLst xmlns:a="http://schemas.openxmlformats.org/drawingml/2006/main">
               <a:ext uri="{FF2B5EF4-FFF2-40B4-BE49-F238E27FC236}">
-                <a16:creationId xmlns:a16="http://schemas.microsoft.com/office/drawing/2014/main" id="{9E4587D8-9E38-4714-9D21-C26BE2B0B956}"/>
+                <a16:creationId xmlns:a16="http://schemas.microsoft.com/office/drawing/2014/main" id="{C6CF62EE-24A5-48F1-B0F0-BC79BB6DDE58}"/>
               </a:ext>
             </a:extLst>
           </p:cNvPr>
@@ -1469,7 +1469,7 @@
           <p:cNvPr id="9" name="">
             <a:extLst xmlns:a="http://schemas.openxmlformats.org/drawingml/2006/main">
               <a:ext uri="{FF2B5EF4-FFF2-40B4-BE49-F238E27FC236}">
-                <a16:creationId xmlns:a16="http://schemas.microsoft.com/office/drawing/2014/main" id="{E40DC9C5-9E7B-416F-8088-690734273512}"/>
+                <a16:creationId xmlns:a16="http://schemas.microsoft.com/office/drawing/2014/main" id="{9055BC41-0A41-4A54-819A-C2D565123350}"/>
               </a:ext>
             </a:extLst>
           </p:cNvPr>
@@ -1504,7 +1504,7 @@
           <p:cNvPr id="10" name="">
             <a:extLst xmlns:a="http://schemas.openxmlformats.org/drawingml/2006/main">
               <a:ext uri="{FF2B5EF4-FFF2-40B4-BE49-F238E27FC236}">
-                <a16:creationId xmlns:a16="http://schemas.microsoft.com/office/drawing/2014/main" id="{F6AE54EC-55C2-4DDF-BAD7-CF887AE7754D}"/>
+                <a16:creationId xmlns:a16="http://schemas.microsoft.com/office/drawing/2014/main" id="{A756A2D9-8A3B-4897-954A-FB8841E8CBFE}"/>
               </a:ext>
             </a:extLst>
           </p:cNvPr>
@@ -1539,7 +1539,7 @@
           <p:cNvPr id="11" name="">
             <a:extLst xmlns:a="http://schemas.openxmlformats.org/drawingml/2006/main">
               <a:ext uri="{FF2B5EF4-FFF2-40B4-BE49-F238E27FC236}">
-                <a16:creationId xmlns:a16="http://schemas.microsoft.com/office/drawing/2014/main" id="{BC77156C-893E-400C-BEF8-FD6BACD67C50}"/>
+                <a16:creationId xmlns:a16="http://schemas.microsoft.com/office/drawing/2014/main" id="{72BDFD22-04ED-4B43-91C1-B61E4730CD09}"/>
               </a:ext>
             </a:extLst>
           </p:cNvPr>
@@ -1574,7 +1574,7 @@
           <p:cNvPr id="12" name="">
             <a:extLst xmlns:a="http://schemas.openxmlformats.org/drawingml/2006/main">
               <a:ext uri="{FF2B5EF4-FFF2-40B4-BE49-F238E27FC236}">
-                <a16:creationId xmlns:a16="http://schemas.microsoft.com/office/drawing/2014/main" id="{D167A5E0-49AA-4842-8A9D-2BE7F7881BED}"/>
+                <a16:creationId xmlns:a16="http://schemas.microsoft.com/office/drawing/2014/main" id="{8205E09A-8EF3-44B1-B236-14868C47277C}"/>
               </a:ext>
             </a:extLst>
           </p:cNvPr>
@@ -1609,7 +1609,7 @@
           <p:cNvPr id="13" name="">
             <a:extLst xmlns:a="http://schemas.openxmlformats.org/drawingml/2006/main">
               <a:ext uri="{FF2B5EF4-FFF2-40B4-BE49-F238E27FC236}">
-                <a16:creationId xmlns:a16="http://schemas.microsoft.com/office/drawing/2014/main" id="{88C716CD-EC0B-433F-A791-60B0B4E5378A}"/>
+                <a16:creationId xmlns:a16="http://schemas.microsoft.com/office/drawing/2014/main" id="{4714093A-D873-4FFC-B41E-FCAB35FB4030}"/>
               </a:ext>
             </a:extLst>
           </p:cNvPr>
@@ -1644,7 +1644,7 @@
           <p:cNvPr id="14" name="">
             <a:extLst xmlns:a="http://schemas.openxmlformats.org/drawingml/2006/main">
               <a:ext uri="{FF2B5EF4-FFF2-40B4-BE49-F238E27FC236}">
-                <a16:creationId xmlns:a16="http://schemas.microsoft.com/office/drawing/2014/main" id="{E1DF1E78-2EA4-44CE-BCE8-6B806E0E85C6}"/>
+                <a16:creationId xmlns:a16="http://schemas.microsoft.com/office/drawing/2014/main" id="{2D8E69F4-2CB7-4B04-AA8A-4115011DF06D}"/>
               </a:ext>
             </a:extLst>
           </p:cNvPr>
@@ -1679,7 +1679,7 @@
           <p:cNvPr id="15" name="">
             <a:extLst xmlns:a="http://schemas.openxmlformats.org/drawingml/2006/main">
               <a:ext uri="{FF2B5EF4-FFF2-40B4-BE49-F238E27FC236}">
-                <a16:creationId xmlns:a16="http://schemas.microsoft.com/office/drawing/2014/main" id="{BBD6EDCF-7361-46BA-BF6F-5B30776EBE3F}"/>
+                <a16:creationId xmlns:a16="http://schemas.microsoft.com/office/drawing/2014/main" id="{4B17411E-3956-4341-BDDE-77F341F8388C}"/>
               </a:ext>
             </a:extLst>
           </p:cNvPr>
@@ -1714,7 +1714,7 @@
           <p:cNvPr id="16" name="">
             <a:extLst xmlns:a="http://schemas.openxmlformats.org/drawingml/2006/main">
               <a:ext uri="{FF2B5EF4-FFF2-40B4-BE49-F238E27FC236}">
-                <a16:creationId xmlns:a16="http://schemas.microsoft.com/office/drawing/2014/main" id="{35F71D9B-20A7-49E6-8009-B63EDB8C2EBD}"/>
+                <a16:creationId xmlns:a16="http://schemas.microsoft.com/office/drawing/2014/main" id="{EDB714A1-4999-4FEB-AB73-4D24DF946AC0}"/>
               </a:ext>
             </a:extLst>
           </p:cNvPr>
@@ -1749,7 +1749,7 @@
           <p:cNvPr id="17" name="">
             <a:extLst xmlns:a="http://schemas.openxmlformats.org/drawingml/2006/main">
               <a:ext uri="{FF2B5EF4-FFF2-40B4-BE49-F238E27FC236}">
-                <a16:creationId xmlns:a16="http://schemas.microsoft.com/office/drawing/2014/main" id="{97E22A46-0DE7-4CF2-882F-50C0744AF388}"/>
+                <a16:creationId xmlns:a16="http://schemas.microsoft.com/office/drawing/2014/main" id="{94871091-B418-4B4C-A430-5611C05D1555}"/>
               </a:ext>
             </a:extLst>
           </p:cNvPr>
@@ -1784,7 +1784,7 @@
           <p:cNvPr id="18" name="">
             <a:extLst xmlns:a="http://schemas.openxmlformats.org/drawingml/2006/main">
               <a:ext uri="{FF2B5EF4-FFF2-40B4-BE49-F238E27FC236}">
-                <a16:creationId xmlns:a16="http://schemas.microsoft.com/office/drawing/2014/main" id="{07E43438-EF61-49F5-AEC4-10DC75AB9A83}"/>
+                <a16:creationId xmlns:a16="http://schemas.microsoft.com/office/drawing/2014/main" id="{E5DA2FD3-462E-4E2A-B1CD-F43CACCCEEB3}"/>
               </a:ext>
             </a:extLst>
           </p:cNvPr>
@@ -1819,7 +1819,7 @@
           <p:cNvPr id="19" name="">
             <a:extLst xmlns:a="http://schemas.openxmlformats.org/drawingml/2006/main">
               <a:ext uri="{FF2B5EF4-FFF2-40B4-BE49-F238E27FC236}">
-                <a16:creationId xmlns:a16="http://schemas.microsoft.com/office/drawing/2014/main" id="{047D224C-6D72-48A4-A2BB-28EDD7D30063}"/>
+                <a16:creationId xmlns:a16="http://schemas.microsoft.com/office/drawing/2014/main" id="{4C2CBDDF-3A16-42DD-B81A-069AE217811C}"/>
               </a:ext>
             </a:extLst>
           </p:cNvPr>
@@ -1854,7 +1854,7 @@
           <p:cNvPr id="20" name="">
             <a:extLst xmlns:a="http://schemas.openxmlformats.org/drawingml/2006/main">
               <a:ext uri="{FF2B5EF4-FFF2-40B4-BE49-F238E27FC236}">
-                <a16:creationId xmlns:a16="http://schemas.microsoft.com/office/drawing/2014/main" id="{63E5851F-4E38-49AA-B426-F9A5838BA407}"/>
+                <a16:creationId xmlns:a16="http://schemas.microsoft.com/office/drawing/2014/main" id="{4B470567-7795-4E6E-B85D-E6D148D5EDBC}"/>
               </a:ext>
             </a:extLst>
           </p:cNvPr>
@@ -1889,7 +1889,7 @@
           <p:cNvPr id="21" name="">
             <a:extLst xmlns:a="http://schemas.openxmlformats.org/drawingml/2006/main">
               <a:ext uri="{FF2B5EF4-FFF2-40B4-BE49-F238E27FC236}">
-                <a16:creationId xmlns:a16="http://schemas.microsoft.com/office/drawing/2014/main" id="{ABC2C04F-844F-4D06-8A34-3D875036D873}"/>
+                <a16:creationId xmlns:a16="http://schemas.microsoft.com/office/drawing/2014/main" id="{BE94BCBA-242C-4A10-99BA-7B06A969C63C}"/>
               </a:ext>
             </a:extLst>
           </p:cNvPr>
@@ -1924,7 +1924,7 @@
           <p:cNvPr id="22" name="">
             <a:extLst xmlns:a="http://schemas.openxmlformats.org/drawingml/2006/main">
               <a:ext uri="{FF2B5EF4-FFF2-40B4-BE49-F238E27FC236}">
-                <a16:creationId xmlns:a16="http://schemas.microsoft.com/office/drawing/2014/main" id="{A46C608A-2BDF-4D44-A6FB-4F80F9D7255D}"/>
+                <a16:creationId xmlns:a16="http://schemas.microsoft.com/office/drawing/2014/main" id="{554DD5FA-2B4A-43B4-BEBE-992D15E5DAD1}"/>
               </a:ext>
             </a:extLst>
           </p:cNvPr>
@@ -1959,7 +1959,7 @@
           <p:cNvPr id="23" name="">
             <a:extLst xmlns:a="http://schemas.openxmlformats.org/drawingml/2006/main">
               <a:ext uri="{FF2B5EF4-FFF2-40B4-BE49-F238E27FC236}">
-                <a16:creationId xmlns:a16="http://schemas.microsoft.com/office/drawing/2014/main" id="{B207D38F-9776-4DDF-9C68-F25393D53343}"/>
+                <a16:creationId xmlns:a16="http://schemas.microsoft.com/office/drawing/2014/main" id="{BE7888B2-8329-4A45-94CE-B15AB56C6F06}"/>
               </a:ext>
             </a:extLst>
           </p:cNvPr>
@@ -1994,7 +1994,7 @@
           <p:cNvPr id="24" name="">
             <a:extLst xmlns:a="http://schemas.openxmlformats.org/drawingml/2006/main">
               <a:ext uri="{FF2B5EF4-FFF2-40B4-BE49-F238E27FC236}">
-                <a16:creationId xmlns:a16="http://schemas.microsoft.com/office/drawing/2014/main" id="{A9F4470D-922B-4F38-BACF-0554B5CDADC1}"/>
+                <a16:creationId xmlns:a16="http://schemas.microsoft.com/office/drawing/2014/main" id="{2A070B3F-1D1D-412F-8C0B-08AF2D60A376}"/>
               </a:ext>
             </a:extLst>
           </p:cNvPr>
@@ -2029,7 +2029,7 @@
           <p:cNvPr id="25" name="">
             <a:extLst xmlns:a="http://schemas.openxmlformats.org/drawingml/2006/main">
               <a:ext uri="{FF2B5EF4-FFF2-40B4-BE49-F238E27FC236}">
-                <a16:creationId xmlns:a16="http://schemas.microsoft.com/office/drawing/2014/main" id="{6D7F228C-7A76-4389-99BE-6ECB9A5EEB32}"/>
+                <a16:creationId xmlns:a16="http://schemas.microsoft.com/office/drawing/2014/main" id="{382F4671-B7E6-4A83-A53D-DEE41618DDFB}"/>
               </a:ext>
             </a:extLst>
           </p:cNvPr>
@@ -2064,7 +2064,7 @@
           <p:cNvPr id="26" name="">
             <a:extLst xmlns:a="http://schemas.openxmlformats.org/drawingml/2006/main">
               <a:ext uri="{FF2B5EF4-FFF2-40B4-BE49-F238E27FC236}">
-                <a16:creationId xmlns:a16="http://schemas.microsoft.com/office/drawing/2014/main" id="{6E517503-EF7D-445B-9E4E-F3B74C8D69D3}"/>
+                <a16:creationId xmlns:a16="http://schemas.microsoft.com/office/drawing/2014/main" id="{BE1CD5F8-F745-4EA6-8B59-8C1F717E1066}"/>
               </a:ext>
             </a:extLst>
           </p:cNvPr>
@@ -2099,7 +2099,7 @@
           <p:cNvPr id="27" name="">
             <a:extLst xmlns:a="http://schemas.openxmlformats.org/drawingml/2006/main">
               <a:ext uri="{FF2B5EF4-FFF2-40B4-BE49-F238E27FC236}">
-                <a16:creationId xmlns:a16="http://schemas.microsoft.com/office/drawing/2014/main" id="{3E8ED849-2346-476F-A27F-0F5889AD4776}"/>
+                <a16:creationId xmlns:a16="http://schemas.microsoft.com/office/drawing/2014/main" id="{D1E21041-379D-4324-A09A-9ED91518C8BE}"/>
               </a:ext>
             </a:extLst>
           </p:cNvPr>
@@ -2134,7 +2134,7 @@
           <p:cNvPr id="28" name="">
             <a:extLst xmlns:a="http://schemas.openxmlformats.org/drawingml/2006/main">
               <a:ext uri="{FF2B5EF4-FFF2-40B4-BE49-F238E27FC236}">
-                <a16:creationId xmlns:a16="http://schemas.microsoft.com/office/drawing/2014/main" id="{CE738827-97C6-40D4-ACAA-8971E23B885C}"/>
+                <a16:creationId xmlns:a16="http://schemas.microsoft.com/office/drawing/2014/main" id="{EA2F7A32-9121-48F1-8D6E-618A8A2A88CC}"/>
               </a:ext>
             </a:extLst>
           </p:cNvPr>
@@ -2169,7 +2169,7 @@
           <p:cNvPr id="29" name="">
             <a:extLst xmlns:a="http://schemas.openxmlformats.org/drawingml/2006/main">
               <a:ext uri="{FF2B5EF4-FFF2-40B4-BE49-F238E27FC236}">
-                <a16:creationId xmlns:a16="http://schemas.microsoft.com/office/drawing/2014/main" id="{155AECE2-9107-48C6-9672-7AA6AD708F7A}"/>
+                <a16:creationId xmlns:a16="http://schemas.microsoft.com/office/drawing/2014/main" id="{750B36F3-8FFD-440F-B658-5AFB909749AB}"/>
               </a:ext>
             </a:extLst>
           </p:cNvPr>
@@ -2204,7 +2204,7 @@
           <p:cNvPr id="30" name="">
             <a:extLst xmlns:a="http://schemas.openxmlformats.org/drawingml/2006/main">
               <a:ext uri="{FF2B5EF4-FFF2-40B4-BE49-F238E27FC236}">
-                <a16:creationId xmlns:a16="http://schemas.microsoft.com/office/drawing/2014/main" id="{70A47281-A00E-474C-854B-6C504C099C1A}"/>
+                <a16:creationId xmlns:a16="http://schemas.microsoft.com/office/drawing/2014/main" id="{0A702CA0-2AB8-4E7C-A5F9-123B0DD322D7}"/>
               </a:ext>
             </a:extLst>
           </p:cNvPr>
@@ -2268,7 +2268,7 @@
           <p:cNvPr id="31" name="kicker-01-marker">
             <a:extLst xmlns:a="http://schemas.openxmlformats.org/drawingml/2006/main">
               <a:ext uri="{FF2B5EF4-FFF2-40B4-BE49-F238E27FC236}">
-                <a16:creationId xmlns:a16="http://schemas.microsoft.com/office/drawing/2014/main" id="{EE067B35-BC18-4295-BBF8-DD32252E4B88}"/>
+                <a16:creationId xmlns:a16="http://schemas.microsoft.com/office/drawing/2014/main" id="{B8747A50-7497-49E5-8B5A-2B95E2A8A037}"/>
               </a:ext>
             </a:extLst>
           </p:cNvPr>
@@ -2303,7 +2303,7 @@
           <p:cNvPr id="32" name="kicker-01-label">
             <a:extLst xmlns:a="http://schemas.openxmlformats.org/drawingml/2006/main">
               <a:ext uri="{FF2B5EF4-FFF2-40B4-BE49-F238E27FC236}">
-                <a16:creationId xmlns:a16="http://schemas.microsoft.com/office/drawing/2014/main" id="{1D4E8926-D7BB-4D21-8E37-51A970D85858}"/>
+                <a16:creationId xmlns:a16="http://schemas.microsoft.com/office/drawing/2014/main" id="{45EC9008-D696-4568-9E39-DDC2D9AAA2FA}"/>
               </a:ext>
             </a:extLst>
           </p:cNvPr>
@@ -2367,7 +2367,135 @@
           <p:cNvPr id="33" name="">
             <a:extLst xmlns:a="http://schemas.openxmlformats.org/drawingml/2006/main">
               <a:ext uri="{FF2B5EF4-FFF2-40B4-BE49-F238E27FC236}">
-                <a16:creationId xmlns:a16="http://schemas.microsoft.com/office/drawing/2014/main" id="{136DEFAA-52B0-4267-9659-83543D48E7D2}"/>
+                <a16:creationId xmlns:a16="http://schemas.microsoft.com/office/drawing/2014/main" id="{85794EF8-C555-477C-BD30-33E26CA00C8A}"/>
+              </a:ext>
+            </a:extLst>
+          </p:cNvPr>
+          <p:cNvSpPr>
+            <a:spLocks xmlns:a="http://schemas.openxmlformats.org/drawingml/2006/main" noGrp="1"/>
+          </p:cNvSpPr>
+          <p:nvPr/>
+        </p:nvSpPr>
+        <p:spPr>
+          <a:xfrm xmlns:a="http://schemas.openxmlformats.org/drawingml/2006/main">
+            <a:off x="552450" y="781050"/>
+            <a:ext cx="7429500" cy="628650"/>
+          </a:xfrm>
+          <a:prstGeom xmlns:a="http://schemas.openxmlformats.org/drawingml/2006/main" prst="rect">
+            <a:avLst/>
+          </a:prstGeom>
+          <a:solidFill xmlns:a="http://schemas.openxmlformats.org/drawingml/2006/main">
+            <a:srgbClr val="000000">
+              <a:alpha val="0"/>
+            </a:srgbClr>
+          </a:solidFill>
+          <a:ln xmlns:a="http://schemas.openxmlformats.org/drawingml/2006/main" w="0">
+            <a:solidFill>
+              <a:srgbClr val="000000">
+                <a:alpha val="0"/>
+              </a:srgbClr>
+            </a:solidFill>
+            <a:prstDash val="solid"/>
+          </a:ln>
+        </p:spPr>
+        <p:txBody>
+          <a:bodyPr xmlns:a="http://schemas.openxmlformats.org/drawingml/2006/main" lIns="0" tIns="0" rIns="0" bIns="0" anchor="t"/>
+          <a:lstStyle xmlns:a="http://schemas.openxmlformats.org/drawingml/2006/main"/>
+          <a:p xmlns:a="http://schemas.openxmlformats.org/drawingml/2006/main">
+            <a:pPr algn="l">
+              <a:defRPr sz="2775" b="1">
+                <a:solidFill>
+                  <a:srgbClr val="F8F2E8"/>
+                </a:solidFill>
+                <a:latin typeface="Hiragino Sans"/>
+                <a:ea typeface="Hiragino Sans"/>
+                <a:cs typeface="Hiragino Sans"/>
+              </a:defRPr>
+            </a:pPr>
+            <a:r>
+              <a:rPr sz="2775" b="1">
+                <a:solidFill>
+                  <a:srgbClr val="F8F2E8"/>
+                </a:solidFill>
+                <a:latin typeface="Hiragino Sans"/>
+                <a:ea typeface="Hiragino Sans"/>
+                <a:cs typeface="Hiragino Sans"/>
+              </a:rPr>
+              <a:t>最新が、いちばん危ない復元先になる</a:t>
+            </a:r>
+          </a:p>
+        </p:txBody>
+      </p:sp>
+      <p:sp>
+        <p:nvSpPr>
+          <p:cNvPr id="34" name="">
+            <a:extLst xmlns:a="http://schemas.openxmlformats.org/drawingml/2006/main">
+              <a:ext uri="{FF2B5EF4-FFF2-40B4-BE49-F238E27FC236}">
+                <a16:creationId xmlns:a16="http://schemas.microsoft.com/office/drawing/2014/main" id="{B03806B5-77E0-4B87-B770-771B37F0DE94}"/>
+              </a:ext>
+            </a:extLst>
+          </p:cNvPr>
+          <p:cNvSpPr>
+            <a:spLocks xmlns:a="http://schemas.openxmlformats.org/drawingml/2006/main" noGrp="1"/>
+          </p:cNvSpPr>
+          <p:nvPr/>
+        </p:nvSpPr>
+        <p:spPr>
+          <a:xfrm xmlns:a="http://schemas.openxmlformats.org/drawingml/2006/main">
+            <a:off x="590550" y="1466850"/>
+            <a:ext cx="6858000" cy="342900"/>
+          </a:xfrm>
+          <a:prstGeom xmlns:a="http://schemas.openxmlformats.org/drawingml/2006/main" prst="rect">
+            <a:avLst/>
+          </a:prstGeom>
+          <a:solidFill xmlns:a="http://schemas.openxmlformats.org/drawingml/2006/main">
+            <a:srgbClr val="000000">
+              <a:alpha val="0"/>
+            </a:srgbClr>
+          </a:solidFill>
+          <a:ln xmlns:a="http://schemas.openxmlformats.org/drawingml/2006/main" w="0">
+            <a:solidFill>
+              <a:srgbClr val="000000">
+                <a:alpha val="0"/>
+              </a:srgbClr>
+            </a:solidFill>
+            <a:prstDash val="solid"/>
+          </a:ln>
+        </p:spPr>
+        <p:txBody>
+          <a:bodyPr xmlns:a="http://schemas.openxmlformats.org/drawingml/2006/main" lIns="0" tIns="0" rIns="0" bIns="0" anchor="t"/>
+          <a:lstStyle xmlns:a="http://schemas.openxmlformats.org/drawingml/2006/main"/>
+          <a:p xmlns:a="http://schemas.openxmlformats.org/drawingml/2006/main">
+            <a:pPr algn="l">
+              <a:defRPr sz="1050" b="0">
+                <a:solidFill>
+                  <a:srgbClr val="A8B1BA"/>
+                </a:solidFill>
+                <a:latin typeface="Hiragino Sans"/>
+                <a:ea typeface="Hiragino Sans"/>
+                <a:cs typeface="Hiragino Sans"/>
+              </a:defRPr>
+            </a:pPr>
+            <a:r>
+              <a:rPr sz="1050" b="0">
+                <a:solidFill>
+                  <a:srgbClr val="A8B1BA"/>
+                </a:solidFill>
+                <a:latin typeface="Hiragino Sans"/>
+                <a:ea typeface="Hiragino Sans"/>
+                <a:cs typeface="Hiragino Sans"/>
+              </a:rPr>
+              <a:t>侵入後のバックアップは新しくても清浄とは限らない。復旧判断の問いを、鮮度から清浄性へひっくり返す。</a:t>
+            </a:r>
+          </a:p>
+        </p:txBody>
+      </p:sp>
+      <p:sp>
+        <p:nvSpPr>
+          <p:cNvPr id="35" name="">
+            <a:extLst xmlns:a="http://schemas.openxmlformats.org/drawingml/2006/main">
+              <a:ext uri="{FF2B5EF4-FFF2-40B4-BE49-F238E27FC236}">
+                <a16:creationId xmlns:a16="http://schemas.microsoft.com/office/drawing/2014/main" id="{31167F40-CB1D-406A-B373-E1EDFCA7B17C}"/>
               </a:ext>
             </a:extLst>
           </p:cNvPr>
@@ -2428,138 +2556,10 @@
       </p:sp>
       <p:sp>
         <p:nvSpPr>
-          <p:cNvPr id="34" name="">
-            <a:extLst xmlns:a="http://schemas.openxmlformats.org/drawingml/2006/main">
-              <a:ext uri="{FF2B5EF4-FFF2-40B4-BE49-F238E27FC236}">
-                <a16:creationId xmlns:a16="http://schemas.microsoft.com/office/drawing/2014/main" id="{181342FC-1D23-4108-A850-41EBF676D68F}"/>
-              </a:ext>
-            </a:extLst>
-          </p:cNvPr>
-          <p:cNvSpPr>
-            <a:spLocks xmlns:a="http://schemas.openxmlformats.org/drawingml/2006/main" noGrp="1"/>
-          </p:cNvSpPr>
-          <p:nvPr/>
-        </p:nvSpPr>
-        <p:spPr>
-          <a:xfrm xmlns:a="http://schemas.openxmlformats.org/drawingml/2006/main">
-            <a:off x="552450" y="781050"/>
-            <a:ext cx="7429500" cy="647700"/>
-          </a:xfrm>
-          <a:prstGeom xmlns:a="http://schemas.openxmlformats.org/drawingml/2006/main" prst="rect">
-            <a:avLst/>
-          </a:prstGeom>
-          <a:solidFill xmlns:a="http://schemas.openxmlformats.org/drawingml/2006/main">
-            <a:srgbClr val="000000">
-              <a:alpha val="0"/>
-            </a:srgbClr>
-          </a:solidFill>
-          <a:ln xmlns:a="http://schemas.openxmlformats.org/drawingml/2006/main" w="0">
-            <a:solidFill>
-              <a:srgbClr val="000000">
-                <a:alpha val="0"/>
-              </a:srgbClr>
-            </a:solidFill>
-            <a:prstDash val="solid"/>
-          </a:ln>
-        </p:spPr>
-        <p:txBody>
-          <a:bodyPr xmlns:a="http://schemas.openxmlformats.org/drawingml/2006/main" lIns="0" tIns="0" rIns="0" bIns="0" anchor="t"/>
-          <a:lstStyle xmlns:a="http://schemas.openxmlformats.org/drawingml/2006/main"/>
-          <a:p xmlns:a="http://schemas.openxmlformats.org/drawingml/2006/main">
-            <a:pPr algn="l">
-              <a:defRPr sz="2775" b="1">
-                <a:solidFill>
-                  <a:srgbClr val="F8F2E8"/>
-                </a:solidFill>
-                <a:latin typeface="Hiragino Sans"/>
-                <a:ea typeface="Hiragino Sans"/>
-                <a:cs typeface="Hiragino Sans"/>
-              </a:defRPr>
-            </a:pPr>
-            <a:r>
-              <a:rPr sz="2775" b="1">
-                <a:solidFill>
-                  <a:srgbClr val="F8F2E8"/>
-                </a:solidFill>
-                <a:latin typeface="Hiragino Sans"/>
-                <a:ea typeface="Hiragino Sans"/>
-                <a:cs typeface="Hiragino Sans"/>
-              </a:rPr>
-              <a:t>最新が、いちばん危ない復元先になる</a:t>
-            </a:r>
-          </a:p>
-        </p:txBody>
-      </p:sp>
-      <p:sp>
-        <p:nvSpPr>
-          <p:cNvPr id="35" name="">
-            <a:extLst xmlns:a="http://schemas.openxmlformats.org/drawingml/2006/main">
-              <a:ext uri="{FF2B5EF4-FFF2-40B4-BE49-F238E27FC236}">
-                <a16:creationId xmlns:a16="http://schemas.microsoft.com/office/drawing/2014/main" id="{780D14DB-AD2C-4052-94DF-CB0F3E0CD7C0}"/>
-              </a:ext>
-            </a:extLst>
-          </p:cNvPr>
-          <p:cNvSpPr>
-            <a:spLocks xmlns:a="http://schemas.openxmlformats.org/drawingml/2006/main" noGrp="1"/>
-          </p:cNvSpPr>
-          <p:nvPr/>
-        </p:nvSpPr>
-        <p:spPr>
-          <a:xfrm xmlns:a="http://schemas.openxmlformats.org/drawingml/2006/main">
-            <a:off x="590550" y="1466850"/>
-            <a:ext cx="6858000" cy="323850"/>
-          </a:xfrm>
-          <a:prstGeom xmlns:a="http://schemas.openxmlformats.org/drawingml/2006/main" prst="rect">
-            <a:avLst/>
-          </a:prstGeom>
-          <a:solidFill xmlns:a="http://schemas.openxmlformats.org/drawingml/2006/main">
-            <a:srgbClr val="000000">
-              <a:alpha val="0"/>
-            </a:srgbClr>
-          </a:solidFill>
-          <a:ln xmlns:a="http://schemas.openxmlformats.org/drawingml/2006/main" w="0">
-            <a:solidFill>
-              <a:srgbClr val="000000">
-                <a:alpha val="0"/>
-              </a:srgbClr>
-            </a:solidFill>
-            <a:prstDash val="solid"/>
-          </a:ln>
-        </p:spPr>
-        <p:txBody>
-          <a:bodyPr xmlns:a="http://schemas.openxmlformats.org/drawingml/2006/main" lIns="0" tIns="0" rIns="0" bIns="0" anchor="t"/>
-          <a:lstStyle xmlns:a="http://schemas.openxmlformats.org/drawingml/2006/main"/>
-          <a:p xmlns:a="http://schemas.openxmlformats.org/drawingml/2006/main">
-            <a:pPr algn="l">
-              <a:defRPr sz="1050" b="0">
-                <a:solidFill>
-                  <a:srgbClr val="A8B1BA"/>
-                </a:solidFill>
-                <a:latin typeface="Hiragino Sans"/>
-                <a:ea typeface="Hiragino Sans"/>
-                <a:cs typeface="Hiragino Sans"/>
-              </a:defRPr>
-            </a:pPr>
-            <a:r>
-              <a:rPr sz="1050" b="0">
-                <a:solidFill>
-                  <a:srgbClr val="A8B1BA"/>
-                </a:solidFill>
-                <a:latin typeface="Hiragino Sans"/>
-                <a:ea typeface="Hiragino Sans"/>
-                <a:cs typeface="Hiragino Sans"/>
-              </a:rPr>
-              <a:t>侵入後のバックアップは新しくても清浄とは限らない。復旧判断の問いを、鮮度から清浄性へひっくり返す。</a:t>
-            </a:r>
-          </a:p>
-        </p:txBody>
-      </p:sp>
-      <p:sp>
-        <p:nvSpPr>
           <p:cNvPr id="36" name="">
             <a:extLst xmlns:a="http://schemas.openxmlformats.org/drawingml/2006/main">
               <a:ext uri="{FF2B5EF4-FFF2-40B4-BE49-F238E27FC236}">
-                <a16:creationId xmlns:a16="http://schemas.microsoft.com/office/drawing/2014/main" id="{31FF34BF-C0EB-4A56-9A69-4E0DA43CC1DB}"/>
+                <a16:creationId xmlns:a16="http://schemas.microsoft.com/office/drawing/2014/main" id="{B14A601A-69D7-49EF-957A-60D7C7AD58F0}"/>
               </a:ext>
             </a:extLst>
           </p:cNvPr>
@@ -2592,7 +2592,7 @@
           <p:cNvPr id="37" name="">
             <a:extLst xmlns:a="http://schemas.openxmlformats.org/drawingml/2006/main">
               <a:ext uri="{FF2B5EF4-FFF2-40B4-BE49-F238E27FC236}">
-                <a16:creationId xmlns:a16="http://schemas.microsoft.com/office/drawing/2014/main" id="{27A0231A-1BB9-4216-8C8D-2C9B845BA3A0}"/>
+                <a16:creationId xmlns:a16="http://schemas.microsoft.com/office/drawing/2014/main" id="{05CC29CD-F120-451A-9B22-5426ADC87EE6}"/>
               </a:ext>
             </a:extLst>
           </p:cNvPr>
@@ -2627,7 +2627,7 @@
           <p:cNvPr id="38" name="">
             <a:extLst xmlns:a="http://schemas.openxmlformats.org/drawingml/2006/main">
               <a:ext uri="{FF2B5EF4-FFF2-40B4-BE49-F238E27FC236}">
-                <a16:creationId xmlns:a16="http://schemas.microsoft.com/office/drawing/2014/main" id="{F9DB7C34-5485-4172-BF14-A259AEF5F623}"/>
+                <a16:creationId xmlns:a16="http://schemas.microsoft.com/office/drawing/2014/main" id="{59A9DFA1-3F7F-450A-B726-C08431E382A5}"/>
               </a:ext>
             </a:extLst>
           </p:cNvPr>
@@ -2662,7 +2662,7 @@
           <p:cNvPr id="39" name="">
             <a:extLst xmlns:a="http://schemas.openxmlformats.org/drawingml/2006/main">
               <a:ext uri="{FF2B5EF4-FFF2-40B4-BE49-F238E27FC236}">
-                <a16:creationId xmlns:a16="http://schemas.microsoft.com/office/drawing/2014/main" id="{63A4B068-F8F3-478D-934C-EFCE8EE45AB4}"/>
+                <a16:creationId xmlns:a16="http://schemas.microsoft.com/office/drawing/2014/main" id="{7F31B2FA-A593-45AF-8D4C-1AD7573AD496}"/>
               </a:ext>
             </a:extLst>
           </p:cNvPr>
@@ -2697,7 +2697,7 @@
           <p:cNvPr id="40" name="">
             <a:extLst xmlns:a="http://schemas.openxmlformats.org/drawingml/2006/main">
               <a:ext uri="{FF2B5EF4-FFF2-40B4-BE49-F238E27FC236}">
-                <a16:creationId xmlns:a16="http://schemas.microsoft.com/office/drawing/2014/main" id="{8FC9CDE6-A785-473A-9F1F-BB5E36B3C5DA}"/>
+                <a16:creationId xmlns:a16="http://schemas.microsoft.com/office/drawing/2014/main" id="{E0BB746E-7FBB-4B96-B7D0-F3E978B43CB4}"/>
               </a:ext>
             </a:extLst>
           </p:cNvPr>
@@ -2732,7 +2732,7 @@
           <p:cNvPr id="41" name="">
             <a:extLst xmlns:a="http://schemas.openxmlformats.org/drawingml/2006/main">
               <a:ext uri="{FF2B5EF4-FFF2-40B4-BE49-F238E27FC236}">
-                <a16:creationId xmlns:a16="http://schemas.microsoft.com/office/drawing/2014/main" id="{3F739326-BB8C-4141-9339-0DE6C9ADBB02}"/>
+                <a16:creationId xmlns:a16="http://schemas.microsoft.com/office/drawing/2014/main" id="{2D4395E1-2FC7-49B2-9FDA-0669856ADD17}"/>
               </a:ext>
             </a:extLst>
           </p:cNvPr>
@@ -2767,7 +2767,7 @@
           <p:cNvPr id="42" name="">
             <a:extLst xmlns:a="http://schemas.openxmlformats.org/drawingml/2006/main">
               <a:ext uri="{FF2B5EF4-FFF2-40B4-BE49-F238E27FC236}">
-                <a16:creationId xmlns:a16="http://schemas.microsoft.com/office/drawing/2014/main" id="{A399F637-A4B4-4FEC-8929-CA5174086D8B}"/>
+                <a16:creationId xmlns:a16="http://schemas.microsoft.com/office/drawing/2014/main" id="{E44CDB9B-2E03-4FED-9185-3D122F25A8CC}"/>
               </a:ext>
             </a:extLst>
           </p:cNvPr>
@@ -2802,7 +2802,7 @@
           <p:cNvPr id="43" name="">
             <a:extLst xmlns:a="http://schemas.openxmlformats.org/drawingml/2006/main">
               <a:ext uri="{FF2B5EF4-FFF2-40B4-BE49-F238E27FC236}">
-                <a16:creationId xmlns:a16="http://schemas.microsoft.com/office/drawing/2014/main" id="{3326D1C4-11F9-43FF-B022-6A3C54C9C356}"/>
+                <a16:creationId xmlns:a16="http://schemas.microsoft.com/office/drawing/2014/main" id="{16EC8BCC-9AE1-420A-96CE-EB98C1E66FB5}"/>
               </a:ext>
             </a:extLst>
           </p:cNvPr>
@@ -2866,7 +2866,7 @@
           <p:cNvPr id="44" name="">
             <a:extLst xmlns:a="http://schemas.openxmlformats.org/drawingml/2006/main">
               <a:ext uri="{FF2B5EF4-FFF2-40B4-BE49-F238E27FC236}">
-                <a16:creationId xmlns:a16="http://schemas.microsoft.com/office/drawing/2014/main" id="{F952A9C6-0965-4FE9-A986-17C5B52093DD}"/>
+                <a16:creationId xmlns:a16="http://schemas.microsoft.com/office/drawing/2014/main" id="{AB0449EB-9C5E-4C0F-B6B0-918A65F4B232}"/>
               </a:ext>
             </a:extLst>
           </p:cNvPr>
@@ -2901,7 +2901,7 @@
           <p:cNvPr id="45" name="">
             <a:extLst xmlns:a="http://schemas.openxmlformats.org/drawingml/2006/main">
               <a:ext uri="{FF2B5EF4-FFF2-40B4-BE49-F238E27FC236}">
-                <a16:creationId xmlns:a16="http://schemas.microsoft.com/office/drawing/2014/main" id="{E6A92A1A-2EF2-476E-B501-86043D26D0E3}"/>
+                <a16:creationId xmlns:a16="http://schemas.microsoft.com/office/drawing/2014/main" id="{96547E59-2E92-4CA3-9F9C-C52D7E486A61}"/>
               </a:ext>
             </a:extLst>
           </p:cNvPr>
@@ -2965,7 +2965,71 @@
           <p:cNvPr id="46" name="">
             <a:extLst xmlns:a="http://schemas.openxmlformats.org/drawingml/2006/main">
               <a:ext uri="{FF2B5EF4-FFF2-40B4-BE49-F238E27FC236}">
-                <a16:creationId xmlns:a16="http://schemas.microsoft.com/office/drawing/2014/main" id="{5E2B2815-5B17-4150-9DE6-A520DEAE8FCD}"/>
+                <a16:creationId xmlns:a16="http://schemas.microsoft.com/office/drawing/2014/main" id="{A721D8D2-3779-4CD9-B33C-9FD1E919FB63}"/>
+              </a:ext>
+            </a:extLst>
+          </p:cNvPr>
+          <p:cNvSpPr>
+            <a:spLocks xmlns:a="http://schemas.openxmlformats.org/drawingml/2006/main" noGrp="1"/>
+          </p:cNvSpPr>
+          <p:nvPr/>
+        </p:nvSpPr>
+        <p:spPr>
+          <a:xfrm xmlns:a="http://schemas.openxmlformats.org/drawingml/2006/main">
+            <a:off x="1085850" y="2362200"/>
+            <a:ext cx="3429000" cy="209550"/>
+          </a:xfrm>
+          <a:prstGeom xmlns:a="http://schemas.openxmlformats.org/drawingml/2006/main" prst="rect">
+            <a:avLst/>
+          </a:prstGeom>
+          <a:solidFill xmlns:a="http://schemas.openxmlformats.org/drawingml/2006/main">
+            <a:srgbClr val="000000">
+              <a:alpha val="0"/>
+            </a:srgbClr>
+          </a:solidFill>
+          <a:ln xmlns:a="http://schemas.openxmlformats.org/drawingml/2006/main" w="0">
+            <a:solidFill>
+              <a:srgbClr val="000000">
+                <a:alpha val="0"/>
+              </a:srgbClr>
+            </a:solidFill>
+            <a:prstDash val="solid"/>
+          </a:ln>
+        </p:spPr>
+        <p:txBody>
+          <a:bodyPr xmlns:a="http://schemas.openxmlformats.org/drawingml/2006/main" lIns="0" tIns="0" rIns="0" bIns="0" anchor="t"/>
+          <a:lstStyle xmlns:a="http://schemas.openxmlformats.org/drawingml/2006/main"/>
+          <a:p xmlns:a="http://schemas.openxmlformats.org/drawingml/2006/main">
+            <a:pPr algn="l">
+              <a:defRPr sz="863" b="0">
+                <a:solidFill>
+                  <a:srgbClr val="A8B1BA"/>
+                </a:solidFill>
+                <a:latin typeface="Hiragino Sans"/>
+                <a:ea typeface="Hiragino Sans"/>
+                <a:cs typeface="Hiragino Sans"/>
+              </a:defRPr>
+            </a:pPr>
+            <a:r>
+              <a:rPr sz="863" b="0">
+                <a:solidFill>
+                  <a:srgbClr val="A8B1BA"/>
+                </a:solidFill>
+                <a:latin typeface="Hiragino Sans"/>
+                <a:ea typeface="Hiragino Sans"/>
+                <a:cs typeface="Hiragino Sans"/>
+              </a:rPr>
+              <a:t>横軸: バックアップ時点（古い → 新しい）</a:t>
+            </a:r>
+          </a:p>
+        </p:txBody>
+      </p:sp>
+      <p:sp>
+        <p:nvSpPr>
+          <p:cNvPr id="47" name="">
+            <a:extLst xmlns:a="http://schemas.openxmlformats.org/drawingml/2006/main">
+              <a:ext uri="{FF2B5EF4-FFF2-40B4-BE49-F238E27FC236}">
+                <a16:creationId xmlns:a16="http://schemas.microsoft.com/office/drawing/2014/main" id="{9865F79D-1778-4723-8ECF-64970C471236}"/>
               </a:ext>
             </a:extLst>
           </p:cNvPr>
@@ -2997,10 +3061,10 @@
       </p:sp>
       <p:sp>
         <p:nvSpPr>
-          <p:cNvPr id="47" name="">
-            <a:extLst xmlns:a="http://schemas.openxmlformats.org/drawingml/2006/main">
-              <a:ext uri="{FF2B5EF4-FFF2-40B4-BE49-F238E27FC236}">
-                <a16:creationId xmlns:a16="http://schemas.microsoft.com/office/drawing/2014/main" id="{AAE36364-48F8-4372-8177-843C58D76816}"/>
+          <p:cNvPr id="48" name="">
+            <a:extLst xmlns:a="http://schemas.openxmlformats.org/drawingml/2006/main">
+              <a:ext uri="{FF2B5EF4-FFF2-40B4-BE49-F238E27FC236}">
+                <a16:creationId xmlns:a16="http://schemas.microsoft.com/office/drawing/2014/main" id="{02B52806-ACD9-4F85-BFA6-ADB77393C6C2}"/>
               </a:ext>
             </a:extLst>
           </p:cNvPr>
@@ -3061,10 +3125,10 @@
       </p:sp>
       <p:sp>
         <p:nvSpPr>
-          <p:cNvPr id="48" name="">
-            <a:extLst xmlns:a="http://schemas.openxmlformats.org/drawingml/2006/main">
-              <a:ext uri="{FF2B5EF4-FFF2-40B4-BE49-F238E27FC236}">
-                <a16:creationId xmlns:a16="http://schemas.microsoft.com/office/drawing/2014/main" id="{389FDE9B-5CCA-4A55-B0BA-6ACCF6F791B9}"/>
+          <p:cNvPr id="49" name="">
+            <a:extLst xmlns:a="http://schemas.openxmlformats.org/drawingml/2006/main">
+              <a:ext uri="{FF2B5EF4-FFF2-40B4-BE49-F238E27FC236}">
+                <a16:creationId xmlns:a16="http://schemas.microsoft.com/office/drawing/2014/main" id="{FF3D4441-5A0B-41D9-A2C3-DF3CE6E1463E}"/>
               </a:ext>
             </a:extLst>
           </p:cNvPr>
@@ -3096,10 +3160,10 @@
       </p:sp>
       <p:sp>
         <p:nvSpPr>
-          <p:cNvPr id="49" name="">
-            <a:extLst xmlns:a="http://schemas.openxmlformats.org/drawingml/2006/main">
-              <a:ext uri="{FF2B5EF4-FFF2-40B4-BE49-F238E27FC236}">
-                <a16:creationId xmlns:a16="http://schemas.microsoft.com/office/drawing/2014/main" id="{A9CE872D-4A8D-4BA1-A259-35F19410DB4F}"/>
+          <p:cNvPr id="50" name="">
+            <a:extLst xmlns:a="http://schemas.openxmlformats.org/drawingml/2006/main">
+              <a:ext uri="{FF2B5EF4-FFF2-40B4-BE49-F238E27FC236}">
+                <a16:creationId xmlns:a16="http://schemas.microsoft.com/office/drawing/2014/main" id="{3382D48D-01E9-4104-9D6E-DBFDA22B89FD}"/>
               </a:ext>
             </a:extLst>
           </p:cNvPr>
@@ -3160,10 +3224,10 @@
       </p:sp>
       <p:sp>
         <p:nvSpPr>
-          <p:cNvPr id="50" name="">
-            <a:extLst xmlns:a="http://schemas.openxmlformats.org/drawingml/2006/main">
-              <a:ext uri="{FF2B5EF4-FFF2-40B4-BE49-F238E27FC236}">
-                <a16:creationId xmlns:a16="http://schemas.microsoft.com/office/drawing/2014/main" id="{DC428B2C-EFA2-475A-B968-6B1C6DF97E37}"/>
+          <p:cNvPr id="51" name="">
+            <a:extLst xmlns:a="http://schemas.openxmlformats.org/drawingml/2006/main">
+              <a:ext uri="{FF2B5EF4-FFF2-40B4-BE49-F238E27FC236}">
+                <a16:creationId xmlns:a16="http://schemas.microsoft.com/office/drawing/2014/main" id="{84FFAC0E-BD52-4D0C-98C8-3545D5D821A9}"/>
               </a:ext>
             </a:extLst>
           </p:cNvPr>
@@ -3193,10 +3257,10 @@
       </p:sp>
       <p:sp>
         <p:nvSpPr>
-          <p:cNvPr id="51" name="">
-            <a:extLst xmlns:a="http://schemas.openxmlformats.org/drawingml/2006/main">
-              <a:ext uri="{FF2B5EF4-FFF2-40B4-BE49-F238E27FC236}">
-                <a16:creationId xmlns:a16="http://schemas.microsoft.com/office/drawing/2014/main" id="{65E20ADA-71AF-4C58-BDF6-C35B612142C4}"/>
+          <p:cNvPr id="52" name="">
+            <a:extLst xmlns:a="http://schemas.openxmlformats.org/drawingml/2006/main">
+              <a:ext uri="{FF2B5EF4-FFF2-40B4-BE49-F238E27FC236}">
+                <a16:creationId xmlns:a16="http://schemas.microsoft.com/office/drawing/2014/main" id="{E252351A-8C6C-474F-AD29-218AA1E9A8FD}"/>
               </a:ext>
             </a:extLst>
           </p:cNvPr>
@@ -3257,10 +3321,10 @@
       </p:sp>
       <p:sp>
         <p:nvSpPr>
-          <p:cNvPr id="52" name="">
-            <a:extLst xmlns:a="http://schemas.openxmlformats.org/drawingml/2006/main">
-              <a:ext uri="{FF2B5EF4-FFF2-40B4-BE49-F238E27FC236}">
-                <a16:creationId xmlns:a16="http://schemas.microsoft.com/office/drawing/2014/main" id="{4C0CBEF6-48E0-4B91-B5CA-01762CA18CBA}"/>
+          <p:cNvPr id="53" name="">
+            <a:extLst xmlns:a="http://schemas.openxmlformats.org/drawingml/2006/main">
+              <a:ext uri="{FF2B5EF4-FFF2-40B4-BE49-F238E27FC236}">
+                <a16:creationId xmlns:a16="http://schemas.microsoft.com/office/drawing/2014/main" id="{CA5FFA4D-67A9-424A-A60F-73FBFBF7A1E7}"/>
               </a:ext>
             </a:extLst>
           </p:cNvPr>
@@ -3321,10 +3385,10 @@
       </p:sp>
       <p:sp>
         <p:nvSpPr>
-          <p:cNvPr id="53" name="">
-            <a:extLst xmlns:a="http://schemas.openxmlformats.org/drawingml/2006/main">
-              <a:ext uri="{FF2B5EF4-FFF2-40B4-BE49-F238E27FC236}">
-                <a16:creationId xmlns:a16="http://schemas.microsoft.com/office/drawing/2014/main" id="{DC2AE315-DE7F-4ED1-BA04-6E0A6CC07F31}"/>
+          <p:cNvPr id="54" name="">
+            <a:extLst xmlns:a="http://schemas.openxmlformats.org/drawingml/2006/main">
+              <a:ext uri="{FF2B5EF4-FFF2-40B4-BE49-F238E27FC236}">
+                <a16:creationId xmlns:a16="http://schemas.microsoft.com/office/drawing/2014/main" id="{DBBFDD2D-A764-4C98-89F4-B29716199F60}"/>
               </a:ext>
             </a:extLst>
           </p:cNvPr>
@@ -3356,10 +3420,10 @@
       </p:sp>
       <p:sp>
         <p:nvSpPr>
-          <p:cNvPr id="54" name="">
-            <a:extLst xmlns:a="http://schemas.openxmlformats.org/drawingml/2006/main">
-              <a:ext uri="{FF2B5EF4-FFF2-40B4-BE49-F238E27FC236}">
-                <a16:creationId xmlns:a16="http://schemas.microsoft.com/office/drawing/2014/main" id="{3BE6C450-B5C4-41FB-B27D-876467298771}"/>
+          <p:cNvPr id="55" name="">
+            <a:extLst xmlns:a="http://schemas.openxmlformats.org/drawingml/2006/main">
+              <a:ext uri="{FF2B5EF4-FFF2-40B4-BE49-F238E27FC236}">
+                <a16:creationId xmlns:a16="http://schemas.microsoft.com/office/drawing/2014/main" id="{BDFEDBAC-2788-434D-BCAB-633C9B80DC2E}"/>
               </a:ext>
             </a:extLst>
           </p:cNvPr>
@@ -3420,10 +3484,10 @@
       </p:sp>
       <p:sp>
         <p:nvSpPr>
-          <p:cNvPr id="55" name="">
-            <a:extLst xmlns:a="http://schemas.openxmlformats.org/drawingml/2006/main">
-              <a:ext uri="{FF2B5EF4-FFF2-40B4-BE49-F238E27FC236}">
-                <a16:creationId xmlns:a16="http://schemas.microsoft.com/office/drawing/2014/main" id="{7C079EAF-0A4C-4680-8CC8-D81FCD41B931}"/>
+          <p:cNvPr id="56" name="">
+            <a:extLst xmlns:a="http://schemas.openxmlformats.org/drawingml/2006/main">
+              <a:ext uri="{FF2B5EF4-FFF2-40B4-BE49-F238E27FC236}">
+                <a16:creationId xmlns:a16="http://schemas.microsoft.com/office/drawing/2014/main" id="{DC72C61F-0372-4DF8-AA95-BAB99C590CC8}"/>
               </a:ext>
             </a:extLst>
           </p:cNvPr>
@@ -3455,10 +3519,10 @@
       </p:sp>
       <p:sp>
         <p:nvSpPr>
-          <p:cNvPr id="56" name="">
-            <a:extLst xmlns:a="http://schemas.openxmlformats.org/drawingml/2006/main">
-              <a:ext uri="{FF2B5EF4-FFF2-40B4-BE49-F238E27FC236}">
-                <a16:creationId xmlns:a16="http://schemas.microsoft.com/office/drawing/2014/main" id="{8C8D898A-54C3-4EF8-ADE8-68D23A0C1F0C}"/>
+          <p:cNvPr id="57" name="">
+            <a:extLst xmlns:a="http://schemas.openxmlformats.org/drawingml/2006/main">
+              <a:ext uri="{FF2B5EF4-FFF2-40B4-BE49-F238E27FC236}">
+                <a16:creationId xmlns:a16="http://schemas.microsoft.com/office/drawing/2014/main" id="{583FAEA7-985B-4B85-B7F4-A58ECB5941D9}"/>
               </a:ext>
             </a:extLst>
           </p:cNvPr>
@@ -3519,10 +3583,10 @@
       </p:sp>
       <p:sp>
         <p:nvSpPr>
-          <p:cNvPr id="57" name="">
-            <a:extLst xmlns:a="http://schemas.openxmlformats.org/drawingml/2006/main">
-              <a:ext uri="{FF2B5EF4-FFF2-40B4-BE49-F238E27FC236}">
-                <a16:creationId xmlns:a16="http://schemas.microsoft.com/office/drawing/2014/main" id="{62E4E8CA-4489-46AF-BAD6-879034EFEC75}"/>
+          <p:cNvPr id="58" name="">
+            <a:extLst xmlns:a="http://schemas.openxmlformats.org/drawingml/2006/main">
+              <a:ext uri="{FF2B5EF4-FFF2-40B4-BE49-F238E27FC236}">
+                <a16:creationId xmlns:a16="http://schemas.microsoft.com/office/drawing/2014/main" id="{BD590026-A00D-4746-910A-F5E1A01A6440}"/>
               </a:ext>
             </a:extLst>
           </p:cNvPr>
@@ -3554,10 +3618,10 @@
       </p:sp>
       <p:sp>
         <p:nvSpPr>
-          <p:cNvPr id="58" name="">
-            <a:extLst xmlns:a="http://schemas.openxmlformats.org/drawingml/2006/main">
-              <a:ext uri="{FF2B5EF4-FFF2-40B4-BE49-F238E27FC236}">
-                <a16:creationId xmlns:a16="http://schemas.microsoft.com/office/drawing/2014/main" id="{DF7E60F1-1303-4525-9987-5E03FB5E6386}"/>
+          <p:cNvPr id="59" name="">
+            <a:extLst xmlns:a="http://schemas.openxmlformats.org/drawingml/2006/main">
+              <a:ext uri="{FF2B5EF4-FFF2-40B4-BE49-F238E27FC236}">
+                <a16:creationId xmlns:a16="http://schemas.microsoft.com/office/drawing/2014/main" id="{EB156C90-8D17-4AFD-9DAB-091E80116766}"/>
               </a:ext>
             </a:extLst>
           </p:cNvPr>
@@ -3618,10 +3682,10 @@
       </p:sp>
       <p:sp>
         <p:nvSpPr>
-          <p:cNvPr id="59" name="">
-            <a:extLst xmlns:a="http://schemas.openxmlformats.org/drawingml/2006/main">
-              <a:ext uri="{FF2B5EF4-FFF2-40B4-BE49-F238E27FC236}">
-                <a16:creationId xmlns:a16="http://schemas.microsoft.com/office/drawing/2014/main" id="{F47EE3D7-0E23-4125-B34C-8B4CC2666715}"/>
+          <p:cNvPr id="60" name="">
+            <a:extLst xmlns:a="http://schemas.openxmlformats.org/drawingml/2006/main">
+              <a:ext uri="{FF2B5EF4-FFF2-40B4-BE49-F238E27FC236}">
+                <a16:creationId xmlns:a16="http://schemas.microsoft.com/office/drawing/2014/main" id="{270E0AB8-9B82-45CC-8012-DDF54DF70049}"/>
               </a:ext>
             </a:extLst>
           </p:cNvPr>
@@ -3653,10 +3717,10 @@
       </p:sp>
       <p:sp>
         <p:nvSpPr>
-          <p:cNvPr id="60" name="">
-            <a:extLst xmlns:a="http://schemas.openxmlformats.org/drawingml/2006/main">
-              <a:ext uri="{FF2B5EF4-FFF2-40B4-BE49-F238E27FC236}">
-                <a16:creationId xmlns:a16="http://schemas.microsoft.com/office/drawing/2014/main" id="{1C5989A9-A87A-4426-A3DF-9CE1969F5E96}"/>
+          <p:cNvPr id="61" name="">
+            <a:extLst xmlns:a="http://schemas.openxmlformats.org/drawingml/2006/main">
+              <a:ext uri="{FF2B5EF4-FFF2-40B4-BE49-F238E27FC236}">
+                <a16:creationId xmlns:a16="http://schemas.microsoft.com/office/drawing/2014/main" id="{0AE0452E-D1AB-4C12-9AB1-33C8E2CCCC48}"/>
               </a:ext>
             </a:extLst>
           </p:cNvPr>
@@ -3717,10 +3781,10 @@
       </p:sp>
       <p:sp>
         <p:nvSpPr>
-          <p:cNvPr id="61" name="">
-            <a:extLst xmlns:a="http://schemas.openxmlformats.org/drawingml/2006/main">
-              <a:ext uri="{FF2B5EF4-FFF2-40B4-BE49-F238E27FC236}">
-                <a16:creationId xmlns:a16="http://schemas.microsoft.com/office/drawing/2014/main" id="{0D4AFD8D-943E-4003-B9DF-3302036FD865}"/>
+          <p:cNvPr id="62" name="">
+            <a:extLst xmlns:a="http://schemas.openxmlformats.org/drawingml/2006/main">
+              <a:ext uri="{FF2B5EF4-FFF2-40B4-BE49-F238E27FC236}">
+                <a16:creationId xmlns:a16="http://schemas.microsoft.com/office/drawing/2014/main" id="{02BABC5E-AFBD-4BFC-83F3-099468DDA34C}"/>
               </a:ext>
             </a:extLst>
           </p:cNvPr>
@@ -3752,10 +3816,10 @@
       </p:sp>
       <p:sp>
         <p:nvSpPr>
-          <p:cNvPr id="62" name="">
-            <a:extLst xmlns:a="http://schemas.openxmlformats.org/drawingml/2006/main">
-              <a:ext uri="{FF2B5EF4-FFF2-40B4-BE49-F238E27FC236}">
-                <a16:creationId xmlns:a16="http://schemas.microsoft.com/office/drawing/2014/main" id="{9AD39796-FF52-4953-9124-23AD4AB2C591}"/>
+          <p:cNvPr id="63" name="">
+            <a:extLst xmlns:a="http://schemas.openxmlformats.org/drawingml/2006/main">
+              <a:ext uri="{FF2B5EF4-FFF2-40B4-BE49-F238E27FC236}">
+                <a16:creationId xmlns:a16="http://schemas.microsoft.com/office/drawing/2014/main" id="{D53BAEEE-C4B1-46F4-9A59-61E613A64731}"/>
               </a:ext>
             </a:extLst>
           </p:cNvPr>
@@ -3816,10 +3880,10 @@
       </p:sp>
       <p:sp>
         <p:nvSpPr>
-          <p:cNvPr id="63" name="">
-            <a:extLst xmlns:a="http://schemas.openxmlformats.org/drawingml/2006/main">
-              <a:ext uri="{FF2B5EF4-FFF2-40B4-BE49-F238E27FC236}">
-                <a16:creationId xmlns:a16="http://schemas.microsoft.com/office/drawing/2014/main" id="{10382044-F581-4783-AF94-B75D64BFCEA1}"/>
+          <p:cNvPr id="64" name="">
+            <a:extLst xmlns:a="http://schemas.openxmlformats.org/drawingml/2006/main">
+              <a:ext uri="{FF2B5EF4-FFF2-40B4-BE49-F238E27FC236}">
+                <a16:creationId xmlns:a16="http://schemas.microsoft.com/office/drawing/2014/main" id="{28E4287A-40BA-4C4B-9D7E-95CA948DB6C5}"/>
               </a:ext>
             </a:extLst>
           </p:cNvPr>
@@ -3851,10 +3915,10 @@
       </p:sp>
       <p:sp>
         <p:nvSpPr>
-          <p:cNvPr id="64" name="">
-            <a:extLst xmlns:a="http://schemas.openxmlformats.org/drawingml/2006/main">
-              <a:ext uri="{FF2B5EF4-FFF2-40B4-BE49-F238E27FC236}">
-                <a16:creationId xmlns:a16="http://schemas.microsoft.com/office/drawing/2014/main" id="{9C665714-777E-47D4-96FD-894B21104D18}"/>
+          <p:cNvPr id="65" name="">
+            <a:extLst xmlns:a="http://schemas.openxmlformats.org/drawingml/2006/main">
+              <a:ext uri="{FF2B5EF4-FFF2-40B4-BE49-F238E27FC236}">
+                <a16:creationId xmlns:a16="http://schemas.microsoft.com/office/drawing/2014/main" id="{11CFCEF2-4D37-4C9B-9F47-3DE58F36650C}"/>
               </a:ext>
             </a:extLst>
           </p:cNvPr>
@@ -3915,10 +3979,10 @@
       </p:sp>
       <p:sp>
         <p:nvSpPr>
-          <p:cNvPr id="65" name="">
-            <a:extLst xmlns:a="http://schemas.openxmlformats.org/drawingml/2006/main">
-              <a:ext uri="{FF2B5EF4-FFF2-40B4-BE49-F238E27FC236}">
-                <a16:creationId xmlns:a16="http://schemas.microsoft.com/office/drawing/2014/main" id="{1038E8F4-F4E2-4460-9FA8-2D8241137F7C}"/>
+          <p:cNvPr id="66" name="">
+            <a:extLst xmlns:a="http://schemas.openxmlformats.org/drawingml/2006/main">
+              <a:ext uri="{FF2B5EF4-FFF2-40B4-BE49-F238E27FC236}">
+                <a16:creationId xmlns:a16="http://schemas.microsoft.com/office/drawing/2014/main" id="{562315E7-C4E6-444D-9AD4-137580EB2CA6}"/>
               </a:ext>
             </a:extLst>
           </p:cNvPr>
@@ -3950,10 +4014,10 @@
       </p:sp>
       <p:sp>
         <p:nvSpPr>
-          <p:cNvPr id="66" name="">
-            <a:extLst xmlns:a="http://schemas.openxmlformats.org/drawingml/2006/main">
-              <a:ext uri="{FF2B5EF4-FFF2-40B4-BE49-F238E27FC236}">
-                <a16:creationId xmlns:a16="http://schemas.microsoft.com/office/drawing/2014/main" id="{D8CFF285-84E5-4DA7-96CF-F0A75BB68C68}"/>
+          <p:cNvPr id="67" name="">
+            <a:extLst xmlns:a="http://schemas.openxmlformats.org/drawingml/2006/main">
+              <a:ext uri="{FF2B5EF4-FFF2-40B4-BE49-F238E27FC236}">
+                <a16:creationId xmlns:a16="http://schemas.microsoft.com/office/drawing/2014/main" id="{535258E0-F787-4B72-A880-4E94EBB50D16}"/>
               </a:ext>
             </a:extLst>
           </p:cNvPr>
@@ -4014,10 +4078,10 @@
       </p:sp>
       <p:sp>
         <p:nvSpPr>
-          <p:cNvPr id="67" name="">
-            <a:extLst xmlns:a="http://schemas.openxmlformats.org/drawingml/2006/main">
-              <a:ext uri="{FF2B5EF4-FFF2-40B4-BE49-F238E27FC236}">
-                <a16:creationId xmlns:a16="http://schemas.microsoft.com/office/drawing/2014/main" id="{FC8E744A-C7A6-4B1F-ADBF-5A20EC80B9D6}"/>
+          <p:cNvPr id="68" name="">
+            <a:extLst xmlns:a="http://schemas.openxmlformats.org/drawingml/2006/main">
+              <a:ext uri="{FF2B5EF4-FFF2-40B4-BE49-F238E27FC236}">
+                <a16:creationId xmlns:a16="http://schemas.microsoft.com/office/drawing/2014/main" id="{859EBB0F-47C4-41D4-BAE5-E41113DBC104}"/>
               </a:ext>
             </a:extLst>
           </p:cNvPr>
@@ -4047,10 +4111,10 @@
       </p:sp>
       <p:sp>
         <p:nvSpPr>
-          <p:cNvPr id="68" name="">
-            <a:extLst xmlns:a="http://schemas.openxmlformats.org/drawingml/2006/main">
-              <a:ext uri="{FF2B5EF4-FFF2-40B4-BE49-F238E27FC236}">
-                <a16:creationId xmlns:a16="http://schemas.microsoft.com/office/drawing/2014/main" id="{D3F5A3CC-6ACF-4780-A37D-98CB3EE2DAD6}"/>
+          <p:cNvPr id="69" name="">
+            <a:extLst xmlns:a="http://schemas.openxmlformats.org/drawingml/2006/main">
+              <a:ext uri="{FF2B5EF4-FFF2-40B4-BE49-F238E27FC236}">
+                <a16:creationId xmlns:a16="http://schemas.microsoft.com/office/drawing/2014/main" id="{92AD2308-7A1C-42AB-96DE-49B023278161}"/>
               </a:ext>
             </a:extLst>
           </p:cNvPr>
@@ -4111,10 +4175,10 @@
       </p:sp>
       <p:sp>
         <p:nvSpPr>
-          <p:cNvPr id="69" name="">
-            <a:extLst xmlns:a="http://schemas.openxmlformats.org/drawingml/2006/main">
-              <a:ext uri="{FF2B5EF4-FFF2-40B4-BE49-F238E27FC236}">
-                <a16:creationId xmlns:a16="http://schemas.microsoft.com/office/drawing/2014/main" id="{CADF668F-7771-43D8-8EB9-C39F351D2CF8}"/>
+          <p:cNvPr id="70" name="">
+            <a:extLst xmlns:a="http://schemas.openxmlformats.org/drawingml/2006/main">
+              <a:ext uri="{FF2B5EF4-FFF2-40B4-BE49-F238E27FC236}">
+                <a16:creationId xmlns:a16="http://schemas.microsoft.com/office/drawing/2014/main" id="{8D52F889-6FD8-4FE7-A3DA-C725D251C205}"/>
               </a:ext>
             </a:extLst>
           </p:cNvPr>
@@ -4175,10 +4239,10 @@
       </p:sp>
       <p:sp>
         <p:nvSpPr>
-          <p:cNvPr id="70" name="">
-            <a:extLst xmlns:a="http://schemas.openxmlformats.org/drawingml/2006/main">
-              <a:ext uri="{FF2B5EF4-FFF2-40B4-BE49-F238E27FC236}">
-                <a16:creationId xmlns:a16="http://schemas.microsoft.com/office/drawing/2014/main" id="{763DDDA5-4F8F-49CA-A718-60A1D54BF8FD}"/>
+          <p:cNvPr id="71" name="">
+            <a:extLst xmlns:a="http://schemas.openxmlformats.org/drawingml/2006/main">
+              <a:ext uri="{FF2B5EF4-FFF2-40B4-BE49-F238E27FC236}">
+                <a16:creationId xmlns:a16="http://schemas.microsoft.com/office/drawing/2014/main" id="{739A4099-2AFC-4179-AC84-55FD6BA7D613}"/>
               </a:ext>
             </a:extLst>
           </p:cNvPr>
@@ -4210,10 +4274,10 @@
       </p:sp>
       <p:sp>
         <p:nvSpPr>
-          <p:cNvPr id="71" name="">
-            <a:extLst xmlns:a="http://schemas.openxmlformats.org/drawingml/2006/main">
-              <a:ext uri="{FF2B5EF4-FFF2-40B4-BE49-F238E27FC236}">
-                <a16:creationId xmlns:a16="http://schemas.microsoft.com/office/drawing/2014/main" id="{9F983AAB-B067-4BD7-9BB8-FD0554F469D1}"/>
+          <p:cNvPr id="72" name="">
+            <a:extLst xmlns:a="http://schemas.openxmlformats.org/drawingml/2006/main">
+              <a:ext uri="{FF2B5EF4-FFF2-40B4-BE49-F238E27FC236}">
+                <a16:creationId xmlns:a16="http://schemas.microsoft.com/office/drawing/2014/main" id="{7E05E97C-42AC-402D-8DBB-4E567EE2A02F}"/>
               </a:ext>
             </a:extLst>
           </p:cNvPr>
@@ -4274,10 +4338,10 @@
       </p:sp>
       <p:sp>
         <p:nvSpPr>
-          <p:cNvPr id="72" name="">
-            <a:extLst xmlns:a="http://schemas.openxmlformats.org/drawingml/2006/main">
-              <a:ext uri="{FF2B5EF4-FFF2-40B4-BE49-F238E27FC236}">
-                <a16:creationId xmlns:a16="http://schemas.microsoft.com/office/drawing/2014/main" id="{EC97A89F-CDEF-4AA2-A70D-A653743B2971}"/>
+          <p:cNvPr id="73" name="">
+            <a:extLst xmlns:a="http://schemas.openxmlformats.org/drawingml/2006/main">
+              <a:ext uri="{FF2B5EF4-FFF2-40B4-BE49-F238E27FC236}">
+                <a16:creationId xmlns:a16="http://schemas.microsoft.com/office/drawing/2014/main" id="{E9417914-5CC4-4474-B200-EF36055C1AA0}"/>
               </a:ext>
             </a:extLst>
           </p:cNvPr>
@@ -4338,10 +4402,10 @@
       </p:sp>
       <p:sp>
         <p:nvSpPr>
-          <p:cNvPr id="73" name="">
-            <a:extLst xmlns:a="http://schemas.openxmlformats.org/drawingml/2006/main">
-              <a:ext uri="{FF2B5EF4-FFF2-40B4-BE49-F238E27FC236}">
-                <a16:creationId xmlns:a16="http://schemas.microsoft.com/office/drawing/2014/main" id="{9C955FE9-0AD5-461F-B944-342DAE27545A}"/>
+          <p:cNvPr id="74" name="">
+            <a:extLst xmlns:a="http://schemas.openxmlformats.org/drawingml/2006/main">
+              <a:ext uri="{FF2B5EF4-FFF2-40B4-BE49-F238E27FC236}">
+                <a16:creationId xmlns:a16="http://schemas.microsoft.com/office/drawing/2014/main" id="{C9AB7AE2-704C-4C2D-999B-9CB6D10CA046}"/>
               </a:ext>
             </a:extLst>
           </p:cNvPr>
@@ -4373,10 +4437,10 @@
       </p:sp>
       <p:sp>
         <p:nvSpPr>
-          <p:cNvPr id="74" name="">
-            <a:extLst xmlns:a="http://schemas.openxmlformats.org/drawingml/2006/main">
-              <a:ext uri="{FF2B5EF4-FFF2-40B4-BE49-F238E27FC236}">
-                <a16:creationId xmlns:a16="http://schemas.microsoft.com/office/drawing/2014/main" id="{BEBC4155-5D88-415C-805E-E00A5249018B}"/>
+          <p:cNvPr id="75" name="">
+            <a:extLst xmlns:a="http://schemas.openxmlformats.org/drawingml/2006/main">
+              <a:ext uri="{FF2B5EF4-FFF2-40B4-BE49-F238E27FC236}">
+                <a16:creationId xmlns:a16="http://schemas.microsoft.com/office/drawing/2014/main" id="{27516852-0E2A-4872-BD2E-2CD0F174E540}"/>
               </a:ext>
             </a:extLst>
           </p:cNvPr>
@@ -4460,10 +4524,10 @@
       </p:sp>
       <p:sp>
         <p:nvSpPr>
-          <p:cNvPr id="75" name="">
-            <a:extLst xmlns:a="http://schemas.openxmlformats.org/drawingml/2006/main">
-              <a:ext uri="{FF2B5EF4-FFF2-40B4-BE49-F238E27FC236}">
-                <a16:creationId xmlns:a16="http://schemas.microsoft.com/office/drawing/2014/main" id="{C7B39790-93A2-45AE-9B1D-E2D30BFEA867}"/>
+          <p:cNvPr id="76" name="">
+            <a:extLst xmlns:a="http://schemas.openxmlformats.org/drawingml/2006/main">
+              <a:ext uri="{FF2B5EF4-FFF2-40B4-BE49-F238E27FC236}">
+                <a16:creationId xmlns:a16="http://schemas.microsoft.com/office/drawing/2014/main" id="{6E9133B9-EF94-4AB8-8D87-AF7530ECE0F8}"/>
               </a:ext>
             </a:extLst>
           </p:cNvPr>
@@ -4525,7 +4589,7 @@
     </p:spTree>
     <p:extLst>
       <p:ext uri="{BB962C8B-B14F-4D97-AF65-F5344CB8AC3E}">
-        <p14:creationId xmlns:p14="http://schemas.microsoft.com/office/powerpoint/2010/main" val="1168926181"/>
+        <p14:creationId xmlns:p14="http://schemas.microsoft.com/office/powerpoint/2010/main" val="430929704"/>
       </p:ext>
     </p:extLst>
   </p:cSld>
@@ -4549,7 +4613,7 @@
           <p:cNvPr id="1" name="">
             <a:extLst xmlns:a="http://schemas.openxmlformats.org/drawingml/2006/main">
               <a:ext uri="{FF2B5EF4-FFF2-40B4-BE49-F238E27FC236}">
-                <a16:creationId xmlns:a16="http://schemas.microsoft.com/office/drawing/2014/main" id="{5DB22161-B7CB-4AAD-8551-0639A9499A1D}"/>
+                <a16:creationId xmlns:a16="http://schemas.microsoft.com/office/drawing/2014/main" id="{81C25DDB-8A8C-4B4C-BA05-3CE3B890CD05}"/>
               </a:ext>
             </a:extLst>
           </p:cNvPr>
@@ -4584,7 +4648,7 @@
           <p:cNvPr id="2" name="">
             <a:extLst xmlns:a="http://schemas.openxmlformats.org/drawingml/2006/main">
               <a:ext uri="{FF2B5EF4-FFF2-40B4-BE49-F238E27FC236}">
-                <a16:creationId xmlns:a16="http://schemas.microsoft.com/office/drawing/2014/main" id="{965494C7-7948-4948-8DA3-734366424B14}"/>
+                <a16:creationId xmlns:a16="http://schemas.microsoft.com/office/drawing/2014/main" id="{1DC83458-3FB1-4CB1-BAA0-001E64CFD992}"/>
               </a:ext>
             </a:extLst>
           </p:cNvPr>
@@ -4619,7 +4683,7 @@
           <p:cNvPr id="3" name="">
             <a:extLst xmlns:a="http://schemas.openxmlformats.org/drawingml/2006/main">
               <a:ext uri="{FF2B5EF4-FFF2-40B4-BE49-F238E27FC236}">
-                <a16:creationId xmlns:a16="http://schemas.microsoft.com/office/drawing/2014/main" id="{801983F5-2F9A-49A7-8EFE-D470F15065B8}"/>
+                <a16:creationId xmlns:a16="http://schemas.microsoft.com/office/drawing/2014/main" id="{1ACC825C-FE18-47AC-94FC-A5DCBC5AD246}"/>
               </a:ext>
             </a:extLst>
           </p:cNvPr>
@@ -4654,7 +4718,7 @@
           <p:cNvPr id="4" name="">
             <a:extLst xmlns:a="http://schemas.openxmlformats.org/drawingml/2006/main">
               <a:ext uri="{FF2B5EF4-FFF2-40B4-BE49-F238E27FC236}">
-                <a16:creationId xmlns:a16="http://schemas.microsoft.com/office/drawing/2014/main" id="{669A3B79-CBEF-4D67-A24A-0093338A20BA}"/>
+                <a16:creationId xmlns:a16="http://schemas.microsoft.com/office/drawing/2014/main" id="{EF356B45-2099-47B1-B6D1-345171B64EE5}"/>
               </a:ext>
             </a:extLst>
           </p:cNvPr>
@@ -4689,7 +4753,7 @@
           <p:cNvPr id="5" name="">
             <a:extLst xmlns:a="http://schemas.openxmlformats.org/drawingml/2006/main">
               <a:ext uri="{FF2B5EF4-FFF2-40B4-BE49-F238E27FC236}">
-                <a16:creationId xmlns:a16="http://schemas.microsoft.com/office/drawing/2014/main" id="{0A2DBDE1-8D7E-400B-A772-4B9DB6304805}"/>
+                <a16:creationId xmlns:a16="http://schemas.microsoft.com/office/drawing/2014/main" id="{431F9738-7B86-40B4-93B8-02E997BE32A9}"/>
               </a:ext>
             </a:extLst>
           </p:cNvPr>
@@ -4724,7 +4788,7 @@
           <p:cNvPr id="6" name="">
             <a:extLst xmlns:a="http://schemas.openxmlformats.org/drawingml/2006/main">
               <a:ext uri="{FF2B5EF4-FFF2-40B4-BE49-F238E27FC236}">
-                <a16:creationId xmlns:a16="http://schemas.microsoft.com/office/drawing/2014/main" id="{53BDA88A-7D41-4720-8CCF-CA960AD6176C}"/>
+                <a16:creationId xmlns:a16="http://schemas.microsoft.com/office/drawing/2014/main" id="{2E3A68A2-26BC-454F-BC48-A76A9C80B257}"/>
               </a:ext>
             </a:extLst>
           </p:cNvPr>
@@ -4759,7 +4823,7 @@
           <p:cNvPr id="7" name="">
             <a:extLst xmlns:a="http://schemas.openxmlformats.org/drawingml/2006/main">
               <a:ext uri="{FF2B5EF4-FFF2-40B4-BE49-F238E27FC236}">
-                <a16:creationId xmlns:a16="http://schemas.microsoft.com/office/drawing/2014/main" id="{D796AC48-085D-466F-A6F6-8BA639A059BC}"/>
+                <a16:creationId xmlns:a16="http://schemas.microsoft.com/office/drawing/2014/main" id="{97A00FDC-3D64-4C76-A350-B4F502822135}"/>
               </a:ext>
             </a:extLst>
           </p:cNvPr>
@@ -4794,7 +4858,7 @@
           <p:cNvPr id="8" name="">
             <a:extLst xmlns:a="http://schemas.openxmlformats.org/drawingml/2006/main">
               <a:ext uri="{FF2B5EF4-FFF2-40B4-BE49-F238E27FC236}">
-                <a16:creationId xmlns:a16="http://schemas.microsoft.com/office/drawing/2014/main" id="{E732CED5-76AE-4BC9-8A18-B657FC1FD1F6}"/>
+                <a16:creationId xmlns:a16="http://schemas.microsoft.com/office/drawing/2014/main" id="{85F7B9C3-9F30-4CAA-B8C6-F7E8D841DBFD}"/>
               </a:ext>
             </a:extLst>
           </p:cNvPr>
@@ -4829,7 +4893,7 @@
           <p:cNvPr id="9" name="">
             <a:extLst xmlns:a="http://schemas.openxmlformats.org/drawingml/2006/main">
               <a:ext uri="{FF2B5EF4-FFF2-40B4-BE49-F238E27FC236}">
-                <a16:creationId xmlns:a16="http://schemas.microsoft.com/office/drawing/2014/main" id="{AEEDA2C7-D57A-4D0B-9BCC-B2D8ADE7A004}"/>
+                <a16:creationId xmlns:a16="http://schemas.microsoft.com/office/drawing/2014/main" id="{943B91FE-11C3-4CD5-9307-A9AA2BAB7D06}"/>
               </a:ext>
             </a:extLst>
           </p:cNvPr>
@@ -4864,7 +4928,7 @@
           <p:cNvPr id="10" name="">
             <a:extLst xmlns:a="http://schemas.openxmlformats.org/drawingml/2006/main">
               <a:ext uri="{FF2B5EF4-FFF2-40B4-BE49-F238E27FC236}">
-                <a16:creationId xmlns:a16="http://schemas.microsoft.com/office/drawing/2014/main" id="{6502AE58-E3AF-4DDE-B296-A34D2F9E1827}"/>
+                <a16:creationId xmlns:a16="http://schemas.microsoft.com/office/drawing/2014/main" id="{3D1023F5-91E7-4830-A81F-D7DE6AE4C6B1}"/>
               </a:ext>
             </a:extLst>
           </p:cNvPr>
@@ -4899,7 +4963,7 @@
           <p:cNvPr id="11" name="">
             <a:extLst xmlns:a="http://schemas.openxmlformats.org/drawingml/2006/main">
               <a:ext uri="{FF2B5EF4-FFF2-40B4-BE49-F238E27FC236}">
-                <a16:creationId xmlns:a16="http://schemas.microsoft.com/office/drawing/2014/main" id="{8ADC2F77-7057-4A44-AE0D-D917B9D1C892}"/>
+                <a16:creationId xmlns:a16="http://schemas.microsoft.com/office/drawing/2014/main" id="{0C4802D7-6BDA-4C15-B2DF-3B4B6A6F2FDD}"/>
               </a:ext>
             </a:extLst>
           </p:cNvPr>
@@ -4934,7 +4998,7 @@
           <p:cNvPr id="12" name="">
             <a:extLst xmlns:a="http://schemas.openxmlformats.org/drawingml/2006/main">
               <a:ext uri="{FF2B5EF4-FFF2-40B4-BE49-F238E27FC236}">
-                <a16:creationId xmlns:a16="http://schemas.microsoft.com/office/drawing/2014/main" id="{3AB97BB5-C418-4178-AF95-1BF40629CD32}"/>
+                <a16:creationId xmlns:a16="http://schemas.microsoft.com/office/drawing/2014/main" id="{C4A99328-17A5-4D57-8676-AB7F892CCBE5}"/>
               </a:ext>
             </a:extLst>
           </p:cNvPr>
@@ -4969,7 +5033,7 @@
           <p:cNvPr id="13" name="">
             <a:extLst xmlns:a="http://schemas.openxmlformats.org/drawingml/2006/main">
               <a:ext uri="{FF2B5EF4-FFF2-40B4-BE49-F238E27FC236}">
-                <a16:creationId xmlns:a16="http://schemas.microsoft.com/office/drawing/2014/main" id="{B203275B-856F-445C-806F-B5642D7457DA}"/>
+                <a16:creationId xmlns:a16="http://schemas.microsoft.com/office/drawing/2014/main" id="{E08BBD2E-F8CA-4ED0-8B77-4EA2558CCA15}"/>
               </a:ext>
             </a:extLst>
           </p:cNvPr>
@@ -5004,7 +5068,7 @@
           <p:cNvPr id="14" name="">
             <a:extLst xmlns:a="http://schemas.openxmlformats.org/drawingml/2006/main">
               <a:ext uri="{FF2B5EF4-FFF2-40B4-BE49-F238E27FC236}">
-                <a16:creationId xmlns:a16="http://schemas.microsoft.com/office/drawing/2014/main" id="{778B2015-7DF4-4FB1-ACA9-561573DAEC73}"/>
+                <a16:creationId xmlns:a16="http://schemas.microsoft.com/office/drawing/2014/main" id="{195075A3-23EA-4BAF-B807-6C31B76BEA13}"/>
               </a:ext>
             </a:extLst>
           </p:cNvPr>
@@ -5039,7 +5103,7 @@
           <p:cNvPr id="15" name="">
             <a:extLst xmlns:a="http://schemas.openxmlformats.org/drawingml/2006/main">
               <a:ext uri="{FF2B5EF4-FFF2-40B4-BE49-F238E27FC236}">
-                <a16:creationId xmlns:a16="http://schemas.microsoft.com/office/drawing/2014/main" id="{8685440D-EFEE-4AC4-8BC0-68AF641E7F42}"/>
+                <a16:creationId xmlns:a16="http://schemas.microsoft.com/office/drawing/2014/main" id="{36C7C298-38C1-463A-B551-F3E12F6DF652}"/>
               </a:ext>
             </a:extLst>
           </p:cNvPr>
@@ -5074,7 +5138,7 @@
           <p:cNvPr id="16" name="">
             <a:extLst xmlns:a="http://schemas.openxmlformats.org/drawingml/2006/main">
               <a:ext uri="{FF2B5EF4-FFF2-40B4-BE49-F238E27FC236}">
-                <a16:creationId xmlns:a16="http://schemas.microsoft.com/office/drawing/2014/main" id="{DD547D92-95BF-45CD-9880-8A533B212B8E}"/>
+                <a16:creationId xmlns:a16="http://schemas.microsoft.com/office/drawing/2014/main" id="{5CFDC43A-A7F1-4A0F-8CCA-59737218A2EF}"/>
               </a:ext>
             </a:extLst>
           </p:cNvPr>
@@ -5109,7 +5173,7 @@
           <p:cNvPr id="17" name="">
             <a:extLst xmlns:a="http://schemas.openxmlformats.org/drawingml/2006/main">
               <a:ext uri="{FF2B5EF4-FFF2-40B4-BE49-F238E27FC236}">
-                <a16:creationId xmlns:a16="http://schemas.microsoft.com/office/drawing/2014/main" id="{C18444F1-9323-4A5E-992E-12E0FB8C4635}"/>
+                <a16:creationId xmlns:a16="http://schemas.microsoft.com/office/drawing/2014/main" id="{690051C5-0E29-42C5-86C7-644DA4DDBE71}"/>
               </a:ext>
             </a:extLst>
           </p:cNvPr>
@@ -5144,7 +5208,7 @@
           <p:cNvPr id="18" name="">
             <a:extLst xmlns:a="http://schemas.openxmlformats.org/drawingml/2006/main">
               <a:ext uri="{FF2B5EF4-FFF2-40B4-BE49-F238E27FC236}">
-                <a16:creationId xmlns:a16="http://schemas.microsoft.com/office/drawing/2014/main" id="{2AE410BA-9185-4EFA-8D41-C9ADB3EEC1B0}"/>
+                <a16:creationId xmlns:a16="http://schemas.microsoft.com/office/drawing/2014/main" id="{0317B366-427E-4518-BD70-AF10FA0054C6}"/>
               </a:ext>
             </a:extLst>
           </p:cNvPr>
@@ -5179,7 +5243,7 @@
           <p:cNvPr id="19" name="">
             <a:extLst xmlns:a="http://schemas.openxmlformats.org/drawingml/2006/main">
               <a:ext uri="{FF2B5EF4-FFF2-40B4-BE49-F238E27FC236}">
-                <a16:creationId xmlns:a16="http://schemas.microsoft.com/office/drawing/2014/main" id="{BAB139B3-7D56-49AD-A196-BA48497057BD}"/>
+                <a16:creationId xmlns:a16="http://schemas.microsoft.com/office/drawing/2014/main" id="{DA69B390-7EB5-404F-A691-ADBC70407B25}"/>
               </a:ext>
             </a:extLst>
           </p:cNvPr>
@@ -5214,7 +5278,7 @@
           <p:cNvPr id="20" name="">
             <a:extLst xmlns:a="http://schemas.openxmlformats.org/drawingml/2006/main">
               <a:ext uri="{FF2B5EF4-FFF2-40B4-BE49-F238E27FC236}">
-                <a16:creationId xmlns:a16="http://schemas.microsoft.com/office/drawing/2014/main" id="{795EFFEB-2D58-46A4-87C2-E907453B9461}"/>
+                <a16:creationId xmlns:a16="http://schemas.microsoft.com/office/drawing/2014/main" id="{93EA7F17-2D39-4CB8-A572-0DD4F77EB5BB}"/>
               </a:ext>
             </a:extLst>
           </p:cNvPr>
@@ -5249,7 +5313,7 @@
           <p:cNvPr id="21" name="">
             <a:extLst xmlns:a="http://schemas.openxmlformats.org/drawingml/2006/main">
               <a:ext uri="{FF2B5EF4-FFF2-40B4-BE49-F238E27FC236}">
-                <a16:creationId xmlns:a16="http://schemas.microsoft.com/office/drawing/2014/main" id="{096D1E0A-2D8C-4EAB-85BF-F4FC1A59E33F}"/>
+                <a16:creationId xmlns:a16="http://schemas.microsoft.com/office/drawing/2014/main" id="{B95CB259-1C9F-400C-A7B3-8E9A0F54418C}"/>
               </a:ext>
             </a:extLst>
           </p:cNvPr>
@@ -5284,7 +5348,7 @@
           <p:cNvPr id="22" name="">
             <a:extLst xmlns:a="http://schemas.openxmlformats.org/drawingml/2006/main">
               <a:ext uri="{FF2B5EF4-FFF2-40B4-BE49-F238E27FC236}">
-                <a16:creationId xmlns:a16="http://schemas.microsoft.com/office/drawing/2014/main" id="{6791B452-B9C5-46E8-A981-898D8005DBA6}"/>
+                <a16:creationId xmlns:a16="http://schemas.microsoft.com/office/drawing/2014/main" id="{CC7785A4-4F9E-4CBE-B07C-A5BC1E58FD2D}"/>
               </a:ext>
             </a:extLst>
           </p:cNvPr>
@@ -5319,7 +5383,7 @@
           <p:cNvPr id="23" name="">
             <a:extLst xmlns:a="http://schemas.openxmlformats.org/drawingml/2006/main">
               <a:ext uri="{FF2B5EF4-FFF2-40B4-BE49-F238E27FC236}">
-                <a16:creationId xmlns:a16="http://schemas.microsoft.com/office/drawing/2014/main" id="{313A6172-473A-41C7-8B16-8145BC19DA1A}"/>
+                <a16:creationId xmlns:a16="http://schemas.microsoft.com/office/drawing/2014/main" id="{960E25FE-9CBF-413D-BE72-12ADB01CA7AA}"/>
               </a:ext>
             </a:extLst>
           </p:cNvPr>
@@ -5354,7 +5418,7 @@
           <p:cNvPr id="24" name="">
             <a:extLst xmlns:a="http://schemas.openxmlformats.org/drawingml/2006/main">
               <a:ext uri="{FF2B5EF4-FFF2-40B4-BE49-F238E27FC236}">
-                <a16:creationId xmlns:a16="http://schemas.microsoft.com/office/drawing/2014/main" id="{6A81C64E-0F8F-4F38-ACB6-F107ECFE7AE0}"/>
+                <a16:creationId xmlns:a16="http://schemas.microsoft.com/office/drawing/2014/main" id="{5129273E-9B95-4243-9B5A-78C5C98A6226}"/>
               </a:ext>
             </a:extLst>
           </p:cNvPr>
@@ -5389,7 +5453,7 @@
           <p:cNvPr id="25" name="">
             <a:extLst xmlns:a="http://schemas.openxmlformats.org/drawingml/2006/main">
               <a:ext uri="{FF2B5EF4-FFF2-40B4-BE49-F238E27FC236}">
-                <a16:creationId xmlns:a16="http://schemas.microsoft.com/office/drawing/2014/main" id="{F2734083-E737-4C2D-AE92-326812C23652}"/>
+                <a16:creationId xmlns:a16="http://schemas.microsoft.com/office/drawing/2014/main" id="{EEF5FCC6-A31A-475F-85C9-6802E85C2B7B}"/>
               </a:ext>
             </a:extLst>
           </p:cNvPr>
@@ -5424,7 +5488,7 @@
           <p:cNvPr id="26" name="">
             <a:extLst xmlns:a="http://schemas.openxmlformats.org/drawingml/2006/main">
               <a:ext uri="{FF2B5EF4-FFF2-40B4-BE49-F238E27FC236}">
-                <a16:creationId xmlns:a16="http://schemas.microsoft.com/office/drawing/2014/main" id="{F7AAF36A-2FB7-46FD-A8B5-E27DBE028ED0}"/>
+                <a16:creationId xmlns:a16="http://schemas.microsoft.com/office/drawing/2014/main" id="{294A5435-263F-4D69-9D38-854D7A804629}"/>
               </a:ext>
             </a:extLst>
           </p:cNvPr>
@@ -5459,7 +5523,7 @@
           <p:cNvPr id="27" name="">
             <a:extLst xmlns:a="http://schemas.openxmlformats.org/drawingml/2006/main">
               <a:ext uri="{FF2B5EF4-FFF2-40B4-BE49-F238E27FC236}">
-                <a16:creationId xmlns:a16="http://schemas.microsoft.com/office/drawing/2014/main" id="{D52C155F-A83C-4B5A-8025-6D53D625A337}"/>
+                <a16:creationId xmlns:a16="http://schemas.microsoft.com/office/drawing/2014/main" id="{241121DD-EC74-42EC-8160-CF59BE831581}"/>
               </a:ext>
             </a:extLst>
           </p:cNvPr>
@@ -5494,7 +5558,7 @@
           <p:cNvPr id="28" name="">
             <a:extLst xmlns:a="http://schemas.openxmlformats.org/drawingml/2006/main">
               <a:ext uri="{FF2B5EF4-FFF2-40B4-BE49-F238E27FC236}">
-                <a16:creationId xmlns:a16="http://schemas.microsoft.com/office/drawing/2014/main" id="{42B40B68-C4C8-44AE-9E49-A5CC22210A3A}"/>
+                <a16:creationId xmlns:a16="http://schemas.microsoft.com/office/drawing/2014/main" id="{D5A3AB52-A78C-482E-B950-C6CB4A1C1483}"/>
               </a:ext>
             </a:extLst>
           </p:cNvPr>
@@ -5529,7 +5593,7 @@
           <p:cNvPr id="29" name="">
             <a:extLst xmlns:a="http://schemas.openxmlformats.org/drawingml/2006/main">
               <a:ext uri="{FF2B5EF4-FFF2-40B4-BE49-F238E27FC236}">
-                <a16:creationId xmlns:a16="http://schemas.microsoft.com/office/drawing/2014/main" id="{BE3BAE43-9ECA-425B-BBC7-CDA06D8D8019}"/>
+                <a16:creationId xmlns:a16="http://schemas.microsoft.com/office/drawing/2014/main" id="{7551CA29-34B1-44DA-93C4-8203838B3BCC}"/>
               </a:ext>
             </a:extLst>
           </p:cNvPr>
@@ -5564,7 +5628,7 @@
           <p:cNvPr id="30" name="">
             <a:extLst xmlns:a="http://schemas.openxmlformats.org/drawingml/2006/main">
               <a:ext uri="{FF2B5EF4-FFF2-40B4-BE49-F238E27FC236}">
-                <a16:creationId xmlns:a16="http://schemas.microsoft.com/office/drawing/2014/main" id="{409236C1-AFC7-4895-9642-2F8E6C99A390}"/>
+                <a16:creationId xmlns:a16="http://schemas.microsoft.com/office/drawing/2014/main" id="{DD6D4E07-E2EB-435A-AB69-26D46A43D1AB}"/>
               </a:ext>
             </a:extLst>
           </p:cNvPr>
@@ -5628,7 +5692,7 @@
           <p:cNvPr id="31" name="kicker-02-marker">
             <a:extLst xmlns:a="http://schemas.openxmlformats.org/drawingml/2006/main">
               <a:ext uri="{FF2B5EF4-FFF2-40B4-BE49-F238E27FC236}">
-                <a16:creationId xmlns:a16="http://schemas.microsoft.com/office/drawing/2014/main" id="{231FD350-087D-4784-84C8-03D0B7F251CF}"/>
+                <a16:creationId xmlns:a16="http://schemas.microsoft.com/office/drawing/2014/main" id="{35181432-58E3-4C3C-95EB-23422B37431E}"/>
               </a:ext>
             </a:extLst>
           </p:cNvPr>
@@ -5663,7 +5727,7 @@
           <p:cNvPr id="32" name="kicker-02-label">
             <a:extLst xmlns:a="http://schemas.openxmlformats.org/drawingml/2006/main">
               <a:ext uri="{FF2B5EF4-FFF2-40B4-BE49-F238E27FC236}">
-                <a16:creationId xmlns:a16="http://schemas.microsoft.com/office/drawing/2014/main" id="{E5ABC54A-9224-4903-88B6-34A8EE22F5A0}"/>
+                <a16:creationId xmlns:a16="http://schemas.microsoft.com/office/drawing/2014/main" id="{1F7FD70D-6C78-4671-8565-BB003E1D6DC1}"/>
               </a:ext>
             </a:extLst>
           </p:cNvPr>
@@ -5727,7 +5791,7 @@
           <p:cNvPr id="33" name="">
             <a:extLst xmlns:a="http://schemas.openxmlformats.org/drawingml/2006/main">
               <a:ext uri="{FF2B5EF4-FFF2-40B4-BE49-F238E27FC236}">
-                <a16:creationId xmlns:a16="http://schemas.microsoft.com/office/drawing/2014/main" id="{34ECBE20-111B-4353-A4A3-FBC0D2991BAE}"/>
+                <a16:creationId xmlns:a16="http://schemas.microsoft.com/office/drawing/2014/main" id="{95D18EAD-6A57-4786-B539-A2D50862E31B}"/>
               </a:ext>
             </a:extLst>
           </p:cNvPr>
@@ -5739,7 +5803,7 @@
         <p:spPr>
           <a:xfrm xmlns:a="http://schemas.openxmlformats.org/drawingml/2006/main">
             <a:off x="552450" y="781050"/>
-            <a:ext cx="9334500" cy="647700"/>
+            <a:ext cx="9334500" cy="628650"/>
           </a:xfrm>
           <a:prstGeom xmlns:a="http://schemas.openxmlformats.org/drawingml/2006/main" prst="rect">
             <a:avLst/>
@@ -5791,7 +5855,7 @@
           <p:cNvPr id="34" name="">
             <a:extLst xmlns:a="http://schemas.openxmlformats.org/drawingml/2006/main">
               <a:ext uri="{FF2B5EF4-FFF2-40B4-BE49-F238E27FC236}">
-                <a16:creationId xmlns:a16="http://schemas.microsoft.com/office/drawing/2014/main" id="{46E8ECEA-129C-4A7D-B09C-734FFD152585}"/>
+                <a16:creationId xmlns:a16="http://schemas.microsoft.com/office/drawing/2014/main" id="{8F6B917A-4B0C-47CA-8142-527483EEE875}"/>
               </a:ext>
             </a:extLst>
           </p:cNvPr>
@@ -5803,7 +5867,7 @@
         <p:spPr>
           <a:xfrm xmlns:a="http://schemas.openxmlformats.org/drawingml/2006/main">
             <a:off x="590550" y="1466850"/>
-            <a:ext cx="9144000" cy="323850"/>
+            <a:ext cx="7239000" cy="342900"/>
           </a:xfrm>
           <a:prstGeom xmlns:a="http://schemas.openxmlformats.org/drawingml/2006/main" prst="rect">
             <a:avLst/>
@@ -5855,7 +5919,7 @@
           <p:cNvPr id="35" name="">
             <a:extLst xmlns:a="http://schemas.openxmlformats.org/drawingml/2006/main">
               <a:ext uri="{FF2B5EF4-FFF2-40B4-BE49-F238E27FC236}">
-                <a16:creationId xmlns:a16="http://schemas.microsoft.com/office/drawing/2014/main" id="{021723FC-651E-4A6C-8069-DF0431399A1F}"/>
+                <a16:creationId xmlns:a16="http://schemas.microsoft.com/office/drawing/2014/main" id="{281EA8BE-BA67-478C-BC47-676ECDCD8B75}"/>
               </a:ext>
             </a:extLst>
           </p:cNvPr>
@@ -5888,7 +5952,7 @@
           <p:cNvPr id="36" name="">
             <a:extLst xmlns:a="http://schemas.openxmlformats.org/drawingml/2006/main">
               <a:ext uri="{FF2B5EF4-FFF2-40B4-BE49-F238E27FC236}">
-                <a16:creationId xmlns:a16="http://schemas.microsoft.com/office/drawing/2014/main" id="{B7810E4C-A9F6-4F1D-B967-421CFDDCE6AF}"/>
+                <a16:creationId xmlns:a16="http://schemas.microsoft.com/office/drawing/2014/main" id="{E9D29FC0-52B7-4E15-93E4-DBA072EA9AC7}"/>
               </a:ext>
             </a:extLst>
           </p:cNvPr>
@@ -5952,7 +6016,7 @@
           <p:cNvPr id="37" name="">
             <a:extLst xmlns:a="http://schemas.openxmlformats.org/drawingml/2006/main">
               <a:ext uri="{FF2B5EF4-FFF2-40B4-BE49-F238E27FC236}">
-                <a16:creationId xmlns:a16="http://schemas.microsoft.com/office/drawing/2014/main" id="{9FFDAC8C-2169-4527-9558-E817261B2349}"/>
+                <a16:creationId xmlns:a16="http://schemas.microsoft.com/office/drawing/2014/main" id="{6542D193-44C9-4E00-AD6C-FD4B9FD1EAF5}"/>
               </a:ext>
             </a:extLst>
           </p:cNvPr>
@@ -6016,7 +6080,7 @@
           <p:cNvPr id="38" name="">
             <a:extLst xmlns:a="http://schemas.openxmlformats.org/drawingml/2006/main">
               <a:ext uri="{FF2B5EF4-FFF2-40B4-BE49-F238E27FC236}">
-                <a16:creationId xmlns:a16="http://schemas.microsoft.com/office/drawing/2014/main" id="{C3051EBC-B74F-4D30-BB86-FE443CC93E1D}"/>
+                <a16:creationId xmlns:a16="http://schemas.microsoft.com/office/drawing/2014/main" id="{489F04DF-26F4-40BA-9D90-68FBE2A5E745}"/>
               </a:ext>
             </a:extLst>
           </p:cNvPr>
@@ -6070,7 +6134,30 @@
                 <a:ea typeface="Hiragino Sans"/>
                 <a:cs typeface="Hiragino Sans"/>
               </a:rPr>
-              <a:t>CLEAN HISTORY EXPIRES</a:t>
+              <a:t>CLEAN HISTORY</a:t>
+            </a:r>
+          </a:p>
+          <a:p xmlns:a="http://schemas.openxmlformats.org/drawingml/2006/main">
+            <a:pPr algn="l">
+              <a:defRPr sz="2550" b="1">
+                <a:solidFill>
+                  <a:srgbClr val="34E0B3"/>
+                </a:solidFill>
+                <a:latin typeface="Hiragino Sans"/>
+                <a:ea typeface="Hiragino Sans"/>
+                <a:cs typeface="Hiragino Sans"/>
+              </a:defRPr>
+            </a:pPr>
+            <a:r>
+              <a:rPr sz="2550" b="1">
+                <a:solidFill>
+                  <a:srgbClr val="34E0B3"/>
+                </a:solidFill>
+                <a:latin typeface="Hiragino Sans"/>
+                <a:ea typeface="Hiragino Sans"/>
+                <a:cs typeface="Hiragino Sans"/>
+              </a:rPr>
+              <a:t>EXPIRES</a:t>
             </a:r>
           </a:p>
         </p:txBody>
@@ -6080,7 +6167,7 @@
           <p:cNvPr id="39" name="">
             <a:extLst xmlns:a="http://schemas.openxmlformats.org/drawingml/2006/main">
               <a:ext uri="{FF2B5EF4-FFF2-40B4-BE49-F238E27FC236}">
-                <a16:creationId xmlns:a16="http://schemas.microsoft.com/office/drawing/2014/main" id="{CA31F892-B935-4E15-A057-1E763D44C82B}"/>
+                <a16:creationId xmlns:a16="http://schemas.microsoft.com/office/drawing/2014/main" id="{962BD374-E5B2-4AC2-A500-711CDFA3A34D}"/>
               </a:ext>
             </a:extLst>
           </p:cNvPr>
@@ -6144,7 +6231,7 @@
           <p:cNvPr id="40" name="">
             <a:extLst xmlns:a="http://schemas.openxmlformats.org/drawingml/2006/main">
               <a:ext uri="{FF2B5EF4-FFF2-40B4-BE49-F238E27FC236}">
-                <a16:creationId xmlns:a16="http://schemas.microsoft.com/office/drawing/2014/main" id="{8B1FCCF8-5C66-4346-86DF-6703E5ED3927}"/>
+                <a16:creationId xmlns:a16="http://schemas.microsoft.com/office/drawing/2014/main" id="{1A74019B-1E65-493D-924E-092D1C34C9A1}"/>
               </a:ext>
             </a:extLst>
           </p:cNvPr>
@@ -6179,7 +6266,7 @@
           <p:cNvPr id="41" name="">
             <a:extLst xmlns:a="http://schemas.openxmlformats.org/drawingml/2006/main">
               <a:ext uri="{FF2B5EF4-FFF2-40B4-BE49-F238E27FC236}">
-                <a16:creationId xmlns:a16="http://schemas.microsoft.com/office/drawing/2014/main" id="{A89E3A0A-3DA2-4C7E-A92E-CE5B791A4A18}"/>
+                <a16:creationId xmlns:a16="http://schemas.microsoft.com/office/drawing/2014/main" id="{0676BC11-21DB-4518-A1E9-B5949784A55D}"/>
               </a:ext>
             </a:extLst>
           </p:cNvPr>
@@ -6214,7 +6301,7 @@
           <p:cNvPr id="42" name="">
             <a:extLst xmlns:a="http://schemas.openxmlformats.org/drawingml/2006/main">
               <a:ext uri="{FF2B5EF4-FFF2-40B4-BE49-F238E27FC236}">
-                <a16:creationId xmlns:a16="http://schemas.microsoft.com/office/drawing/2014/main" id="{EFD870E8-AD1E-4400-97C2-DD6EB02F2A7E}"/>
+                <a16:creationId xmlns:a16="http://schemas.microsoft.com/office/drawing/2014/main" id="{19C37909-3ADD-412C-87DA-5534AE291EE3}"/>
               </a:ext>
             </a:extLst>
           </p:cNvPr>
@@ -6249,7 +6336,7 @@
           <p:cNvPr id="43" name="">
             <a:extLst xmlns:a="http://schemas.openxmlformats.org/drawingml/2006/main">
               <a:ext uri="{FF2B5EF4-FFF2-40B4-BE49-F238E27FC236}">
-                <a16:creationId xmlns:a16="http://schemas.microsoft.com/office/drawing/2014/main" id="{BCF1A61B-15C7-4AA3-8393-43B9841FD15F}"/>
+                <a16:creationId xmlns:a16="http://schemas.microsoft.com/office/drawing/2014/main" id="{C174C6F1-4172-40AD-B4B7-AE9145131EA9}"/>
               </a:ext>
             </a:extLst>
           </p:cNvPr>
@@ -6284,7 +6371,7 @@
           <p:cNvPr id="44" name="">
             <a:extLst xmlns:a="http://schemas.openxmlformats.org/drawingml/2006/main">
               <a:ext uri="{FF2B5EF4-FFF2-40B4-BE49-F238E27FC236}">
-                <a16:creationId xmlns:a16="http://schemas.microsoft.com/office/drawing/2014/main" id="{11E8706D-C267-4B4E-AEBD-07EA8F650940}"/>
+                <a16:creationId xmlns:a16="http://schemas.microsoft.com/office/drawing/2014/main" id="{FB37DE16-17EA-4B78-A4DB-EEC0B587C460}"/>
               </a:ext>
             </a:extLst>
           </p:cNvPr>
@@ -6319,7 +6406,7 @@
           <p:cNvPr id="45" name="">
             <a:extLst xmlns:a="http://schemas.openxmlformats.org/drawingml/2006/main">
               <a:ext uri="{FF2B5EF4-FFF2-40B4-BE49-F238E27FC236}">
-                <a16:creationId xmlns:a16="http://schemas.microsoft.com/office/drawing/2014/main" id="{7467E6BF-5861-4F17-9CC3-2A2F6920A541}"/>
+                <a16:creationId xmlns:a16="http://schemas.microsoft.com/office/drawing/2014/main" id="{DA4BC76A-0A9D-4A19-BE95-40AE65D90CCA}"/>
               </a:ext>
             </a:extLst>
           </p:cNvPr>
@@ -6354,7 +6441,7 @@
           <p:cNvPr id="46" name="">
             <a:extLst xmlns:a="http://schemas.openxmlformats.org/drawingml/2006/main">
               <a:ext uri="{FF2B5EF4-FFF2-40B4-BE49-F238E27FC236}">
-                <a16:creationId xmlns:a16="http://schemas.microsoft.com/office/drawing/2014/main" id="{6C5CA83F-D455-4199-A635-6BF4B873C3D8}"/>
+                <a16:creationId xmlns:a16="http://schemas.microsoft.com/office/drawing/2014/main" id="{89B323EF-F820-467F-80B7-E3E3B0090B5C}"/>
               </a:ext>
             </a:extLst>
           </p:cNvPr>
@@ -6387,7 +6474,7 @@
           <p:cNvPr id="47" name="">
             <a:extLst xmlns:a="http://schemas.openxmlformats.org/drawingml/2006/main">
               <a:ext uri="{FF2B5EF4-FFF2-40B4-BE49-F238E27FC236}">
-                <a16:creationId xmlns:a16="http://schemas.microsoft.com/office/drawing/2014/main" id="{AB570C57-F437-416A-98E3-F80BCDAA543F}"/>
+                <a16:creationId xmlns:a16="http://schemas.microsoft.com/office/drawing/2014/main" id="{1B2EB802-6F4C-45A1-95C3-18EE23EF3EE9}"/>
               </a:ext>
             </a:extLst>
           </p:cNvPr>
@@ -6422,7 +6509,7 @@
           <p:cNvPr id="48" name="">
             <a:extLst xmlns:a="http://schemas.openxmlformats.org/drawingml/2006/main">
               <a:ext uri="{FF2B5EF4-FFF2-40B4-BE49-F238E27FC236}">
-                <a16:creationId xmlns:a16="http://schemas.microsoft.com/office/drawing/2014/main" id="{93EF319B-1EF0-4D5C-BFBF-49A543F4A4F5}"/>
+                <a16:creationId xmlns:a16="http://schemas.microsoft.com/office/drawing/2014/main" id="{25C7907F-FADC-4C46-92C2-D377D2B47025}"/>
               </a:ext>
             </a:extLst>
           </p:cNvPr>
@@ -6486,7 +6573,71 @@
           <p:cNvPr id="49" name="">
             <a:extLst xmlns:a="http://schemas.openxmlformats.org/drawingml/2006/main">
               <a:ext uri="{FF2B5EF4-FFF2-40B4-BE49-F238E27FC236}">
-                <a16:creationId xmlns:a16="http://schemas.microsoft.com/office/drawing/2014/main" id="{3C9187F6-48E8-428C-8C36-8C6864556F4A}"/>
+                <a16:creationId xmlns:a16="http://schemas.microsoft.com/office/drawing/2014/main" id="{C4356705-D232-4C49-BF44-E7B51D486CF9}"/>
+              </a:ext>
+            </a:extLst>
+          </p:cNvPr>
+          <p:cNvSpPr>
+            <a:spLocks xmlns:a="http://schemas.openxmlformats.org/drawingml/2006/main" noGrp="1"/>
+          </p:cNvSpPr>
+          <p:nvPr/>
+        </p:nvSpPr>
+        <p:spPr>
+          <a:xfrm xmlns:a="http://schemas.openxmlformats.org/drawingml/2006/main">
+            <a:off x="1695450" y="3790950"/>
+            <a:ext cx="3429000" cy="209550"/>
+          </a:xfrm>
+          <a:prstGeom xmlns:a="http://schemas.openxmlformats.org/drawingml/2006/main" prst="rect">
+            <a:avLst/>
+          </a:prstGeom>
+          <a:solidFill xmlns:a="http://schemas.openxmlformats.org/drawingml/2006/main">
+            <a:srgbClr val="000000">
+              <a:alpha val="0"/>
+            </a:srgbClr>
+          </a:solidFill>
+          <a:ln xmlns:a="http://schemas.openxmlformats.org/drawingml/2006/main" w="0">
+            <a:solidFill>
+              <a:srgbClr val="000000">
+                <a:alpha val="0"/>
+              </a:srgbClr>
+            </a:solidFill>
+            <a:prstDash val="solid"/>
+          </a:ln>
+        </p:spPr>
+        <p:txBody>
+          <a:bodyPr xmlns:a="http://schemas.openxmlformats.org/drawingml/2006/main" lIns="0" tIns="0" rIns="0" bIns="0" anchor="t"/>
+          <a:lstStyle xmlns:a="http://schemas.openxmlformats.org/drawingml/2006/main"/>
+          <a:p xmlns:a="http://schemas.openxmlformats.org/drawingml/2006/main">
+            <a:pPr algn="l">
+              <a:defRPr sz="863" b="0">
+                <a:solidFill>
+                  <a:srgbClr val="A8B1BA"/>
+                </a:solidFill>
+                <a:latin typeface="Hiragino Sans"/>
+                <a:ea typeface="Hiragino Sans"/>
+                <a:cs typeface="Hiragino Sans"/>
+              </a:defRPr>
+            </a:pPr>
+            <a:r>
+              <a:rPr sz="863" b="0">
+                <a:solidFill>
+                  <a:srgbClr val="A8B1BA"/>
+                </a:solidFill>
+                <a:latin typeface="Hiragino Sans"/>
+                <a:ea typeface="Hiragino Sans"/>
+                <a:cs typeface="Hiragino Sans"/>
+              </a:rPr>
+              <a:t>横軸: 感染後に経過した時間（短い → 長い）</a:t>
+            </a:r>
+          </a:p>
+        </p:txBody>
+      </p:sp>
+      <p:sp>
+        <p:nvSpPr>
+          <p:cNvPr id="50" name="">
+            <a:extLst xmlns:a="http://schemas.openxmlformats.org/drawingml/2006/main">
+              <a:ext uri="{FF2B5EF4-FFF2-40B4-BE49-F238E27FC236}">
+                <a16:creationId xmlns:a16="http://schemas.microsoft.com/office/drawing/2014/main" id="{BFFD5AA5-BE8E-4245-8F90-2374B70952D0}"/>
               </a:ext>
             </a:extLst>
           </p:cNvPr>
@@ -6547,10 +6698,10 @@
       </p:sp>
       <p:sp>
         <p:nvSpPr>
-          <p:cNvPr id="50" name="">
-            <a:extLst xmlns:a="http://schemas.openxmlformats.org/drawingml/2006/main">
-              <a:ext uri="{FF2B5EF4-FFF2-40B4-BE49-F238E27FC236}">
-                <a16:creationId xmlns:a16="http://schemas.microsoft.com/office/drawing/2014/main" id="{DFF8EE1F-4B04-4D3C-9505-1ABFBC032D4F}"/>
+          <p:cNvPr id="51" name="">
+            <a:extLst xmlns:a="http://schemas.openxmlformats.org/drawingml/2006/main">
+              <a:ext uri="{FF2B5EF4-FFF2-40B4-BE49-F238E27FC236}">
+                <a16:creationId xmlns:a16="http://schemas.microsoft.com/office/drawing/2014/main" id="{16ADDFC2-AC41-489A-BCB9-C0C47A86853F}"/>
               </a:ext>
             </a:extLst>
           </p:cNvPr>
@@ -6611,10 +6762,10 @@
       </p:sp>
       <p:sp>
         <p:nvSpPr>
-          <p:cNvPr id="51" name="">
-            <a:extLst xmlns:a="http://schemas.openxmlformats.org/drawingml/2006/main">
-              <a:ext uri="{FF2B5EF4-FFF2-40B4-BE49-F238E27FC236}">
-                <a16:creationId xmlns:a16="http://schemas.microsoft.com/office/drawing/2014/main" id="{9A98F635-20D3-49B4-8C9F-98BE89A10755}"/>
+          <p:cNvPr id="52" name="">
+            <a:extLst xmlns:a="http://schemas.openxmlformats.org/drawingml/2006/main">
+              <a:ext uri="{FF2B5EF4-FFF2-40B4-BE49-F238E27FC236}">
+                <a16:creationId xmlns:a16="http://schemas.microsoft.com/office/drawing/2014/main" id="{CEC95A44-31BC-4BE0-B9B8-83845701690F}"/>
               </a:ext>
             </a:extLst>
           </p:cNvPr>
@@ -6646,10 +6797,10 @@
       </p:sp>
       <p:sp>
         <p:nvSpPr>
-          <p:cNvPr id="52" name="">
-            <a:extLst xmlns:a="http://schemas.openxmlformats.org/drawingml/2006/main">
-              <a:ext uri="{FF2B5EF4-FFF2-40B4-BE49-F238E27FC236}">
-                <a16:creationId xmlns:a16="http://schemas.microsoft.com/office/drawing/2014/main" id="{00AE4EE0-4DC3-4BDF-84F5-C9A3A4CD9459}"/>
+          <p:cNvPr id="53" name="">
+            <a:extLst xmlns:a="http://schemas.openxmlformats.org/drawingml/2006/main">
+              <a:ext uri="{FF2B5EF4-FFF2-40B4-BE49-F238E27FC236}">
+                <a16:creationId xmlns:a16="http://schemas.microsoft.com/office/drawing/2014/main" id="{8FAD0C6A-9306-4830-9B46-64C94E45465F}"/>
               </a:ext>
             </a:extLst>
           </p:cNvPr>
@@ -6710,10 +6861,10 @@
       </p:sp>
       <p:sp>
         <p:nvSpPr>
-          <p:cNvPr id="53" name="">
-            <a:extLst xmlns:a="http://schemas.openxmlformats.org/drawingml/2006/main">
-              <a:ext uri="{FF2B5EF4-FFF2-40B4-BE49-F238E27FC236}">
-                <a16:creationId xmlns:a16="http://schemas.microsoft.com/office/drawing/2014/main" id="{C8305AF1-7405-4CA3-9E9D-EC6BAEC87D50}"/>
+          <p:cNvPr id="54" name="">
+            <a:extLst xmlns:a="http://schemas.openxmlformats.org/drawingml/2006/main">
+              <a:ext uri="{FF2B5EF4-FFF2-40B4-BE49-F238E27FC236}">
+                <a16:creationId xmlns:a16="http://schemas.microsoft.com/office/drawing/2014/main" id="{CBEBAFB6-5BA6-4618-B90D-1025A9123190}"/>
               </a:ext>
             </a:extLst>
           </p:cNvPr>
@@ -6745,10 +6896,10 @@
       </p:sp>
       <p:sp>
         <p:nvSpPr>
-          <p:cNvPr id="54" name="">
-            <a:extLst xmlns:a="http://schemas.openxmlformats.org/drawingml/2006/main">
-              <a:ext uri="{FF2B5EF4-FFF2-40B4-BE49-F238E27FC236}">
-                <a16:creationId xmlns:a16="http://schemas.microsoft.com/office/drawing/2014/main" id="{0DCC2EB3-1671-46F5-8260-2C04F765EFDD}"/>
+          <p:cNvPr id="55" name="">
+            <a:extLst xmlns:a="http://schemas.openxmlformats.org/drawingml/2006/main">
+              <a:ext uri="{FF2B5EF4-FFF2-40B4-BE49-F238E27FC236}">
+                <a16:creationId xmlns:a16="http://schemas.microsoft.com/office/drawing/2014/main" id="{01F0076F-B49E-4C59-9203-E43146FE69E9}"/>
               </a:ext>
             </a:extLst>
           </p:cNvPr>
@@ -6809,10 +6960,10 @@
       </p:sp>
       <p:sp>
         <p:nvSpPr>
-          <p:cNvPr id="55" name="">
-            <a:extLst xmlns:a="http://schemas.openxmlformats.org/drawingml/2006/main">
-              <a:ext uri="{FF2B5EF4-FFF2-40B4-BE49-F238E27FC236}">
-                <a16:creationId xmlns:a16="http://schemas.microsoft.com/office/drawing/2014/main" id="{3A70E83E-13CC-4DBE-92DC-90A1B5C12209}"/>
+          <p:cNvPr id="56" name="">
+            <a:extLst xmlns:a="http://schemas.openxmlformats.org/drawingml/2006/main">
+              <a:ext uri="{FF2B5EF4-FFF2-40B4-BE49-F238E27FC236}">
+                <a16:creationId xmlns:a16="http://schemas.microsoft.com/office/drawing/2014/main" id="{48914A38-C5BB-46E7-B7A3-3A02ED847A00}"/>
               </a:ext>
             </a:extLst>
           </p:cNvPr>
@@ -6844,10 +6995,10 @@
       </p:sp>
       <p:sp>
         <p:nvSpPr>
-          <p:cNvPr id="56" name="">
-            <a:extLst xmlns:a="http://schemas.openxmlformats.org/drawingml/2006/main">
-              <a:ext uri="{FF2B5EF4-FFF2-40B4-BE49-F238E27FC236}">
-                <a16:creationId xmlns:a16="http://schemas.microsoft.com/office/drawing/2014/main" id="{F7D5D269-3C12-4E34-BE75-F4F6964DE8BF}"/>
+          <p:cNvPr id="57" name="">
+            <a:extLst xmlns:a="http://schemas.openxmlformats.org/drawingml/2006/main">
+              <a:ext uri="{FF2B5EF4-FFF2-40B4-BE49-F238E27FC236}">
+                <a16:creationId xmlns:a16="http://schemas.microsoft.com/office/drawing/2014/main" id="{1C12E191-1BBA-4BDB-B7F9-08D76B6E2E6B}"/>
               </a:ext>
             </a:extLst>
           </p:cNvPr>
@@ -6908,10 +7059,10 @@
       </p:sp>
       <p:sp>
         <p:nvSpPr>
-          <p:cNvPr id="57" name="">
-            <a:extLst xmlns:a="http://schemas.openxmlformats.org/drawingml/2006/main">
-              <a:ext uri="{FF2B5EF4-FFF2-40B4-BE49-F238E27FC236}">
-                <a16:creationId xmlns:a16="http://schemas.microsoft.com/office/drawing/2014/main" id="{FAFD9477-A6D7-424B-87D8-B4592301753B}"/>
+          <p:cNvPr id="58" name="">
+            <a:extLst xmlns:a="http://schemas.openxmlformats.org/drawingml/2006/main">
+              <a:ext uri="{FF2B5EF4-FFF2-40B4-BE49-F238E27FC236}">
+                <a16:creationId xmlns:a16="http://schemas.microsoft.com/office/drawing/2014/main" id="{EC01ABB8-F056-4816-9F35-B72F703E9BA3}"/>
               </a:ext>
             </a:extLst>
           </p:cNvPr>
@@ -6943,10 +7094,10 @@
       </p:sp>
       <p:sp>
         <p:nvSpPr>
-          <p:cNvPr id="58" name="">
-            <a:extLst xmlns:a="http://schemas.openxmlformats.org/drawingml/2006/main">
-              <a:ext uri="{FF2B5EF4-FFF2-40B4-BE49-F238E27FC236}">
-                <a16:creationId xmlns:a16="http://schemas.microsoft.com/office/drawing/2014/main" id="{E55D7481-E005-4ACD-A0C8-174F13CB6BDD}"/>
+          <p:cNvPr id="59" name="">
+            <a:extLst xmlns:a="http://schemas.openxmlformats.org/drawingml/2006/main">
+              <a:ext uri="{FF2B5EF4-FFF2-40B4-BE49-F238E27FC236}">
+                <a16:creationId xmlns:a16="http://schemas.microsoft.com/office/drawing/2014/main" id="{5FE461A8-109B-412A-A581-BDB9284FAFE0}"/>
               </a:ext>
             </a:extLst>
           </p:cNvPr>
@@ -7007,10 +7158,10 @@
       </p:sp>
       <p:sp>
         <p:nvSpPr>
-          <p:cNvPr id="59" name="">
-            <a:extLst xmlns:a="http://schemas.openxmlformats.org/drawingml/2006/main">
-              <a:ext uri="{FF2B5EF4-FFF2-40B4-BE49-F238E27FC236}">
-                <a16:creationId xmlns:a16="http://schemas.microsoft.com/office/drawing/2014/main" id="{EFBE71B3-5B51-450F-B00A-C71AD97AF123}"/>
+          <p:cNvPr id="60" name="">
+            <a:extLst xmlns:a="http://schemas.openxmlformats.org/drawingml/2006/main">
+              <a:ext uri="{FF2B5EF4-FFF2-40B4-BE49-F238E27FC236}">
+                <a16:creationId xmlns:a16="http://schemas.microsoft.com/office/drawing/2014/main" id="{56052AFB-F6DB-4B83-8D87-4EB7B444BA3C}"/>
               </a:ext>
             </a:extLst>
           </p:cNvPr>
@@ -7072,7 +7223,7 @@
     </p:spTree>
     <p:extLst>
       <p:ext uri="{BB962C8B-B14F-4D97-AF65-F5344CB8AC3E}">
-        <p14:creationId xmlns:p14="http://schemas.microsoft.com/office/powerpoint/2010/main" val="177218412"/>
+        <p14:creationId xmlns:p14="http://schemas.microsoft.com/office/powerpoint/2010/main" val="150211408"/>
       </p:ext>
     </p:extLst>
   </p:cSld>
@@ -7096,7 +7247,7 @@
           <p:cNvPr id="1" name="">
             <a:extLst xmlns:a="http://schemas.openxmlformats.org/drawingml/2006/main">
               <a:ext uri="{FF2B5EF4-FFF2-40B4-BE49-F238E27FC236}">
-                <a16:creationId xmlns:a16="http://schemas.microsoft.com/office/drawing/2014/main" id="{EE450640-1FCC-4279-84E8-4808221339F0}"/>
+                <a16:creationId xmlns:a16="http://schemas.microsoft.com/office/drawing/2014/main" id="{95A6C0F0-C339-46EC-9245-E470611BBB25}"/>
               </a:ext>
             </a:extLst>
           </p:cNvPr>
@@ -7131,7 +7282,7 @@
           <p:cNvPr id="2" name="">
             <a:extLst xmlns:a="http://schemas.openxmlformats.org/drawingml/2006/main">
               <a:ext uri="{FF2B5EF4-FFF2-40B4-BE49-F238E27FC236}">
-                <a16:creationId xmlns:a16="http://schemas.microsoft.com/office/drawing/2014/main" id="{0250FD54-9E8E-4923-87C3-566735B778B0}"/>
+                <a16:creationId xmlns:a16="http://schemas.microsoft.com/office/drawing/2014/main" id="{740735DE-AD55-4BB7-8ECD-828511AA2DCE}"/>
               </a:ext>
             </a:extLst>
           </p:cNvPr>
@@ -7166,7 +7317,7 @@
           <p:cNvPr id="3" name="">
             <a:extLst xmlns:a="http://schemas.openxmlformats.org/drawingml/2006/main">
               <a:ext uri="{FF2B5EF4-FFF2-40B4-BE49-F238E27FC236}">
-                <a16:creationId xmlns:a16="http://schemas.microsoft.com/office/drawing/2014/main" id="{F2AA64F6-F56B-44AE-93BD-B7E6DF9F968B}"/>
+                <a16:creationId xmlns:a16="http://schemas.microsoft.com/office/drawing/2014/main" id="{9ADFDA21-44FB-4C60-BDA1-9EB8A89E9E4E}"/>
               </a:ext>
             </a:extLst>
           </p:cNvPr>
@@ -7201,7 +7352,7 @@
           <p:cNvPr id="4" name="">
             <a:extLst xmlns:a="http://schemas.openxmlformats.org/drawingml/2006/main">
               <a:ext uri="{FF2B5EF4-FFF2-40B4-BE49-F238E27FC236}">
-                <a16:creationId xmlns:a16="http://schemas.microsoft.com/office/drawing/2014/main" id="{B5462572-212A-421A-8B75-6839D2314155}"/>
+                <a16:creationId xmlns:a16="http://schemas.microsoft.com/office/drawing/2014/main" id="{88B2CCD7-A3D7-4E8A-836D-3562EB601F28}"/>
               </a:ext>
             </a:extLst>
           </p:cNvPr>
@@ -7236,7 +7387,7 @@
           <p:cNvPr id="5" name="">
             <a:extLst xmlns:a="http://schemas.openxmlformats.org/drawingml/2006/main">
               <a:ext uri="{FF2B5EF4-FFF2-40B4-BE49-F238E27FC236}">
-                <a16:creationId xmlns:a16="http://schemas.microsoft.com/office/drawing/2014/main" id="{4BB05CFD-2B54-4539-AC4F-C9C88E364612}"/>
+                <a16:creationId xmlns:a16="http://schemas.microsoft.com/office/drawing/2014/main" id="{2D556CF8-4F34-421A-B74B-A66BCDFF011F}"/>
               </a:ext>
             </a:extLst>
           </p:cNvPr>
@@ -7271,7 +7422,7 @@
           <p:cNvPr id="6" name="">
             <a:extLst xmlns:a="http://schemas.openxmlformats.org/drawingml/2006/main">
               <a:ext uri="{FF2B5EF4-FFF2-40B4-BE49-F238E27FC236}">
-                <a16:creationId xmlns:a16="http://schemas.microsoft.com/office/drawing/2014/main" id="{0D1EBF06-8A40-4C24-8856-84F0E7AFF5EE}"/>
+                <a16:creationId xmlns:a16="http://schemas.microsoft.com/office/drawing/2014/main" id="{6E588D8F-EE11-43FC-8E60-63DE617B4023}"/>
               </a:ext>
             </a:extLst>
           </p:cNvPr>
@@ -7306,7 +7457,7 @@
           <p:cNvPr id="7" name="">
             <a:extLst xmlns:a="http://schemas.openxmlformats.org/drawingml/2006/main">
               <a:ext uri="{FF2B5EF4-FFF2-40B4-BE49-F238E27FC236}">
-                <a16:creationId xmlns:a16="http://schemas.microsoft.com/office/drawing/2014/main" id="{CCF64E7A-218B-4C29-B9AB-D62757AD6AF4}"/>
+                <a16:creationId xmlns:a16="http://schemas.microsoft.com/office/drawing/2014/main" id="{42E1F003-686F-4812-B171-384F937F334B}"/>
               </a:ext>
             </a:extLst>
           </p:cNvPr>
@@ -7341,7 +7492,7 @@
           <p:cNvPr id="8" name="">
             <a:extLst xmlns:a="http://schemas.openxmlformats.org/drawingml/2006/main">
               <a:ext uri="{FF2B5EF4-FFF2-40B4-BE49-F238E27FC236}">
-                <a16:creationId xmlns:a16="http://schemas.microsoft.com/office/drawing/2014/main" id="{C1DBE844-A851-4C37-9172-045D71C9A281}"/>
+                <a16:creationId xmlns:a16="http://schemas.microsoft.com/office/drawing/2014/main" id="{4D8192B1-7003-48EC-A7AB-D6DCD2AA7975}"/>
               </a:ext>
             </a:extLst>
           </p:cNvPr>
@@ -7376,7 +7527,7 @@
           <p:cNvPr id="9" name="">
             <a:extLst xmlns:a="http://schemas.openxmlformats.org/drawingml/2006/main">
               <a:ext uri="{FF2B5EF4-FFF2-40B4-BE49-F238E27FC236}">
-                <a16:creationId xmlns:a16="http://schemas.microsoft.com/office/drawing/2014/main" id="{7912C715-CC80-4E84-8011-803A9E38B893}"/>
+                <a16:creationId xmlns:a16="http://schemas.microsoft.com/office/drawing/2014/main" id="{3DFF0518-36FE-406B-A0AC-6E9E53C16C54}"/>
               </a:ext>
             </a:extLst>
           </p:cNvPr>
@@ -7411,7 +7562,7 @@
           <p:cNvPr id="10" name="">
             <a:extLst xmlns:a="http://schemas.openxmlformats.org/drawingml/2006/main">
               <a:ext uri="{FF2B5EF4-FFF2-40B4-BE49-F238E27FC236}">
-                <a16:creationId xmlns:a16="http://schemas.microsoft.com/office/drawing/2014/main" id="{E34D64AE-7EFC-4B5C-85E9-123F3879FEB5}"/>
+                <a16:creationId xmlns:a16="http://schemas.microsoft.com/office/drawing/2014/main" id="{EDF28D3E-FC60-48BF-8DA0-EEA0B189FD6B}"/>
               </a:ext>
             </a:extLst>
           </p:cNvPr>
@@ -7446,7 +7597,7 @@
           <p:cNvPr id="11" name="">
             <a:extLst xmlns:a="http://schemas.openxmlformats.org/drawingml/2006/main">
               <a:ext uri="{FF2B5EF4-FFF2-40B4-BE49-F238E27FC236}">
-                <a16:creationId xmlns:a16="http://schemas.microsoft.com/office/drawing/2014/main" id="{B638D20C-659C-4F15-8D8B-40B27D287229}"/>
+                <a16:creationId xmlns:a16="http://schemas.microsoft.com/office/drawing/2014/main" id="{CD0013AA-7D22-4166-BA6B-622334B7090C}"/>
               </a:ext>
             </a:extLst>
           </p:cNvPr>
@@ -7481,7 +7632,7 @@
           <p:cNvPr id="12" name="">
             <a:extLst xmlns:a="http://schemas.openxmlformats.org/drawingml/2006/main">
               <a:ext uri="{FF2B5EF4-FFF2-40B4-BE49-F238E27FC236}">
-                <a16:creationId xmlns:a16="http://schemas.microsoft.com/office/drawing/2014/main" id="{209B8114-E847-4CBB-B46D-844221FF691F}"/>
+                <a16:creationId xmlns:a16="http://schemas.microsoft.com/office/drawing/2014/main" id="{5CF896E2-EB4A-44B4-BA3C-E78D083B4407}"/>
               </a:ext>
             </a:extLst>
           </p:cNvPr>
@@ -7516,7 +7667,7 @@
           <p:cNvPr id="13" name="">
             <a:extLst xmlns:a="http://schemas.openxmlformats.org/drawingml/2006/main">
               <a:ext uri="{FF2B5EF4-FFF2-40B4-BE49-F238E27FC236}">
-                <a16:creationId xmlns:a16="http://schemas.microsoft.com/office/drawing/2014/main" id="{DF5551B9-415A-407B-BD24-010D4CA4F206}"/>
+                <a16:creationId xmlns:a16="http://schemas.microsoft.com/office/drawing/2014/main" id="{4BA5BEEC-CE21-45A2-9D41-9723E3BBA12D}"/>
               </a:ext>
             </a:extLst>
           </p:cNvPr>
@@ -7551,7 +7702,7 @@
           <p:cNvPr id="14" name="">
             <a:extLst xmlns:a="http://schemas.openxmlformats.org/drawingml/2006/main">
               <a:ext uri="{FF2B5EF4-FFF2-40B4-BE49-F238E27FC236}">
-                <a16:creationId xmlns:a16="http://schemas.microsoft.com/office/drawing/2014/main" id="{034E4705-52C5-40BE-956C-D554FF001A27}"/>
+                <a16:creationId xmlns:a16="http://schemas.microsoft.com/office/drawing/2014/main" id="{B69D34EE-5BC7-411E-94D6-B979FEFCD25B}"/>
               </a:ext>
             </a:extLst>
           </p:cNvPr>
@@ -7586,7 +7737,7 @@
           <p:cNvPr id="15" name="">
             <a:extLst xmlns:a="http://schemas.openxmlformats.org/drawingml/2006/main">
               <a:ext uri="{FF2B5EF4-FFF2-40B4-BE49-F238E27FC236}">
-                <a16:creationId xmlns:a16="http://schemas.microsoft.com/office/drawing/2014/main" id="{FFD7C329-35E6-4EB8-94AC-AACC57365855}"/>
+                <a16:creationId xmlns:a16="http://schemas.microsoft.com/office/drawing/2014/main" id="{B3227814-19B0-487B-8F47-599C5F406012}"/>
               </a:ext>
             </a:extLst>
           </p:cNvPr>
@@ -7621,7 +7772,7 @@
           <p:cNvPr id="16" name="">
             <a:extLst xmlns:a="http://schemas.openxmlformats.org/drawingml/2006/main">
               <a:ext uri="{FF2B5EF4-FFF2-40B4-BE49-F238E27FC236}">
-                <a16:creationId xmlns:a16="http://schemas.microsoft.com/office/drawing/2014/main" id="{35DD6853-94B1-4A43-8CE5-7D799ACFA2AA}"/>
+                <a16:creationId xmlns:a16="http://schemas.microsoft.com/office/drawing/2014/main" id="{7CD92B05-B28E-4349-9422-20D10E237B78}"/>
               </a:ext>
             </a:extLst>
           </p:cNvPr>
@@ -7656,7 +7807,7 @@
           <p:cNvPr id="17" name="">
             <a:extLst xmlns:a="http://schemas.openxmlformats.org/drawingml/2006/main">
               <a:ext uri="{FF2B5EF4-FFF2-40B4-BE49-F238E27FC236}">
-                <a16:creationId xmlns:a16="http://schemas.microsoft.com/office/drawing/2014/main" id="{2C0DF52D-7E02-41E3-9FE3-BF1951F1FD91}"/>
+                <a16:creationId xmlns:a16="http://schemas.microsoft.com/office/drawing/2014/main" id="{9BF9B79D-5A75-43F9-904C-BEBBA12F2135}"/>
               </a:ext>
             </a:extLst>
           </p:cNvPr>
@@ -7691,7 +7842,7 @@
           <p:cNvPr id="18" name="">
             <a:extLst xmlns:a="http://schemas.openxmlformats.org/drawingml/2006/main">
               <a:ext uri="{FF2B5EF4-FFF2-40B4-BE49-F238E27FC236}">
-                <a16:creationId xmlns:a16="http://schemas.microsoft.com/office/drawing/2014/main" id="{2F10817D-3E37-4D1D-B576-0ED99B974662}"/>
+                <a16:creationId xmlns:a16="http://schemas.microsoft.com/office/drawing/2014/main" id="{B5EB2922-1888-4DFF-B323-A9B22D2AE4A2}"/>
               </a:ext>
             </a:extLst>
           </p:cNvPr>
@@ -7726,7 +7877,7 @@
           <p:cNvPr id="19" name="">
             <a:extLst xmlns:a="http://schemas.openxmlformats.org/drawingml/2006/main">
               <a:ext uri="{FF2B5EF4-FFF2-40B4-BE49-F238E27FC236}">
-                <a16:creationId xmlns:a16="http://schemas.microsoft.com/office/drawing/2014/main" id="{E1D6026D-E5F7-4BDA-BD05-E928C22DA6B0}"/>
+                <a16:creationId xmlns:a16="http://schemas.microsoft.com/office/drawing/2014/main" id="{DB63F7E7-A071-4DCC-912C-B36FBCD5CE16}"/>
               </a:ext>
             </a:extLst>
           </p:cNvPr>
@@ -7761,7 +7912,7 @@
           <p:cNvPr id="20" name="">
             <a:extLst xmlns:a="http://schemas.openxmlformats.org/drawingml/2006/main">
               <a:ext uri="{FF2B5EF4-FFF2-40B4-BE49-F238E27FC236}">
-                <a16:creationId xmlns:a16="http://schemas.microsoft.com/office/drawing/2014/main" id="{960034DF-055C-4396-9081-A326F63D8204}"/>
+                <a16:creationId xmlns:a16="http://schemas.microsoft.com/office/drawing/2014/main" id="{D0E6C9E9-2884-457D-8573-34A56C2750CF}"/>
               </a:ext>
             </a:extLst>
           </p:cNvPr>
@@ -7796,7 +7947,7 @@
           <p:cNvPr id="21" name="">
             <a:extLst xmlns:a="http://schemas.openxmlformats.org/drawingml/2006/main">
               <a:ext uri="{FF2B5EF4-FFF2-40B4-BE49-F238E27FC236}">
-                <a16:creationId xmlns:a16="http://schemas.microsoft.com/office/drawing/2014/main" id="{9442206D-AC16-4FEC-86E5-03CE455EE573}"/>
+                <a16:creationId xmlns:a16="http://schemas.microsoft.com/office/drawing/2014/main" id="{CBBCB3CF-E09A-42BB-BEB2-AF46FFF9A215}"/>
               </a:ext>
             </a:extLst>
           </p:cNvPr>
@@ -7831,7 +7982,7 @@
           <p:cNvPr id="22" name="">
             <a:extLst xmlns:a="http://schemas.openxmlformats.org/drawingml/2006/main">
               <a:ext uri="{FF2B5EF4-FFF2-40B4-BE49-F238E27FC236}">
-                <a16:creationId xmlns:a16="http://schemas.microsoft.com/office/drawing/2014/main" id="{A749755F-C102-45C7-8887-F44FAA53FECE}"/>
+                <a16:creationId xmlns:a16="http://schemas.microsoft.com/office/drawing/2014/main" id="{5CCD575E-7DB7-4939-9729-1D928F551E5A}"/>
               </a:ext>
             </a:extLst>
           </p:cNvPr>
@@ -7866,7 +8017,7 @@
           <p:cNvPr id="23" name="">
             <a:extLst xmlns:a="http://schemas.openxmlformats.org/drawingml/2006/main">
               <a:ext uri="{FF2B5EF4-FFF2-40B4-BE49-F238E27FC236}">
-                <a16:creationId xmlns:a16="http://schemas.microsoft.com/office/drawing/2014/main" id="{37C56FDE-5D5D-485E-A7F9-049888EE9F31}"/>
+                <a16:creationId xmlns:a16="http://schemas.microsoft.com/office/drawing/2014/main" id="{9211F222-396C-43A2-A390-85D03EF47FC3}"/>
               </a:ext>
             </a:extLst>
           </p:cNvPr>
@@ -7901,7 +8052,7 @@
           <p:cNvPr id="24" name="">
             <a:extLst xmlns:a="http://schemas.openxmlformats.org/drawingml/2006/main">
               <a:ext uri="{FF2B5EF4-FFF2-40B4-BE49-F238E27FC236}">
-                <a16:creationId xmlns:a16="http://schemas.microsoft.com/office/drawing/2014/main" id="{F1412D30-4B47-4244-80CB-79ABCBFB59C7}"/>
+                <a16:creationId xmlns:a16="http://schemas.microsoft.com/office/drawing/2014/main" id="{9EE9CEE8-506F-465E-89A6-D2DAA2D62637}"/>
               </a:ext>
             </a:extLst>
           </p:cNvPr>
@@ -7936,7 +8087,7 @@
           <p:cNvPr id="25" name="">
             <a:extLst xmlns:a="http://schemas.openxmlformats.org/drawingml/2006/main">
               <a:ext uri="{FF2B5EF4-FFF2-40B4-BE49-F238E27FC236}">
-                <a16:creationId xmlns:a16="http://schemas.microsoft.com/office/drawing/2014/main" id="{E9407929-E48A-4457-9DC2-1209E9C0DA2B}"/>
+                <a16:creationId xmlns:a16="http://schemas.microsoft.com/office/drawing/2014/main" id="{C9766D9C-C7C5-4137-A6E4-B70D6FB5E8E8}"/>
               </a:ext>
             </a:extLst>
           </p:cNvPr>
@@ -7971,7 +8122,7 @@
           <p:cNvPr id="26" name="">
             <a:extLst xmlns:a="http://schemas.openxmlformats.org/drawingml/2006/main">
               <a:ext uri="{FF2B5EF4-FFF2-40B4-BE49-F238E27FC236}">
-                <a16:creationId xmlns:a16="http://schemas.microsoft.com/office/drawing/2014/main" id="{223C87BC-3497-4EB6-BB1D-17D42B926CF2}"/>
+                <a16:creationId xmlns:a16="http://schemas.microsoft.com/office/drawing/2014/main" id="{E31DB9D7-CEF3-4C7F-A74D-A6AD33484855}"/>
               </a:ext>
             </a:extLst>
           </p:cNvPr>
@@ -8006,7 +8157,7 @@
           <p:cNvPr id="27" name="">
             <a:extLst xmlns:a="http://schemas.openxmlformats.org/drawingml/2006/main">
               <a:ext uri="{FF2B5EF4-FFF2-40B4-BE49-F238E27FC236}">
-                <a16:creationId xmlns:a16="http://schemas.microsoft.com/office/drawing/2014/main" id="{B560C48C-A68A-4EFB-AC45-393707ED3850}"/>
+                <a16:creationId xmlns:a16="http://schemas.microsoft.com/office/drawing/2014/main" id="{ADD635BE-4845-4D70-B60D-2A5D92C1D2C4}"/>
               </a:ext>
             </a:extLst>
           </p:cNvPr>
@@ -8041,7 +8192,7 @@
           <p:cNvPr id="28" name="">
             <a:extLst xmlns:a="http://schemas.openxmlformats.org/drawingml/2006/main">
               <a:ext uri="{FF2B5EF4-FFF2-40B4-BE49-F238E27FC236}">
-                <a16:creationId xmlns:a16="http://schemas.microsoft.com/office/drawing/2014/main" id="{50830FCE-5368-4FAA-89DE-D34FA1451CCB}"/>
+                <a16:creationId xmlns:a16="http://schemas.microsoft.com/office/drawing/2014/main" id="{3383C293-55FE-4C02-8F8C-FE8B6203D8E1}"/>
               </a:ext>
             </a:extLst>
           </p:cNvPr>
@@ -8076,7 +8227,7 @@
           <p:cNvPr id="29" name="">
             <a:extLst xmlns:a="http://schemas.openxmlformats.org/drawingml/2006/main">
               <a:ext uri="{FF2B5EF4-FFF2-40B4-BE49-F238E27FC236}">
-                <a16:creationId xmlns:a16="http://schemas.microsoft.com/office/drawing/2014/main" id="{27F2AB5C-9E56-4EB0-8B5D-D8A4D747FFAF}"/>
+                <a16:creationId xmlns:a16="http://schemas.microsoft.com/office/drawing/2014/main" id="{9C9BDEC7-86E6-4EC4-A1B2-86C13D80BF31}"/>
               </a:ext>
             </a:extLst>
           </p:cNvPr>
@@ -8111,7 +8262,7 @@
           <p:cNvPr id="30" name="">
             <a:extLst xmlns:a="http://schemas.openxmlformats.org/drawingml/2006/main">
               <a:ext uri="{FF2B5EF4-FFF2-40B4-BE49-F238E27FC236}">
-                <a16:creationId xmlns:a16="http://schemas.microsoft.com/office/drawing/2014/main" id="{1C18B8BB-B1D4-44B2-BB19-418FC39F76A3}"/>
+                <a16:creationId xmlns:a16="http://schemas.microsoft.com/office/drawing/2014/main" id="{7B106F7F-DE31-4614-835A-A219483BC9FB}"/>
               </a:ext>
             </a:extLst>
           </p:cNvPr>
@@ -8175,7 +8326,7 @@
           <p:cNvPr id="31" name="kicker-03-marker">
             <a:extLst xmlns:a="http://schemas.openxmlformats.org/drawingml/2006/main">
               <a:ext uri="{FF2B5EF4-FFF2-40B4-BE49-F238E27FC236}">
-                <a16:creationId xmlns:a16="http://schemas.microsoft.com/office/drawing/2014/main" id="{748D203B-099A-4467-877E-E72D43D9AB82}"/>
+                <a16:creationId xmlns:a16="http://schemas.microsoft.com/office/drawing/2014/main" id="{4A0D3080-C053-4618-9F7F-CA5FB12D737E}"/>
               </a:ext>
             </a:extLst>
           </p:cNvPr>
@@ -8210,7 +8361,7 @@
           <p:cNvPr id="32" name="kicker-03-label">
             <a:extLst xmlns:a="http://schemas.openxmlformats.org/drawingml/2006/main">
               <a:ext uri="{FF2B5EF4-FFF2-40B4-BE49-F238E27FC236}">
-                <a16:creationId xmlns:a16="http://schemas.microsoft.com/office/drawing/2014/main" id="{B4CAE6A9-3822-4EAD-A350-C8ECF8FCEC21}"/>
+                <a16:creationId xmlns:a16="http://schemas.microsoft.com/office/drawing/2014/main" id="{4D8C38CB-CD07-4951-BFBB-C58C03904554}"/>
               </a:ext>
             </a:extLst>
           </p:cNvPr>
@@ -8274,7 +8425,7 @@
           <p:cNvPr id="33" name="">
             <a:extLst xmlns:a="http://schemas.openxmlformats.org/drawingml/2006/main">
               <a:ext uri="{FF2B5EF4-FFF2-40B4-BE49-F238E27FC236}">
-                <a16:creationId xmlns:a16="http://schemas.microsoft.com/office/drawing/2014/main" id="{60619BE6-EDBF-4E92-A9F4-5590CC48D91B}"/>
+                <a16:creationId xmlns:a16="http://schemas.microsoft.com/office/drawing/2014/main" id="{C55D5593-7638-4AAD-A306-65680E03E3B4}"/>
               </a:ext>
             </a:extLst>
           </p:cNvPr>
@@ -8286,7 +8437,7 @@
         <p:spPr>
           <a:xfrm xmlns:a="http://schemas.openxmlformats.org/drawingml/2006/main">
             <a:off x="552450" y="781050"/>
-            <a:ext cx="9334500" cy="647700"/>
+            <a:ext cx="9334500" cy="628650"/>
           </a:xfrm>
           <a:prstGeom xmlns:a="http://schemas.openxmlformats.org/drawingml/2006/main" prst="rect">
             <a:avLst/>
@@ -8338,7 +8489,7 @@
           <p:cNvPr id="34" name="">
             <a:extLst xmlns:a="http://schemas.openxmlformats.org/drawingml/2006/main">
               <a:ext uri="{FF2B5EF4-FFF2-40B4-BE49-F238E27FC236}">
-                <a16:creationId xmlns:a16="http://schemas.microsoft.com/office/drawing/2014/main" id="{EFDB90B0-BAD9-4BFE-934F-90D8E72372AA}"/>
+                <a16:creationId xmlns:a16="http://schemas.microsoft.com/office/drawing/2014/main" id="{060405EB-E23A-493F-8068-3025942EDF90}"/>
               </a:ext>
             </a:extLst>
           </p:cNvPr>
@@ -8350,7 +8501,7 @@
         <p:spPr>
           <a:xfrm xmlns:a="http://schemas.openxmlformats.org/drawingml/2006/main">
             <a:off x="590550" y="1466850"/>
-            <a:ext cx="9144000" cy="323850"/>
+            <a:ext cx="8191500" cy="342900"/>
           </a:xfrm>
           <a:prstGeom xmlns:a="http://schemas.openxmlformats.org/drawingml/2006/main" prst="rect">
             <a:avLst/>
@@ -8402,7 +8553,7 @@
           <p:cNvPr id="35" name="">
             <a:extLst xmlns:a="http://schemas.openxmlformats.org/drawingml/2006/main">
               <a:ext uri="{FF2B5EF4-FFF2-40B4-BE49-F238E27FC236}">
-                <a16:creationId xmlns:a16="http://schemas.microsoft.com/office/drawing/2014/main" id="{C595A070-0381-4435-916B-92B2D0FEEE7D}"/>
+                <a16:creationId xmlns:a16="http://schemas.microsoft.com/office/drawing/2014/main" id="{60601D98-2DDB-4D32-9B37-D062342EE516}"/>
               </a:ext>
             </a:extLst>
           </p:cNvPr>
@@ -8435,7 +8586,7 @@
           <p:cNvPr id="36" name="">
             <a:extLst xmlns:a="http://schemas.openxmlformats.org/drawingml/2006/main">
               <a:ext uri="{FF2B5EF4-FFF2-40B4-BE49-F238E27FC236}">
-                <a16:creationId xmlns:a16="http://schemas.microsoft.com/office/drawing/2014/main" id="{FA4F3370-C717-464B-BD7E-20DC2EE7E471}"/>
+                <a16:creationId xmlns:a16="http://schemas.microsoft.com/office/drawing/2014/main" id="{55FE5A55-3189-4B56-A09D-1D2C8CD9EC3A}"/>
               </a:ext>
             </a:extLst>
           </p:cNvPr>
@@ -8468,19 +8619,19 @@
           <p:cNvPr id="37" name="">
             <a:extLst xmlns:a="http://schemas.openxmlformats.org/drawingml/2006/main">
               <a:ext uri="{FF2B5EF4-FFF2-40B4-BE49-F238E27FC236}">
-                <a16:creationId xmlns:a16="http://schemas.microsoft.com/office/drawing/2014/main" id="{3B6A85C8-C889-4877-8777-24AA5EE416C0}"/>
-              </a:ext>
-            </a:extLst>
-          </p:cNvPr>
-          <p:cNvSpPr>
-            <a:spLocks xmlns:a="http://schemas.openxmlformats.org/drawingml/2006/main" noGrp="1"/>
-          </p:cNvSpPr>
-          <p:nvPr/>
-        </p:nvSpPr>
-        <p:spPr>
-          <a:xfrm xmlns:a="http://schemas.openxmlformats.org/drawingml/2006/main">
-            <a:off x="1181100" y="2381250"/>
-            <a:ext cx="2095500" cy="285750"/>
+                <a16:creationId xmlns:a16="http://schemas.microsoft.com/office/drawing/2014/main" id="{769B69EC-65A1-4237-AF47-DF074A4C83F0}"/>
+              </a:ext>
+            </a:extLst>
+          </p:cNvPr>
+          <p:cNvSpPr>
+            <a:spLocks xmlns:a="http://schemas.openxmlformats.org/drawingml/2006/main" noGrp="1"/>
+          </p:cNvSpPr>
+          <p:nvPr/>
+        </p:nvSpPr>
+        <p:spPr>
+          <a:xfrm xmlns:a="http://schemas.openxmlformats.org/drawingml/2006/main">
+            <a:off x="1181100" y="2362200"/>
+            <a:ext cx="2095500" cy="266700"/>
           </a:xfrm>
           <a:prstGeom xmlns:a="http://schemas.openxmlformats.org/drawingml/2006/main" prst="rect">
             <a:avLst/>
@@ -8504,7 +8655,7 @@
           <a:lstStyle xmlns:a="http://schemas.openxmlformats.org/drawingml/2006/main"/>
           <a:p xmlns:a="http://schemas.openxmlformats.org/drawingml/2006/main">
             <a:pPr algn="l">
-              <a:defRPr sz="1500" b="1">
+              <a:defRPr sz="1425" b="1">
                 <a:solidFill>
                   <a:srgbClr val="F8F2E8"/>
                 </a:solidFill>
@@ -8514,7 +8665,7 @@
               </a:defRPr>
             </a:pPr>
             <a:r>
-              <a:rPr sz="1500" b="1">
+              <a:rPr sz="1425" b="1">
                 <a:solidFill>
                   <a:srgbClr val="F8F2E8"/>
                 </a:solidFill>
@@ -8532,19 +8683,19 @@
           <p:cNvPr id="38" name="">
             <a:extLst xmlns:a="http://schemas.openxmlformats.org/drawingml/2006/main">
               <a:ext uri="{FF2B5EF4-FFF2-40B4-BE49-F238E27FC236}">
-                <a16:creationId xmlns:a16="http://schemas.microsoft.com/office/drawing/2014/main" id="{C91E42E4-184A-4398-8F6B-4F3026E27D9E}"/>
-              </a:ext>
-            </a:extLst>
-          </p:cNvPr>
-          <p:cNvSpPr>
-            <a:spLocks xmlns:a="http://schemas.openxmlformats.org/drawingml/2006/main" noGrp="1"/>
-          </p:cNvSpPr>
-          <p:nvPr/>
-        </p:nvSpPr>
-        <p:spPr>
-          <a:xfrm xmlns:a="http://schemas.openxmlformats.org/drawingml/2006/main">
-            <a:off x="7162800" y="2381250"/>
-            <a:ext cx="1714500" cy="285750"/>
+                <a16:creationId xmlns:a16="http://schemas.microsoft.com/office/drawing/2014/main" id="{F67D2DD4-DE45-4C3E-8985-D9DBE97AB1C6}"/>
+              </a:ext>
+            </a:extLst>
+          </p:cNvPr>
+          <p:cNvSpPr>
+            <a:spLocks xmlns:a="http://schemas.openxmlformats.org/drawingml/2006/main" noGrp="1"/>
+          </p:cNvSpPr>
+          <p:nvPr/>
+        </p:nvSpPr>
+        <p:spPr>
+          <a:xfrm xmlns:a="http://schemas.openxmlformats.org/drawingml/2006/main">
+            <a:off x="7162800" y="2362200"/>
+            <a:ext cx="1714500" cy="266700"/>
           </a:xfrm>
           <a:prstGeom xmlns:a="http://schemas.openxmlformats.org/drawingml/2006/main" prst="rect">
             <a:avLst/>
@@ -8568,7 +8719,7 @@
           <a:lstStyle xmlns:a="http://schemas.openxmlformats.org/drawingml/2006/main"/>
           <a:p xmlns:a="http://schemas.openxmlformats.org/drawingml/2006/main">
             <a:pPr algn="l">
-              <a:defRPr sz="1500" b="1">
+              <a:defRPr sz="1425" b="1">
                 <a:solidFill>
                   <a:srgbClr val="F8F2E8"/>
                 </a:solidFill>
@@ -8578,7 +8729,7 @@
               </a:defRPr>
             </a:pPr>
             <a:r>
-              <a:rPr sz="1500" b="1">
+              <a:rPr sz="1425" b="1">
                 <a:solidFill>
                   <a:srgbClr val="F8F2E8"/>
                 </a:solidFill>
@@ -8596,18 +8747,53 @@
           <p:cNvPr id="39" name="">
             <a:extLst xmlns:a="http://schemas.openxmlformats.org/drawingml/2006/main">
               <a:ext uri="{FF2B5EF4-FFF2-40B4-BE49-F238E27FC236}">
-                <a16:creationId xmlns:a16="http://schemas.microsoft.com/office/drawing/2014/main" id="{CAA5E1A8-B78F-449F-B9E6-DB97C967DC44}"/>
-              </a:ext>
-            </a:extLst>
-          </p:cNvPr>
-          <p:cNvSpPr>
-            <a:spLocks xmlns:a="http://schemas.openxmlformats.org/drawingml/2006/main" noGrp="1"/>
-          </p:cNvSpPr>
-          <p:nvPr/>
-        </p:nvSpPr>
-        <p:spPr>
-          <a:xfrm xmlns:a="http://schemas.openxmlformats.org/drawingml/2006/main">
-            <a:off x="1428750" y="4438650"/>
+                <a16:creationId xmlns:a16="http://schemas.microsoft.com/office/drawing/2014/main" id="{06516CA9-2C84-42C5-BC7A-12353F820F5E}"/>
+              </a:ext>
+            </a:extLst>
+          </p:cNvPr>
+          <p:cNvSpPr>
+            <a:spLocks xmlns:a="http://schemas.openxmlformats.org/drawingml/2006/main" noGrp="1"/>
+          </p:cNvSpPr>
+          <p:nvPr/>
+        </p:nvSpPr>
+        <p:spPr>
+          <a:xfrm xmlns:a="http://schemas.openxmlformats.org/drawingml/2006/main">
+            <a:off x="1428750" y="3048000"/>
+            <a:ext cx="19050" cy="1314450"/>
+          </a:xfrm>
+          <a:prstGeom xmlns:a="http://schemas.openxmlformats.org/drawingml/2006/main" prst="rect">
+            <a:avLst/>
+          </a:prstGeom>
+          <a:solidFill xmlns:a="http://schemas.openxmlformats.org/drawingml/2006/main">
+            <a:srgbClr val="81919C"/>
+          </a:solidFill>
+          <a:ln xmlns:a="http://schemas.openxmlformats.org/drawingml/2006/main" w="0">
+            <a:solidFill>
+              <a:srgbClr val="000000">
+                <a:alpha val="0"/>
+              </a:srgbClr>
+            </a:solidFill>
+            <a:prstDash val="solid"/>
+          </a:ln>
+        </p:spPr>
+      </p:sp>
+      <p:sp>
+        <p:nvSpPr>
+          <p:cNvPr id="40" name="">
+            <a:extLst xmlns:a="http://schemas.openxmlformats.org/drawingml/2006/main">
+              <a:ext uri="{FF2B5EF4-FFF2-40B4-BE49-F238E27FC236}">
+                <a16:creationId xmlns:a16="http://schemas.microsoft.com/office/drawing/2014/main" id="{D10FF2E3-58C6-43EC-BD28-EC34C572023E}"/>
+              </a:ext>
+            </a:extLst>
+          </p:cNvPr>
+          <p:cNvSpPr>
+            <a:spLocks xmlns:a="http://schemas.openxmlformats.org/drawingml/2006/main" noGrp="1"/>
+          </p:cNvSpPr>
+          <p:nvPr/>
+        </p:nvSpPr>
+        <p:spPr>
+          <a:xfrm xmlns:a="http://schemas.openxmlformats.org/drawingml/2006/main">
+            <a:off x="1428750" y="4362450"/>
             <a:ext cx="3238500" cy="19050"/>
           </a:xfrm>
           <a:prstGeom xmlns:a="http://schemas.openxmlformats.org/drawingml/2006/main" prst="rect">
@@ -8628,21 +8814,184 @@
       </p:sp>
       <p:sp>
         <p:nvSpPr>
-          <p:cNvPr id="40" name="">
-            <a:extLst xmlns:a="http://schemas.openxmlformats.org/drawingml/2006/main">
-              <a:ext uri="{FF2B5EF4-FFF2-40B4-BE49-F238E27FC236}">
-                <a16:creationId xmlns:a16="http://schemas.microsoft.com/office/drawing/2014/main" id="{4F2F2112-0314-4A93-BB65-21F45CE0D1A7}"/>
-              </a:ext>
-            </a:extLst>
-          </p:cNvPr>
-          <p:cNvSpPr>
-            <a:spLocks xmlns:a="http://schemas.openxmlformats.org/drawingml/2006/main" noGrp="1"/>
-          </p:cNvSpPr>
-          <p:nvPr/>
-        </p:nvSpPr>
-        <p:spPr>
-          <a:xfrm xmlns:a="http://schemas.openxmlformats.org/drawingml/2006/main">
-            <a:off x="7429500" y="4438650"/>
+          <p:cNvPr id="41" name="">
+            <a:extLst xmlns:a="http://schemas.openxmlformats.org/drawingml/2006/main">
+              <a:ext uri="{FF2B5EF4-FFF2-40B4-BE49-F238E27FC236}">
+                <a16:creationId xmlns:a16="http://schemas.microsoft.com/office/drawing/2014/main" id="{C7202F5E-A35D-4FE4-AAEC-A6684E263C09}"/>
+              </a:ext>
+            </a:extLst>
+          </p:cNvPr>
+          <p:cNvSpPr>
+            <a:spLocks xmlns:a="http://schemas.openxmlformats.org/drawingml/2006/main" noGrp="1"/>
+          </p:cNvSpPr>
+          <p:nvPr/>
+        </p:nvSpPr>
+        <p:spPr>
+          <a:xfrm xmlns:a="http://schemas.openxmlformats.org/drawingml/2006/main">
+            <a:off x="1333500" y="2800350"/>
+            <a:ext cx="1428750" cy="171450"/>
+          </a:xfrm>
+          <a:prstGeom xmlns:a="http://schemas.openxmlformats.org/drawingml/2006/main" prst="rect">
+            <a:avLst/>
+          </a:prstGeom>
+          <a:solidFill xmlns:a="http://schemas.openxmlformats.org/drawingml/2006/main">
+            <a:srgbClr val="000000">
+              <a:alpha val="0"/>
+            </a:srgbClr>
+          </a:solidFill>
+          <a:ln xmlns:a="http://schemas.openxmlformats.org/drawingml/2006/main" w="0">
+            <a:solidFill>
+              <a:srgbClr val="000000">
+                <a:alpha val="0"/>
+              </a:srgbClr>
+            </a:solidFill>
+            <a:prstDash val="solid"/>
+          </a:ln>
+        </p:spPr>
+        <p:txBody>
+          <a:bodyPr xmlns:a="http://schemas.openxmlformats.org/drawingml/2006/main" lIns="0" tIns="0" rIns="0" bIns="0" anchor="t"/>
+          <a:lstStyle xmlns:a="http://schemas.openxmlformats.org/drawingml/2006/main"/>
+          <a:p xmlns:a="http://schemas.openxmlformats.org/drawingml/2006/main">
+            <a:pPr algn="l">
+              <a:defRPr sz="788" b="0">
+                <a:solidFill>
+                  <a:srgbClr val="A8B1BA"/>
+                </a:solidFill>
+                <a:latin typeface="Hiragino Sans"/>
+                <a:ea typeface="Hiragino Sans"/>
+                <a:cs typeface="Hiragino Sans"/>
+              </a:defRPr>
+            </a:pPr>
+            <a:r>
+              <a:rPr sz="788" b="0">
+                <a:solidFill>
+                  <a:srgbClr val="A8B1BA"/>
+                </a:solidFill>
+                <a:latin typeface="Hiragino Sans"/>
+                <a:ea typeface="Hiragino Sans"/>
+                <a:cs typeface="Hiragino Sans"/>
+              </a:rPr>
+              <a:t>縦軸: 起きやすさ</a:t>
+            </a:r>
+          </a:p>
+        </p:txBody>
+      </p:sp>
+      <p:sp>
+        <p:nvSpPr>
+          <p:cNvPr id="42" name="">
+            <a:extLst xmlns:a="http://schemas.openxmlformats.org/drawingml/2006/main">
+              <a:ext uri="{FF2B5EF4-FFF2-40B4-BE49-F238E27FC236}">
+                <a16:creationId xmlns:a16="http://schemas.microsoft.com/office/drawing/2014/main" id="{7675CF85-507E-48A3-BCEE-9B271AED1332}"/>
+              </a:ext>
+            </a:extLst>
+          </p:cNvPr>
+          <p:cNvSpPr>
+            <a:spLocks xmlns:a="http://schemas.openxmlformats.org/drawingml/2006/main" noGrp="1"/>
+          </p:cNvSpPr>
+          <p:nvPr/>
+        </p:nvSpPr>
+        <p:spPr>
+          <a:xfrm xmlns:a="http://schemas.openxmlformats.org/drawingml/2006/main">
+            <a:off x="2190750" y="4552950"/>
+            <a:ext cx="2571750" cy="171450"/>
+          </a:xfrm>
+          <a:prstGeom xmlns:a="http://schemas.openxmlformats.org/drawingml/2006/main" prst="rect">
+            <a:avLst/>
+          </a:prstGeom>
+          <a:solidFill xmlns:a="http://schemas.openxmlformats.org/drawingml/2006/main">
+            <a:srgbClr val="000000">
+              <a:alpha val="0"/>
+            </a:srgbClr>
+          </a:solidFill>
+          <a:ln xmlns:a="http://schemas.openxmlformats.org/drawingml/2006/main" w="0">
+            <a:solidFill>
+              <a:srgbClr val="000000">
+                <a:alpha val="0"/>
+              </a:srgbClr>
+            </a:solidFill>
+            <a:prstDash val="solid"/>
+          </a:ln>
+        </p:spPr>
+        <p:txBody>
+          <a:bodyPr xmlns:a="http://schemas.openxmlformats.org/drawingml/2006/main" lIns="0" tIns="0" rIns="0" bIns="0" anchor="t"/>
+          <a:lstStyle xmlns:a="http://schemas.openxmlformats.org/drawingml/2006/main"/>
+          <a:p xmlns:a="http://schemas.openxmlformats.org/drawingml/2006/main">
+            <a:pPr algn="l">
+              <a:defRPr sz="788" b="0">
+                <a:solidFill>
+                  <a:srgbClr val="A8B1BA"/>
+                </a:solidFill>
+                <a:latin typeface="Hiragino Sans"/>
+                <a:ea typeface="Hiragino Sans"/>
+                <a:cs typeface="Hiragino Sans"/>
+              </a:defRPr>
+            </a:pPr>
+            <a:r>
+              <a:rPr sz="788" b="0">
+                <a:solidFill>
+                  <a:srgbClr val="A8B1BA"/>
+                </a:solidFill>
+                <a:latin typeface="Hiragino Sans"/>
+                <a:ea typeface="Hiragino Sans"/>
+                <a:cs typeface="Hiragino Sans"/>
+              </a:rPr>
+              <a:t>横軸: 潜伏期間（短い → 長い）</a:t>
+            </a:r>
+          </a:p>
+        </p:txBody>
+      </p:sp>
+      <p:sp>
+        <p:nvSpPr>
+          <p:cNvPr id="43" name="">
+            <a:extLst xmlns:a="http://schemas.openxmlformats.org/drawingml/2006/main">
+              <a:ext uri="{FF2B5EF4-FFF2-40B4-BE49-F238E27FC236}">
+                <a16:creationId xmlns:a16="http://schemas.microsoft.com/office/drawing/2014/main" id="{183B3F0E-EA17-4A86-AE11-864603B53A32}"/>
+              </a:ext>
+            </a:extLst>
+          </p:cNvPr>
+          <p:cNvSpPr>
+            <a:spLocks xmlns:a="http://schemas.openxmlformats.org/drawingml/2006/main" noGrp="1"/>
+          </p:cNvSpPr>
+          <p:nvPr/>
+        </p:nvSpPr>
+        <p:spPr>
+          <a:xfrm xmlns:a="http://schemas.openxmlformats.org/drawingml/2006/main">
+            <a:off x="7429500" y="3048000"/>
+            <a:ext cx="19050" cy="1314450"/>
+          </a:xfrm>
+          <a:prstGeom xmlns:a="http://schemas.openxmlformats.org/drawingml/2006/main" prst="rect">
+            <a:avLst/>
+          </a:prstGeom>
+          <a:solidFill xmlns:a="http://schemas.openxmlformats.org/drawingml/2006/main">
+            <a:srgbClr val="81919C"/>
+          </a:solidFill>
+          <a:ln xmlns:a="http://schemas.openxmlformats.org/drawingml/2006/main" w="0">
+            <a:solidFill>
+              <a:srgbClr val="000000">
+                <a:alpha val="0"/>
+              </a:srgbClr>
+            </a:solidFill>
+            <a:prstDash val="solid"/>
+          </a:ln>
+        </p:spPr>
+      </p:sp>
+      <p:sp>
+        <p:nvSpPr>
+          <p:cNvPr id="44" name="">
+            <a:extLst xmlns:a="http://schemas.openxmlformats.org/drawingml/2006/main">
+              <a:ext uri="{FF2B5EF4-FFF2-40B4-BE49-F238E27FC236}">
+                <a16:creationId xmlns:a16="http://schemas.microsoft.com/office/drawing/2014/main" id="{010C2719-2E09-49E2-9222-A8FFEC406BF7}"/>
+              </a:ext>
+            </a:extLst>
+          </p:cNvPr>
+          <p:cNvSpPr>
+            <a:spLocks xmlns:a="http://schemas.openxmlformats.org/drawingml/2006/main" noGrp="1"/>
+          </p:cNvSpPr>
+          <p:nvPr/>
+        </p:nvSpPr>
+        <p:spPr>
+          <a:xfrm xmlns:a="http://schemas.openxmlformats.org/drawingml/2006/main">
+            <a:off x="7429500" y="4362450"/>
             <a:ext cx="3238500" cy="19050"/>
           </a:xfrm>
           <a:prstGeom xmlns:a="http://schemas.openxmlformats.org/drawingml/2006/main" prst="rect">
@@ -8663,22 +9012,150 @@
       </p:sp>
       <p:sp>
         <p:nvSpPr>
-          <p:cNvPr id="41" name="">
-            <a:extLst xmlns:a="http://schemas.openxmlformats.org/drawingml/2006/main">
-              <a:ext uri="{FF2B5EF4-FFF2-40B4-BE49-F238E27FC236}">
-                <a16:creationId xmlns:a16="http://schemas.microsoft.com/office/drawing/2014/main" id="{E065FACF-3B6E-4F6D-838C-E84C17583106}"/>
-              </a:ext>
-            </a:extLst>
-          </p:cNvPr>
-          <p:cNvSpPr>
-            <a:spLocks xmlns:a="http://schemas.openxmlformats.org/drawingml/2006/main" noGrp="1"/>
-          </p:cNvSpPr>
-          <p:nvPr/>
-        </p:nvSpPr>
-        <p:spPr>
-          <a:xfrm xmlns:a="http://schemas.openxmlformats.org/drawingml/2006/main">
-            <a:off x="1866900" y="3886200"/>
-            <a:ext cx="285750" cy="552450"/>
+          <p:cNvPr id="45" name="">
+            <a:extLst xmlns:a="http://schemas.openxmlformats.org/drawingml/2006/main">
+              <a:ext uri="{FF2B5EF4-FFF2-40B4-BE49-F238E27FC236}">
+                <a16:creationId xmlns:a16="http://schemas.microsoft.com/office/drawing/2014/main" id="{78877702-B376-4FDB-8C2D-9F44650816F4}"/>
+              </a:ext>
+            </a:extLst>
+          </p:cNvPr>
+          <p:cNvSpPr>
+            <a:spLocks xmlns:a="http://schemas.openxmlformats.org/drawingml/2006/main" noGrp="1"/>
+          </p:cNvSpPr>
+          <p:nvPr/>
+        </p:nvSpPr>
+        <p:spPr>
+          <a:xfrm xmlns:a="http://schemas.openxmlformats.org/drawingml/2006/main">
+            <a:off x="7334250" y="2800350"/>
+            <a:ext cx="1428750" cy="171450"/>
+          </a:xfrm>
+          <a:prstGeom xmlns:a="http://schemas.openxmlformats.org/drawingml/2006/main" prst="rect">
+            <a:avLst/>
+          </a:prstGeom>
+          <a:solidFill xmlns:a="http://schemas.openxmlformats.org/drawingml/2006/main">
+            <a:srgbClr val="000000">
+              <a:alpha val="0"/>
+            </a:srgbClr>
+          </a:solidFill>
+          <a:ln xmlns:a="http://schemas.openxmlformats.org/drawingml/2006/main" w="0">
+            <a:solidFill>
+              <a:srgbClr val="000000">
+                <a:alpha val="0"/>
+              </a:srgbClr>
+            </a:solidFill>
+            <a:prstDash val="solid"/>
+          </a:ln>
+        </p:spPr>
+        <p:txBody>
+          <a:bodyPr xmlns:a="http://schemas.openxmlformats.org/drawingml/2006/main" lIns="0" tIns="0" rIns="0" bIns="0" anchor="t"/>
+          <a:lstStyle xmlns:a="http://schemas.openxmlformats.org/drawingml/2006/main"/>
+          <a:p xmlns:a="http://schemas.openxmlformats.org/drawingml/2006/main">
+            <a:pPr algn="l">
+              <a:defRPr sz="788" b="0">
+                <a:solidFill>
+                  <a:srgbClr val="A8B1BA"/>
+                </a:solidFill>
+                <a:latin typeface="Hiragino Sans"/>
+                <a:ea typeface="Hiragino Sans"/>
+                <a:cs typeface="Hiragino Sans"/>
+              </a:defRPr>
+            </a:pPr>
+            <a:r>
+              <a:rPr sz="788" b="0">
+                <a:solidFill>
+                  <a:srgbClr val="A8B1BA"/>
+                </a:solidFill>
+                <a:latin typeface="Hiragino Sans"/>
+                <a:ea typeface="Hiragino Sans"/>
+                <a:cs typeface="Hiragino Sans"/>
+              </a:rPr>
+              <a:t>縦軸: 起きやすさ</a:t>
+            </a:r>
+          </a:p>
+        </p:txBody>
+      </p:sp>
+      <p:sp>
+        <p:nvSpPr>
+          <p:cNvPr id="46" name="">
+            <a:extLst xmlns:a="http://schemas.openxmlformats.org/drawingml/2006/main">
+              <a:ext uri="{FF2B5EF4-FFF2-40B4-BE49-F238E27FC236}">
+                <a16:creationId xmlns:a16="http://schemas.microsoft.com/office/drawing/2014/main" id="{59CE6836-B028-4F03-A1D3-A4DA3E848094}"/>
+              </a:ext>
+            </a:extLst>
+          </p:cNvPr>
+          <p:cNvSpPr>
+            <a:spLocks xmlns:a="http://schemas.openxmlformats.org/drawingml/2006/main" noGrp="1"/>
+          </p:cNvSpPr>
+          <p:nvPr/>
+        </p:nvSpPr>
+        <p:spPr>
+          <a:xfrm xmlns:a="http://schemas.openxmlformats.org/drawingml/2006/main">
+            <a:off x="8191500" y="4552950"/>
+            <a:ext cx="2571750" cy="171450"/>
+          </a:xfrm>
+          <a:prstGeom xmlns:a="http://schemas.openxmlformats.org/drawingml/2006/main" prst="rect">
+            <a:avLst/>
+          </a:prstGeom>
+          <a:solidFill xmlns:a="http://schemas.openxmlformats.org/drawingml/2006/main">
+            <a:srgbClr val="000000">
+              <a:alpha val="0"/>
+            </a:srgbClr>
+          </a:solidFill>
+          <a:ln xmlns:a="http://schemas.openxmlformats.org/drawingml/2006/main" w="0">
+            <a:solidFill>
+              <a:srgbClr val="000000">
+                <a:alpha val="0"/>
+              </a:srgbClr>
+            </a:solidFill>
+            <a:prstDash val="solid"/>
+          </a:ln>
+        </p:spPr>
+        <p:txBody>
+          <a:bodyPr xmlns:a="http://schemas.openxmlformats.org/drawingml/2006/main" lIns="0" tIns="0" rIns="0" bIns="0" anchor="t"/>
+          <a:lstStyle xmlns:a="http://schemas.openxmlformats.org/drawingml/2006/main"/>
+          <a:p xmlns:a="http://schemas.openxmlformats.org/drawingml/2006/main">
+            <a:pPr algn="l">
+              <a:defRPr sz="788" b="0">
+                <a:solidFill>
+                  <a:srgbClr val="A8B1BA"/>
+                </a:solidFill>
+                <a:latin typeface="Hiragino Sans"/>
+                <a:ea typeface="Hiragino Sans"/>
+                <a:cs typeface="Hiragino Sans"/>
+              </a:defRPr>
+            </a:pPr>
+            <a:r>
+              <a:rPr sz="788" b="0">
+                <a:solidFill>
+                  <a:srgbClr val="A8B1BA"/>
+                </a:solidFill>
+                <a:latin typeface="Hiragino Sans"/>
+                <a:ea typeface="Hiragino Sans"/>
+                <a:cs typeface="Hiragino Sans"/>
+              </a:rPr>
+              <a:t>横軸: 潜伏期間（短い → 長い）</a:t>
+            </a:r>
+          </a:p>
+        </p:txBody>
+      </p:sp>
+      <p:sp>
+        <p:nvSpPr>
+          <p:cNvPr id="47" name="">
+            <a:extLst xmlns:a="http://schemas.openxmlformats.org/drawingml/2006/main">
+              <a:ext uri="{FF2B5EF4-FFF2-40B4-BE49-F238E27FC236}">
+                <a16:creationId xmlns:a16="http://schemas.microsoft.com/office/drawing/2014/main" id="{EFAE12DA-CC76-49C4-AC08-9728C55E3C72}"/>
+              </a:ext>
+            </a:extLst>
+          </p:cNvPr>
+          <p:cNvSpPr>
+            <a:spLocks xmlns:a="http://schemas.openxmlformats.org/drawingml/2006/main" noGrp="1"/>
+          </p:cNvSpPr>
+          <p:nvPr/>
+        </p:nvSpPr>
+        <p:spPr>
+          <a:xfrm xmlns:a="http://schemas.openxmlformats.org/drawingml/2006/main">
+            <a:off x="1962150" y="3810000"/>
+            <a:ext cx="266700" cy="552450"/>
           </a:xfrm>
           <a:prstGeom xmlns:a="http://schemas.openxmlformats.org/drawingml/2006/main" prst="rect">
             <a:avLst/>
@@ -8698,22 +9175,22 @@
       </p:sp>
       <p:sp>
         <p:nvSpPr>
-          <p:cNvPr id="42" name="">
-            <a:extLst xmlns:a="http://schemas.openxmlformats.org/drawingml/2006/main">
-              <a:ext uri="{FF2B5EF4-FFF2-40B4-BE49-F238E27FC236}">
-                <a16:creationId xmlns:a16="http://schemas.microsoft.com/office/drawing/2014/main" id="{18576A6A-A6AE-498C-8333-1464726C9DA7}"/>
-              </a:ext>
-            </a:extLst>
-          </p:cNvPr>
-          <p:cNvSpPr>
-            <a:spLocks xmlns:a="http://schemas.openxmlformats.org/drawingml/2006/main" noGrp="1"/>
-          </p:cNvSpPr>
-          <p:nvPr/>
-        </p:nvSpPr>
-        <p:spPr>
-          <a:xfrm xmlns:a="http://schemas.openxmlformats.org/drawingml/2006/main">
-            <a:off x="2362200" y="3562350"/>
-            <a:ext cx="285750" cy="876300"/>
+          <p:cNvPr id="48" name="">
+            <a:extLst xmlns:a="http://schemas.openxmlformats.org/drawingml/2006/main">
+              <a:ext uri="{FF2B5EF4-FFF2-40B4-BE49-F238E27FC236}">
+                <a16:creationId xmlns:a16="http://schemas.microsoft.com/office/drawing/2014/main" id="{CB23214D-701E-47EC-B7F3-9BD58556F613}"/>
+              </a:ext>
+            </a:extLst>
+          </p:cNvPr>
+          <p:cNvSpPr>
+            <a:spLocks xmlns:a="http://schemas.openxmlformats.org/drawingml/2006/main" noGrp="1"/>
+          </p:cNvSpPr>
+          <p:nvPr/>
+        </p:nvSpPr>
+        <p:spPr>
+          <a:xfrm xmlns:a="http://schemas.openxmlformats.org/drawingml/2006/main">
+            <a:off x="2419350" y="3486150"/>
+            <a:ext cx="266700" cy="876300"/>
           </a:xfrm>
           <a:prstGeom xmlns:a="http://schemas.openxmlformats.org/drawingml/2006/main" prst="rect">
             <a:avLst/>
@@ -8733,22 +9210,22 @@
       </p:sp>
       <p:sp>
         <p:nvSpPr>
-          <p:cNvPr id="43" name="">
-            <a:extLst xmlns:a="http://schemas.openxmlformats.org/drawingml/2006/main">
-              <a:ext uri="{FF2B5EF4-FFF2-40B4-BE49-F238E27FC236}">
-                <a16:creationId xmlns:a16="http://schemas.microsoft.com/office/drawing/2014/main" id="{CBCED658-2B11-43A6-BA4F-3A45B2EF6722}"/>
-              </a:ext>
-            </a:extLst>
-          </p:cNvPr>
-          <p:cNvSpPr>
-            <a:spLocks xmlns:a="http://schemas.openxmlformats.org/drawingml/2006/main" noGrp="1"/>
-          </p:cNvSpPr>
-          <p:nvPr/>
-        </p:nvSpPr>
-        <p:spPr>
-          <a:xfrm xmlns:a="http://schemas.openxmlformats.org/drawingml/2006/main">
-            <a:off x="2857500" y="3276600"/>
-            <a:ext cx="285750" cy="1162050"/>
+          <p:cNvPr id="49" name="">
+            <a:extLst xmlns:a="http://schemas.openxmlformats.org/drawingml/2006/main">
+              <a:ext uri="{FF2B5EF4-FFF2-40B4-BE49-F238E27FC236}">
+                <a16:creationId xmlns:a16="http://schemas.microsoft.com/office/drawing/2014/main" id="{DFF653CB-324A-4CBA-B9EC-95867205EEF6}"/>
+              </a:ext>
+            </a:extLst>
+          </p:cNvPr>
+          <p:cNvSpPr>
+            <a:spLocks xmlns:a="http://schemas.openxmlformats.org/drawingml/2006/main" noGrp="1"/>
+          </p:cNvSpPr>
+          <p:nvPr/>
+        </p:nvSpPr>
+        <p:spPr>
+          <a:xfrm xmlns:a="http://schemas.openxmlformats.org/drawingml/2006/main">
+            <a:off x="2876550" y="3200400"/>
+            <a:ext cx="266700" cy="1162050"/>
           </a:xfrm>
           <a:prstGeom xmlns:a="http://schemas.openxmlformats.org/drawingml/2006/main" prst="rect">
             <a:avLst/>
@@ -8768,22 +9245,22 @@
       </p:sp>
       <p:sp>
         <p:nvSpPr>
-          <p:cNvPr id="44" name="">
-            <a:extLst xmlns:a="http://schemas.openxmlformats.org/drawingml/2006/main">
-              <a:ext uri="{FF2B5EF4-FFF2-40B4-BE49-F238E27FC236}">
-                <a16:creationId xmlns:a16="http://schemas.microsoft.com/office/drawing/2014/main" id="{E62A815F-F0B1-4D98-A807-96251AF6EA8A}"/>
-              </a:ext>
-            </a:extLst>
-          </p:cNvPr>
-          <p:cNvSpPr>
-            <a:spLocks xmlns:a="http://schemas.openxmlformats.org/drawingml/2006/main" noGrp="1"/>
-          </p:cNvSpPr>
-          <p:nvPr/>
-        </p:nvSpPr>
-        <p:spPr>
-          <a:xfrm xmlns:a="http://schemas.openxmlformats.org/drawingml/2006/main">
-            <a:off x="3352800" y="3448050"/>
-            <a:ext cx="285750" cy="990600"/>
+          <p:cNvPr id="50" name="">
+            <a:extLst xmlns:a="http://schemas.openxmlformats.org/drawingml/2006/main">
+              <a:ext uri="{FF2B5EF4-FFF2-40B4-BE49-F238E27FC236}">
+                <a16:creationId xmlns:a16="http://schemas.microsoft.com/office/drawing/2014/main" id="{A2156890-2091-42A3-ABCB-6AE5DB0993F4}"/>
+              </a:ext>
+            </a:extLst>
+          </p:cNvPr>
+          <p:cNvSpPr>
+            <a:spLocks xmlns:a="http://schemas.openxmlformats.org/drawingml/2006/main" noGrp="1"/>
+          </p:cNvSpPr>
+          <p:nvPr/>
+        </p:nvSpPr>
+        <p:spPr>
+          <a:xfrm xmlns:a="http://schemas.openxmlformats.org/drawingml/2006/main">
+            <a:off x="3333750" y="3371850"/>
+            <a:ext cx="266700" cy="990600"/>
           </a:xfrm>
           <a:prstGeom xmlns:a="http://schemas.openxmlformats.org/drawingml/2006/main" prst="rect">
             <a:avLst/>
@@ -8803,22 +9280,22 @@
       </p:sp>
       <p:sp>
         <p:nvSpPr>
-          <p:cNvPr id="45" name="">
-            <a:extLst xmlns:a="http://schemas.openxmlformats.org/drawingml/2006/main">
-              <a:ext uri="{FF2B5EF4-FFF2-40B4-BE49-F238E27FC236}">
-                <a16:creationId xmlns:a16="http://schemas.microsoft.com/office/drawing/2014/main" id="{F948C70B-387E-49F9-9683-24924773566B}"/>
-              </a:ext>
-            </a:extLst>
-          </p:cNvPr>
-          <p:cNvSpPr>
-            <a:spLocks xmlns:a="http://schemas.openxmlformats.org/drawingml/2006/main" noGrp="1"/>
-          </p:cNvSpPr>
-          <p:nvPr/>
-        </p:nvSpPr>
-        <p:spPr>
-          <a:xfrm xmlns:a="http://schemas.openxmlformats.org/drawingml/2006/main">
-            <a:off x="3848100" y="3810000"/>
-            <a:ext cx="285750" cy="628650"/>
+          <p:cNvPr id="51" name="">
+            <a:extLst xmlns:a="http://schemas.openxmlformats.org/drawingml/2006/main">
+              <a:ext uri="{FF2B5EF4-FFF2-40B4-BE49-F238E27FC236}">
+                <a16:creationId xmlns:a16="http://schemas.microsoft.com/office/drawing/2014/main" id="{CA9C1DC0-CA3C-43EF-9D23-5E06DA0DAFBD}"/>
+              </a:ext>
+            </a:extLst>
+          </p:cNvPr>
+          <p:cNvSpPr>
+            <a:spLocks xmlns:a="http://schemas.openxmlformats.org/drawingml/2006/main" noGrp="1"/>
+          </p:cNvSpPr>
+          <p:nvPr/>
+        </p:nvSpPr>
+        <p:spPr>
+          <a:xfrm xmlns:a="http://schemas.openxmlformats.org/drawingml/2006/main">
+            <a:off x="3790950" y="3733800"/>
+            <a:ext cx="266700" cy="628650"/>
           </a:xfrm>
           <a:prstGeom xmlns:a="http://schemas.openxmlformats.org/drawingml/2006/main" prst="rect">
             <a:avLst/>
@@ -8838,22 +9315,22 @@
       </p:sp>
       <p:sp>
         <p:nvSpPr>
-          <p:cNvPr id="46" name="">
-            <a:extLst xmlns:a="http://schemas.openxmlformats.org/drawingml/2006/main">
-              <a:ext uri="{FF2B5EF4-FFF2-40B4-BE49-F238E27FC236}">
-                <a16:creationId xmlns:a16="http://schemas.microsoft.com/office/drawing/2014/main" id="{41BD5A2A-99ED-42DD-98CF-E2CE13216EBD}"/>
-              </a:ext>
-            </a:extLst>
-          </p:cNvPr>
-          <p:cNvSpPr>
-            <a:spLocks xmlns:a="http://schemas.openxmlformats.org/drawingml/2006/main" noGrp="1"/>
-          </p:cNvSpPr>
-          <p:nvPr/>
-        </p:nvSpPr>
-        <p:spPr>
-          <a:xfrm xmlns:a="http://schemas.openxmlformats.org/drawingml/2006/main">
-            <a:off x="7772400" y="3924300"/>
-            <a:ext cx="228600" cy="514350"/>
+          <p:cNvPr id="52" name="">
+            <a:extLst xmlns:a="http://schemas.openxmlformats.org/drawingml/2006/main">
+              <a:ext uri="{FF2B5EF4-FFF2-40B4-BE49-F238E27FC236}">
+                <a16:creationId xmlns:a16="http://schemas.microsoft.com/office/drawing/2014/main" id="{A7B076EA-9F44-47EE-9824-0A7AF728E430}"/>
+              </a:ext>
+            </a:extLst>
+          </p:cNvPr>
+          <p:cNvSpPr>
+            <a:spLocks xmlns:a="http://schemas.openxmlformats.org/drawingml/2006/main" noGrp="1"/>
+          </p:cNvSpPr>
+          <p:nvPr/>
+        </p:nvSpPr>
+        <p:spPr>
+          <a:xfrm xmlns:a="http://schemas.openxmlformats.org/drawingml/2006/main">
+            <a:off x="7905750" y="3848100"/>
+            <a:ext cx="209550" cy="514350"/>
           </a:xfrm>
           <a:prstGeom xmlns:a="http://schemas.openxmlformats.org/drawingml/2006/main" prst="rect">
             <a:avLst/>
@@ -8873,22 +9350,22 @@
       </p:sp>
       <p:sp>
         <p:nvSpPr>
-          <p:cNvPr id="47" name="">
-            <a:extLst xmlns:a="http://schemas.openxmlformats.org/drawingml/2006/main">
-              <a:ext uri="{FF2B5EF4-FFF2-40B4-BE49-F238E27FC236}">
-                <a16:creationId xmlns:a16="http://schemas.microsoft.com/office/drawing/2014/main" id="{ED390A7F-5289-4266-9061-41309AB5C2B5}"/>
-              </a:ext>
-            </a:extLst>
-          </p:cNvPr>
-          <p:cNvSpPr>
-            <a:spLocks xmlns:a="http://schemas.openxmlformats.org/drawingml/2006/main" noGrp="1"/>
-          </p:cNvSpPr>
-          <p:nvPr/>
-        </p:nvSpPr>
-        <p:spPr>
-          <a:xfrm xmlns:a="http://schemas.openxmlformats.org/drawingml/2006/main">
-            <a:off x="8096250" y="3600450"/>
-            <a:ext cx="228600" cy="838200"/>
+          <p:cNvPr id="53" name="">
+            <a:extLst xmlns:a="http://schemas.openxmlformats.org/drawingml/2006/main">
+              <a:ext uri="{FF2B5EF4-FFF2-40B4-BE49-F238E27FC236}">
+                <a16:creationId xmlns:a16="http://schemas.microsoft.com/office/drawing/2014/main" id="{125F71BD-EBCC-4CE4-8EDB-C1C2D12B157A}"/>
+              </a:ext>
+            </a:extLst>
+          </p:cNvPr>
+          <p:cNvSpPr>
+            <a:spLocks xmlns:a="http://schemas.openxmlformats.org/drawingml/2006/main" noGrp="1"/>
+          </p:cNvSpPr>
+          <p:nvPr/>
+        </p:nvSpPr>
+        <p:spPr>
+          <a:xfrm xmlns:a="http://schemas.openxmlformats.org/drawingml/2006/main">
+            <a:off x="8210550" y="3524250"/>
+            <a:ext cx="209550" cy="838200"/>
           </a:xfrm>
           <a:prstGeom xmlns:a="http://schemas.openxmlformats.org/drawingml/2006/main" prst="rect">
             <a:avLst/>
@@ -8908,22 +9385,22 @@
       </p:sp>
       <p:sp>
         <p:nvSpPr>
-          <p:cNvPr id="48" name="">
-            <a:extLst xmlns:a="http://schemas.openxmlformats.org/drawingml/2006/main">
-              <a:ext uri="{FF2B5EF4-FFF2-40B4-BE49-F238E27FC236}">
-                <a16:creationId xmlns:a16="http://schemas.microsoft.com/office/drawing/2014/main" id="{1C41B24C-54C8-4BFA-99F9-58F116578335}"/>
-              </a:ext>
-            </a:extLst>
-          </p:cNvPr>
-          <p:cNvSpPr>
-            <a:spLocks xmlns:a="http://schemas.openxmlformats.org/drawingml/2006/main" noGrp="1"/>
-          </p:cNvSpPr>
-          <p:nvPr/>
-        </p:nvSpPr>
-        <p:spPr>
-          <a:xfrm xmlns:a="http://schemas.openxmlformats.org/drawingml/2006/main">
-            <a:off x="8420100" y="3333750"/>
-            <a:ext cx="228600" cy="1104900"/>
+          <p:cNvPr id="54" name="">
+            <a:extLst xmlns:a="http://schemas.openxmlformats.org/drawingml/2006/main">
+              <a:ext uri="{FF2B5EF4-FFF2-40B4-BE49-F238E27FC236}">
+                <a16:creationId xmlns:a16="http://schemas.microsoft.com/office/drawing/2014/main" id="{7188A65B-406E-4DD3-ADF9-B88E8930884C}"/>
+              </a:ext>
+            </a:extLst>
+          </p:cNvPr>
+          <p:cNvSpPr>
+            <a:spLocks xmlns:a="http://schemas.openxmlformats.org/drawingml/2006/main" noGrp="1"/>
+          </p:cNvSpPr>
+          <p:nvPr/>
+        </p:nvSpPr>
+        <p:spPr>
+          <a:xfrm xmlns:a="http://schemas.openxmlformats.org/drawingml/2006/main">
+            <a:off x="8515350" y="3257550"/>
+            <a:ext cx="209550" cy="1104900"/>
           </a:xfrm>
           <a:prstGeom xmlns:a="http://schemas.openxmlformats.org/drawingml/2006/main" prst="rect">
             <a:avLst/>
@@ -8943,22 +9420,22 @@
       </p:sp>
       <p:sp>
         <p:nvSpPr>
-          <p:cNvPr id="49" name="">
-            <a:extLst xmlns:a="http://schemas.openxmlformats.org/drawingml/2006/main">
-              <a:ext uri="{FF2B5EF4-FFF2-40B4-BE49-F238E27FC236}">
-                <a16:creationId xmlns:a16="http://schemas.microsoft.com/office/drawing/2014/main" id="{98834324-0C66-4FBE-B545-5348FC77079E}"/>
-              </a:ext>
-            </a:extLst>
-          </p:cNvPr>
-          <p:cNvSpPr>
-            <a:spLocks xmlns:a="http://schemas.openxmlformats.org/drawingml/2006/main" noGrp="1"/>
-          </p:cNvSpPr>
-          <p:nvPr/>
-        </p:nvSpPr>
-        <p:spPr>
-          <a:xfrm xmlns:a="http://schemas.openxmlformats.org/drawingml/2006/main">
-            <a:off x="8743950" y="2952750"/>
-            <a:ext cx="228600" cy="1485900"/>
+          <p:cNvPr id="55" name="">
+            <a:extLst xmlns:a="http://schemas.openxmlformats.org/drawingml/2006/main">
+              <a:ext uri="{FF2B5EF4-FFF2-40B4-BE49-F238E27FC236}">
+                <a16:creationId xmlns:a16="http://schemas.microsoft.com/office/drawing/2014/main" id="{3E7D1834-40E5-40A0-A529-479F2D8B2A8E}"/>
+              </a:ext>
+            </a:extLst>
+          </p:cNvPr>
+          <p:cNvSpPr>
+            <a:spLocks xmlns:a="http://schemas.openxmlformats.org/drawingml/2006/main" noGrp="1"/>
+          </p:cNvSpPr>
+          <p:nvPr/>
+        </p:nvSpPr>
+        <p:spPr>
+          <a:xfrm xmlns:a="http://schemas.openxmlformats.org/drawingml/2006/main">
+            <a:off x="8820150" y="2876550"/>
+            <a:ext cx="209550" cy="1485900"/>
           </a:xfrm>
           <a:prstGeom xmlns:a="http://schemas.openxmlformats.org/drawingml/2006/main" prst="rect">
             <a:avLst/>
@@ -8978,22 +9455,22 @@
       </p:sp>
       <p:sp>
         <p:nvSpPr>
-          <p:cNvPr id="50" name="">
-            <a:extLst xmlns:a="http://schemas.openxmlformats.org/drawingml/2006/main">
-              <a:ext uri="{FF2B5EF4-FFF2-40B4-BE49-F238E27FC236}">
-                <a16:creationId xmlns:a16="http://schemas.microsoft.com/office/drawing/2014/main" id="{806B9B11-E65C-4D80-85C0-854BBBB7BC2F}"/>
-              </a:ext>
-            </a:extLst>
-          </p:cNvPr>
-          <p:cNvSpPr>
-            <a:spLocks xmlns:a="http://schemas.openxmlformats.org/drawingml/2006/main" noGrp="1"/>
-          </p:cNvSpPr>
-          <p:nvPr/>
-        </p:nvSpPr>
-        <p:spPr>
-          <a:xfrm xmlns:a="http://schemas.openxmlformats.org/drawingml/2006/main">
-            <a:off x="9067800" y="2476500"/>
-            <a:ext cx="228600" cy="1962150"/>
+          <p:cNvPr id="56" name="">
+            <a:extLst xmlns:a="http://schemas.openxmlformats.org/drawingml/2006/main">
+              <a:ext uri="{FF2B5EF4-FFF2-40B4-BE49-F238E27FC236}">
+                <a16:creationId xmlns:a16="http://schemas.microsoft.com/office/drawing/2014/main" id="{A136F87F-EB5D-49F4-B2F7-8FEE7136CEEA}"/>
+              </a:ext>
+            </a:extLst>
+          </p:cNvPr>
+          <p:cNvSpPr>
+            <a:spLocks xmlns:a="http://schemas.openxmlformats.org/drawingml/2006/main" noGrp="1"/>
+          </p:cNvSpPr>
+          <p:nvPr/>
+        </p:nvSpPr>
+        <p:spPr>
+          <a:xfrm xmlns:a="http://schemas.openxmlformats.org/drawingml/2006/main">
+            <a:off x="9124950" y="2476500"/>
+            <a:ext cx="209550" cy="1885950"/>
           </a:xfrm>
           <a:prstGeom xmlns:a="http://schemas.openxmlformats.org/drawingml/2006/main" prst="rect">
             <a:avLst/>
@@ -9013,22 +9490,22 @@
       </p:sp>
       <p:sp>
         <p:nvSpPr>
-          <p:cNvPr id="51" name="">
-            <a:extLst xmlns:a="http://schemas.openxmlformats.org/drawingml/2006/main">
-              <a:ext uri="{FF2B5EF4-FFF2-40B4-BE49-F238E27FC236}">
-                <a16:creationId xmlns:a16="http://schemas.microsoft.com/office/drawing/2014/main" id="{2CE20883-3826-48DD-A383-10CC9353D2B2}"/>
-              </a:ext>
-            </a:extLst>
-          </p:cNvPr>
-          <p:cNvSpPr>
-            <a:spLocks xmlns:a="http://schemas.openxmlformats.org/drawingml/2006/main" noGrp="1"/>
-          </p:cNvSpPr>
-          <p:nvPr/>
-        </p:nvSpPr>
-        <p:spPr>
-          <a:xfrm xmlns:a="http://schemas.openxmlformats.org/drawingml/2006/main">
-            <a:off x="9391650" y="2990850"/>
-            <a:ext cx="228600" cy="1447800"/>
+          <p:cNvPr id="57" name="">
+            <a:extLst xmlns:a="http://schemas.openxmlformats.org/drawingml/2006/main">
+              <a:ext uri="{FF2B5EF4-FFF2-40B4-BE49-F238E27FC236}">
+                <a16:creationId xmlns:a16="http://schemas.microsoft.com/office/drawing/2014/main" id="{C0722B40-DDA8-4401-9B70-2F0FEBD34B25}"/>
+              </a:ext>
+            </a:extLst>
+          </p:cNvPr>
+          <p:cNvSpPr>
+            <a:spLocks xmlns:a="http://schemas.openxmlformats.org/drawingml/2006/main" noGrp="1"/>
+          </p:cNvSpPr>
+          <p:nvPr/>
+        </p:nvSpPr>
+        <p:spPr>
+          <a:xfrm xmlns:a="http://schemas.openxmlformats.org/drawingml/2006/main">
+            <a:off x="9429750" y="2971800"/>
+            <a:ext cx="209550" cy="1390650"/>
           </a:xfrm>
           <a:prstGeom xmlns:a="http://schemas.openxmlformats.org/drawingml/2006/main" prst="rect">
             <a:avLst/>
@@ -9048,22 +9525,22 @@
       </p:sp>
       <p:sp>
         <p:nvSpPr>
-          <p:cNvPr id="52" name="">
-            <a:extLst xmlns:a="http://schemas.openxmlformats.org/drawingml/2006/main">
-              <a:ext uri="{FF2B5EF4-FFF2-40B4-BE49-F238E27FC236}">
-                <a16:creationId xmlns:a16="http://schemas.microsoft.com/office/drawing/2014/main" id="{6AEC21AA-9244-4C0E-BEEB-EA2F495A8F65}"/>
-              </a:ext>
-            </a:extLst>
-          </p:cNvPr>
-          <p:cNvSpPr>
-            <a:spLocks xmlns:a="http://schemas.openxmlformats.org/drawingml/2006/main" noGrp="1"/>
-          </p:cNvSpPr>
-          <p:nvPr/>
-        </p:nvSpPr>
-        <p:spPr>
-          <a:xfrm xmlns:a="http://schemas.openxmlformats.org/drawingml/2006/main">
-            <a:off x="9715500" y="3371850"/>
-            <a:ext cx="228600" cy="1066800"/>
+          <p:cNvPr id="58" name="">
+            <a:extLst xmlns:a="http://schemas.openxmlformats.org/drawingml/2006/main">
+              <a:ext uri="{FF2B5EF4-FFF2-40B4-BE49-F238E27FC236}">
+                <a16:creationId xmlns:a16="http://schemas.microsoft.com/office/drawing/2014/main" id="{65CB09EB-ADDC-4655-9A84-5637D0DF553A}"/>
+              </a:ext>
+            </a:extLst>
+          </p:cNvPr>
+          <p:cNvSpPr>
+            <a:spLocks xmlns:a="http://schemas.openxmlformats.org/drawingml/2006/main" noGrp="1"/>
+          </p:cNvSpPr>
+          <p:nvPr/>
+        </p:nvSpPr>
+        <p:spPr>
+          <a:xfrm xmlns:a="http://schemas.openxmlformats.org/drawingml/2006/main">
+            <a:off x="9734550" y="3371850"/>
+            <a:ext cx="209550" cy="990600"/>
           </a:xfrm>
           <a:prstGeom xmlns:a="http://schemas.openxmlformats.org/drawingml/2006/main" prst="rect">
             <a:avLst/>
@@ -9083,10 +9560,10 @@
       </p:sp>
       <p:sp>
         <p:nvSpPr>
-          <p:cNvPr id="53" name="">
-            <a:extLst xmlns:a="http://schemas.openxmlformats.org/drawingml/2006/main">
-              <a:ext uri="{FF2B5EF4-FFF2-40B4-BE49-F238E27FC236}">
-                <a16:creationId xmlns:a16="http://schemas.microsoft.com/office/drawing/2014/main" id="{69289686-8D98-4A4D-8A70-27D6D314FE6B}"/>
+          <p:cNvPr id="59" name="">
+            <a:extLst xmlns:a="http://schemas.openxmlformats.org/drawingml/2006/main">
+              <a:ext uri="{FF2B5EF4-FFF2-40B4-BE49-F238E27FC236}">
+                <a16:creationId xmlns:a16="http://schemas.microsoft.com/office/drawing/2014/main" id="{4A967B50-7743-4823-BD38-056C93278570}"/>
               </a:ext>
             </a:extLst>
           </p:cNvPr>
@@ -9098,7 +9575,7 @@
         <p:spPr>
           <a:xfrm xmlns:a="http://schemas.openxmlformats.org/drawingml/2006/main">
             <a:off x="10039350" y="3619500"/>
-            <a:ext cx="228600" cy="819150"/>
+            <a:ext cx="209550" cy="742950"/>
           </a:xfrm>
           <a:prstGeom xmlns:a="http://schemas.openxmlformats.org/drawingml/2006/main" prst="rect">
             <a:avLst/>
@@ -9118,22 +9595,22 @@
       </p:sp>
       <p:sp>
         <p:nvSpPr>
-          <p:cNvPr id="54" name="">
-            <a:extLst xmlns:a="http://schemas.openxmlformats.org/drawingml/2006/main">
-              <a:ext uri="{FF2B5EF4-FFF2-40B4-BE49-F238E27FC236}">
-                <a16:creationId xmlns:a16="http://schemas.microsoft.com/office/drawing/2014/main" id="{90E23EBB-EE86-4406-8312-DBDD43779F7C}"/>
-              </a:ext>
-            </a:extLst>
-          </p:cNvPr>
-          <p:cNvSpPr>
-            <a:spLocks xmlns:a="http://schemas.openxmlformats.org/drawingml/2006/main" noGrp="1"/>
-          </p:cNvSpPr>
-          <p:nvPr/>
-        </p:nvSpPr>
-        <p:spPr>
-          <a:xfrm xmlns:a="http://schemas.openxmlformats.org/drawingml/2006/main">
-            <a:off x="10363200" y="3829050"/>
-            <a:ext cx="228600" cy="609600"/>
+          <p:cNvPr id="60" name="">
+            <a:extLst xmlns:a="http://schemas.openxmlformats.org/drawingml/2006/main">
+              <a:ext uri="{FF2B5EF4-FFF2-40B4-BE49-F238E27FC236}">
+                <a16:creationId xmlns:a16="http://schemas.microsoft.com/office/drawing/2014/main" id="{87754762-AE1C-4A51-AB0D-D1B40BF64CE4}"/>
+              </a:ext>
+            </a:extLst>
+          </p:cNvPr>
+          <p:cNvSpPr>
+            <a:spLocks xmlns:a="http://schemas.openxmlformats.org/drawingml/2006/main" noGrp="1"/>
+          </p:cNvSpPr>
+          <p:nvPr/>
+        </p:nvSpPr>
+        <p:spPr>
+          <a:xfrm xmlns:a="http://schemas.openxmlformats.org/drawingml/2006/main">
+            <a:off x="10344150" y="3810000"/>
+            <a:ext cx="209550" cy="552450"/>
           </a:xfrm>
           <a:prstGeom xmlns:a="http://schemas.openxmlformats.org/drawingml/2006/main" prst="rect">
             <a:avLst/>
@@ -9153,22 +9630,22 @@
       </p:sp>
       <p:sp>
         <p:nvSpPr>
-          <p:cNvPr id="55" name="">
-            <a:extLst xmlns:a="http://schemas.openxmlformats.org/drawingml/2006/main">
-              <a:ext uri="{FF2B5EF4-FFF2-40B4-BE49-F238E27FC236}">
-                <a16:creationId xmlns:a16="http://schemas.microsoft.com/office/drawing/2014/main" id="{2326485F-E31D-4EAE-B88B-6F02956B26C9}"/>
-              </a:ext>
-            </a:extLst>
-          </p:cNvPr>
-          <p:cNvSpPr>
-            <a:spLocks xmlns:a="http://schemas.openxmlformats.org/drawingml/2006/main" noGrp="1"/>
-          </p:cNvSpPr>
-          <p:nvPr/>
-        </p:nvSpPr>
-        <p:spPr>
-          <a:xfrm xmlns:a="http://schemas.openxmlformats.org/drawingml/2006/main">
-            <a:off x="10172700" y="2857500"/>
-            <a:ext cx="685800" cy="1581150"/>
+          <p:cNvPr id="61" name="">
+            <a:extLst xmlns:a="http://schemas.openxmlformats.org/drawingml/2006/main">
+              <a:ext uri="{FF2B5EF4-FFF2-40B4-BE49-F238E27FC236}">
+                <a16:creationId xmlns:a16="http://schemas.microsoft.com/office/drawing/2014/main" id="{3E50FFD4-46BF-4D6D-BC58-D51207EA8F7E}"/>
+              </a:ext>
+            </a:extLst>
+          </p:cNvPr>
+          <p:cNvSpPr>
+            <a:spLocks xmlns:a="http://schemas.openxmlformats.org/drawingml/2006/main" noGrp="1"/>
+          </p:cNvSpPr>
+          <p:nvPr/>
+        </p:nvSpPr>
+        <p:spPr>
+          <a:xfrm xmlns:a="http://schemas.openxmlformats.org/drawingml/2006/main">
+            <a:off x="10153650" y="2952750"/>
+            <a:ext cx="590550" cy="1409700"/>
           </a:xfrm>
           <a:prstGeom xmlns:a="http://schemas.openxmlformats.org/drawingml/2006/main" prst="rect">
             <a:avLst/>
@@ -9186,22 +9663,22 @@
       </p:sp>
       <p:sp>
         <p:nvSpPr>
-          <p:cNvPr id="56" name="">
-            <a:extLst xmlns:a="http://schemas.openxmlformats.org/drawingml/2006/main">
-              <a:ext uri="{FF2B5EF4-FFF2-40B4-BE49-F238E27FC236}">
-                <a16:creationId xmlns:a16="http://schemas.microsoft.com/office/drawing/2014/main" id="{F3F13F01-43C1-426B-BAA7-F4BEC12D495A}"/>
-              </a:ext>
-            </a:extLst>
-          </p:cNvPr>
-          <p:cNvSpPr>
-            <a:spLocks xmlns:a="http://schemas.openxmlformats.org/drawingml/2006/main" noGrp="1"/>
-          </p:cNvSpPr>
-          <p:nvPr/>
-        </p:nvSpPr>
-        <p:spPr>
-          <a:xfrm xmlns:a="http://schemas.openxmlformats.org/drawingml/2006/main">
-            <a:off x="4057650" y="2857500"/>
-            <a:ext cx="47625" cy="1924050"/>
+          <p:cNvPr id="62" name="">
+            <a:extLst xmlns:a="http://schemas.openxmlformats.org/drawingml/2006/main">
+              <a:ext uri="{FF2B5EF4-FFF2-40B4-BE49-F238E27FC236}">
+                <a16:creationId xmlns:a16="http://schemas.microsoft.com/office/drawing/2014/main" id="{908D542D-C7D6-4613-AFC4-4CA2F020B6BC}"/>
+              </a:ext>
+            </a:extLst>
+          </p:cNvPr>
+          <p:cNvSpPr>
+            <a:spLocks xmlns:a="http://schemas.openxmlformats.org/drawingml/2006/main" noGrp="1"/>
+          </p:cNvSpPr>
+          <p:nvPr/>
+        </p:nvSpPr>
+        <p:spPr>
+          <a:xfrm xmlns:a="http://schemas.openxmlformats.org/drawingml/2006/main">
+            <a:off x="4057650" y="2838450"/>
+            <a:ext cx="47625" cy="1638300"/>
           </a:xfrm>
           <a:prstGeom xmlns:a="http://schemas.openxmlformats.org/drawingml/2006/main" prst="rect">
             <a:avLst/>
@@ -9221,22 +9698,22 @@
       </p:sp>
       <p:sp>
         <p:nvSpPr>
-          <p:cNvPr id="57" name="">
-            <a:extLst xmlns:a="http://schemas.openxmlformats.org/drawingml/2006/main">
-              <a:ext uri="{FF2B5EF4-FFF2-40B4-BE49-F238E27FC236}">
-                <a16:creationId xmlns:a16="http://schemas.microsoft.com/office/drawing/2014/main" id="{CC1E451D-9E9B-4EE4-A5C4-6F31D794C62C}"/>
-              </a:ext>
-            </a:extLst>
-          </p:cNvPr>
-          <p:cNvSpPr>
-            <a:spLocks xmlns:a="http://schemas.openxmlformats.org/drawingml/2006/main" noGrp="1"/>
-          </p:cNvSpPr>
-          <p:nvPr/>
-        </p:nvSpPr>
-        <p:spPr>
-          <a:xfrm xmlns:a="http://schemas.openxmlformats.org/drawingml/2006/main">
-            <a:off x="9525000" y="2857500"/>
-            <a:ext cx="47625" cy="1924050"/>
+          <p:cNvPr id="63" name="">
+            <a:extLst xmlns:a="http://schemas.openxmlformats.org/drawingml/2006/main">
+              <a:ext uri="{FF2B5EF4-FFF2-40B4-BE49-F238E27FC236}">
+                <a16:creationId xmlns:a16="http://schemas.microsoft.com/office/drawing/2014/main" id="{A9D81A56-6C44-4C7D-B3A2-677F311799B1}"/>
+              </a:ext>
+            </a:extLst>
+          </p:cNvPr>
+          <p:cNvSpPr>
+            <a:spLocks xmlns:a="http://schemas.openxmlformats.org/drawingml/2006/main" noGrp="1"/>
+          </p:cNvSpPr>
+          <p:nvPr/>
+        </p:nvSpPr>
+        <p:spPr>
+          <a:xfrm xmlns:a="http://schemas.openxmlformats.org/drawingml/2006/main">
+            <a:off x="9525000" y="2838450"/>
+            <a:ext cx="47625" cy="1638300"/>
           </a:xfrm>
           <a:prstGeom xmlns:a="http://schemas.openxmlformats.org/drawingml/2006/main" prst="rect">
             <a:avLst/>
@@ -9256,10 +9733,10 @@
       </p:sp>
       <p:sp>
         <p:nvSpPr>
-          <p:cNvPr id="58" name="">
-            <a:extLst xmlns:a="http://schemas.openxmlformats.org/drawingml/2006/main">
-              <a:ext uri="{FF2B5EF4-FFF2-40B4-BE49-F238E27FC236}">
-                <a16:creationId xmlns:a16="http://schemas.microsoft.com/office/drawing/2014/main" id="{C4412320-2E0E-409E-81D9-E98B07AA66E6}"/>
+          <p:cNvPr id="64" name="">
+            <a:extLst xmlns:a="http://schemas.openxmlformats.org/drawingml/2006/main">
+              <a:ext uri="{FF2B5EF4-FFF2-40B4-BE49-F238E27FC236}">
+                <a16:creationId xmlns:a16="http://schemas.microsoft.com/office/drawing/2014/main" id="{C62EA8E8-207C-4511-9A52-D29832278E33}"/>
               </a:ext>
             </a:extLst>
           </p:cNvPr>
@@ -9291,10 +9768,10 @@
       </p:sp>
       <p:sp>
         <p:nvSpPr>
-          <p:cNvPr id="59" name="">
-            <a:extLst xmlns:a="http://schemas.openxmlformats.org/drawingml/2006/main">
-              <a:ext uri="{FF2B5EF4-FFF2-40B4-BE49-F238E27FC236}">
-                <a16:creationId xmlns:a16="http://schemas.microsoft.com/office/drawing/2014/main" id="{25F48B1D-DBFF-43D9-BC53-06590B535761}"/>
+          <p:cNvPr id="65" name="">
+            <a:extLst xmlns:a="http://schemas.openxmlformats.org/drawingml/2006/main">
+              <a:ext uri="{FF2B5EF4-FFF2-40B4-BE49-F238E27FC236}">
+                <a16:creationId xmlns:a16="http://schemas.microsoft.com/office/drawing/2014/main" id="{058AC564-AA37-40E0-A259-77B327D0A5C6}"/>
               </a:ext>
             </a:extLst>
           </p:cNvPr>
@@ -9355,10 +9832,10 @@
       </p:sp>
       <p:sp>
         <p:nvSpPr>
-          <p:cNvPr id="60" name="">
-            <a:extLst xmlns:a="http://schemas.openxmlformats.org/drawingml/2006/main">
-              <a:ext uri="{FF2B5EF4-FFF2-40B4-BE49-F238E27FC236}">
-                <a16:creationId xmlns:a16="http://schemas.microsoft.com/office/drawing/2014/main" id="{D246D810-EA4E-4C78-8AEB-8F359B8D475E}"/>
+          <p:cNvPr id="66" name="">
+            <a:extLst xmlns:a="http://schemas.openxmlformats.org/drawingml/2006/main">
+              <a:ext uri="{FF2B5EF4-FFF2-40B4-BE49-F238E27FC236}">
+                <a16:creationId xmlns:a16="http://schemas.microsoft.com/office/drawing/2014/main" id="{6BCEE1C1-BF87-4EDF-A2E5-9452FED0790C}"/>
               </a:ext>
             </a:extLst>
           </p:cNvPr>
@@ -9390,10 +9867,10 @@
       </p:sp>
       <p:sp>
         <p:nvSpPr>
-          <p:cNvPr id="61" name="">
-            <a:extLst xmlns:a="http://schemas.openxmlformats.org/drawingml/2006/main">
-              <a:ext uri="{FF2B5EF4-FFF2-40B4-BE49-F238E27FC236}">
-                <a16:creationId xmlns:a16="http://schemas.microsoft.com/office/drawing/2014/main" id="{2D4DCFE1-E7EC-4AF0-A32D-A601C7C61896}"/>
+          <p:cNvPr id="67" name="">
+            <a:extLst xmlns:a="http://schemas.openxmlformats.org/drawingml/2006/main">
+              <a:ext uri="{FF2B5EF4-FFF2-40B4-BE49-F238E27FC236}">
+                <a16:creationId xmlns:a16="http://schemas.microsoft.com/office/drawing/2014/main" id="{3B278B49-76CD-4C62-B38D-32A1F9947252}"/>
               </a:ext>
             </a:extLst>
           </p:cNvPr>
@@ -9454,22 +9931,22 @@
       </p:sp>
       <p:sp>
         <p:nvSpPr>
-          <p:cNvPr id="62" name="">
-            <a:extLst xmlns:a="http://schemas.openxmlformats.org/drawingml/2006/main">
-              <a:ext uri="{FF2B5EF4-FFF2-40B4-BE49-F238E27FC236}">
-                <a16:creationId xmlns:a16="http://schemas.microsoft.com/office/drawing/2014/main" id="{4B42A468-AB35-4AA7-AB50-80E7827B0676}"/>
-              </a:ext>
-            </a:extLst>
-          </p:cNvPr>
-          <p:cNvSpPr>
-            <a:spLocks xmlns:a="http://schemas.openxmlformats.org/drawingml/2006/main" noGrp="1"/>
-          </p:cNvSpPr>
-          <p:nvPr/>
-        </p:nvSpPr>
-        <p:spPr>
-          <a:xfrm xmlns:a="http://schemas.openxmlformats.org/drawingml/2006/main">
-            <a:off x="2190750" y="4743450"/>
-            <a:ext cx="2000250" cy="266700"/>
+          <p:cNvPr id="68" name="">
+            <a:extLst xmlns:a="http://schemas.openxmlformats.org/drawingml/2006/main">
+              <a:ext uri="{FF2B5EF4-FFF2-40B4-BE49-F238E27FC236}">
+                <a16:creationId xmlns:a16="http://schemas.microsoft.com/office/drawing/2014/main" id="{655E1FDE-9423-4A98-BF28-7B8C66A0F44E}"/>
+              </a:ext>
+            </a:extLst>
+          </p:cNvPr>
+          <p:cNvSpPr>
+            <a:spLocks xmlns:a="http://schemas.openxmlformats.org/drawingml/2006/main" noGrp="1"/>
+          </p:cNvSpPr>
+          <p:nvPr/>
+        </p:nvSpPr>
+        <p:spPr>
+          <a:xfrm xmlns:a="http://schemas.openxmlformats.org/drawingml/2006/main">
+            <a:off x="2190750" y="4838700"/>
+            <a:ext cx="2000250" cy="228600"/>
           </a:xfrm>
           <a:prstGeom xmlns:a="http://schemas.openxmlformats.org/drawingml/2006/main" prst="rect">
             <a:avLst/>
@@ -9493,7 +9970,7 @@
           <a:lstStyle xmlns:a="http://schemas.openxmlformats.org/drawingml/2006/main"/>
           <a:p xmlns:a="http://schemas.openxmlformats.org/drawingml/2006/main">
             <a:pPr algn="ctr">
-              <a:defRPr sz="1200" b="1">
+              <a:defRPr sz="1050" b="1">
                 <a:solidFill>
                   <a:srgbClr val="6EA8FF"/>
                 </a:solidFill>
@@ -9503,7 +9980,7 @@
               </a:defRPr>
             </a:pPr>
             <a:r>
-              <a:rPr sz="1200" b="1">
+              <a:rPr sz="1050" b="1">
                 <a:solidFill>
                   <a:srgbClr val="6EA8FF"/>
                 </a:solidFill>
@@ -9518,22 +9995,22 @@
       </p:sp>
       <p:sp>
         <p:nvSpPr>
-          <p:cNvPr id="63" name="">
-            <a:extLst xmlns:a="http://schemas.openxmlformats.org/drawingml/2006/main">
-              <a:ext uri="{FF2B5EF4-FFF2-40B4-BE49-F238E27FC236}">
-                <a16:creationId xmlns:a16="http://schemas.microsoft.com/office/drawing/2014/main" id="{51F0BE29-CB00-4221-99C4-8A7D8E822975}"/>
-              </a:ext>
-            </a:extLst>
-          </p:cNvPr>
-          <p:cNvSpPr>
-            <a:spLocks xmlns:a="http://schemas.openxmlformats.org/drawingml/2006/main" noGrp="1"/>
-          </p:cNvSpPr>
-          <p:nvPr/>
-        </p:nvSpPr>
-        <p:spPr>
-          <a:xfrm xmlns:a="http://schemas.openxmlformats.org/drawingml/2006/main">
-            <a:off x="8534400" y="4743450"/>
-            <a:ext cx="2476500" cy="266700"/>
+          <p:cNvPr id="69" name="">
+            <a:extLst xmlns:a="http://schemas.openxmlformats.org/drawingml/2006/main">
+              <a:ext uri="{FF2B5EF4-FFF2-40B4-BE49-F238E27FC236}">
+                <a16:creationId xmlns:a16="http://schemas.microsoft.com/office/drawing/2014/main" id="{09A30A1B-8753-4854-A9F0-248DA2764C37}"/>
+              </a:ext>
+            </a:extLst>
+          </p:cNvPr>
+          <p:cNvSpPr>
+            <a:spLocks xmlns:a="http://schemas.openxmlformats.org/drawingml/2006/main" noGrp="1"/>
+          </p:cNvSpPr>
+          <p:nvPr/>
+        </p:nvSpPr>
+        <p:spPr>
+          <a:xfrm xmlns:a="http://schemas.openxmlformats.org/drawingml/2006/main">
+            <a:off x="8515350" y="4838700"/>
+            <a:ext cx="2514600" cy="228600"/>
           </a:xfrm>
           <a:prstGeom xmlns:a="http://schemas.openxmlformats.org/drawingml/2006/main" prst="rect">
             <a:avLst/>
@@ -9557,7 +10034,7 @@
           <a:lstStyle xmlns:a="http://schemas.openxmlformats.org/drawingml/2006/main"/>
           <a:p xmlns:a="http://schemas.openxmlformats.org/drawingml/2006/main">
             <a:pPr algn="ctr">
-              <a:defRPr sz="1200" b="1">
+              <a:defRPr sz="1050" b="1">
                 <a:solidFill>
                   <a:srgbClr val="FF4D4A"/>
                 </a:solidFill>
@@ -9567,7 +10044,7 @@
               </a:defRPr>
             </a:pPr>
             <a:r>
-              <a:rPr sz="1200" b="1">
+              <a:rPr sz="1050" b="1">
                 <a:solidFill>
                   <a:srgbClr val="FF4D4A"/>
                 </a:solidFill>
@@ -9582,22 +10059,22 @@
       </p:sp>
       <p:sp>
         <p:nvSpPr>
-          <p:cNvPr id="64" name="">
-            <a:extLst xmlns:a="http://schemas.openxmlformats.org/drawingml/2006/main">
-              <a:ext uri="{FF2B5EF4-FFF2-40B4-BE49-F238E27FC236}">
-                <a16:creationId xmlns:a16="http://schemas.microsoft.com/office/drawing/2014/main" id="{826AF713-B6CD-45BC-99BC-04BB58F07318}"/>
-              </a:ext>
-            </a:extLst>
-          </p:cNvPr>
-          <p:cNvSpPr>
-            <a:spLocks xmlns:a="http://schemas.openxmlformats.org/drawingml/2006/main" noGrp="1"/>
-          </p:cNvSpPr>
-          <p:nvPr/>
-        </p:nvSpPr>
-        <p:spPr>
-          <a:xfrm xmlns:a="http://schemas.openxmlformats.org/drawingml/2006/main">
-            <a:off x="9829800" y="2190750"/>
-            <a:ext cx="1143000" cy="381000"/>
+          <p:cNvPr id="70" name="">
+            <a:extLst xmlns:a="http://schemas.openxmlformats.org/drawingml/2006/main">
+              <a:ext uri="{FF2B5EF4-FFF2-40B4-BE49-F238E27FC236}">
+                <a16:creationId xmlns:a16="http://schemas.microsoft.com/office/drawing/2014/main" id="{A2C84566-029B-4998-AA4E-2482A14F567C}"/>
+              </a:ext>
+            </a:extLst>
+          </p:cNvPr>
+          <p:cNvSpPr>
+            <a:spLocks xmlns:a="http://schemas.openxmlformats.org/drawingml/2006/main" noGrp="1"/>
+          </p:cNvSpPr>
+          <p:nvPr/>
+        </p:nvSpPr>
+        <p:spPr>
+          <a:xfrm xmlns:a="http://schemas.openxmlformats.org/drawingml/2006/main">
+            <a:off x="9810750" y="2190750"/>
+            <a:ext cx="1143000" cy="361950"/>
           </a:xfrm>
           <a:prstGeom xmlns:a="http://schemas.openxmlformats.org/drawingml/2006/main" prst="rect">
             <a:avLst/>
@@ -9621,7 +10098,7 @@
           <a:lstStyle xmlns:a="http://schemas.openxmlformats.org/drawingml/2006/main"/>
           <a:p xmlns:a="http://schemas.openxmlformats.org/drawingml/2006/main">
             <a:pPr algn="ctr">
-              <a:defRPr sz="1725" b="1">
+              <a:defRPr sz="1650" b="1">
                 <a:solidFill>
                   <a:srgbClr val="FF4D4A"/>
                 </a:solidFill>
@@ -9631,7 +10108,7 @@
               </a:defRPr>
             </a:pPr>
             <a:r>
-              <a:rPr sz="1725" b="1">
+              <a:rPr sz="1650" b="1">
                 <a:solidFill>
                   <a:srgbClr val="FF4D4A"/>
                 </a:solidFill>
@@ -9646,22 +10123,22 @@
       </p:sp>
       <p:sp>
         <p:nvSpPr>
-          <p:cNvPr id="65" name="">
-            <a:extLst xmlns:a="http://schemas.openxmlformats.org/drawingml/2006/main">
-              <a:ext uri="{FF2B5EF4-FFF2-40B4-BE49-F238E27FC236}">
-                <a16:creationId xmlns:a16="http://schemas.microsoft.com/office/drawing/2014/main" id="{AD150CE7-95F4-434E-98E7-2F1548862AE9}"/>
-              </a:ext>
-            </a:extLst>
-          </p:cNvPr>
-          <p:cNvSpPr>
-            <a:spLocks xmlns:a="http://schemas.openxmlformats.org/drawingml/2006/main" noGrp="1"/>
-          </p:cNvSpPr>
-          <p:nvPr/>
-        </p:nvSpPr>
-        <p:spPr>
-          <a:xfrm xmlns:a="http://schemas.openxmlformats.org/drawingml/2006/main">
-            <a:off x="9753600" y="5200650"/>
-            <a:ext cx="1238250" cy="285750"/>
+          <p:cNvPr id="71" name="">
+            <a:extLst xmlns:a="http://schemas.openxmlformats.org/drawingml/2006/main">
+              <a:ext uri="{FF2B5EF4-FFF2-40B4-BE49-F238E27FC236}">
+                <a16:creationId xmlns:a16="http://schemas.microsoft.com/office/drawing/2014/main" id="{D45C71B0-8E68-4397-932F-69F54B35D52A}"/>
+              </a:ext>
+            </a:extLst>
+          </p:cNvPr>
+          <p:cNvSpPr>
+            <a:spLocks xmlns:a="http://schemas.openxmlformats.org/drawingml/2006/main" noGrp="1"/>
+          </p:cNvSpPr>
+          <p:nvPr/>
+        </p:nvSpPr>
+        <p:spPr>
+          <a:xfrm xmlns:a="http://schemas.openxmlformats.org/drawingml/2006/main">
+            <a:off x="9677400" y="5295900"/>
+            <a:ext cx="1371600" cy="190500"/>
           </a:xfrm>
           <a:prstGeom xmlns:a="http://schemas.openxmlformats.org/drawingml/2006/main" prst="rect">
             <a:avLst/>
@@ -9685,7 +10162,7 @@
           <a:lstStyle xmlns:a="http://schemas.openxmlformats.org/drawingml/2006/main"/>
           <a:p xmlns:a="http://schemas.openxmlformats.org/drawingml/2006/main">
             <a:pPr algn="ctr">
-              <a:defRPr sz="1350" b="1">
+              <a:defRPr sz="1050" b="1">
                 <a:solidFill>
                   <a:srgbClr val="FF4D4A"/>
                 </a:solidFill>
@@ -9695,7 +10172,7 @@
               </a:defRPr>
             </a:pPr>
             <a:r>
-              <a:rPr sz="1350" b="1">
+              <a:rPr sz="1050" b="1">
                 <a:solidFill>
                   <a:srgbClr val="FF4D4A"/>
                 </a:solidFill>
@@ -9710,22 +10187,22 @@
       </p:sp>
       <p:sp>
         <p:nvSpPr>
-          <p:cNvPr id="66" name="">
-            <a:extLst xmlns:a="http://schemas.openxmlformats.org/drawingml/2006/main">
-              <a:ext uri="{FF2B5EF4-FFF2-40B4-BE49-F238E27FC236}">
-                <a16:creationId xmlns:a16="http://schemas.microsoft.com/office/drawing/2014/main" id="{509588E9-23F4-40FF-8F2B-80427C06FDE9}"/>
-              </a:ext>
-            </a:extLst>
-          </p:cNvPr>
-          <p:cNvSpPr>
-            <a:spLocks xmlns:a="http://schemas.openxmlformats.org/drawingml/2006/main" noGrp="1"/>
-          </p:cNvSpPr>
-          <p:nvPr/>
-        </p:nvSpPr>
-        <p:spPr>
-          <a:xfrm xmlns:a="http://schemas.openxmlformats.org/drawingml/2006/main">
-            <a:off x="2476500" y="5619750"/>
-            <a:ext cx="7239000" cy="514350"/>
+          <p:cNvPr id="72" name="">
+            <a:extLst xmlns:a="http://schemas.openxmlformats.org/drawingml/2006/main">
+              <a:ext uri="{FF2B5EF4-FFF2-40B4-BE49-F238E27FC236}">
+                <a16:creationId xmlns:a16="http://schemas.microsoft.com/office/drawing/2014/main" id="{A1FECDB0-5BE7-4B71-AFAD-2E01177AE7A8}"/>
+              </a:ext>
+            </a:extLst>
+          </p:cNvPr>
+          <p:cNvSpPr>
+            <a:spLocks xmlns:a="http://schemas.openxmlformats.org/drawingml/2006/main" noGrp="1"/>
+          </p:cNvSpPr>
+          <p:nvPr/>
+        </p:nvSpPr>
+        <p:spPr>
+          <a:xfrm xmlns:a="http://schemas.openxmlformats.org/drawingml/2006/main">
+            <a:off x="2247900" y="5619750"/>
+            <a:ext cx="7696200" cy="514350"/>
           </a:xfrm>
           <a:prstGeom xmlns:a="http://schemas.openxmlformats.org/drawingml/2006/main" prst="rect">
             <a:avLst/>
@@ -9745,22 +10222,22 @@
       </p:sp>
       <p:sp>
         <p:nvSpPr>
-          <p:cNvPr id="67" name="">
-            <a:extLst xmlns:a="http://schemas.openxmlformats.org/drawingml/2006/main">
-              <a:ext uri="{FF2B5EF4-FFF2-40B4-BE49-F238E27FC236}">
-                <a16:creationId xmlns:a16="http://schemas.microsoft.com/office/drawing/2014/main" id="{9E5FFB59-82DA-470D-9EF9-03497C629CF6}"/>
-              </a:ext>
-            </a:extLst>
-          </p:cNvPr>
-          <p:cNvSpPr>
-            <a:spLocks xmlns:a="http://schemas.openxmlformats.org/drawingml/2006/main" noGrp="1"/>
-          </p:cNvSpPr>
-          <p:nvPr/>
-        </p:nvSpPr>
-        <p:spPr>
-          <a:xfrm xmlns:a="http://schemas.openxmlformats.org/drawingml/2006/main">
-            <a:off x="2647950" y="5734050"/>
-            <a:ext cx="6896100" cy="285750"/>
+          <p:cNvPr id="73" name="">
+            <a:extLst xmlns:a="http://schemas.openxmlformats.org/drawingml/2006/main">
+              <a:ext uri="{FF2B5EF4-FFF2-40B4-BE49-F238E27FC236}">
+                <a16:creationId xmlns:a16="http://schemas.microsoft.com/office/drawing/2014/main" id="{B0EF4D9A-07D3-479B-879F-4398BF5A668B}"/>
+              </a:ext>
+            </a:extLst>
+          </p:cNvPr>
+          <p:cNvSpPr>
+            <a:spLocks xmlns:a="http://schemas.openxmlformats.org/drawingml/2006/main" noGrp="1"/>
+          </p:cNvSpPr>
+          <p:nvPr/>
+        </p:nvSpPr>
+        <p:spPr>
+          <a:xfrm xmlns:a="http://schemas.openxmlformats.org/drawingml/2006/main">
+            <a:off x="2419350" y="5734050"/>
+            <a:ext cx="7353300" cy="285750"/>
           </a:xfrm>
           <a:prstGeom xmlns:a="http://schemas.openxmlformats.org/drawingml/2006/main" prst="rect">
             <a:avLst/>
@@ -9784,7 +10261,7 @@
           <a:lstStyle xmlns:a="http://schemas.openxmlformats.org/drawingml/2006/main"/>
           <a:p xmlns:a="http://schemas.openxmlformats.org/drawingml/2006/main">
             <a:pPr algn="ctr">
-              <a:defRPr sz="1500" b="1">
+              <a:defRPr sz="1350" b="1">
                 <a:solidFill>
                   <a:srgbClr val="111820"/>
                 </a:solidFill>
@@ -9794,7 +10271,7 @@
               </a:defRPr>
             </a:pPr>
             <a:r>
-              <a:rPr sz="1500" b="1">
+              <a:rPr sz="1350" b="1">
                 <a:solidFill>
                   <a:srgbClr val="111820"/>
                 </a:solidFill>
@@ -9802,17 +10279,17 @@
                 <a:ea typeface="Hiragino Sans"/>
                 <a:cs typeface="Hiragino Sans"/>
               </a:rPr>
-              <a:t>典型例が短く見えても、少数の長期潜伏が保持窓を超える</a:t>
+              <a:t>この図で見るのは「高い棒」ではなく、右端の尾が保持窓を越えるか</a:t>
             </a:r>
           </a:p>
         </p:txBody>
       </p:sp>
       <p:sp>
         <p:nvSpPr>
-          <p:cNvPr id="68" name="">
-            <a:extLst xmlns:a="http://schemas.openxmlformats.org/drawingml/2006/main">
-              <a:ext uri="{FF2B5EF4-FFF2-40B4-BE49-F238E27FC236}">
-                <a16:creationId xmlns:a16="http://schemas.microsoft.com/office/drawing/2014/main" id="{8E2877EA-BAC9-4A8D-A402-BD87113CB0F2}"/>
+          <p:cNvPr id="74" name="">
+            <a:extLst xmlns:a="http://schemas.openxmlformats.org/drawingml/2006/main">
+              <a:ext uri="{FF2B5EF4-FFF2-40B4-BE49-F238E27FC236}">
+                <a16:creationId xmlns:a16="http://schemas.microsoft.com/office/drawing/2014/main" id="{185AE382-E2A0-445D-8246-11B48D2514B2}"/>
               </a:ext>
             </a:extLst>
           </p:cNvPr>
@@ -9874,7 +10351,7 @@
     </p:spTree>
     <p:extLst>
       <p:ext uri="{BB962C8B-B14F-4D97-AF65-F5344CB8AC3E}">
-        <p14:creationId xmlns:p14="http://schemas.microsoft.com/office/powerpoint/2010/main" val="1380616506"/>
+        <p14:creationId xmlns:p14="http://schemas.microsoft.com/office/powerpoint/2010/main" val="1924074695"/>
       </p:ext>
     </p:extLst>
   </p:cSld>
@@ -9898,7 +10375,7 @@
           <p:cNvPr id="1" name="">
             <a:extLst xmlns:a="http://schemas.openxmlformats.org/drawingml/2006/main">
               <a:ext uri="{FF2B5EF4-FFF2-40B4-BE49-F238E27FC236}">
-                <a16:creationId xmlns:a16="http://schemas.microsoft.com/office/drawing/2014/main" id="{8FF08276-26A8-4897-B443-FFBF8BD094AE}"/>
+                <a16:creationId xmlns:a16="http://schemas.microsoft.com/office/drawing/2014/main" id="{2395EF4D-C0F2-45F6-8321-61FF963B9BBA}"/>
               </a:ext>
             </a:extLst>
           </p:cNvPr>
@@ -9933,7 +10410,7 @@
           <p:cNvPr id="2" name="">
             <a:extLst xmlns:a="http://schemas.openxmlformats.org/drawingml/2006/main">
               <a:ext uri="{FF2B5EF4-FFF2-40B4-BE49-F238E27FC236}">
-                <a16:creationId xmlns:a16="http://schemas.microsoft.com/office/drawing/2014/main" id="{A24074FE-8089-4A2E-9154-30F20EE79DE3}"/>
+                <a16:creationId xmlns:a16="http://schemas.microsoft.com/office/drawing/2014/main" id="{DC4BC3BF-FAE2-4404-A8EA-095F1356C2FD}"/>
               </a:ext>
             </a:extLst>
           </p:cNvPr>
@@ -9968,7 +10445,7 @@
           <p:cNvPr id="3" name="">
             <a:extLst xmlns:a="http://schemas.openxmlformats.org/drawingml/2006/main">
               <a:ext uri="{FF2B5EF4-FFF2-40B4-BE49-F238E27FC236}">
-                <a16:creationId xmlns:a16="http://schemas.microsoft.com/office/drawing/2014/main" id="{5F2ECB30-9319-48EC-9C2E-3577DFB64B63}"/>
+                <a16:creationId xmlns:a16="http://schemas.microsoft.com/office/drawing/2014/main" id="{A06E7C2B-23AE-4856-8961-A853A5220D97}"/>
               </a:ext>
             </a:extLst>
           </p:cNvPr>
@@ -10003,7 +10480,7 @@
           <p:cNvPr id="4" name="">
             <a:extLst xmlns:a="http://schemas.openxmlformats.org/drawingml/2006/main">
               <a:ext uri="{FF2B5EF4-FFF2-40B4-BE49-F238E27FC236}">
-                <a16:creationId xmlns:a16="http://schemas.microsoft.com/office/drawing/2014/main" id="{BA9426B8-C709-4A82-A6D4-D58F8935C57E}"/>
+                <a16:creationId xmlns:a16="http://schemas.microsoft.com/office/drawing/2014/main" id="{12E33CD7-7D55-40BD-B955-C31E80D6620E}"/>
               </a:ext>
             </a:extLst>
           </p:cNvPr>
@@ -10038,7 +10515,7 @@
           <p:cNvPr id="5" name="">
             <a:extLst xmlns:a="http://schemas.openxmlformats.org/drawingml/2006/main">
               <a:ext uri="{FF2B5EF4-FFF2-40B4-BE49-F238E27FC236}">
-                <a16:creationId xmlns:a16="http://schemas.microsoft.com/office/drawing/2014/main" id="{F7E09B3E-BA86-4DED-AFC1-BBD86A9BD6B4}"/>
+                <a16:creationId xmlns:a16="http://schemas.microsoft.com/office/drawing/2014/main" id="{3518178C-2055-4006-AB5C-BA6E126D7065}"/>
               </a:ext>
             </a:extLst>
           </p:cNvPr>
@@ -10073,7 +10550,7 @@
           <p:cNvPr id="6" name="">
             <a:extLst xmlns:a="http://schemas.openxmlformats.org/drawingml/2006/main">
               <a:ext uri="{FF2B5EF4-FFF2-40B4-BE49-F238E27FC236}">
-                <a16:creationId xmlns:a16="http://schemas.microsoft.com/office/drawing/2014/main" id="{AA8F782D-AC01-4994-970A-716694F0E31A}"/>
+                <a16:creationId xmlns:a16="http://schemas.microsoft.com/office/drawing/2014/main" id="{FE4BF622-8F7B-4CAD-80F3-4413D4687921}"/>
               </a:ext>
             </a:extLst>
           </p:cNvPr>
@@ -10108,7 +10585,7 @@
           <p:cNvPr id="7" name="">
             <a:extLst xmlns:a="http://schemas.openxmlformats.org/drawingml/2006/main">
               <a:ext uri="{FF2B5EF4-FFF2-40B4-BE49-F238E27FC236}">
-                <a16:creationId xmlns:a16="http://schemas.microsoft.com/office/drawing/2014/main" id="{1D94E525-B071-47CF-A8DC-59A24B7EE68A}"/>
+                <a16:creationId xmlns:a16="http://schemas.microsoft.com/office/drawing/2014/main" id="{70FD2DFB-C92F-4687-AEE7-0103708915C9}"/>
               </a:ext>
             </a:extLst>
           </p:cNvPr>
@@ -10143,7 +10620,7 @@
           <p:cNvPr id="8" name="">
             <a:extLst xmlns:a="http://schemas.openxmlformats.org/drawingml/2006/main">
               <a:ext uri="{FF2B5EF4-FFF2-40B4-BE49-F238E27FC236}">
-                <a16:creationId xmlns:a16="http://schemas.microsoft.com/office/drawing/2014/main" id="{7B7FCCAC-1440-46C8-8BE9-A05FB9E21E91}"/>
+                <a16:creationId xmlns:a16="http://schemas.microsoft.com/office/drawing/2014/main" id="{11AE8AAB-39C7-40AA-A30C-30B16E808DCB}"/>
               </a:ext>
             </a:extLst>
           </p:cNvPr>
@@ -10178,7 +10655,7 @@
           <p:cNvPr id="9" name="">
             <a:extLst xmlns:a="http://schemas.openxmlformats.org/drawingml/2006/main">
               <a:ext uri="{FF2B5EF4-FFF2-40B4-BE49-F238E27FC236}">
-                <a16:creationId xmlns:a16="http://schemas.microsoft.com/office/drawing/2014/main" id="{7174336E-26CF-41BA-93C9-FE217AC74A1F}"/>
+                <a16:creationId xmlns:a16="http://schemas.microsoft.com/office/drawing/2014/main" id="{2D3069DE-0A67-4AB0-A07E-0D02466DB076}"/>
               </a:ext>
             </a:extLst>
           </p:cNvPr>
@@ -10213,7 +10690,7 @@
           <p:cNvPr id="10" name="">
             <a:extLst xmlns:a="http://schemas.openxmlformats.org/drawingml/2006/main">
               <a:ext uri="{FF2B5EF4-FFF2-40B4-BE49-F238E27FC236}">
-                <a16:creationId xmlns:a16="http://schemas.microsoft.com/office/drawing/2014/main" id="{22E949DF-25EC-472C-90A8-5E3F15C7CE1B}"/>
+                <a16:creationId xmlns:a16="http://schemas.microsoft.com/office/drawing/2014/main" id="{F0AC3646-0B03-467B-BF2A-7B89812261EB}"/>
               </a:ext>
             </a:extLst>
           </p:cNvPr>
@@ -10248,7 +10725,7 @@
           <p:cNvPr id="11" name="">
             <a:extLst xmlns:a="http://schemas.openxmlformats.org/drawingml/2006/main">
               <a:ext uri="{FF2B5EF4-FFF2-40B4-BE49-F238E27FC236}">
-                <a16:creationId xmlns:a16="http://schemas.microsoft.com/office/drawing/2014/main" id="{7DBDBC9F-2B7D-4859-B369-60A9309984EC}"/>
+                <a16:creationId xmlns:a16="http://schemas.microsoft.com/office/drawing/2014/main" id="{D280F395-0D1C-4778-94E3-66040B0A4F63}"/>
               </a:ext>
             </a:extLst>
           </p:cNvPr>
@@ -10283,7 +10760,7 @@
           <p:cNvPr id="12" name="">
             <a:extLst xmlns:a="http://schemas.openxmlformats.org/drawingml/2006/main">
               <a:ext uri="{FF2B5EF4-FFF2-40B4-BE49-F238E27FC236}">
-                <a16:creationId xmlns:a16="http://schemas.microsoft.com/office/drawing/2014/main" id="{56E3E3F8-0DB5-46B8-8827-854AC68B3959}"/>
+                <a16:creationId xmlns:a16="http://schemas.microsoft.com/office/drawing/2014/main" id="{FC96BEC2-BA18-4FCB-84FC-17DA6E14100A}"/>
               </a:ext>
             </a:extLst>
           </p:cNvPr>
@@ -10318,7 +10795,7 @@
           <p:cNvPr id="13" name="">
             <a:extLst xmlns:a="http://schemas.openxmlformats.org/drawingml/2006/main">
               <a:ext uri="{FF2B5EF4-FFF2-40B4-BE49-F238E27FC236}">
-                <a16:creationId xmlns:a16="http://schemas.microsoft.com/office/drawing/2014/main" id="{52F8E61D-C774-44B1-B050-19E94CB475E8}"/>
+                <a16:creationId xmlns:a16="http://schemas.microsoft.com/office/drawing/2014/main" id="{6F56A008-6345-4FA8-85F1-C4C0A04979EC}"/>
               </a:ext>
             </a:extLst>
           </p:cNvPr>
@@ -10353,7 +10830,7 @@
           <p:cNvPr id="14" name="">
             <a:extLst xmlns:a="http://schemas.openxmlformats.org/drawingml/2006/main">
               <a:ext uri="{FF2B5EF4-FFF2-40B4-BE49-F238E27FC236}">
-                <a16:creationId xmlns:a16="http://schemas.microsoft.com/office/drawing/2014/main" id="{30A3BC86-CEB0-4717-8B52-6AB5D0C7AAEC}"/>
+                <a16:creationId xmlns:a16="http://schemas.microsoft.com/office/drawing/2014/main" id="{ACBC011E-3208-486B-8F90-044003ECDA3F}"/>
               </a:ext>
             </a:extLst>
           </p:cNvPr>
@@ -10388,7 +10865,7 @@
           <p:cNvPr id="15" name="">
             <a:extLst xmlns:a="http://schemas.openxmlformats.org/drawingml/2006/main">
               <a:ext uri="{FF2B5EF4-FFF2-40B4-BE49-F238E27FC236}">
-                <a16:creationId xmlns:a16="http://schemas.microsoft.com/office/drawing/2014/main" id="{A07536DC-43BF-48D4-A19C-AC942CE4E668}"/>
+                <a16:creationId xmlns:a16="http://schemas.microsoft.com/office/drawing/2014/main" id="{5AA78D61-CE19-42EF-9C21-B1F6AF651E24}"/>
               </a:ext>
             </a:extLst>
           </p:cNvPr>
@@ -10423,7 +10900,7 @@
           <p:cNvPr id="16" name="">
             <a:extLst xmlns:a="http://schemas.openxmlformats.org/drawingml/2006/main">
               <a:ext uri="{FF2B5EF4-FFF2-40B4-BE49-F238E27FC236}">
-                <a16:creationId xmlns:a16="http://schemas.microsoft.com/office/drawing/2014/main" id="{C9D67680-E5ED-4F88-B7B3-20306258D179}"/>
+                <a16:creationId xmlns:a16="http://schemas.microsoft.com/office/drawing/2014/main" id="{4C7CC373-7A1F-47C8-B447-2852A7AB9ADF}"/>
               </a:ext>
             </a:extLst>
           </p:cNvPr>
@@ -10458,7 +10935,7 @@
           <p:cNvPr id="17" name="">
             <a:extLst xmlns:a="http://schemas.openxmlformats.org/drawingml/2006/main">
               <a:ext uri="{FF2B5EF4-FFF2-40B4-BE49-F238E27FC236}">
-                <a16:creationId xmlns:a16="http://schemas.microsoft.com/office/drawing/2014/main" id="{547CDF4E-A65A-46F4-9FBA-FB8E4073F271}"/>
+                <a16:creationId xmlns:a16="http://schemas.microsoft.com/office/drawing/2014/main" id="{B05EBC5D-75AF-45D4-BFBA-B4ED2B38241D}"/>
               </a:ext>
             </a:extLst>
           </p:cNvPr>
@@ -10493,7 +10970,7 @@
           <p:cNvPr id="18" name="">
             <a:extLst xmlns:a="http://schemas.openxmlformats.org/drawingml/2006/main">
               <a:ext uri="{FF2B5EF4-FFF2-40B4-BE49-F238E27FC236}">
-                <a16:creationId xmlns:a16="http://schemas.microsoft.com/office/drawing/2014/main" id="{2EDB4357-1E7D-4411-9FBB-795F748EE20D}"/>
+                <a16:creationId xmlns:a16="http://schemas.microsoft.com/office/drawing/2014/main" id="{80AEF879-1DD4-44B2-9BF7-31179DEC940F}"/>
               </a:ext>
             </a:extLst>
           </p:cNvPr>
@@ -10528,7 +11005,7 @@
           <p:cNvPr id="19" name="">
             <a:extLst xmlns:a="http://schemas.openxmlformats.org/drawingml/2006/main">
               <a:ext uri="{FF2B5EF4-FFF2-40B4-BE49-F238E27FC236}">
-                <a16:creationId xmlns:a16="http://schemas.microsoft.com/office/drawing/2014/main" id="{3BDF60AD-439F-4237-BFF1-4B5899FBCE57}"/>
+                <a16:creationId xmlns:a16="http://schemas.microsoft.com/office/drawing/2014/main" id="{4D9B2780-BEEB-4275-9037-F9EF54B7EB28}"/>
               </a:ext>
             </a:extLst>
           </p:cNvPr>
@@ -10563,7 +11040,7 @@
           <p:cNvPr id="20" name="">
             <a:extLst xmlns:a="http://schemas.openxmlformats.org/drawingml/2006/main">
               <a:ext uri="{FF2B5EF4-FFF2-40B4-BE49-F238E27FC236}">
-                <a16:creationId xmlns:a16="http://schemas.microsoft.com/office/drawing/2014/main" id="{8E1B9886-22D0-4B24-A989-E432231F25A0}"/>
+                <a16:creationId xmlns:a16="http://schemas.microsoft.com/office/drawing/2014/main" id="{69BFB5ED-8A14-4D25-B97D-6E011EDECE47}"/>
               </a:ext>
             </a:extLst>
           </p:cNvPr>
@@ -10598,7 +11075,7 @@
           <p:cNvPr id="21" name="">
             <a:extLst xmlns:a="http://schemas.openxmlformats.org/drawingml/2006/main">
               <a:ext uri="{FF2B5EF4-FFF2-40B4-BE49-F238E27FC236}">
-                <a16:creationId xmlns:a16="http://schemas.microsoft.com/office/drawing/2014/main" id="{501E82B7-2A9C-4C16-B8B8-AD31A586A8D6}"/>
+                <a16:creationId xmlns:a16="http://schemas.microsoft.com/office/drawing/2014/main" id="{51B005BB-4E36-4A21-9990-4D142BEA6943}"/>
               </a:ext>
             </a:extLst>
           </p:cNvPr>
@@ -10633,7 +11110,7 @@
           <p:cNvPr id="22" name="">
             <a:extLst xmlns:a="http://schemas.openxmlformats.org/drawingml/2006/main">
               <a:ext uri="{FF2B5EF4-FFF2-40B4-BE49-F238E27FC236}">
-                <a16:creationId xmlns:a16="http://schemas.microsoft.com/office/drawing/2014/main" id="{A633AFA0-5D1A-4F4F-9868-3C3095909E19}"/>
+                <a16:creationId xmlns:a16="http://schemas.microsoft.com/office/drawing/2014/main" id="{9B4DCB1C-1F7A-4E5A-A06C-32FFD9F8C190}"/>
               </a:ext>
             </a:extLst>
           </p:cNvPr>
@@ -10668,7 +11145,7 @@
           <p:cNvPr id="23" name="">
             <a:extLst xmlns:a="http://schemas.openxmlformats.org/drawingml/2006/main">
               <a:ext uri="{FF2B5EF4-FFF2-40B4-BE49-F238E27FC236}">
-                <a16:creationId xmlns:a16="http://schemas.microsoft.com/office/drawing/2014/main" id="{CD94FCC0-EB1E-443D-8BB3-113F4EC4B9B3}"/>
+                <a16:creationId xmlns:a16="http://schemas.microsoft.com/office/drawing/2014/main" id="{8D884283-1344-4449-9FE6-209C0989D42F}"/>
               </a:ext>
             </a:extLst>
           </p:cNvPr>
@@ -10703,7 +11180,7 @@
           <p:cNvPr id="24" name="">
             <a:extLst xmlns:a="http://schemas.openxmlformats.org/drawingml/2006/main">
               <a:ext uri="{FF2B5EF4-FFF2-40B4-BE49-F238E27FC236}">
-                <a16:creationId xmlns:a16="http://schemas.microsoft.com/office/drawing/2014/main" id="{DEC3E4D8-E154-40C8-B159-481F6DF4833D}"/>
+                <a16:creationId xmlns:a16="http://schemas.microsoft.com/office/drawing/2014/main" id="{AA9659D2-3097-4E48-AFDD-B8053196D854}"/>
               </a:ext>
             </a:extLst>
           </p:cNvPr>
@@ -10738,7 +11215,7 @@
           <p:cNvPr id="25" name="">
             <a:extLst xmlns:a="http://schemas.openxmlformats.org/drawingml/2006/main">
               <a:ext uri="{FF2B5EF4-FFF2-40B4-BE49-F238E27FC236}">
-                <a16:creationId xmlns:a16="http://schemas.microsoft.com/office/drawing/2014/main" id="{92359E2F-B84E-4422-A25B-5D044151E1D7}"/>
+                <a16:creationId xmlns:a16="http://schemas.microsoft.com/office/drawing/2014/main" id="{E570210D-7ED5-4FF1-85D1-A45F2D70278F}"/>
               </a:ext>
             </a:extLst>
           </p:cNvPr>
@@ -10773,7 +11250,7 @@
           <p:cNvPr id="26" name="">
             <a:extLst xmlns:a="http://schemas.openxmlformats.org/drawingml/2006/main">
               <a:ext uri="{FF2B5EF4-FFF2-40B4-BE49-F238E27FC236}">
-                <a16:creationId xmlns:a16="http://schemas.microsoft.com/office/drawing/2014/main" id="{8C03F4C7-3E6B-4EEF-A42C-BC1E03F8D0B0}"/>
+                <a16:creationId xmlns:a16="http://schemas.microsoft.com/office/drawing/2014/main" id="{BD927F20-7624-4736-BDB9-2EF036470A3D}"/>
               </a:ext>
             </a:extLst>
           </p:cNvPr>
@@ -10808,7 +11285,7 @@
           <p:cNvPr id="27" name="">
             <a:extLst xmlns:a="http://schemas.openxmlformats.org/drawingml/2006/main">
               <a:ext uri="{FF2B5EF4-FFF2-40B4-BE49-F238E27FC236}">
-                <a16:creationId xmlns:a16="http://schemas.microsoft.com/office/drawing/2014/main" id="{6047C388-1AF8-4E9D-8BFC-568586BE6010}"/>
+                <a16:creationId xmlns:a16="http://schemas.microsoft.com/office/drawing/2014/main" id="{6C116025-0343-4C08-9132-96CC7A52051C}"/>
               </a:ext>
             </a:extLst>
           </p:cNvPr>
@@ -10843,7 +11320,7 @@
           <p:cNvPr id="28" name="">
             <a:extLst xmlns:a="http://schemas.openxmlformats.org/drawingml/2006/main">
               <a:ext uri="{FF2B5EF4-FFF2-40B4-BE49-F238E27FC236}">
-                <a16:creationId xmlns:a16="http://schemas.microsoft.com/office/drawing/2014/main" id="{95D88A9C-6C48-4D5E-AC6D-B988E8D76FF7}"/>
+                <a16:creationId xmlns:a16="http://schemas.microsoft.com/office/drawing/2014/main" id="{D3E96343-0CA4-47A2-B44F-4172C7B28D79}"/>
               </a:ext>
             </a:extLst>
           </p:cNvPr>
@@ -10878,7 +11355,7 @@
           <p:cNvPr id="29" name="">
             <a:extLst xmlns:a="http://schemas.openxmlformats.org/drawingml/2006/main">
               <a:ext uri="{FF2B5EF4-FFF2-40B4-BE49-F238E27FC236}">
-                <a16:creationId xmlns:a16="http://schemas.microsoft.com/office/drawing/2014/main" id="{501212D3-8ECD-4717-A9BC-CDDC8A9D3933}"/>
+                <a16:creationId xmlns:a16="http://schemas.microsoft.com/office/drawing/2014/main" id="{A22D45E6-387C-4A76-AF52-1843618641CA}"/>
               </a:ext>
             </a:extLst>
           </p:cNvPr>
@@ -10913,7 +11390,7 @@
           <p:cNvPr id="30" name="">
             <a:extLst xmlns:a="http://schemas.openxmlformats.org/drawingml/2006/main">
               <a:ext uri="{FF2B5EF4-FFF2-40B4-BE49-F238E27FC236}">
-                <a16:creationId xmlns:a16="http://schemas.microsoft.com/office/drawing/2014/main" id="{9CF49C6C-3249-49F1-87E4-12551F563E12}"/>
+                <a16:creationId xmlns:a16="http://schemas.microsoft.com/office/drawing/2014/main" id="{7A165010-ED5D-49C9-9726-691512AA7974}"/>
               </a:ext>
             </a:extLst>
           </p:cNvPr>
@@ -10977,7 +11454,7 @@
           <p:cNvPr id="31" name="kicker-04-marker">
             <a:extLst xmlns:a="http://schemas.openxmlformats.org/drawingml/2006/main">
               <a:ext uri="{FF2B5EF4-FFF2-40B4-BE49-F238E27FC236}">
-                <a16:creationId xmlns:a16="http://schemas.microsoft.com/office/drawing/2014/main" id="{A40C3BD4-65D5-4585-8903-76C24ED4F684}"/>
+                <a16:creationId xmlns:a16="http://schemas.microsoft.com/office/drawing/2014/main" id="{0B696C4C-9852-497F-9069-8FDCEF7CCE46}"/>
               </a:ext>
             </a:extLst>
           </p:cNvPr>
@@ -11012,7 +11489,7 @@
           <p:cNvPr id="32" name="kicker-04-label">
             <a:extLst xmlns:a="http://schemas.openxmlformats.org/drawingml/2006/main">
               <a:ext uri="{FF2B5EF4-FFF2-40B4-BE49-F238E27FC236}">
-                <a16:creationId xmlns:a16="http://schemas.microsoft.com/office/drawing/2014/main" id="{90E85D8B-B15A-4BAE-B737-FD7A8312D58C}"/>
+                <a16:creationId xmlns:a16="http://schemas.microsoft.com/office/drawing/2014/main" id="{D894BA4B-CD6B-41BD-B233-B0E7265653EA}"/>
               </a:ext>
             </a:extLst>
           </p:cNvPr>
@@ -11076,7 +11553,7 @@
           <p:cNvPr id="33" name="">
             <a:extLst xmlns:a="http://schemas.openxmlformats.org/drawingml/2006/main">
               <a:ext uri="{FF2B5EF4-FFF2-40B4-BE49-F238E27FC236}">
-                <a16:creationId xmlns:a16="http://schemas.microsoft.com/office/drawing/2014/main" id="{0DE89BB4-87D3-44FF-9081-D9607A556CE3}"/>
+                <a16:creationId xmlns:a16="http://schemas.microsoft.com/office/drawing/2014/main" id="{BFD3FFF2-0A69-48C8-9674-B035B497D9EC}"/>
               </a:ext>
             </a:extLst>
           </p:cNvPr>
@@ -11088,7 +11565,7 @@
         <p:spPr>
           <a:xfrm xmlns:a="http://schemas.openxmlformats.org/drawingml/2006/main">
             <a:off x="552450" y="781050"/>
-            <a:ext cx="8858250" cy="647700"/>
+            <a:ext cx="8858250" cy="628650"/>
           </a:xfrm>
           <a:prstGeom xmlns:a="http://schemas.openxmlformats.org/drawingml/2006/main" prst="rect">
             <a:avLst/>
@@ -11140,7 +11617,7 @@
           <p:cNvPr id="34" name="">
             <a:extLst xmlns:a="http://schemas.openxmlformats.org/drawingml/2006/main">
               <a:ext uri="{FF2B5EF4-FFF2-40B4-BE49-F238E27FC236}">
-                <a16:creationId xmlns:a16="http://schemas.microsoft.com/office/drawing/2014/main" id="{DE242392-1226-42CD-9DDF-EDC474813068}"/>
+                <a16:creationId xmlns:a16="http://schemas.microsoft.com/office/drawing/2014/main" id="{E10ED6BE-CE69-4472-9701-81CB28D77D66}"/>
               </a:ext>
             </a:extLst>
           </p:cNvPr>
@@ -11152,7 +11629,7 @@
         <p:spPr>
           <a:xfrm xmlns:a="http://schemas.openxmlformats.org/drawingml/2006/main">
             <a:off x="590550" y="1466850"/>
-            <a:ext cx="9144000" cy="323850"/>
+            <a:ext cx="8191500" cy="342900"/>
           </a:xfrm>
           <a:prstGeom xmlns:a="http://schemas.openxmlformats.org/drawingml/2006/main" prst="rect">
             <a:avLst/>
@@ -11194,7 +11671,7 @@
                 <a:ea typeface="Hiragino Sans"/>
                 <a:cs typeface="Hiragino Sans"/>
               </a:rPr>
-              <a:t>モデルは検知失敗と保持超過を分けて数える。ここが、検知評価を復旧可能性へ接続する継ぎ目になる。</a:t>
+              <a:t>検知失敗と保持超過を分けて数える。ここが、検知評価を復旧可能性へ接続する継ぎ目になる。</a:t>
             </a:r>
           </a:p>
         </p:txBody>
@@ -11204,7 +11681,7 @@
           <p:cNvPr id="35" name="">
             <a:extLst xmlns:a="http://schemas.openxmlformats.org/drawingml/2006/main">
               <a:ext uri="{FF2B5EF4-FFF2-40B4-BE49-F238E27FC236}">
-                <a16:creationId xmlns:a16="http://schemas.microsoft.com/office/drawing/2014/main" id="{9C7EECDC-14C4-4C6E-98D4-6DB87EAFF5C9}"/>
+                <a16:creationId xmlns:a16="http://schemas.microsoft.com/office/drawing/2014/main" id="{039C0594-CE79-4C7B-A452-D55C160D6374}"/>
               </a:ext>
             </a:extLst>
           </p:cNvPr>
@@ -11237,7 +11714,7 @@
           <p:cNvPr id="36" name="">
             <a:extLst xmlns:a="http://schemas.openxmlformats.org/drawingml/2006/main">
               <a:ext uri="{FF2B5EF4-FFF2-40B4-BE49-F238E27FC236}">
-                <a16:creationId xmlns:a16="http://schemas.microsoft.com/office/drawing/2014/main" id="{A766C344-E10C-44DD-941D-A01A5A03CCB2}"/>
+                <a16:creationId xmlns:a16="http://schemas.microsoft.com/office/drawing/2014/main" id="{C41E403E-E12E-41C9-B756-6CAB55150169}"/>
               </a:ext>
             </a:extLst>
           </p:cNvPr>
@@ -11301,7 +11778,7 @@
           <p:cNvPr id="37" name="">
             <a:extLst xmlns:a="http://schemas.openxmlformats.org/drawingml/2006/main">
               <a:ext uri="{FF2B5EF4-FFF2-40B4-BE49-F238E27FC236}">
-                <a16:creationId xmlns:a16="http://schemas.microsoft.com/office/drawing/2014/main" id="{CD748B2A-E980-4D70-96F2-FB2F70D79A74}"/>
+                <a16:creationId xmlns:a16="http://schemas.microsoft.com/office/drawing/2014/main" id="{D1091670-E62C-4A27-AF5C-96CED30CEF61}"/>
               </a:ext>
             </a:extLst>
           </p:cNvPr>
@@ -11334,7 +11811,7 @@
           <p:cNvPr id="38" name="">
             <a:extLst xmlns:a="http://schemas.openxmlformats.org/drawingml/2006/main">
               <a:ext uri="{FF2B5EF4-FFF2-40B4-BE49-F238E27FC236}">
-                <a16:creationId xmlns:a16="http://schemas.microsoft.com/office/drawing/2014/main" id="{759A78B6-123A-4D41-A871-295D9A33ABB3}"/>
+                <a16:creationId xmlns:a16="http://schemas.microsoft.com/office/drawing/2014/main" id="{BC1E137F-0AFA-4B33-87C3-5CFCEC292F63}"/>
               </a:ext>
             </a:extLst>
           </p:cNvPr>
@@ -11398,7 +11875,7 @@
           <p:cNvPr id="39" name="">
             <a:extLst xmlns:a="http://schemas.openxmlformats.org/drawingml/2006/main">
               <a:ext uri="{FF2B5EF4-FFF2-40B4-BE49-F238E27FC236}">
-                <a16:creationId xmlns:a16="http://schemas.microsoft.com/office/drawing/2014/main" id="{844247BB-446A-4D62-B393-2F1E2F3C7EEE}"/>
+                <a16:creationId xmlns:a16="http://schemas.microsoft.com/office/drawing/2014/main" id="{A607813E-025B-4D5E-A573-253E5B695031}"/>
               </a:ext>
             </a:extLst>
           </p:cNvPr>
@@ -11462,7 +11939,7 @@
           <p:cNvPr id="40" name="">
             <a:extLst xmlns:a="http://schemas.openxmlformats.org/drawingml/2006/main">
               <a:ext uri="{FF2B5EF4-FFF2-40B4-BE49-F238E27FC236}">
-                <a16:creationId xmlns:a16="http://schemas.microsoft.com/office/drawing/2014/main" id="{5D87043D-436D-4016-85A8-3F513814C8C9}"/>
+                <a16:creationId xmlns:a16="http://schemas.microsoft.com/office/drawing/2014/main" id="{D724225A-E2D8-45A3-972A-15293DF451DE}"/>
               </a:ext>
             </a:extLst>
           </p:cNvPr>
@@ -11526,7 +12003,7 @@
           <p:cNvPr id="41" name="">
             <a:extLst xmlns:a="http://schemas.openxmlformats.org/drawingml/2006/main">
               <a:ext uri="{FF2B5EF4-FFF2-40B4-BE49-F238E27FC236}">
-                <a16:creationId xmlns:a16="http://schemas.microsoft.com/office/drawing/2014/main" id="{2C114D81-3465-49CC-AC64-54557652DBD9}"/>
+                <a16:creationId xmlns:a16="http://schemas.microsoft.com/office/drawing/2014/main" id="{CCC46ECF-BCB5-463F-AE68-26B992E4CA5F}"/>
               </a:ext>
             </a:extLst>
           </p:cNvPr>
@@ -11559,7 +12036,7 @@
           <p:cNvPr id="42" name="">
             <a:extLst xmlns:a="http://schemas.openxmlformats.org/drawingml/2006/main">
               <a:ext uri="{FF2B5EF4-FFF2-40B4-BE49-F238E27FC236}">
-                <a16:creationId xmlns:a16="http://schemas.microsoft.com/office/drawing/2014/main" id="{F82CC85D-DB72-4346-BC08-4E853EB78DCF}"/>
+                <a16:creationId xmlns:a16="http://schemas.microsoft.com/office/drawing/2014/main" id="{D4A0F2F8-2DC0-483A-A2D6-0C140E88BEB3}"/>
               </a:ext>
             </a:extLst>
           </p:cNvPr>
@@ -11623,7 +12100,7 @@
           <p:cNvPr id="43" name="">
             <a:extLst xmlns:a="http://schemas.openxmlformats.org/drawingml/2006/main">
               <a:ext uri="{FF2B5EF4-FFF2-40B4-BE49-F238E27FC236}">
-                <a16:creationId xmlns:a16="http://schemas.microsoft.com/office/drawing/2014/main" id="{B2E1F817-FA23-45F7-A53D-F969F56B39C1}"/>
+                <a16:creationId xmlns:a16="http://schemas.microsoft.com/office/drawing/2014/main" id="{9DC9B9E3-4D82-4907-969C-2E9CB1C1CC6D}"/>
               </a:ext>
             </a:extLst>
           </p:cNvPr>
@@ -11710,7 +12187,7 @@
           <p:cNvPr id="44" name="">
             <a:extLst xmlns:a="http://schemas.openxmlformats.org/drawingml/2006/main">
               <a:ext uri="{FF2B5EF4-FFF2-40B4-BE49-F238E27FC236}">
-                <a16:creationId xmlns:a16="http://schemas.microsoft.com/office/drawing/2014/main" id="{D14AA088-9A4C-4BC3-80A9-EA4328CFCD73}"/>
+                <a16:creationId xmlns:a16="http://schemas.microsoft.com/office/drawing/2014/main" id="{14B1789C-418D-4986-AB38-D5FBCE408901}"/>
               </a:ext>
             </a:extLst>
           </p:cNvPr>
@@ -11743,7 +12220,7 @@
           <p:cNvPr id="45" name="">
             <a:extLst xmlns:a="http://schemas.openxmlformats.org/drawingml/2006/main">
               <a:ext uri="{FF2B5EF4-FFF2-40B4-BE49-F238E27FC236}">
-                <a16:creationId xmlns:a16="http://schemas.microsoft.com/office/drawing/2014/main" id="{2DFCBB79-6307-4394-95E7-1736F862E4D1}"/>
+                <a16:creationId xmlns:a16="http://schemas.microsoft.com/office/drawing/2014/main" id="{FA701292-A382-4181-98A8-C6C2185525BB}"/>
               </a:ext>
             </a:extLst>
           </p:cNvPr>
@@ -11807,7 +12284,7 @@
           <p:cNvPr id="46" name="">
             <a:extLst xmlns:a="http://schemas.openxmlformats.org/drawingml/2006/main">
               <a:ext uri="{FF2B5EF4-FFF2-40B4-BE49-F238E27FC236}">
-                <a16:creationId xmlns:a16="http://schemas.microsoft.com/office/drawing/2014/main" id="{CB005E40-38DB-4FF5-A18A-17745A800DC3}"/>
+                <a16:creationId xmlns:a16="http://schemas.microsoft.com/office/drawing/2014/main" id="{241D2CA5-EF08-413D-AEE3-2D438F437E62}"/>
               </a:ext>
             </a:extLst>
           </p:cNvPr>
@@ -11894,7 +12371,7 @@
           <p:cNvPr id="47" name="">
             <a:extLst xmlns:a="http://schemas.openxmlformats.org/drawingml/2006/main">
               <a:ext uri="{FF2B5EF4-FFF2-40B4-BE49-F238E27FC236}">
-                <a16:creationId xmlns:a16="http://schemas.microsoft.com/office/drawing/2014/main" id="{2BB4D8EC-7D4C-4330-B563-63931DEBF162}"/>
+                <a16:creationId xmlns:a16="http://schemas.microsoft.com/office/drawing/2014/main" id="{1F027A1B-ED17-41E7-9D73-D09D36F0DA71}"/>
               </a:ext>
             </a:extLst>
           </p:cNvPr>
@@ -11958,7 +12435,7 @@
           <p:cNvPr id="48" name="">
             <a:extLst xmlns:a="http://schemas.openxmlformats.org/drawingml/2006/main">
               <a:ext uri="{FF2B5EF4-FFF2-40B4-BE49-F238E27FC236}">
-                <a16:creationId xmlns:a16="http://schemas.microsoft.com/office/drawing/2014/main" id="{8C3068D1-BF55-4C6A-871F-4E86DEA7CD96}"/>
+                <a16:creationId xmlns:a16="http://schemas.microsoft.com/office/drawing/2014/main" id="{E6FF8DA5-9099-4E99-9711-CA98E6A0B37A}"/>
               </a:ext>
             </a:extLst>
           </p:cNvPr>
@@ -11991,7 +12468,7 @@
           <p:cNvPr id="49" name="">
             <a:extLst xmlns:a="http://schemas.openxmlformats.org/drawingml/2006/main">
               <a:ext uri="{FF2B5EF4-FFF2-40B4-BE49-F238E27FC236}">
-                <a16:creationId xmlns:a16="http://schemas.microsoft.com/office/drawing/2014/main" id="{E31ED90D-10A4-42AE-851B-DEB2218E35DD}"/>
+                <a16:creationId xmlns:a16="http://schemas.microsoft.com/office/drawing/2014/main" id="{62A45727-5B99-46C5-8B3C-C6ACFE2050E8}"/>
               </a:ext>
             </a:extLst>
           </p:cNvPr>
@@ -12055,7 +12532,7 @@
           <p:cNvPr id="50" name="">
             <a:extLst xmlns:a="http://schemas.openxmlformats.org/drawingml/2006/main">
               <a:ext uri="{FF2B5EF4-FFF2-40B4-BE49-F238E27FC236}">
-                <a16:creationId xmlns:a16="http://schemas.microsoft.com/office/drawing/2014/main" id="{41D7818B-EC36-4B3F-BCD7-C269763BDC6B}"/>
+                <a16:creationId xmlns:a16="http://schemas.microsoft.com/office/drawing/2014/main" id="{CA439905-BCD0-448D-AC99-91E486708D6F}"/>
               </a:ext>
             </a:extLst>
           </p:cNvPr>
@@ -12142,7 +12619,7 @@
           <p:cNvPr id="51" name="">
             <a:extLst xmlns:a="http://schemas.openxmlformats.org/drawingml/2006/main">
               <a:ext uri="{FF2B5EF4-FFF2-40B4-BE49-F238E27FC236}">
-                <a16:creationId xmlns:a16="http://schemas.microsoft.com/office/drawing/2014/main" id="{0D137BA6-4D43-49BD-B7EC-C4D54290628C}"/>
+                <a16:creationId xmlns:a16="http://schemas.microsoft.com/office/drawing/2014/main" id="{C1797E02-B653-4C55-AF4F-51E8DC871D1C}"/>
               </a:ext>
             </a:extLst>
           </p:cNvPr>
@@ -12175,7 +12652,7 @@
           <p:cNvPr id="52" name="">
             <a:extLst xmlns:a="http://schemas.openxmlformats.org/drawingml/2006/main">
               <a:ext uri="{FF2B5EF4-FFF2-40B4-BE49-F238E27FC236}">
-                <a16:creationId xmlns:a16="http://schemas.microsoft.com/office/drawing/2014/main" id="{E134F543-50B7-4977-AF77-E1BEC24B31F6}"/>
+                <a16:creationId xmlns:a16="http://schemas.microsoft.com/office/drawing/2014/main" id="{730DC481-7420-4BFA-B029-2F687B2DA482}"/>
               </a:ext>
             </a:extLst>
           </p:cNvPr>
@@ -12239,7 +12716,7 @@
           <p:cNvPr id="53" name="">
             <a:extLst xmlns:a="http://schemas.openxmlformats.org/drawingml/2006/main">
               <a:ext uri="{FF2B5EF4-FFF2-40B4-BE49-F238E27FC236}">
-                <a16:creationId xmlns:a16="http://schemas.microsoft.com/office/drawing/2014/main" id="{645CD4DD-79A0-4D88-9A7B-89A6B5D712C9}"/>
+                <a16:creationId xmlns:a16="http://schemas.microsoft.com/office/drawing/2014/main" id="{1B09E58E-57ED-456F-AF90-C2F8AF5A974A}"/>
               </a:ext>
             </a:extLst>
           </p:cNvPr>
@@ -12326,7 +12803,7 @@
           <p:cNvPr id="54" name="">
             <a:extLst xmlns:a="http://schemas.openxmlformats.org/drawingml/2006/main">
               <a:ext uri="{FF2B5EF4-FFF2-40B4-BE49-F238E27FC236}">
-                <a16:creationId xmlns:a16="http://schemas.microsoft.com/office/drawing/2014/main" id="{6A9C47E9-4CCD-4FCA-80F1-DBA5C47CE6CD}"/>
+                <a16:creationId xmlns:a16="http://schemas.microsoft.com/office/drawing/2014/main" id="{280ABA8E-B1FA-4B2F-9F46-9E11DF9A1B8E}"/>
               </a:ext>
             </a:extLst>
           </p:cNvPr>
@@ -12359,7 +12836,7 @@
           <p:cNvPr id="55" name="">
             <a:extLst xmlns:a="http://schemas.openxmlformats.org/drawingml/2006/main">
               <a:ext uri="{FF2B5EF4-FFF2-40B4-BE49-F238E27FC236}">
-                <a16:creationId xmlns:a16="http://schemas.microsoft.com/office/drawing/2014/main" id="{B431E172-E937-4FAD-9ECA-2EFF2F067055}"/>
+                <a16:creationId xmlns:a16="http://schemas.microsoft.com/office/drawing/2014/main" id="{39CD1091-07CB-43BE-813F-30961C42BABF}"/>
               </a:ext>
             </a:extLst>
           </p:cNvPr>
@@ -12423,7 +12900,7 @@
           <p:cNvPr id="56" name="">
             <a:extLst xmlns:a="http://schemas.openxmlformats.org/drawingml/2006/main">
               <a:ext uri="{FF2B5EF4-FFF2-40B4-BE49-F238E27FC236}">
-                <a16:creationId xmlns:a16="http://schemas.microsoft.com/office/drawing/2014/main" id="{2D97348C-C0AC-4734-B8F1-57FAD0D10CC8}"/>
+                <a16:creationId xmlns:a16="http://schemas.microsoft.com/office/drawing/2014/main" id="{FA92B360-18EC-4EE7-8E10-0920BF7B90FA}"/>
               </a:ext>
             </a:extLst>
           </p:cNvPr>
@@ -12456,7 +12933,7 @@
           <p:cNvPr id="57" name="">
             <a:extLst xmlns:a="http://schemas.openxmlformats.org/drawingml/2006/main">
               <a:ext uri="{FF2B5EF4-FFF2-40B4-BE49-F238E27FC236}">
-                <a16:creationId xmlns:a16="http://schemas.microsoft.com/office/drawing/2014/main" id="{225B1139-DB8F-4AC1-985F-28B446DC4688}"/>
+                <a16:creationId xmlns:a16="http://schemas.microsoft.com/office/drawing/2014/main" id="{2684DB18-A260-490D-A1D5-9E73D977F997}"/>
               </a:ext>
             </a:extLst>
           </p:cNvPr>
@@ -12510,7 +12987,7 @@
                 <a:ea typeface="Hiragino Sans"/>
                 <a:cs typeface="Hiragino Sans"/>
               </a:rPr>
-              <a:t>Mβ: 切断モーメント</a:t>
+              <a:t>Mβ: 保持内</a:t>
             </a:r>
           </a:p>
         </p:txBody>
@@ -12520,7 +12997,7 @@
           <p:cNvPr id="58" name="">
             <a:extLst xmlns:a="http://schemas.openxmlformats.org/drawingml/2006/main">
               <a:ext uri="{FF2B5EF4-FFF2-40B4-BE49-F238E27FC236}">
-                <a16:creationId xmlns:a16="http://schemas.microsoft.com/office/drawing/2014/main" id="{ED33C686-0BE2-4805-8892-7624DD69EBD3}"/>
+                <a16:creationId xmlns:a16="http://schemas.microsoft.com/office/drawing/2014/main" id="{8B74DAC6-D0B3-498D-8660-0799ACC936F4}"/>
               </a:ext>
             </a:extLst>
           </p:cNvPr>
@@ -12553,7 +13030,7 @@
           <p:cNvPr id="59" name="">
             <a:extLst xmlns:a="http://schemas.openxmlformats.org/drawingml/2006/main">
               <a:ext uri="{FF2B5EF4-FFF2-40B4-BE49-F238E27FC236}">
-                <a16:creationId xmlns:a16="http://schemas.microsoft.com/office/drawing/2014/main" id="{8172AF42-AC0F-40EC-81B7-15526D49CBB4}"/>
+                <a16:creationId xmlns:a16="http://schemas.microsoft.com/office/drawing/2014/main" id="{6025C919-3C3C-4560-8611-FD9D4204000F}"/>
               </a:ext>
             </a:extLst>
           </p:cNvPr>
@@ -12617,19 +13094,19 @@
           <p:cNvPr id="60" name="">
             <a:extLst xmlns:a="http://schemas.openxmlformats.org/drawingml/2006/main">
               <a:ext uri="{FF2B5EF4-FFF2-40B4-BE49-F238E27FC236}">
-                <a16:creationId xmlns:a16="http://schemas.microsoft.com/office/drawing/2014/main" id="{2B7B18EC-6F31-4AE5-B891-9A66A9ABE12E}"/>
-              </a:ext>
-            </a:extLst>
-          </p:cNvPr>
-          <p:cNvSpPr>
-            <a:spLocks xmlns:a="http://schemas.openxmlformats.org/drawingml/2006/main" noGrp="1"/>
-          </p:cNvSpPr>
-          <p:nvPr/>
-        </p:nvSpPr>
-        <p:spPr>
-          <a:xfrm xmlns:a="http://schemas.openxmlformats.org/drawingml/2006/main">
-            <a:off x="8972550" y="4686300"/>
-            <a:ext cx="1809750" cy="666750"/>
+                <a16:creationId xmlns:a16="http://schemas.microsoft.com/office/drawing/2014/main" id="{11836BBD-12FC-4AE1-BCFD-628723C59384}"/>
+              </a:ext>
+            </a:extLst>
+          </p:cNvPr>
+          <p:cNvSpPr>
+            <a:spLocks xmlns:a="http://schemas.openxmlformats.org/drawingml/2006/main" noGrp="1"/>
+          </p:cNvSpPr>
+          <p:nvPr/>
+        </p:nvSpPr>
+        <p:spPr>
+          <a:xfrm xmlns:a="http://schemas.openxmlformats.org/drawingml/2006/main">
+            <a:off x="8915400" y="4705350"/>
+            <a:ext cx="1905000" cy="514350"/>
           </a:xfrm>
           <a:prstGeom xmlns:a="http://schemas.openxmlformats.org/drawingml/2006/main" prst="rect">
             <a:avLst/>
@@ -12653,9 +13130,9 @@
           <a:lstStyle xmlns:a="http://schemas.openxmlformats.org/drawingml/2006/main"/>
           <a:p xmlns:a="http://schemas.openxmlformats.org/drawingml/2006/main">
             <a:pPr algn="ctr">
-              <a:defRPr sz="938" b="0">
-                <a:solidFill>
-                  <a:srgbClr val="A8B1BA"/>
+              <a:defRPr sz="975" b="0">
+                <a:solidFill>
+                  <a:srgbClr val="F8F2E8"/>
                 </a:solidFill>
                 <a:latin typeface="Hiragino Sans"/>
                 <a:ea typeface="Hiragino Sans"/>
@@ -12663,22 +13140,22 @@
               </a:defRPr>
             </a:pPr>
             <a:r>
-              <a:rPr sz="938" b="0">
-                <a:solidFill>
-                  <a:srgbClr val="A8B1BA"/>
+              <a:rPr sz="975" b="0">
+                <a:solidFill>
+                  <a:srgbClr val="F8F2E8"/>
                 </a:solidFill>
                 <a:latin typeface="Hiragino Sans"/>
                 <a:ea typeface="Hiragino Sans"/>
                 <a:cs typeface="Hiragino Sans"/>
               </a:rPr>
-              <a:t>保持を少し延ばす便益と</a:t>
+              <a:t>ここで見るのは、</a:t>
             </a:r>
           </a:p>
           <a:p xmlns:a="http://schemas.openxmlformats.org/drawingml/2006/main">
             <a:pPr algn="ctr">
-              <a:defRPr sz="938" b="0">
-                <a:solidFill>
-                  <a:srgbClr val="A8B1BA"/>
+              <a:defRPr sz="975" b="0">
+                <a:solidFill>
+                  <a:srgbClr val="F8F2E8"/>
                 </a:solidFill>
                 <a:latin typeface="Hiragino Sans"/>
                 <a:ea typeface="Hiragino Sans"/>
@@ -12686,38 +13163,15 @@
               </a:defRPr>
             </a:pPr>
             <a:r>
-              <a:rPr sz="938" b="0">
-                <a:solidFill>
-                  <a:srgbClr val="A8B1BA"/>
+              <a:rPr sz="975" b="0">
+                <a:solidFill>
+                  <a:srgbClr val="F8F2E8"/>
                 </a:solidFill>
                 <a:latin typeface="Hiragino Sans"/>
                 <a:ea typeface="Hiragino Sans"/>
                 <a:cs typeface="Hiragino Sans"/>
               </a:rPr>
-              <a:t>スキャン停止時間の費用が</a:t>
-            </a:r>
-          </a:p>
-          <a:p xmlns:a="http://schemas.openxmlformats.org/drawingml/2006/main">
-            <a:pPr algn="ctr">
-              <a:defRPr sz="938" b="0">
-                <a:solidFill>
-                  <a:srgbClr val="A8B1BA"/>
-                </a:solidFill>
-                <a:latin typeface="Hiragino Sans"/>
-                <a:ea typeface="Hiragino Sans"/>
-                <a:cs typeface="Hiragino Sans"/>
-              </a:defRPr>
-            </a:pPr>
-            <a:r>
-              <a:rPr sz="938" b="0">
-                <a:solidFill>
-                  <a:srgbClr val="A8B1BA"/>
-                </a:solidFill>
-                <a:latin typeface="Hiragino Sans"/>
-                <a:ea typeface="Hiragino Sans"/>
-                <a:cs typeface="Hiragino Sans"/>
-              </a:rPr>
-              <a:t>釣り合う点が設計式になる。</a:t>
+              <a:t>どの分岐が Δ で変わるか。</a:t>
             </a:r>
           </a:p>
         </p:txBody>
@@ -12727,7 +13181,7 @@
           <p:cNvPr id="61" name="">
             <a:extLst xmlns:a="http://schemas.openxmlformats.org/drawingml/2006/main">
               <a:ext uri="{FF2B5EF4-FFF2-40B4-BE49-F238E27FC236}">
-                <a16:creationId xmlns:a16="http://schemas.microsoft.com/office/drawing/2014/main" id="{66F83E35-3D9B-4D8D-891E-97E6B0F86914}"/>
+                <a16:creationId xmlns:a16="http://schemas.microsoft.com/office/drawing/2014/main" id="{8E4187F9-A7F5-49D0-BD55-6AE7742EFC2E}"/>
               </a:ext>
             </a:extLst>
           </p:cNvPr>
@@ -12762,7 +13216,7 @@
           <p:cNvPr id="62" name="">
             <a:extLst xmlns:a="http://schemas.openxmlformats.org/drawingml/2006/main">
               <a:ext uri="{FF2B5EF4-FFF2-40B4-BE49-F238E27FC236}">
-                <a16:creationId xmlns:a16="http://schemas.microsoft.com/office/drawing/2014/main" id="{6CCF4739-45D6-41E2-93EE-B09BB52CCC1B}"/>
+                <a16:creationId xmlns:a16="http://schemas.microsoft.com/office/drawing/2014/main" id="{7F6654A2-2060-40C8-BBD3-3BE619B8AC92}"/>
               </a:ext>
             </a:extLst>
           </p:cNvPr>
@@ -12826,7 +13280,7 @@
           <p:cNvPr id="63" name="">
             <a:extLst xmlns:a="http://schemas.openxmlformats.org/drawingml/2006/main">
               <a:ext uri="{FF2B5EF4-FFF2-40B4-BE49-F238E27FC236}">
-                <a16:creationId xmlns:a16="http://schemas.microsoft.com/office/drawing/2014/main" id="{736456AB-6F0C-457E-ABED-CE7A5DC28020}"/>
+                <a16:creationId xmlns:a16="http://schemas.microsoft.com/office/drawing/2014/main" id="{BE3DF042-5C67-46F0-BEDC-CDE6435F1037}"/>
               </a:ext>
             </a:extLst>
           </p:cNvPr>
@@ -12888,7 +13342,7 @@
     </p:spTree>
     <p:extLst>
       <p:ext uri="{BB962C8B-B14F-4D97-AF65-F5344CB8AC3E}">
-        <p14:creationId xmlns:p14="http://schemas.microsoft.com/office/powerpoint/2010/main" val="1894885199"/>
+        <p14:creationId xmlns:p14="http://schemas.microsoft.com/office/powerpoint/2010/main" val="174122464"/>
       </p:ext>
     </p:extLst>
   </p:cSld>
@@ -12912,7 +13366,7 @@
           <p:cNvPr id="1" name="">
             <a:extLst xmlns:a="http://schemas.openxmlformats.org/drawingml/2006/main">
               <a:ext uri="{FF2B5EF4-FFF2-40B4-BE49-F238E27FC236}">
-                <a16:creationId xmlns:a16="http://schemas.microsoft.com/office/drawing/2014/main" id="{C18D77D7-A2C9-419E-87B9-8A3D8A7AAFBA}"/>
+                <a16:creationId xmlns:a16="http://schemas.microsoft.com/office/drawing/2014/main" id="{B0922503-BAD4-4CC3-AA71-FF6544290983}"/>
               </a:ext>
             </a:extLst>
           </p:cNvPr>
@@ -12947,7 +13401,7 @@
           <p:cNvPr id="2" name="">
             <a:extLst xmlns:a="http://schemas.openxmlformats.org/drawingml/2006/main">
               <a:ext uri="{FF2B5EF4-FFF2-40B4-BE49-F238E27FC236}">
-                <a16:creationId xmlns:a16="http://schemas.microsoft.com/office/drawing/2014/main" id="{4F862C08-70D7-499C-8F6D-AEBA9E4916FD}"/>
+                <a16:creationId xmlns:a16="http://schemas.microsoft.com/office/drawing/2014/main" id="{6619A4FA-D7B1-4323-91B2-8AB4C68834B0}"/>
               </a:ext>
             </a:extLst>
           </p:cNvPr>
@@ -12982,7 +13436,7 @@
           <p:cNvPr id="3" name="">
             <a:extLst xmlns:a="http://schemas.openxmlformats.org/drawingml/2006/main">
               <a:ext uri="{FF2B5EF4-FFF2-40B4-BE49-F238E27FC236}">
-                <a16:creationId xmlns:a16="http://schemas.microsoft.com/office/drawing/2014/main" id="{D68FEEAA-F6FF-4D62-B7F1-B023499734B7}"/>
+                <a16:creationId xmlns:a16="http://schemas.microsoft.com/office/drawing/2014/main" id="{A11F6F3D-DA20-4410-8745-AA98721D060E}"/>
               </a:ext>
             </a:extLst>
           </p:cNvPr>
@@ -13017,7 +13471,7 @@
           <p:cNvPr id="4" name="">
             <a:extLst xmlns:a="http://schemas.openxmlformats.org/drawingml/2006/main">
               <a:ext uri="{FF2B5EF4-FFF2-40B4-BE49-F238E27FC236}">
-                <a16:creationId xmlns:a16="http://schemas.microsoft.com/office/drawing/2014/main" id="{44B77846-F206-4906-9328-95BC19A275FE}"/>
+                <a16:creationId xmlns:a16="http://schemas.microsoft.com/office/drawing/2014/main" id="{0EAAA7C5-5370-4345-9A5C-E7C880E3C0CC}"/>
               </a:ext>
             </a:extLst>
           </p:cNvPr>
@@ -13052,7 +13506,7 @@
           <p:cNvPr id="5" name="">
             <a:extLst xmlns:a="http://schemas.openxmlformats.org/drawingml/2006/main">
               <a:ext uri="{FF2B5EF4-FFF2-40B4-BE49-F238E27FC236}">
-                <a16:creationId xmlns:a16="http://schemas.microsoft.com/office/drawing/2014/main" id="{BBACAE29-49B3-4C05-BB4B-B26FD243F557}"/>
+                <a16:creationId xmlns:a16="http://schemas.microsoft.com/office/drawing/2014/main" id="{212EFCB9-E267-4CD5-852A-030E25ADDF3F}"/>
               </a:ext>
             </a:extLst>
           </p:cNvPr>
@@ -13087,7 +13541,7 @@
           <p:cNvPr id="6" name="">
             <a:extLst xmlns:a="http://schemas.openxmlformats.org/drawingml/2006/main">
               <a:ext uri="{FF2B5EF4-FFF2-40B4-BE49-F238E27FC236}">
-                <a16:creationId xmlns:a16="http://schemas.microsoft.com/office/drawing/2014/main" id="{04B16162-2B03-4A49-883E-0DDC2FBD8560}"/>
+                <a16:creationId xmlns:a16="http://schemas.microsoft.com/office/drawing/2014/main" id="{0CC219C1-6899-4625-973A-D878CC4953C3}"/>
               </a:ext>
             </a:extLst>
           </p:cNvPr>
@@ -13122,7 +13576,7 @@
           <p:cNvPr id="7" name="">
             <a:extLst xmlns:a="http://schemas.openxmlformats.org/drawingml/2006/main">
               <a:ext uri="{FF2B5EF4-FFF2-40B4-BE49-F238E27FC236}">
-                <a16:creationId xmlns:a16="http://schemas.microsoft.com/office/drawing/2014/main" id="{B6FC6D97-BF5F-4AD1-A164-5AC832BACC0B}"/>
+                <a16:creationId xmlns:a16="http://schemas.microsoft.com/office/drawing/2014/main" id="{6EDA8977-1283-4894-AD53-0E900701E9D3}"/>
               </a:ext>
             </a:extLst>
           </p:cNvPr>
@@ -13157,7 +13611,7 @@
           <p:cNvPr id="8" name="">
             <a:extLst xmlns:a="http://schemas.openxmlformats.org/drawingml/2006/main">
               <a:ext uri="{FF2B5EF4-FFF2-40B4-BE49-F238E27FC236}">
-                <a16:creationId xmlns:a16="http://schemas.microsoft.com/office/drawing/2014/main" id="{E6E204FF-88CF-4410-9293-FF50812E6D43}"/>
+                <a16:creationId xmlns:a16="http://schemas.microsoft.com/office/drawing/2014/main" id="{51F1D965-05D0-4D1D-93BB-5FEDC4F8BB5B}"/>
               </a:ext>
             </a:extLst>
           </p:cNvPr>
@@ -13192,7 +13646,7 @@
           <p:cNvPr id="9" name="">
             <a:extLst xmlns:a="http://schemas.openxmlformats.org/drawingml/2006/main">
               <a:ext uri="{FF2B5EF4-FFF2-40B4-BE49-F238E27FC236}">
-                <a16:creationId xmlns:a16="http://schemas.microsoft.com/office/drawing/2014/main" id="{60F84A06-9E3B-4E73-BD73-C9797532AA2E}"/>
+                <a16:creationId xmlns:a16="http://schemas.microsoft.com/office/drawing/2014/main" id="{0B8C80E7-AA64-40AA-B8B0-43CA0086C1E2}"/>
               </a:ext>
             </a:extLst>
           </p:cNvPr>
@@ -13227,7 +13681,7 @@
           <p:cNvPr id="10" name="">
             <a:extLst xmlns:a="http://schemas.openxmlformats.org/drawingml/2006/main">
               <a:ext uri="{FF2B5EF4-FFF2-40B4-BE49-F238E27FC236}">
-                <a16:creationId xmlns:a16="http://schemas.microsoft.com/office/drawing/2014/main" id="{4647BDC6-D8E8-4DA5-ACB5-D8735DFE9F4C}"/>
+                <a16:creationId xmlns:a16="http://schemas.microsoft.com/office/drawing/2014/main" id="{834A1F6E-0C05-4156-98FF-1C70D08234F3}"/>
               </a:ext>
             </a:extLst>
           </p:cNvPr>
@@ -13262,7 +13716,7 @@
           <p:cNvPr id="11" name="">
             <a:extLst xmlns:a="http://schemas.openxmlformats.org/drawingml/2006/main">
               <a:ext uri="{FF2B5EF4-FFF2-40B4-BE49-F238E27FC236}">
-                <a16:creationId xmlns:a16="http://schemas.microsoft.com/office/drawing/2014/main" id="{F5F5D1E1-A2CA-4E7A-A1DA-504CDF78CCF9}"/>
+                <a16:creationId xmlns:a16="http://schemas.microsoft.com/office/drawing/2014/main" id="{792E8117-72F1-48D4-BB92-76EB2BFE33C8}"/>
               </a:ext>
             </a:extLst>
           </p:cNvPr>
@@ -13297,7 +13751,7 @@
           <p:cNvPr id="12" name="">
             <a:extLst xmlns:a="http://schemas.openxmlformats.org/drawingml/2006/main">
               <a:ext uri="{FF2B5EF4-FFF2-40B4-BE49-F238E27FC236}">
-                <a16:creationId xmlns:a16="http://schemas.microsoft.com/office/drawing/2014/main" id="{81954FD4-5B9F-45B5-9217-50FDB2804464}"/>
+                <a16:creationId xmlns:a16="http://schemas.microsoft.com/office/drawing/2014/main" id="{61EDDD8F-3704-4D83-828C-27FE10B88171}"/>
               </a:ext>
             </a:extLst>
           </p:cNvPr>
@@ -13332,7 +13786,7 @@
           <p:cNvPr id="13" name="">
             <a:extLst xmlns:a="http://schemas.openxmlformats.org/drawingml/2006/main">
               <a:ext uri="{FF2B5EF4-FFF2-40B4-BE49-F238E27FC236}">
-                <a16:creationId xmlns:a16="http://schemas.microsoft.com/office/drawing/2014/main" id="{931990CF-66A3-4463-9761-78BC036919B0}"/>
+                <a16:creationId xmlns:a16="http://schemas.microsoft.com/office/drawing/2014/main" id="{E9F0886C-F835-4686-B6A6-4AE97CF06CD8}"/>
               </a:ext>
             </a:extLst>
           </p:cNvPr>
@@ -13367,7 +13821,7 @@
           <p:cNvPr id="14" name="">
             <a:extLst xmlns:a="http://schemas.openxmlformats.org/drawingml/2006/main">
               <a:ext uri="{FF2B5EF4-FFF2-40B4-BE49-F238E27FC236}">
-                <a16:creationId xmlns:a16="http://schemas.microsoft.com/office/drawing/2014/main" id="{59D47D7D-4E98-4558-AE8E-108C805F45DB}"/>
+                <a16:creationId xmlns:a16="http://schemas.microsoft.com/office/drawing/2014/main" id="{536750ED-B5A1-4C59-8096-1296CBDFB9DA}"/>
               </a:ext>
             </a:extLst>
           </p:cNvPr>
@@ -13402,7 +13856,7 @@
           <p:cNvPr id="15" name="">
             <a:extLst xmlns:a="http://schemas.openxmlformats.org/drawingml/2006/main">
               <a:ext uri="{FF2B5EF4-FFF2-40B4-BE49-F238E27FC236}">
-                <a16:creationId xmlns:a16="http://schemas.microsoft.com/office/drawing/2014/main" id="{0944AB2F-CDE8-4373-B6B6-A432DC334992}"/>
+                <a16:creationId xmlns:a16="http://schemas.microsoft.com/office/drawing/2014/main" id="{AD4AB6EB-14FC-4740-9561-D5B27642A312}"/>
               </a:ext>
             </a:extLst>
           </p:cNvPr>
@@ -13437,7 +13891,7 @@
           <p:cNvPr id="16" name="">
             <a:extLst xmlns:a="http://schemas.openxmlformats.org/drawingml/2006/main">
               <a:ext uri="{FF2B5EF4-FFF2-40B4-BE49-F238E27FC236}">
-                <a16:creationId xmlns:a16="http://schemas.microsoft.com/office/drawing/2014/main" id="{A4CF5E2C-F70D-4569-93C2-A2EA49A2BAB2}"/>
+                <a16:creationId xmlns:a16="http://schemas.microsoft.com/office/drawing/2014/main" id="{91804242-4C9E-4B39-9F68-9F2E9C83C96A}"/>
               </a:ext>
             </a:extLst>
           </p:cNvPr>
@@ -13472,7 +13926,7 @@
           <p:cNvPr id="17" name="">
             <a:extLst xmlns:a="http://schemas.openxmlformats.org/drawingml/2006/main">
               <a:ext uri="{FF2B5EF4-FFF2-40B4-BE49-F238E27FC236}">
-                <a16:creationId xmlns:a16="http://schemas.microsoft.com/office/drawing/2014/main" id="{DE2E49C5-5015-421C-96F8-9724DA62B021}"/>
+                <a16:creationId xmlns:a16="http://schemas.microsoft.com/office/drawing/2014/main" id="{0B562881-1D70-4FA1-BC94-46CDEA29E09F}"/>
               </a:ext>
             </a:extLst>
           </p:cNvPr>
@@ -13507,7 +13961,7 @@
           <p:cNvPr id="18" name="">
             <a:extLst xmlns:a="http://schemas.openxmlformats.org/drawingml/2006/main">
               <a:ext uri="{FF2B5EF4-FFF2-40B4-BE49-F238E27FC236}">
-                <a16:creationId xmlns:a16="http://schemas.microsoft.com/office/drawing/2014/main" id="{EA33A672-4A16-4CDB-B772-BDA7B86514A4}"/>
+                <a16:creationId xmlns:a16="http://schemas.microsoft.com/office/drawing/2014/main" id="{00F723AD-39F6-4BF5-B4EF-AC31E972AB44}"/>
               </a:ext>
             </a:extLst>
           </p:cNvPr>
@@ -13542,7 +13996,7 @@
           <p:cNvPr id="19" name="">
             <a:extLst xmlns:a="http://schemas.openxmlformats.org/drawingml/2006/main">
               <a:ext uri="{FF2B5EF4-FFF2-40B4-BE49-F238E27FC236}">
-                <a16:creationId xmlns:a16="http://schemas.microsoft.com/office/drawing/2014/main" id="{ECE9A873-3254-4F27-A8C8-E74B074B6CC0}"/>
+                <a16:creationId xmlns:a16="http://schemas.microsoft.com/office/drawing/2014/main" id="{0012FD95-4259-42F3-8BBF-1F423F4E71F9}"/>
               </a:ext>
             </a:extLst>
           </p:cNvPr>
@@ -13577,7 +14031,7 @@
           <p:cNvPr id="20" name="">
             <a:extLst xmlns:a="http://schemas.openxmlformats.org/drawingml/2006/main">
               <a:ext uri="{FF2B5EF4-FFF2-40B4-BE49-F238E27FC236}">
-                <a16:creationId xmlns:a16="http://schemas.microsoft.com/office/drawing/2014/main" id="{279BB9E0-C9C9-4626-AC29-91CF4A440CD2}"/>
+                <a16:creationId xmlns:a16="http://schemas.microsoft.com/office/drawing/2014/main" id="{95278FAE-246F-4A7C-B43B-63979642EDC8}"/>
               </a:ext>
             </a:extLst>
           </p:cNvPr>
@@ -13612,7 +14066,7 @@
           <p:cNvPr id="21" name="">
             <a:extLst xmlns:a="http://schemas.openxmlformats.org/drawingml/2006/main">
               <a:ext uri="{FF2B5EF4-FFF2-40B4-BE49-F238E27FC236}">
-                <a16:creationId xmlns:a16="http://schemas.microsoft.com/office/drawing/2014/main" id="{70D1F2CA-A487-4BD8-B13E-D719C1FBDB13}"/>
+                <a16:creationId xmlns:a16="http://schemas.microsoft.com/office/drawing/2014/main" id="{233077C3-671B-4420-8E53-0758779B363E}"/>
               </a:ext>
             </a:extLst>
           </p:cNvPr>
@@ -13647,7 +14101,7 @@
           <p:cNvPr id="22" name="">
             <a:extLst xmlns:a="http://schemas.openxmlformats.org/drawingml/2006/main">
               <a:ext uri="{FF2B5EF4-FFF2-40B4-BE49-F238E27FC236}">
-                <a16:creationId xmlns:a16="http://schemas.microsoft.com/office/drawing/2014/main" id="{A17139C3-3A24-476C-946D-C37263718CD8}"/>
+                <a16:creationId xmlns:a16="http://schemas.microsoft.com/office/drawing/2014/main" id="{E3998D4D-C371-4364-B7D3-300CDBA8D8A7}"/>
               </a:ext>
             </a:extLst>
           </p:cNvPr>
@@ -13682,7 +14136,7 @@
           <p:cNvPr id="23" name="">
             <a:extLst xmlns:a="http://schemas.openxmlformats.org/drawingml/2006/main">
               <a:ext uri="{FF2B5EF4-FFF2-40B4-BE49-F238E27FC236}">
-                <a16:creationId xmlns:a16="http://schemas.microsoft.com/office/drawing/2014/main" id="{155354EE-E888-4DD8-8C74-92AF579BC311}"/>
+                <a16:creationId xmlns:a16="http://schemas.microsoft.com/office/drawing/2014/main" id="{5C5A62B5-E385-4559-90EE-FC3B9D42E90E}"/>
               </a:ext>
             </a:extLst>
           </p:cNvPr>
@@ -13717,7 +14171,7 @@
           <p:cNvPr id="24" name="">
             <a:extLst xmlns:a="http://schemas.openxmlformats.org/drawingml/2006/main">
               <a:ext uri="{FF2B5EF4-FFF2-40B4-BE49-F238E27FC236}">
-                <a16:creationId xmlns:a16="http://schemas.microsoft.com/office/drawing/2014/main" id="{193A640A-2708-498F-8E14-D2AC5B2BB199}"/>
+                <a16:creationId xmlns:a16="http://schemas.microsoft.com/office/drawing/2014/main" id="{01D10753-844A-46A0-958C-26C5E2FE5C0C}"/>
               </a:ext>
             </a:extLst>
           </p:cNvPr>
@@ -13752,7 +14206,7 @@
           <p:cNvPr id="25" name="">
             <a:extLst xmlns:a="http://schemas.openxmlformats.org/drawingml/2006/main">
               <a:ext uri="{FF2B5EF4-FFF2-40B4-BE49-F238E27FC236}">
-                <a16:creationId xmlns:a16="http://schemas.microsoft.com/office/drawing/2014/main" id="{467C4FD3-0381-4751-9313-33D42BBC4797}"/>
+                <a16:creationId xmlns:a16="http://schemas.microsoft.com/office/drawing/2014/main" id="{32094267-BB18-4CBB-85B2-62E7FF5BECBB}"/>
               </a:ext>
             </a:extLst>
           </p:cNvPr>
@@ -13787,7 +14241,7 @@
           <p:cNvPr id="26" name="">
             <a:extLst xmlns:a="http://schemas.openxmlformats.org/drawingml/2006/main">
               <a:ext uri="{FF2B5EF4-FFF2-40B4-BE49-F238E27FC236}">
-                <a16:creationId xmlns:a16="http://schemas.microsoft.com/office/drawing/2014/main" id="{446B1C6A-1625-470F-85D7-B63FE38CB474}"/>
+                <a16:creationId xmlns:a16="http://schemas.microsoft.com/office/drawing/2014/main" id="{1FD77ABF-4E0E-4D12-A6CA-734961F4D5B8}"/>
               </a:ext>
             </a:extLst>
           </p:cNvPr>
@@ -13822,7 +14276,7 @@
           <p:cNvPr id="27" name="">
             <a:extLst xmlns:a="http://schemas.openxmlformats.org/drawingml/2006/main">
               <a:ext uri="{FF2B5EF4-FFF2-40B4-BE49-F238E27FC236}">
-                <a16:creationId xmlns:a16="http://schemas.microsoft.com/office/drawing/2014/main" id="{35F7ED94-7419-4EBF-AC45-FCBE5D9E4E94}"/>
+                <a16:creationId xmlns:a16="http://schemas.microsoft.com/office/drawing/2014/main" id="{900F3223-43CE-4A04-A466-9F77C2875BF7}"/>
               </a:ext>
             </a:extLst>
           </p:cNvPr>
@@ -13857,7 +14311,7 @@
           <p:cNvPr id="28" name="">
             <a:extLst xmlns:a="http://schemas.openxmlformats.org/drawingml/2006/main">
               <a:ext uri="{FF2B5EF4-FFF2-40B4-BE49-F238E27FC236}">
-                <a16:creationId xmlns:a16="http://schemas.microsoft.com/office/drawing/2014/main" id="{0E929C4B-A56B-4108-B357-543C34E8CE4E}"/>
+                <a16:creationId xmlns:a16="http://schemas.microsoft.com/office/drawing/2014/main" id="{01D54A5C-9FE7-41BE-9F5D-11DE49DDEE52}"/>
               </a:ext>
             </a:extLst>
           </p:cNvPr>
@@ -13892,7 +14346,7 @@
           <p:cNvPr id="29" name="">
             <a:extLst xmlns:a="http://schemas.openxmlformats.org/drawingml/2006/main">
               <a:ext uri="{FF2B5EF4-FFF2-40B4-BE49-F238E27FC236}">
-                <a16:creationId xmlns:a16="http://schemas.microsoft.com/office/drawing/2014/main" id="{667DAA99-B895-4400-972F-8BB653445CFE}"/>
+                <a16:creationId xmlns:a16="http://schemas.microsoft.com/office/drawing/2014/main" id="{D7D9C7CC-99AB-4141-B666-4322498DCB61}"/>
               </a:ext>
             </a:extLst>
           </p:cNvPr>
@@ -13927,7 +14381,7 @@
           <p:cNvPr id="30" name="">
             <a:extLst xmlns:a="http://schemas.openxmlformats.org/drawingml/2006/main">
               <a:ext uri="{FF2B5EF4-FFF2-40B4-BE49-F238E27FC236}">
-                <a16:creationId xmlns:a16="http://schemas.microsoft.com/office/drawing/2014/main" id="{4C5C6F0D-D464-4024-9B07-C239FCC85448}"/>
+                <a16:creationId xmlns:a16="http://schemas.microsoft.com/office/drawing/2014/main" id="{81DB5700-D8D6-4F6B-80E4-5C689C0FA965}"/>
               </a:ext>
             </a:extLst>
           </p:cNvPr>
@@ -13991,7 +14445,7 @@
           <p:cNvPr id="31" name="kicker-05-marker">
             <a:extLst xmlns:a="http://schemas.openxmlformats.org/drawingml/2006/main">
               <a:ext uri="{FF2B5EF4-FFF2-40B4-BE49-F238E27FC236}">
-                <a16:creationId xmlns:a16="http://schemas.microsoft.com/office/drawing/2014/main" id="{6B47B30E-EFE1-4340-97BF-AD076D75140E}"/>
+                <a16:creationId xmlns:a16="http://schemas.microsoft.com/office/drawing/2014/main" id="{083DB1A1-FF1A-4B8B-85D1-AA6DC83F6479}"/>
               </a:ext>
             </a:extLst>
           </p:cNvPr>
@@ -14026,7 +14480,7 @@
           <p:cNvPr id="32" name="kicker-05-label">
             <a:extLst xmlns:a="http://schemas.openxmlformats.org/drawingml/2006/main">
               <a:ext uri="{FF2B5EF4-FFF2-40B4-BE49-F238E27FC236}">
-                <a16:creationId xmlns:a16="http://schemas.microsoft.com/office/drawing/2014/main" id="{7814FFBA-567F-4343-909F-AF09F373F5EB}"/>
+                <a16:creationId xmlns:a16="http://schemas.microsoft.com/office/drawing/2014/main" id="{DA706F33-F970-4A72-96E4-259873770AF0}"/>
               </a:ext>
             </a:extLst>
           </p:cNvPr>
@@ -14090,7 +14544,7 @@
           <p:cNvPr id="33" name="">
             <a:extLst xmlns:a="http://schemas.openxmlformats.org/drawingml/2006/main">
               <a:ext uri="{FF2B5EF4-FFF2-40B4-BE49-F238E27FC236}">
-                <a16:creationId xmlns:a16="http://schemas.microsoft.com/office/drawing/2014/main" id="{16CEA11A-C07C-49FD-9EF0-DF83F719ADA4}"/>
+                <a16:creationId xmlns:a16="http://schemas.microsoft.com/office/drawing/2014/main" id="{7D4AD6EF-3F3A-40BF-81D4-1B2D3ABD9C53}"/>
               </a:ext>
             </a:extLst>
           </p:cNvPr>
@@ -14102,7 +14556,7 @@
         <p:spPr>
           <a:xfrm xmlns:a="http://schemas.openxmlformats.org/drawingml/2006/main">
             <a:off x="552450" y="781050"/>
-            <a:ext cx="7239000" cy="647700"/>
+            <a:ext cx="7239000" cy="628650"/>
           </a:xfrm>
           <a:prstGeom xmlns:a="http://schemas.openxmlformats.org/drawingml/2006/main" prst="rect">
             <a:avLst/>
@@ -14126,7 +14580,7 @@
           <a:lstStyle xmlns:a="http://schemas.openxmlformats.org/drawingml/2006/main"/>
           <a:p xmlns:a="http://schemas.openxmlformats.org/drawingml/2006/main">
             <a:pPr algn="l">
-              <a:defRPr sz="2775" b="1">
+              <a:defRPr sz="2850" b="1">
                 <a:solidFill>
                   <a:srgbClr val="F8F2E8"/>
                 </a:solidFill>
@@ -14136,7 +14590,7 @@
               </a:defRPr>
             </a:pPr>
             <a:r>
-              <a:rPr sz="2775" b="1">
+              <a:rPr sz="2850" b="1">
                 <a:solidFill>
                   <a:srgbClr val="F8F2E8"/>
                 </a:solidFill>
@@ -14144,7 +14598,7 @@
                 <a:ea typeface="Hiragino Sans"/>
                 <a:cs typeface="Hiragino Sans"/>
               </a:rPr>
-              <a:t>まず決めるのは、間隔ではなく戻れる日数</a:t>
+              <a:t>式は、まず上下のかたまりを見る</a:t>
             </a:r>
           </a:p>
         </p:txBody>
@@ -14154,7 +14608,7 @@
           <p:cNvPr id="34" name="">
             <a:extLst xmlns:a="http://schemas.openxmlformats.org/drawingml/2006/main">
               <a:ext uri="{FF2B5EF4-FFF2-40B4-BE49-F238E27FC236}">
-                <a16:creationId xmlns:a16="http://schemas.microsoft.com/office/drawing/2014/main" id="{3AEC7DA2-E9AC-4356-A71D-3D23ABD2294F}"/>
+                <a16:creationId xmlns:a16="http://schemas.microsoft.com/office/drawing/2014/main" id="{216049F9-10D4-4FF3-A5A2-2805BE41E4D7}"/>
               </a:ext>
             </a:extLst>
           </p:cNvPr>
@@ -14166,7 +14620,7 @@
         <p:spPr>
           <a:xfrm xmlns:a="http://schemas.openxmlformats.org/drawingml/2006/main">
             <a:off x="590550" y="1466850"/>
-            <a:ext cx="6858000" cy="323850"/>
+            <a:ext cx="6858000" cy="342900"/>
           </a:xfrm>
           <a:prstGeom xmlns:a="http://schemas.openxmlformats.org/drawingml/2006/main" prst="rect">
             <a:avLst/>
@@ -14208,7 +14662,7 @@
                 <a:ea typeface="Hiragino Sans"/>
                 <a:cs typeface="Hiragino Sans"/>
               </a:rPr>
-              <a:t>清浄復旧ホライズン a* を先に決め、あとから保持世代数 n とバックアップ間隔 Δ に分解する。</a:t>
+              <a:t>細かい記号を追う前に、分子・分母・最後の n の3か所だけを見る。</a:t>
             </a:r>
           </a:p>
         </p:txBody>
@@ -14218,7 +14672,7 @@
           <p:cNvPr id="35" name="">
             <a:extLst xmlns:a="http://schemas.openxmlformats.org/drawingml/2006/main">
               <a:ext uri="{FF2B5EF4-FFF2-40B4-BE49-F238E27FC236}">
-                <a16:creationId xmlns:a16="http://schemas.microsoft.com/office/drawing/2014/main" id="{E50930C8-946D-45D3-8325-CEC467EE9926}"/>
+                <a16:creationId xmlns:a16="http://schemas.microsoft.com/office/drawing/2014/main" id="{440959C7-AEB9-4278-990D-1F0B24EF8CD5}"/>
               </a:ext>
             </a:extLst>
           </p:cNvPr>
@@ -14272,7 +14726,7 @@
                 <a:ea typeface="Hiragino Sans"/>
                 <a:cs typeface="Hiragino Sans"/>
               </a:rPr>
-              <a:t>a* FIRST</a:t>
+              <a:t>3 POINTS</a:t>
             </a:r>
           </a:p>
         </p:txBody>
@@ -14282,7 +14736,7 @@
           <p:cNvPr id="36" name="">
             <a:extLst xmlns:a="http://schemas.openxmlformats.org/drawingml/2006/main">
               <a:ext uri="{FF2B5EF4-FFF2-40B4-BE49-F238E27FC236}">
-                <a16:creationId xmlns:a16="http://schemas.microsoft.com/office/drawing/2014/main" id="{384F1660-044D-47DD-8493-D1B395F7DF59}"/>
+                <a16:creationId xmlns:a16="http://schemas.microsoft.com/office/drawing/2014/main" id="{2A38AFB0-4506-4988-8382-85889CBCAD16}"/>
               </a:ext>
             </a:extLst>
           </p:cNvPr>
@@ -14315,19 +14769,116 @@
           <p:cNvPr id="37" name="">
             <a:extLst xmlns:a="http://schemas.openxmlformats.org/drawingml/2006/main">
               <a:ext uri="{FF2B5EF4-FFF2-40B4-BE49-F238E27FC236}">
-                <a16:creationId xmlns:a16="http://schemas.microsoft.com/office/drawing/2014/main" id="{8DB77E18-D7AE-454C-8810-7036032B67BD}"/>
-              </a:ext>
-            </a:extLst>
-          </p:cNvPr>
-          <p:cNvSpPr>
-            <a:spLocks xmlns:a="http://schemas.openxmlformats.org/drawingml/2006/main" noGrp="1"/>
-          </p:cNvSpPr>
-          <p:nvPr/>
-        </p:nvSpPr>
-        <p:spPr>
-          <a:xfrm xmlns:a="http://schemas.openxmlformats.org/drawingml/2006/main">
-            <a:off x="1390650" y="2552700"/>
-            <a:ext cx="6972300" cy="476250"/>
+                <a16:creationId xmlns:a16="http://schemas.microsoft.com/office/drawing/2014/main" id="{ABCE8EFC-8F63-4136-BC01-235D47B404BB}"/>
+              </a:ext>
+            </a:extLst>
+          </p:cNvPr>
+          <p:cNvSpPr>
+            <a:spLocks xmlns:a="http://schemas.openxmlformats.org/drawingml/2006/main" noGrp="1"/>
+          </p:cNvSpPr>
+          <p:nvPr/>
+        </p:nvSpPr>
+        <p:spPr>
+          <a:xfrm xmlns:a="http://schemas.openxmlformats.org/drawingml/2006/main">
+            <a:off x="1352550" y="2647950"/>
+            <a:ext cx="781050" cy="438150"/>
+          </a:xfrm>
+          <a:prstGeom xmlns:a="http://schemas.openxmlformats.org/drawingml/2006/main" prst="rect">
+            <a:avLst/>
+          </a:prstGeom>
+          <a:solidFill xmlns:a="http://schemas.openxmlformats.org/drawingml/2006/main">
+            <a:srgbClr val="000000">
+              <a:alpha val="0"/>
+            </a:srgbClr>
+          </a:solidFill>
+          <a:ln xmlns:a="http://schemas.openxmlformats.org/drawingml/2006/main" w="0">
+            <a:solidFill>
+              <a:srgbClr val="000000">
+                <a:alpha val="0"/>
+              </a:srgbClr>
+            </a:solidFill>
+            <a:prstDash val="solid"/>
+          </a:ln>
+        </p:spPr>
+        <p:txBody>
+          <a:bodyPr xmlns:a="http://schemas.openxmlformats.org/drawingml/2006/main" lIns="0" tIns="0" rIns="0" bIns="0" anchor="t"/>
+          <a:lstStyle xmlns:a="http://schemas.openxmlformats.org/drawingml/2006/main"/>
+          <a:p xmlns:a="http://schemas.openxmlformats.org/drawingml/2006/main">
+            <a:pPr algn="l">
+              <a:defRPr sz="2250" b="1">
+                <a:solidFill>
+                  <a:srgbClr val="F8F2E8"/>
+                </a:solidFill>
+                <a:latin typeface="Hiragino Sans"/>
+                <a:ea typeface="Hiragino Sans"/>
+                <a:cs typeface="Hiragino Sans"/>
+              </a:defRPr>
+            </a:pPr>
+            <a:r>
+              <a:rPr sz="2250" b="1">
+                <a:solidFill>
+                  <a:srgbClr val="F8F2E8"/>
+                </a:solidFill>
+                <a:latin typeface="Hiragino Sans"/>
+                <a:ea typeface="Hiragino Sans"/>
+                <a:cs typeface="Hiragino Sans"/>
+              </a:rPr>
+              <a:t>Δ* =</a:t>
+            </a:r>
+          </a:p>
+        </p:txBody>
+      </p:sp>
+      <p:sp>
+        <p:nvSpPr>
+          <p:cNvPr id="38" name="">
+            <a:extLst xmlns:a="http://schemas.openxmlformats.org/drawingml/2006/main">
+              <a:ext uri="{FF2B5EF4-FFF2-40B4-BE49-F238E27FC236}">
+                <a16:creationId xmlns:a16="http://schemas.microsoft.com/office/drawing/2014/main" id="{3233C2D7-D79A-4EA9-B4D2-604F330601ED}"/>
+              </a:ext>
+            </a:extLst>
+          </p:cNvPr>
+          <p:cNvSpPr>
+            <a:spLocks xmlns:a="http://schemas.openxmlformats.org/drawingml/2006/main" noGrp="1"/>
+          </p:cNvSpPr>
+          <p:nvPr/>
+        </p:nvSpPr>
+        <p:spPr>
+          <a:xfrm xmlns:a="http://schemas.openxmlformats.org/drawingml/2006/main">
+            <a:off x="2286000" y="2476500"/>
+            <a:ext cx="4171950" cy="571500"/>
+          </a:xfrm>
+          <a:prstGeom xmlns:a="http://schemas.openxmlformats.org/drawingml/2006/main" prst="rect">
+            <a:avLst/>
+          </a:prstGeom>
+          <a:solidFill xmlns:a="http://schemas.openxmlformats.org/drawingml/2006/main">
+            <a:srgbClr val="251D12"/>
+          </a:solidFill>
+          <a:ln xmlns:a="http://schemas.openxmlformats.org/drawingml/2006/main" w="19050">
+            <a:solidFill>
+              <a:srgbClr val="F2B84B"/>
+            </a:solidFill>
+            <a:prstDash val="solid"/>
+          </a:ln>
+        </p:spPr>
+      </p:sp>
+      <p:sp>
+        <p:nvSpPr>
+          <p:cNvPr id="39" name="">
+            <a:extLst xmlns:a="http://schemas.openxmlformats.org/drawingml/2006/main">
+              <a:ext uri="{FF2B5EF4-FFF2-40B4-BE49-F238E27FC236}">
+                <a16:creationId xmlns:a16="http://schemas.microsoft.com/office/drawing/2014/main" id="{B0B74721-0A13-4EE1-9098-554944DBBEFB}"/>
+              </a:ext>
+            </a:extLst>
+          </p:cNvPr>
+          <p:cNvSpPr>
+            <a:spLocks xmlns:a="http://schemas.openxmlformats.org/drawingml/2006/main" noGrp="1"/>
+          </p:cNvSpPr>
+          <p:nvPr/>
+        </p:nvSpPr>
+        <p:spPr>
+          <a:xfrm xmlns:a="http://schemas.openxmlformats.org/drawingml/2006/main">
+            <a:off x="2495550" y="2628900"/>
+            <a:ext cx="3752850" cy="285750"/>
           </a:xfrm>
           <a:prstGeom xmlns:a="http://schemas.openxmlformats.org/drawingml/2006/main" prst="rect">
             <a:avLst/>
@@ -14351,9 +14902,9 @@
           <a:lstStyle xmlns:a="http://schemas.openxmlformats.org/drawingml/2006/main"/>
           <a:p xmlns:a="http://schemas.openxmlformats.org/drawingml/2006/main">
             <a:pPr algn="ctr">
-              <a:defRPr sz="2175" b="1">
-                <a:solidFill>
-                  <a:srgbClr val="F8F2E8"/>
+              <a:defRPr sz="1875" b="1">
+                <a:solidFill>
+                  <a:srgbClr val="F2B84B"/>
                 </a:solidFill>
                 <a:latin typeface="Hiragino Sans"/>
                 <a:ea typeface="Hiragino Sans"/>
@@ -14361,37 +14912,70 @@
               </a:defRPr>
             </a:pPr>
             <a:r>
-              <a:rPr sz="2175" b="1">
-                <a:solidFill>
-                  <a:srgbClr val="F8F2E8"/>
+              <a:rPr sz="1875" b="1">
+                <a:solidFill>
+                  <a:srgbClr val="F2B84B"/>
                 </a:solidFill>
                 <a:latin typeface="Hiragino Sans"/>
                 <a:ea typeface="Hiragino Sans"/>
                 <a:cs typeface="Hiragino Sans"/>
               </a:rPr>
-              <a:t>Δ* = [L − (d₁τ_R + d₀)] / (d₁κ_s n)</a:t>
+              <a:t>L − (d₁τ_R + d₀)</a:t>
             </a:r>
           </a:p>
         </p:txBody>
       </p:sp>
       <p:sp>
         <p:nvSpPr>
-          <p:cNvPr id="38" name="">
-            <a:extLst xmlns:a="http://schemas.openxmlformats.org/drawingml/2006/main">
-              <a:ext uri="{FF2B5EF4-FFF2-40B4-BE49-F238E27FC236}">
-                <a16:creationId xmlns:a16="http://schemas.microsoft.com/office/drawing/2014/main" id="{A5443E58-95A3-4EB4-9FE6-A5960E4034F5}"/>
-              </a:ext>
-            </a:extLst>
-          </p:cNvPr>
-          <p:cNvSpPr>
-            <a:spLocks xmlns:a="http://schemas.openxmlformats.org/drawingml/2006/main" noGrp="1"/>
-          </p:cNvSpPr>
-          <p:nvPr/>
-        </p:nvSpPr>
-        <p:spPr>
-          <a:xfrm xmlns:a="http://schemas.openxmlformats.org/drawingml/2006/main">
-            <a:off x="1219200" y="3486150"/>
-            <a:ext cx="7334250" cy="552450"/>
+          <p:cNvPr id="40" name="">
+            <a:extLst xmlns:a="http://schemas.openxmlformats.org/drawingml/2006/main">
+              <a:ext uri="{FF2B5EF4-FFF2-40B4-BE49-F238E27FC236}">
+                <a16:creationId xmlns:a16="http://schemas.microsoft.com/office/drawing/2014/main" id="{56C242A2-BE39-4C31-BBBF-5CA3772F858D}"/>
+              </a:ext>
+            </a:extLst>
+          </p:cNvPr>
+          <p:cNvSpPr>
+            <a:spLocks xmlns:a="http://schemas.openxmlformats.org/drawingml/2006/main" noGrp="1"/>
+          </p:cNvSpPr>
+          <p:nvPr/>
+        </p:nvSpPr>
+        <p:spPr>
+          <a:xfrm xmlns:a="http://schemas.openxmlformats.org/drawingml/2006/main">
+            <a:off x="2286000" y="3257550"/>
+            <a:ext cx="4171950" cy="571500"/>
+          </a:xfrm>
+          <a:prstGeom xmlns:a="http://schemas.openxmlformats.org/drawingml/2006/main" prst="rect">
+            <a:avLst/>
+          </a:prstGeom>
+          <a:solidFill xmlns:a="http://schemas.openxmlformats.org/drawingml/2006/main">
+            <a:srgbClr val="122B27"/>
+          </a:solidFill>
+          <a:ln xmlns:a="http://schemas.openxmlformats.org/drawingml/2006/main" w="19050">
+            <a:solidFill>
+              <a:srgbClr val="34E0B3"/>
+            </a:solidFill>
+            <a:prstDash val="solid"/>
+          </a:ln>
+        </p:spPr>
+      </p:sp>
+      <p:sp>
+        <p:nvSpPr>
+          <p:cNvPr id="41" name="">
+            <a:extLst xmlns:a="http://schemas.openxmlformats.org/drawingml/2006/main">
+              <a:ext uri="{FF2B5EF4-FFF2-40B4-BE49-F238E27FC236}">
+                <a16:creationId xmlns:a16="http://schemas.microsoft.com/office/drawing/2014/main" id="{6F5F9C2A-411E-404D-931B-BB1917735E17}"/>
+              </a:ext>
+            </a:extLst>
+          </p:cNvPr>
+          <p:cNvSpPr>
+            <a:spLocks xmlns:a="http://schemas.openxmlformats.org/drawingml/2006/main" noGrp="1"/>
+          </p:cNvSpPr>
+          <p:nvPr/>
+        </p:nvSpPr>
+        <p:spPr>
+          <a:xfrm xmlns:a="http://schemas.openxmlformats.org/drawingml/2006/main">
+            <a:off x="2495550" y="3409950"/>
+            <a:ext cx="3752850" cy="285750"/>
           </a:xfrm>
           <a:prstGeom xmlns:a="http://schemas.openxmlformats.org/drawingml/2006/main" prst="rect">
             <a:avLst/>
@@ -14415,7 +14999,7 @@
           <a:lstStyle xmlns:a="http://schemas.openxmlformats.org/drawingml/2006/main"/>
           <a:p xmlns:a="http://schemas.openxmlformats.org/drawingml/2006/main">
             <a:pPr algn="ctr">
-              <a:defRPr sz="2400" b="1">
+              <a:defRPr sz="1875" b="1">
                 <a:solidFill>
                   <a:srgbClr val="34E0B3"/>
                 </a:solidFill>
@@ -14425,7 +15009,432 @@
               </a:defRPr>
             </a:pPr>
             <a:r>
-              <a:rPr sz="2400" b="1">
+              <a:rPr sz="1875" b="1">
+                <a:solidFill>
+                  <a:srgbClr val="34E0B3"/>
+                </a:solidFill>
+                <a:latin typeface="Hiragino Sans"/>
+                <a:ea typeface="Hiragino Sans"/>
+                <a:cs typeface="Hiragino Sans"/>
+              </a:rPr>
+              <a:t>d₁κ_s</a:t>
+            </a:r>
+          </a:p>
+        </p:txBody>
+      </p:sp>
+      <p:sp>
+        <p:nvSpPr>
+          <p:cNvPr id="42" name="">
+            <a:extLst xmlns:a="http://schemas.openxmlformats.org/drawingml/2006/main">
+              <a:ext uri="{FF2B5EF4-FFF2-40B4-BE49-F238E27FC236}">
+                <a16:creationId xmlns:a16="http://schemas.microsoft.com/office/drawing/2014/main" id="{A490BAAE-0C98-4FFB-8461-DC5525FB716F}"/>
+              </a:ext>
+            </a:extLst>
+          </p:cNvPr>
+          <p:cNvSpPr>
+            <a:spLocks xmlns:a="http://schemas.openxmlformats.org/drawingml/2006/main" noGrp="1"/>
+          </p:cNvSpPr>
+          <p:nvPr/>
+        </p:nvSpPr>
+        <p:spPr>
+          <a:xfrm xmlns:a="http://schemas.openxmlformats.org/drawingml/2006/main">
+            <a:off x="6705600" y="2990850"/>
+            <a:ext cx="819150" cy="381000"/>
+          </a:xfrm>
+          <a:prstGeom xmlns:a="http://schemas.openxmlformats.org/drawingml/2006/main" prst="rect">
+            <a:avLst/>
+          </a:prstGeom>
+          <a:solidFill xmlns:a="http://schemas.openxmlformats.org/drawingml/2006/main">
+            <a:srgbClr val="000000">
+              <a:alpha val="0"/>
+            </a:srgbClr>
+          </a:solidFill>
+          <a:ln xmlns:a="http://schemas.openxmlformats.org/drawingml/2006/main" w="0">
+            <a:solidFill>
+              <a:srgbClr val="000000">
+                <a:alpha val="0"/>
+              </a:srgbClr>
+            </a:solidFill>
+            <a:prstDash val="solid"/>
+          </a:ln>
+        </p:spPr>
+        <p:txBody>
+          <a:bodyPr xmlns:a="http://schemas.openxmlformats.org/drawingml/2006/main" lIns="0" tIns="0" rIns="0" bIns="0" anchor="t"/>
+          <a:lstStyle xmlns:a="http://schemas.openxmlformats.org/drawingml/2006/main"/>
+          <a:p xmlns:a="http://schemas.openxmlformats.org/drawingml/2006/main">
+            <a:pPr algn="ctr">
+              <a:defRPr sz="2100" b="1">
+                <a:solidFill>
+                  <a:srgbClr val="6EA8FF"/>
+                </a:solidFill>
+                <a:latin typeface="Hiragino Sans"/>
+                <a:ea typeface="Hiragino Sans"/>
+                <a:cs typeface="Hiragino Sans"/>
+              </a:defRPr>
+            </a:pPr>
+            <a:r>
+              <a:rPr sz="2100" b="1">
+                <a:solidFill>
+                  <a:srgbClr val="6EA8FF"/>
+                </a:solidFill>
+                <a:latin typeface="Hiragino Sans"/>
+                <a:ea typeface="Hiragino Sans"/>
+                <a:cs typeface="Hiragino Sans"/>
+              </a:rPr>
+              <a:t>÷ n</a:t>
+            </a:r>
+          </a:p>
+        </p:txBody>
+      </p:sp>
+      <p:sp>
+        <p:nvSpPr>
+          <p:cNvPr id="43" name="">
+            <a:extLst xmlns:a="http://schemas.openxmlformats.org/drawingml/2006/main">
+              <a:ext uri="{FF2B5EF4-FFF2-40B4-BE49-F238E27FC236}">
+                <a16:creationId xmlns:a16="http://schemas.microsoft.com/office/drawing/2014/main" id="{22A4C387-C25C-4CED-9FBD-10D314C8278F}"/>
+              </a:ext>
+            </a:extLst>
+          </p:cNvPr>
+          <p:cNvSpPr>
+            <a:spLocks xmlns:a="http://schemas.openxmlformats.org/drawingml/2006/main" noGrp="1"/>
+          </p:cNvSpPr>
+          <p:nvPr/>
+        </p:nvSpPr>
+        <p:spPr>
+          <a:xfrm xmlns:a="http://schemas.openxmlformats.org/drawingml/2006/main">
+            <a:off x="1600200" y="4267200"/>
+            <a:ext cx="2781300" cy="323850"/>
+          </a:xfrm>
+          <a:prstGeom xmlns:a="http://schemas.openxmlformats.org/drawingml/2006/main" prst="rect">
+            <a:avLst/>
+          </a:prstGeom>
+          <a:solidFill xmlns:a="http://schemas.openxmlformats.org/drawingml/2006/main">
+            <a:srgbClr val="382B16"/>
+          </a:solidFill>
+          <a:ln xmlns:a="http://schemas.openxmlformats.org/drawingml/2006/main" w="0">
+            <a:solidFill>
+              <a:srgbClr val="000000">
+                <a:alpha val="0"/>
+              </a:srgbClr>
+            </a:solidFill>
+            <a:prstDash val="solid"/>
+          </a:ln>
+        </p:spPr>
+      </p:sp>
+      <p:sp>
+        <p:nvSpPr>
+          <p:cNvPr id="44" name="">
+            <a:extLst xmlns:a="http://schemas.openxmlformats.org/drawingml/2006/main">
+              <a:ext uri="{FF2B5EF4-FFF2-40B4-BE49-F238E27FC236}">
+                <a16:creationId xmlns:a16="http://schemas.microsoft.com/office/drawing/2014/main" id="{6645A3C3-97B2-4CED-9D33-38E872BD0AFA}"/>
+              </a:ext>
+            </a:extLst>
+          </p:cNvPr>
+          <p:cNvSpPr>
+            <a:spLocks xmlns:a="http://schemas.openxmlformats.org/drawingml/2006/main" noGrp="1"/>
+          </p:cNvSpPr>
+          <p:nvPr/>
+        </p:nvSpPr>
+        <p:spPr>
+          <a:xfrm xmlns:a="http://schemas.openxmlformats.org/drawingml/2006/main">
+            <a:off x="1695450" y="4295775"/>
+            <a:ext cx="2590800" cy="266700"/>
+          </a:xfrm>
+          <a:prstGeom xmlns:a="http://schemas.openxmlformats.org/drawingml/2006/main" prst="rect">
+            <a:avLst/>
+          </a:prstGeom>
+          <a:solidFill xmlns:a="http://schemas.openxmlformats.org/drawingml/2006/main">
+            <a:srgbClr val="000000">
+              <a:alpha val="0"/>
+            </a:srgbClr>
+          </a:solidFill>
+          <a:ln xmlns:a="http://schemas.openxmlformats.org/drawingml/2006/main" w="0">
+            <a:solidFill>
+              <a:srgbClr val="000000">
+                <a:alpha val="0"/>
+              </a:srgbClr>
+            </a:solidFill>
+            <a:prstDash val="solid"/>
+          </a:ln>
+        </p:spPr>
+        <p:txBody>
+          <a:bodyPr xmlns:a="http://schemas.openxmlformats.org/drawingml/2006/main" lIns="0" tIns="0" rIns="0" bIns="0" anchor="ctr"/>
+          <a:lstStyle xmlns:a="http://schemas.openxmlformats.org/drawingml/2006/main"/>
+          <a:p xmlns:a="http://schemas.openxmlformats.org/drawingml/2006/main">
+            <a:pPr algn="ctr">
+              <a:defRPr sz="900" b="1">
+                <a:solidFill>
+                  <a:srgbClr val="F2B84B"/>
+                </a:solidFill>
+                <a:latin typeface="Hiragino Sans"/>
+                <a:ea typeface="Hiragino Sans"/>
+                <a:cs typeface="Hiragino Sans"/>
+              </a:defRPr>
+            </a:pPr>
+            <a:r>
+              <a:rPr sz="900" b="1">
+                <a:solidFill>
+                  <a:srgbClr val="F2B84B"/>
+                </a:solidFill>
+                <a:latin typeface="Hiragino Sans"/>
+                <a:ea typeface="Hiragino Sans"/>
+                <a:cs typeface="Hiragino Sans"/>
+              </a:rPr>
+              <a:t>1 分子: 全損と通常復旧の差</a:t>
+            </a:r>
+          </a:p>
+        </p:txBody>
+      </p:sp>
+      <p:sp>
+        <p:nvSpPr>
+          <p:cNvPr id="45" name="">
+            <a:extLst xmlns:a="http://schemas.openxmlformats.org/drawingml/2006/main">
+              <a:ext uri="{FF2B5EF4-FFF2-40B4-BE49-F238E27FC236}">
+                <a16:creationId xmlns:a16="http://schemas.microsoft.com/office/drawing/2014/main" id="{0E9F5ACC-3F34-4CD9-AE1C-52C4018D2E8B}"/>
+              </a:ext>
+            </a:extLst>
+          </p:cNvPr>
+          <p:cNvSpPr>
+            <a:spLocks xmlns:a="http://schemas.openxmlformats.org/drawingml/2006/main" noGrp="1"/>
+          </p:cNvSpPr>
+          <p:nvPr/>
+        </p:nvSpPr>
+        <p:spPr>
+          <a:xfrm xmlns:a="http://schemas.openxmlformats.org/drawingml/2006/main">
+            <a:off x="4705350" y="4267200"/>
+            <a:ext cx="3048000" cy="323850"/>
+          </a:xfrm>
+          <a:prstGeom xmlns:a="http://schemas.openxmlformats.org/drawingml/2006/main" prst="rect">
+            <a:avLst/>
+          </a:prstGeom>
+          <a:solidFill xmlns:a="http://schemas.openxmlformats.org/drawingml/2006/main">
+            <a:srgbClr val="12332E"/>
+          </a:solidFill>
+          <a:ln xmlns:a="http://schemas.openxmlformats.org/drawingml/2006/main" w="0">
+            <a:solidFill>
+              <a:srgbClr val="000000">
+                <a:alpha val="0"/>
+              </a:srgbClr>
+            </a:solidFill>
+            <a:prstDash val="solid"/>
+          </a:ln>
+        </p:spPr>
+      </p:sp>
+      <p:sp>
+        <p:nvSpPr>
+          <p:cNvPr id="46" name="">
+            <a:extLst xmlns:a="http://schemas.openxmlformats.org/drawingml/2006/main">
+              <a:ext uri="{FF2B5EF4-FFF2-40B4-BE49-F238E27FC236}">
+                <a16:creationId xmlns:a16="http://schemas.microsoft.com/office/drawing/2014/main" id="{98A1E053-05C8-4058-AA83-29C8585C63DB}"/>
+              </a:ext>
+            </a:extLst>
+          </p:cNvPr>
+          <p:cNvSpPr>
+            <a:spLocks xmlns:a="http://schemas.openxmlformats.org/drawingml/2006/main" noGrp="1"/>
+          </p:cNvSpPr>
+          <p:nvPr/>
+        </p:nvSpPr>
+        <p:spPr>
+          <a:xfrm xmlns:a="http://schemas.openxmlformats.org/drawingml/2006/main">
+            <a:off x="4800600" y="4295775"/>
+            <a:ext cx="2857500" cy="266700"/>
+          </a:xfrm>
+          <a:prstGeom xmlns:a="http://schemas.openxmlformats.org/drawingml/2006/main" prst="rect">
+            <a:avLst/>
+          </a:prstGeom>
+          <a:solidFill xmlns:a="http://schemas.openxmlformats.org/drawingml/2006/main">
+            <a:srgbClr val="000000">
+              <a:alpha val="0"/>
+            </a:srgbClr>
+          </a:solidFill>
+          <a:ln xmlns:a="http://schemas.openxmlformats.org/drawingml/2006/main" w="0">
+            <a:solidFill>
+              <a:srgbClr val="000000">
+                <a:alpha val="0"/>
+              </a:srgbClr>
+            </a:solidFill>
+            <a:prstDash val="solid"/>
+          </a:ln>
+        </p:spPr>
+        <p:txBody>
+          <a:bodyPr xmlns:a="http://schemas.openxmlformats.org/drawingml/2006/main" lIns="0" tIns="0" rIns="0" bIns="0" anchor="ctr"/>
+          <a:lstStyle xmlns:a="http://schemas.openxmlformats.org/drawingml/2006/main"/>
+          <a:p xmlns:a="http://schemas.openxmlformats.org/drawingml/2006/main">
+            <a:pPr algn="ctr">
+              <a:defRPr sz="900" b="1">
+                <a:solidFill>
+                  <a:srgbClr val="34E0B3"/>
+                </a:solidFill>
+                <a:latin typeface="Hiragino Sans"/>
+                <a:ea typeface="Hiragino Sans"/>
+                <a:cs typeface="Hiragino Sans"/>
+              </a:defRPr>
+            </a:pPr>
+            <a:r>
+              <a:rPr sz="900" b="1">
+                <a:solidFill>
+                  <a:srgbClr val="34E0B3"/>
+                </a:solidFill>
+                <a:latin typeface="Hiragino Sans"/>
+                <a:ea typeface="Hiragino Sans"/>
+                <a:cs typeface="Hiragino Sans"/>
+              </a:rPr>
+              <a:t>2 分母: 長く戻るほど増える負荷</a:t>
+            </a:r>
+          </a:p>
+        </p:txBody>
+      </p:sp>
+      <p:sp>
+        <p:nvSpPr>
+          <p:cNvPr id="47" name="">
+            <a:extLst xmlns:a="http://schemas.openxmlformats.org/drawingml/2006/main">
+              <a:ext uri="{FF2B5EF4-FFF2-40B4-BE49-F238E27FC236}">
+                <a16:creationId xmlns:a16="http://schemas.microsoft.com/office/drawing/2014/main" id="{F252C173-4C84-43B8-9103-0D040BDAF12B}"/>
+              </a:ext>
+            </a:extLst>
+          </p:cNvPr>
+          <p:cNvSpPr>
+            <a:spLocks xmlns:a="http://schemas.openxmlformats.org/drawingml/2006/main" noGrp="1"/>
+          </p:cNvSpPr>
+          <p:nvPr/>
+        </p:nvSpPr>
+        <p:spPr>
+          <a:xfrm xmlns:a="http://schemas.openxmlformats.org/drawingml/2006/main">
+            <a:off x="8096250" y="4267200"/>
+            <a:ext cx="2552700" cy="323850"/>
+          </a:xfrm>
+          <a:prstGeom xmlns:a="http://schemas.openxmlformats.org/drawingml/2006/main" prst="rect">
+            <a:avLst/>
+          </a:prstGeom>
+          <a:solidFill xmlns:a="http://schemas.openxmlformats.org/drawingml/2006/main">
+            <a:srgbClr val="192B47"/>
+          </a:solidFill>
+          <a:ln xmlns:a="http://schemas.openxmlformats.org/drawingml/2006/main" w="0">
+            <a:solidFill>
+              <a:srgbClr val="000000">
+                <a:alpha val="0"/>
+              </a:srgbClr>
+            </a:solidFill>
+            <a:prstDash val="solid"/>
+          </a:ln>
+        </p:spPr>
+      </p:sp>
+      <p:sp>
+        <p:nvSpPr>
+          <p:cNvPr id="48" name="">
+            <a:extLst xmlns:a="http://schemas.openxmlformats.org/drawingml/2006/main">
+              <a:ext uri="{FF2B5EF4-FFF2-40B4-BE49-F238E27FC236}">
+                <a16:creationId xmlns:a16="http://schemas.microsoft.com/office/drawing/2014/main" id="{DC2FE42E-828A-442C-A7DC-B815D8D6F582}"/>
+              </a:ext>
+            </a:extLst>
+          </p:cNvPr>
+          <p:cNvSpPr>
+            <a:spLocks xmlns:a="http://schemas.openxmlformats.org/drawingml/2006/main" noGrp="1"/>
+          </p:cNvSpPr>
+          <p:nvPr/>
+        </p:nvSpPr>
+        <p:spPr>
+          <a:xfrm xmlns:a="http://schemas.openxmlformats.org/drawingml/2006/main">
+            <a:off x="8191500" y="4295775"/>
+            <a:ext cx="2362200" cy="266700"/>
+          </a:xfrm>
+          <a:prstGeom xmlns:a="http://schemas.openxmlformats.org/drawingml/2006/main" prst="rect">
+            <a:avLst/>
+          </a:prstGeom>
+          <a:solidFill xmlns:a="http://schemas.openxmlformats.org/drawingml/2006/main">
+            <a:srgbClr val="000000">
+              <a:alpha val="0"/>
+            </a:srgbClr>
+          </a:solidFill>
+          <a:ln xmlns:a="http://schemas.openxmlformats.org/drawingml/2006/main" w="0">
+            <a:solidFill>
+              <a:srgbClr val="000000">
+                <a:alpha val="0"/>
+              </a:srgbClr>
+            </a:solidFill>
+            <a:prstDash val="solid"/>
+          </a:ln>
+        </p:spPr>
+        <p:txBody>
+          <a:bodyPr xmlns:a="http://schemas.openxmlformats.org/drawingml/2006/main" lIns="0" tIns="0" rIns="0" bIns="0" anchor="ctr"/>
+          <a:lstStyle xmlns:a="http://schemas.openxmlformats.org/drawingml/2006/main"/>
+          <a:p xmlns:a="http://schemas.openxmlformats.org/drawingml/2006/main">
+            <a:pPr algn="ctr">
+              <a:defRPr sz="900" b="1">
+                <a:solidFill>
+                  <a:srgbClr val="6EA8FF"/>
+                </a:solidFill>
+                <a:latin typeface="Hiragino Sans"/>
+                <a:ea typeface="Hiragino Sans"/>
+                <a:cs typeface="Hiragino Sans"/>
+              </a:defRPr>
+            </a:pPr>
+            <a:r>
+              <a:rPr sz="900" b="1">
+                <a:solidFill>
+                  <a:srgbClr val="6EA8FF"/>
+                </a:solidFill>
+                <a:latin typeface="Hiragino Sans"/>
+                <a:ea typeface="Hiragino Sans"/>
+                <a:cs typeface="Hiragino Sans"/>
+              </a:rPr>
+              <a:t>3 n: 世代数で間隔に割り戻す</a:t>
+            </a:r>
+          </a:p>
+        </p:txBody>
+      </p:sp>
+      <p:sp>
+        <p:nvSpPr>
+          <p:cNvPr id="49" name="">
+            <a:extLst xmlns:a="http://schemas.openxmlformats.org/drawingml/2006/main">
+              <a:ext uri="{FF2B5EF4-FFF2-40B4-BE49-F238E27FC236}">
+                <a16:creationId xmlns:a16="http://schemas.microsoft.com/office/drawing/2014/main" id="{1F68963C-E0DC-48A6-B5C6-E28E7A302774}"/>
+              </a:ext>
+            </a:extLst>
+          </p:cNvPr>
+          <p:cNvSpPr>
+            <a:spLocks xmlns:a="http://schemas.openxmlformats.org/drawingml/2006/main" noGrp="1"/>
+          </p:cNvSpPr>
+          <p:nvPr/>
+        </p:nvSpPr>
+        <p:spPr>
+          <a:xfrm xmlns:a="http://schemas.openxmlformats.org/drawingml/2006/main">
+            <a:off x="1752600" y="5010150"/>
+            <a:ext cx="6896100" cy="361950"/>
+          </a:xfrm>
+          <a:prstGeom xmlns:a="http://schemas.openxmlformats.org/drawingml/2006/main" prst="rect">
+            <a:avLst/>
+          </a:prstGeom>
+          <a:solidFill xmlns:a="http://schemas.openxmlformats.org/drawingml/2006/main">
+            <a:srgbClr val="000000">
+              <a:alpha val="0"/>
+            </a:srgbClr>
+          </a:solidFill>
+          <a:ln xmlns:a="http://schemas.openxmlformats.org/drawingml/2006/main" w="0">
+            <a:solidFill>
+              <a:srgbClr val="000000">
+                <a:alpha val="0"/>
+              </a:srgbClr>
+            </a:solidFill>
+            <a:prstDash val="solid"/>
+          </a:ln>
+        </p:spPr>
+        <p:txBody>
+          <a:bodyPr xmlns:a="http://schemas.openxmlformats.org/drawingml/2006/main" lIns="0" tIns="0" rIns="0" bIns="0" anchor="t"/>
+          <a:lstStyle xmlns:a="http://schemas.openxmlformats.org/drawingml/2006/main"/>
+          <a:p xmlns:a="http://schemas.openxmlformats.org/drawingml/2006/main">
+            <a:pPr algn="ctr">
+              <a:defRPr sz="1800" b="1">
+                <a:solidFill>
+                  <a:srgbClr val="34E0B3"/>
+                </a:solidFill>
+                <a:latin typeface="Hiragino Sans"/>
+                <a:ea typeface="Hiragino Sans"/>
+                <a:cs typeface="Hiragino Sans"/>
+              </a:defRPr>
+            </a:pPr>
+            <a:r>
+              <a:rPr sz="1800" b="1">
                 <a:solidFill>
                   <a:srgbClr val="34E0B3"/>
                 </a:solidFill>
@@ -14440,57 +15449,57 @@
       </p:sp>
       <p:sp>
         <p:nvSpPr>
-          <p:cNvPr id="39" name="">
-            <a:extLst xmlns:a="http://schemas.openxmlformats.org/drawingml/2006/main">
-              <a:ext uri="{FF2B5EF4-FFF2-40B4-BE49-F238E27FC236}">
-                <a16:creationId xmlns:a16="http://schemas.microsoft.com/office/drawing/2014/main" id="{F71F5158-CD35-41F8-81E7-DFC2C8E0B888}"/>
-              </a:ext>
-            </a:extLst>
-          </p:cNvPr>
-          <p:cNvSpPr>
-            <a:spLocks xmlns:a="http://schemas.openxmlformats.org/drawingml/2006/main" noGrp="1"/>
-          </p:cNvSpPr>
-          <p:nvPr/>
-        </p:nvSpPr>
-        <p:spPr>
-          <a:xfrm xmlns:a="http://schemas.openxmlformats.org/drawingml/2006/main">
-            <a:off x="2076450" y="4438650"/>
-            <a:ext cx="2057400" cy="304800"/>
-          </a:xfrm>
-          <a:prstGeom xmlns:a="http://schemas.openxmlformats.org/drawingml/2006/main" prst="rect">
-            <a:avLst/>
-          </a:prstGeom>
-          <a:solidFill xmlns:a="http://schemas.openxmlformats.org/drawingml/2006/main">
-            <a:srgbClr val="382B16"/>
-          </a:solidFill>
-          <a:ln xmlns:a="http://schemas.openxmlformats.org/drawingml/2006/main" w="0">
-            <a:solidFill>
-              <a:srgbClr val="000000">
-                <a:alpha val="0"/>
-              </a:srgbClr>
-            </a:solidFill>
-            <a:prstDash val="solid"/>
-          </a:ln>
-        </p:spPr>
-      </p:sp>
-      <p:sp>
-        <p:nvSpPr>
-          <p:cNvPr id="40" name="">
-            <a:extLst xmlns:a="http://schemas.openxmlformats.org/drawingml/2006/main">
-              <a:ext uri="{FF2B5EF4-FFF2-40B4-BE49-F238E27FC236}">
-                <a16:creationId xmlns:a16="http://schemas.microsoft.com/office/drawing/2014/main" id="{BA2E8937-C01A-480B-9CC0-F4E8447AE581}"/>
-              </a:ext>
-            </a:extLst>
-          </p:cNvPr>
-          <p:cNvSpPr>
-            <a:spLocks xmlns:a="http://schemas.openxmlformats.org/drawingml/2006/main" noGrp="1"/>
-          </p:cNvSpPr>
-          <p:nvPr/>
-        </p:nvSpPr>
-        <p:spPr>
-          <a:xfrm xmlns:a="http://schemas.openxmlformats.org/drawingml/2006/main">
-            <a:off x="2171700" y="4467225"/>
-            <a:ext cx="1866900" cy="247650"/>
+          <p:cNvPr id="50" name="">
+            <a:extLst xmlns:a="http://schemas.openxmlformats.org/drawingml/2006/main">
+              <a:ext uri="{FF2B5EF4-FFF2-40B4-BE49-F238E27FC236}">
+                <a16:creationId xmlns:a16="http://schemas.microsoft.com/office/drawing/2014/main" id="{86B80CD2-6572-46FB-B890-D79E63CC2E37}"/>
+              </a:ext>
+            </a:extLst>
+          </p:cNvPr>
+          <p:cNvSpPr>
+            <a:spLocks xmlns:a="http://schemas.openxmlformats.org/drawingml/2006/main" noGrp="1"/>
+          </p:cNvSpPr>
+          <p:nvPr/>
+        </p:nvSpPr>
+        <p:spPr>
+          <a:xfrm xmlns:a="http://schemas.openxmlformats.org/drawingml/2006/main">
+            <a:off x="1847850" y="5734050"/>
+            <a:ext cx="8496300" cy="419100"/>
+          </a:xfrm>
+          <a:prstGeom xmlns:a="http://schemas.openxmlformats.org/drawingml/2006/main" prst="rect">
+            <a:avLst/>
+          </a:prstGeom>
+          <a:solidFill xmlns:a="http://schemas.openxmlformats.org/drawingml/2006/main">
+            <a:srgbClr val="F8F2E8"/>
+          </a:solidFill>
+          <a:ln xmlns:a="http://schemas.openxmlformats.org/drawingml/2006/main" w="0">
+            <a:solidFill>
+              <a:srgbClr val="000000">
+                <a:alpha val="0"/>
+              </a:srgbClr>
+            </a:solidFill>
+            <a:prstDash val="solid"/>
+          </a:ln>
+        </p:spPr>
+      </p:sp>
+      <p:sp>
+        <p:nvSpPr>
+          <p:cNvPr id="51" name="">
+            <a:extLst xmlns:a="http://schemas.openxmlformats.org/drawingml/2006/main">
+              <a:ext uri="{FF2B5EF4-FFF2-40B4-BE49-F238E27FC236}">
+                <a16:creationId xmlns:a16="http://schemas.microsoft.com/office/drawing/2014/main" id="{93D10659-627F-47D0-88C4-B658EC0687DB}"/>
+              </a:ext>
+            </a:extLst>
+          </p:cNvPr>
+          <p:cNvSpPr>
+            <a:spLocks xmlns:a="http://schemas.openxmlformats.org/drawingml/2006/main" noGrp="1"/>
+          </p:cNvSpPr>
+          <p:nvPr/>
+        </p:nvSpPr>
+        <p:spPr>
+          <a:xfrm xmlns:a="http://schemas.openxmlformats.org/drawingml/2006/main">
+            <a:off x="2019300" y="5848350"/>
+            <a:ext cx="8153400" cy="190500"/>
           </a:xfrm>
           <a:prstGeom xmlns:a="http://schemas.openxmlformats.org/drawingml/2006/main" prst="rect">
             <a:avLst/>
@@ -14514,9 +15523,9 @@
           <a:lstStyle xmlns:a="http://schemas.openxmlformats.org/drawingml/2006/main"/>
           <a:p xmlns:a="http://schemas.openxmlformats.org/drawingml/2006/main">
             <a:pPr algn="ctr">
-              <a:defRPr sz="788" b="1">
-                <a:solidFill>
-                  <a:srgbClr val="F2B84B"/>
+              <a:defRPr sz="1275" b="1">
+                <a:solidFill>
+                  <a:srgbClr val="111820"/>
                 </a:solidFill>
                 <a:latin typeface="Hiragino Sans"/>
                 <a:ea typeface="Hiragino Sans"/>
@@ -14524,235 +15533,37 @@
               </a:defRPr>
             </a:pPr>
             <a:r>
-              <a:rPr sz="788" b="1">
-                <a:solidFill>
-                  <a:srgbClr val="F2B84B"/>
+              <a:rPr sz="1275" b="1">
+                <a:solidFill>
+                  <a:srgbClr val="111820"/>
                 </a:solidFill>
                 <a:latin typeface="Hiragino Sans"/>
                 <a:ea typeface="Hiragino Sans"/>
                 <a:cs typeface="Hiragino Sans"/>
               </a:rPr>
-              <a:t>Δ*: バックアップ間隔</a:t>
+              <a:t>結論として見るのは Δ* より先に a*: 何日前まで清浄に戻れるべきか</a:t>
             </a:r>
           </a:p>
         </p:txBody>
       </p:sp>
       <p:sp>
         <p:nvSpPr>
-          <p:cNvPr id="41" name="">
-            <a:extLst xmlns:a="http://schemas.openxmlformats.org/drawingml/2006/main">
-              <a:ext uri="{FF2B5EF4-FFF2-40B4-BE49-F238E27FC236}">
-                <a16:creationId xmlns:a16="http://schemas.microsoft.com/office/drawing/2014/main" id="{94391614-2617-4B61-BE3E-BD12F55F28A5}"/>
-              </a:ext>
-            </a:extLst>
-          </p:cNvPr>
-          <p:cNvSpPr>
-            <a:spLocks xmlns:a="http://schemas.openxmlformats.org/drawingml/2006/main" noGrp="1"/>
-          </p:cNvSpPr>
-          <p:nvPr/>
-        </p:nvSpPr>
-        <p:spPr>
-          <a:xfrm xmlns:a="http://schemas.openxmlformats.org/drawingml/2006/main">
-            <a:off x="4495800" y="4438650"/>
-            <a:ext cx="2571750" cy="304800"/>
-          </a:xfrm>
-          <a:prstGeom xmlns:a="http://schemas.openxmlformats.org/drawingml/2006/main" prst="rect">
-            <a:avLst/>
-          </a:prstGeom>
-          <a:solidFill xmlns:a="http://schemas.openxmlformats.org/drawingml/2006/main">
-            <a:srgbClr val="12332E"/>
-          </a:solidFill>
-          <a:ln xmlns:a="http://schemas.openxmlformats.org/drawingml/2006/main" w="0">
-            <a:solidFill>
-              <a:srgbClr val="000000">
-                <a:alpha val="0"/>
-              </a:srgbClr>
-            </a:solidFill>
-            <a:prstDash val="solid"/>
-          </a:ln>
-        </p:spPr>
-      </p:sp>
-      <p:sp>
-        <p:nvSpPr>
-          <p:cNvPr id="42" name="">
-            <a:extLst xmlns:a="http://schemas.openxmlformats.org/drawingml/2006/main">
-              <a:ext uri="{FF2B5EF4-FFF2-40B4-BE49-F238E27FC236}">
-                <a16:creationId xmlns:a16="http://schemas.microsoft.com/office/drawing/2014/main" id="{79D1BA4F-8511-482E-B030-54249CD3A802}"/>
-              </a:ext>
-            </a:extLst>
-          </p:cNvPr>
-          <p:cNvSpPr>
-            <a:spLocks xmlns:a="http://schemas.openxmlformats.org/drawingml/2006/main" noGrp="1"/>
-          </p:cNvSpPr>
-          <p:nvPr/>
-        </p:nvSpPr>
-        <p:spPr>
-          <a:xfrm xmlns:a="http://schemas.openxmlformats.org/drawingml/2006/main">
-            <a:off x="4591050" y="4467225"/>
-            <a:ext cx="2381250" cy="247650"/>
-          </a:xfrm>
-          <a:prstGeom xmlns:a="http://schemas.openxmlformats.org/drawingml/2006/main" prst="rect">
-            <a:avLst/>
-          </a:prstGeom>
-          <a:solidFill xmlns:a="http://schemas.openxmlformats.org/drawingml/2006/main">
-            <a:srgbClr val="000000">
-              <a:alpha val="0"/>
-            </a:srgbClr>
-          </a:solidFill>
-          <a:ln xmlns:a="http://schemas.openxmlformats.org/drawingml/2006/main" w="0">
-            <a:solidFill>
-              <a:srgbClr val="000000">
-                <a:alpha val="0"/>
-              </a:srgbClr>
-            </a:solidFill>
-            <a:prstDash val="solid"/>
-          </a:ln>
-        </p:spPr>
-        <p:txBody>
-          <a:bodyPr xmlns:a="http://schemas.openxmlformats.org/drawingml/2006/main" lIns="0" tIns="0" rIns="0" bIns="0" anchor="ctr"/>
-          <a:lstStyle xmlns:a="http://schemas.openxmlformats.org/drawingml/2006/main"/>
-          <a:p xmlns:a="http://schemas.openxmlformats.org/drawingml/2006/main">
-            <a:pPr algn="ctr">
-              <a:defRPr sz="788" b="1">
-                <a:solidFill>
-                  <a:srgbClr val="34E0B3"/>
-                </a:solidFill>
-                <a:latin typeface="Hiragino Sans"/>
-                <a:ea typeface="Hiragino Sans"/>
-                <a:cs typeface="Hiragino Sans"/>
-              </a:defRPr>
-            </a:pPr>
-            <a:r>
-              <a:rPr sz="788" b="1">
-                <a:solidFill>
-                  <a:srgbClr val="34E0B3"/>
-                </a:solidFill>
-                <a:latin typeface="Hiragino Sans"/>
-                <a:ea typeface="Hiragino Sans"/>
-                <a:cs typeface="Hiragino Sans"/>
-              </a:rPr>
-              <a:t>a*: 残すべき清浄期間</a:t>
-            </a:r>
-          </a:p>
-        </p:txBody>
-      </p:sp>
-      <p:sp>
-        <p:nvSpPr>
-          <p:cNvPr id="43" name="">
-            <a:extLst xmlns:a="http://schemas.openxmlformats.org/drawingml/2006/main">
-              <a:ext uri="{FF2B5EF4-FFF2-40B4-BE49-F238E27FC236}">
-                <a16:creationId xmlns:a16="http://schemas.microsoft.com/office/drawing/2014/main" id="{F41542EF-7EF7-474E-8636-8BC787D21603}"/>
-              </a:ext>
-            </a:extLst>
-          </p:cNvPr>
-          <p:cNvSpPr>
-            <a:spLocks xmlns:a="http://schemas.openxmlformats.org/drawingml/2006/main" noGrp="1"/>
-          </p:cNvSpPr>
-          <p:nvPr/>
-        </p:nvSpPr>
-        <p:spPr>
-          <a:xfrm xmlns:a="http://schemas.openxmlformats.org/drawingml/2006/main">
-            <a:off x="1771650" y="4972050"/>
-            <a:ext cx="5962650" cy="400050"/>
-          </a:xfrm>
-          <a:prstGeom xmlns:a="http://schemas.openxmlformats.org/drawingml/2006/main" prst="rect">
-            <a:avLst/>
-          </a:prstGeom>
-          <a:solidFill xmlns:a="http://schemas.openxmlformats.org/drawingml/2006/main">
-            <a:srgbClr val="F8F2E8"/>
-          </a:solidFill>
-          <a:ln xmlns:a="http://schemas.openxmlformats.org/drawingml/2006/main" w="0">
-            <a:solidFill>
-              <a:srgbClr val="000000">
-                <a:alpha val="0"/>
-              </a:srgbClr>
-            </a:solidFill>
-            <a:prstDash val="solid"/>
-          </a:ln>
-        </p:spPr>
-      </p:sp>
-      <p:sp>
-        <p:nvSpPr>
-          <p:cNvPr id="44" name="">
-            <a:extLst xmlns:a="http://schemas.openxmlformats.org/drawingml/2006/main">
-              <a:ext uri="{FF2B5EF4-FFF2-40B4-BE49-F238E27FC236}">
-                <a16:creationId xmlns:a16="http://schemas.microsoft.com/office/drawing/2014/main" id="{2E66097E-C4BD-4C33-80BC-C4D98A76858A}"/>
-              </a:ext>
-            </a:extLst>
-          </p:cNvPr>
-          <p:cNvSpPr>
-            <a:spLocks xmlns:a="http://schemas.openxmlformats.org/drawingml/2006/main" noGrp="1"/>
-          </p:cNvSpPr>
-          <p:nvPr/>
-        </p:nvSpPr>
-        <p:spPr>
-          <a:xfrm xmlns:a="http://schemas.openxmlformats.org/drawingml/2006/main">
-            <a:off x="1943100" y="5086350"/>
-            <a:ext cx="5619750" cy="171450"/>
-          </a:xfrm>
-          <a:prstGeom xmlns:a="http://schemas.openxmlformats.org/drawingml/2006/main" prst="rect">
-            <a:avLst/>
-          </a:prstGeom>
-          <a:solidFill xmlns:a="http://schemas.openxmlformats.org/drawingml/2006/main">
-            <a:srgbClr val="000000">
-              <a:alpha val="0"/>
-            </a:srgbClr>
-          </a:solidFill>
-          <a:ln xmlns:a="http://schemas.openxmlformats.org/drawingml/2006/main" w="0">
-            <a:solidFill>
-              <a:srgbClr val="000000">
-                <a:alpha val="0"/>
-              </a:srgbClr>
-            </a:solidFill>
-            <a:prstDash val="solid"/>
-          </a:ln>
-        </p:spPr>
-        <p:txBody>
-          <a:bodyPr xmlns:a="http://schemas.openxmlformats.org/drawingml/2006/main" lIns="0" tIns="0" rIns="0" bIns="0" anchor="ctr"/>
-          <a:lstStyle xmlns:a="http://schemas.openxmlformats.org/drawingml/2006/main"/>
-          <a:p xmlns:a="http://schemas.openxmlformats.org/drawingml/2006/main">
-            <a:pPr algn="ctr">
-              <a:defRPr sz="1125" b="1">
-                <a:solidFill>
-                  <a:srgbClr val="111820"/>
-                </a:solidFill>
-                <a:latin typeface="Hiragino Sans"/>
-                <a:ea typeface="Hiragino Sans"/>
-                <a:cs typeface="Hiragino Sans"/>
-              </a:defRPr>
-            </a:pPr>
-            <a:r>
-              <a:rPr sz="1125" b="1">
-                <a:solidFill>
-                  <a:srgbClr val="111820"/>
-                </a:solidFill>
-                <a:latin typeface="Hiragino Sans"/>
-                <a:ea typeface="Hiragino Sans"/>
-                <a:cs typeface="Hiragino Sans"/>
-              </a:rPr>
-              <a:t>世代数を増やせるなら、同じ a* をより短い Δ で実装できる</a:t>
-            </a:r>
-          </a:p>
-        </p:txBody>
-      </p:sp>
-      <p:sp>
-        <p:nvSpPr>
-          <p:cNvPr id="45" name="">
-            <a:extLst xmlns:a="http://schemas.openxmlformats.org/drawingml/2006/main">
-              <a:ext uri="{FF2B5EF4-FFF2-40B4-BE49-F238E27FC236}">
-                <a16:creationId xmlns:a16="http://schemas.microsoft.com/office/drawing/2014/main" id="{D231ACBD-6E79-4818-9968-7C3219E0AA97}"/>
-              </a:ext>
-            </a:extLst>
-          </p:cNvPr>
-          <p:cNvSpPr>
-            <a:spLocks xmlns:a="http://schemas.openxmlformats.org/drawingml/2006/main" noGrp="1"/>
-          </p:cNvSpPr>
-          <p:nvPr/>
-        </p:nvSpPr>
-        <p:spPr>
-          <a:xfrm xmlns:a="http://schemas.openxmlformats.org/drawingml/2006/main">
-            <a:off x="8839200" y="2419350"/>
-            <a:ext cx="2114550" cy="2457450"/>
+          <p:cNvPr id="52" name="">
+            <a:extLst xmlns:a="http://schemas.openxmlformats.org/drawingml/2006/main">
+              <a:ext uri="{FF2B5EF4-FFF2-40B4-BE49-F238E27FC236}">
+                <a16:creationId xmlns:a16="http://schemas.microsoft.com/office/drawing/2014/main" id="{906C854F-4AFD-4870-B437-2698571454CF}"/>
+              </a:ext>
+            </a:extLst>
+          </p:cNvPr>
+          <p:cNvSpPr>
+            <a:spLocks xmlns:a="http://schemas.openxmlformats.org/drawingml/2006/main" noGrp="1"/>
+          </p:cNvSpPr>
+          <p:nvPr/>
+        </p:nvSpPr>
+        <p:spPr>
+          <a:xfrm xmlns:a="http://schemas.openxmlformats.org/drawingml/2006/main">
+            <a:off x="8858250" y="2381250"/>
+            <a:ext cx="2057400" cy="1333500"/>
           </a:xfrm>
           <a:prstGeom xmlns:a="http://schemas.openxmlformats.org/drawingml/2006/main" prst="rect">
             <a:avLst/>
@@ -14760,7 +15571,7 @@
           <a:solidFill xmlns:a="http://schemas.openxmlformats.org/drawingml/2006/main">
             <a:srgbClr val="18202A"/>
           </a:solidFill>
-          <a:ln xmlns:a="http://schemas.openxmlformats.org/drawingml/2006/main" w="11430">
+          <a:ln xmlns:a="http://schemas.openxmlformats.org/drawingml/2006/main" w="12383">
             <a:solidFill>
               <a:srgbClr val="53606A"/>
             </a:solidFill>
@@ -14770,22 +15581,22 @@
       </p:sp>
       <p:sp>
         <p:nvSpPr>
-          <p:cNvPr id="46" name="">
-            <a:extLst xmlns:a="http://schemas.openxmlformats.org/drawingml/2006/main">
-              <a:ext uri="{FF2B5EF4-FFF2-40B4-BE49-F238E27FC236}">
-                <a16:creationId xmlns:a16="http://schemas.microsoft.com/office/drawing/2014/main" id="{EC24C518-A8C1-490B-801F-CF0B8D5AF8DB}"/>
-              </a:ext>
-            </a:extLst>
-          </p:cNvPr>
-          <p:cNvSpPr>
-            <a:spLocks xmlns:a="http://schemas.openxmlformats.org/drawingml/2006/main" noGrp="1"/>
-          </p:cNvSpPr>
-          <p:nvPr/>
-        </p:nvSpPr>
-        <p:spPr>
-          <a:xfrm xmlns:a="http://schemas.openxmlformats.org/drawingml/2006/main">
-            <a:off x="9163050" y="2686050"/>
-            <a:ext cx="1447800" cy="247650"/>
+          <p:cNvPr id="53" name="">
+            <a:extLst xmlns:a="http://schemas.openxmlformats.org/drawingml/2006/main">
+              <a:ext uri="{FF2B5EF4-FFF2-40B4-BE49-F238E27FC236}">
+                <a16:creationId xmlns:a16="http://schemas.microsoft.com/office/drawing/2014/main" id="{5ACAB18B-E56D-4814-9D4D-0F0F4E534597}"/>
+              </a:ext>
+            </a:extLst>
+          </p:cNvPr>
+          <p:cNvSpPr>
+            <a:spLocks xmlns:a="http://schemas.openxmlformats.org/drawingml/2006/main" noGrp="1"/>
+          </p:cNvSpPr>
+          <p:nvPr/>
+        </p:nvSpPr>
+        <p:spPr>
+          <a:xfrm xmlns:a="http://schemas.openxmlformats.org/drawingml/2006/main">
+            <a:off x="9105900" y="2590800"/>
+            <a:ext cx="1562100" cy="228600"/>
           </a:xfrm>
           <a:prstGeom xmlns:a="http://schemas.openxmlformats.org/drawingml/2006/main" prst="rect">
             <a:avLst/>
@@ -14809,7 +15620,7 @@
           <a:lstStyle xmlns:a="http://schemas.openxmlformats.org/drawingml/2006/main"/>
           <a:p xmlns:a="http://schemas.openxmlformats.org/drawingml/2006/main">
             <a:pPr algn="ctr">
-              <a:defRPr sz="1275" b="1">
+              <a:defRPr sz="1200" b="1">
                 <a:solidFill>
                   <a:srgbClr val="F8F2E8"/>
                 </a:solidFill>
@@ -14819,7 +15630,7 @@
               </a:defRPr>
             </a:pPr>
             <a:r>
-              <a:rPr sz="1275" b="1">
+              <a:rPr sz="1200" b="1">
                 <a:solidFill>
                   <a:srgbClr val="F8F2E8"/>
                 </a:solidFill>
@@ -14827,458 +15638,29 @@
                 <a:ea typeface="Hiragino Sans"/>
                 <a:cs typeface="Hiragino Sans"/>
               </a:rPr>
-              <a:t>READING</a:t>
+              <a:t>条件</a:t>
             </a:r>
           </a:p>
         </p:txBody>
       </p:sp>
       <p:sp>
         <p:nvSpPr>
-          <p:cNvPr id="47" name="">
-            <a:extLst xmlns:a="http://schemas.openxmlformats.org/drawingml/2006/main">
-              <a:ext uri="{FF2B5EF4-FFF2-40B4-BE49-F238E27FC236}">
-                <a16:creationId xmlns:a16="http://schemas.microsoft.com/office/drawing/2014/main" id="{F0A607C1-C31C-43A1-9A25-EDC348C2A0C4}"/>
-              </a:ext>
-            </a:extLst>
-          </p:cNvPr>
-          <p:cNvSpPr>
-            <a:spLocks xmlns:a="http://schemas.openxmlformats.org/drawingml/2006/main" noGrp="1"/>
-          </p:cNvSpPr>
-          <p:nvPr/>
-        </p:nvSpPr>
-        <p:spPr>
-          <a:xfrm xmlns:a="http://schemas.openxmlformats.org/drawingml/2006/main">
-            <a:off x="9086850" y="3162300"/>
-            <a:ext cx="95250" cy="95250"/>
-          </a:xfrm>
-          <a:prstGeom xmlns:a="http://schemas.openxmlformats.org/drawingml/2006/main" prst="rect">
-            <a:avLst/>
-          </a:prstGeom>
-          <a:solidFill xmlns:a="http://schemas.openxmlformats.org/drawingml/2006/main">
-            <a:srgbClr val="FF4D4A"/>
-          </a:solidFill>
-          <a:ln xmlns:a="http://schemas.openxmlformats.org/drawingml/2006/main" w="0">
-            <a:solidFill>
-              <a:srgbClr val="000000">
-                <a:alpha val="0"/>
-              </a:srgbClr>
-            </a:solidFill>
-            <a:prstDash val="solid"/>
-          </a:ln>
-        </p:spPr>
-      </p:sp>
-      <p:sp>
-        <p:nvSpPr>
-          <p:cNvPr id="48" name="">
-            <a:extLst xmlns:a="http://schemas.openxmlformats.org/drawingml/2006/main">
-              <a:ext uri="{FF2B5EF4-FFF2-40B4-BE49-F238E27FC236}">
-                <a16:creationId xmlns:a16="http://schemas.microsoft.com/office/drawing/2014/main" id="{C7027F88-C4F6-4A5C-98DF-E88F7271DB69}"/>
-              </a:ext>
-            </a:extLst>
-          </p:cNvPr>
-          <p:cNvSpPr>
-            <a:spLocks xmlns:a="http://schemas.openxmlformats.org/drawingml/2006/main" noGrp="1"/>
-          </p:cNvSpPr>
-          <p:nvPr/>
-        </p:nvSpPr>
-        <p:spPr>
-          <a:xfrm xmlns:a="http://schemas.openxmlformats.org/drawingml/2006/main">
-            <a:off x="9315450" y="3067050"/>
-            <a:ext cx="1314450" cy="323850"/>
-          </a:xfrm>
-          <a:prstGeom xmlns:a="http://schemas.openxmlformats.org/drawingml/2006/main" prst="rect">
-            <a:avLst/>
-          </a:prstGeom>
-          <a:solidFill xmlns:a="http://schemas.openxmlformats.org/drawingml/2006/main">
-            <a:srgbClr val="000000">
-              <a:alpha val="0"/>
-            </a:srgbClr>
-          </a:solidFill>
-          <a:ln xmlns:a="http://schemas.openxmlformats.org/drawingml/2006/main" w="0">
-            <a:solidFill>
-              <a:srgbClr val="000000">
-                <a:alpha val="0"/>
-              </a:srgbClr>
-            </a:solidFill>
-            <a:prstDash val="solid"/>
-          </a:ln>
-        </p:spPr>
-        <p:txBody>
-          <a:bodyPr xmlns:a="http://schemas.openxmlformats.org/drawingml/2006/main" lIns="0" tIns="0" rIns="0" bIns="0" anchor="t"/>
-          <a:lstStyle xmlns:a="http://schemas.openxmlformats.org/drawingml/2006/main"/>
-          <a:p xmlns:a="http://schemas.openxmlformats.org/drawingml/2006/main">
-            <a:pPr algn="l">
-              <a:defRPr sz="810" b="0">
-                <a:solidFill>
-                  <a:srgbClr val="A8B1BA"/>
-                </a:solidFill>
-                <a:latin typeface="Hiragino Sans"/>
-                <a:ea typeface="Hiragino Sans"/>
-                <a:cs typeface="Hiragino Sans"/>
-              </a:defRPr>
-            </a:pPr>
-            <a:r>
-              <a:rPr sz="810" b="0">
-                <a:solidFill>
-                  <a:srgbClr val="A8B1BA"/>
-                </a:solidFill>
-                <a:latin typeface="Hiragino Sans"/>
-                <a:ea typeface="Hiragino Sans"/>
-                <a:cs typeface="Hiragino Sans"/>
-              </a:rPr>
-              <a:t>L → 全損時損失</a:t>
-            </a:r>
-          </a:p>
-        </p:txBody>
-      </p:sp>
-      <p:sp>
-        <p:nvSpPr>
-          <p:cNvPr id="49" name="">
-            <a:extLst xmlns:a="http://schemas.openxmlformats.org/drawingml/2006/main">
-              <a:ext uri="{FF2B5EF4-FFF2-40B4-BE49-F238E27FC236}">
-                <a16:creationId xmlns:a16="http://schemas.microsoft.com/office/drawing/2014/main" id="{B353249A-23D7-4E8C-A3E2-9558642B6A06}"/>
-              </a:ext>
-            </a:extLst>
-          </p:cNvPr>
-          <p:cNvSpPr>
-            <a:spLocks xmlns:a="http://schemas.openxmlformats.org/drawingml/2006/main" noGrp="1"/>
-          </p:cNvSpPr>
-          <p:nvPr/>
-        </p:nvSpPr>
-        <p:spPr>
-          <a:xfrm xmlns:a="http://schemas.openxmlformats.org/drawingml/2006/main">
-            <a:off x="9086850" y="3524250"/>
-            <a:ext cx="95250" cy="95250"/>
-          </a:xfrm>
-          <a:prstGeom xmlns:a="http://schemas.openxmlformats.org/drawingml/2006/main" prst="rect">
-            <a:avLst/>
-          </a:prstGeom>
-          <a:solidFill xmlns:a="http://schemas.openxmlformats.org/drawingml/2006/main">
-            <a:srgbClr val="F2B84B"/>
-          </a:solidFill>
-          <a:ln xmlns:a="http://schemas.openxmlformats.org/drawingml/2006/main" w="0">
-            <a:solidFill>
-              <a:srgbClr val="000000">
-                <a:alpha val="0"/>
-              </a:srgbClr>
-            </a:solidFill>
-            <a:prstDash val="solid"/>
-          </a:ln>
-        </p:spPr>
-      </p:sp>
-      <p:sp>
-        <p:nvSpPr>
-          <p:cNvPr id="50" name="">
-            <a:extLst xmlns:a="http://schemas.openxmlformats.org/drawingml/2006/main">
-              <a:ext uri="{FF2B5EF4-FFF2-40B4-BE49-F238E27FC236}">
-                <a16:creationId xmlns:a16="http://schemas.microsoft.com/office/drawing/2014/main" id="{ADBB08D5-45E0-49A7-A990-A75616885907}"/>
-              </a:ext>
-            </a:extLst>
-          </p:cNvPr>
-          <p:cNvSpPr>
-            <a:spLocks xmlns:a="http://schemas.openxmlformats.org/drawingml/2006/main" noGrp="1"/>
-          </p:cNvSpPr>
-          <p:nvPr/>
-        </p:nvSpPr>
-        <p:spPr>
-          <a:xfrm xmlns:a="http://schemas.openxmlformats.org/drawingml/2006/main">
-            <a:off x="9315450" y="3429000"/>
-            <a:ext cx="1314450" cy="323850"/>
-          </a:xfrm>
-          <a:prstGeom xmlns:a="http://schemas.openxmlformats.org/drawingml/2006/main" prst="rect">
-            <a:avLst/>
-          </a:prstGeom>
-          <a:solidFill xmlns:a="http://schemas.openxmlformats.org/drawingml/2006/main">
-            <a:srgbClr val="000000">
-              <a:alpha val="0"/>
-            </a:srgbClr>
-          </a:solidFill>
-          <a:ln xmlns:a="http://schemas.openxmlformats.org/drawingml/2006/main" w="0">
-            <a:solidFill>
-              <a:srgbClr val="000000">
-                <a:alpha val="0"/>
-              </a:srgbClr>
-            </a:solidFill>
-            <a:prstDash val="solid"/>
-          </a:ln>
-        </p:spPr>
-        <p:txBody>
-          <a:bodyPr xmlns:a="http://schemas.openxmlformats.org/drawingml/2006/main" lIns="0" tIns="0" rIns="0" bIns="0" anchor="t"/>
-          <a:lstStyle xmlns:a="http://schemas.openxmlformats.org/drawingml/2006/main"/>
-          <a:p xmlns:a="http://schemas.openxmlformats.org/drawingml/2006/main">
-            <a:pPr algn="l">
-              <a:defRPr sz="810" b="0">
-                <a:solidFill>
-                  <a:srgbClr val="A8B1BA"/>
-                </a:solidFill>
-                <a:latin typeface="Hiragino Sans"/>
-                <a:ea typeface="Hiragino Sans"/>
-                <a:cs typeface="Hiragino Sans"/>
-              </a:defRPr>
-            </a:pPr>
-            <a:r>
-              <a:rPr sz="810" b="0">
-                <a:solidFill>
-                  <a:srgbClr val="A8B1BA"/>
-                </a:solidFill>
-                <a:latin typeface="Hiragino Sans"/>
-                <a:ea typeface="Hiragino Sans"/>
-                <a:cs typeface="Hiragino Sans"/>
-              </a:rPr>
-              <a:t>d₁τ_R+d₀ → 通常復旧損失</a:t>
-            </a:r>
-          </a:p>
-        </p:txBody>
-      </p:sp>
-      <p:sp>
-        <p:nvSpPr>
-          <p:cNvPr id="51" name="">
-            <a:extLst xmlns:a="http://schemas.openxmlformats.org/drawingml/2006/main">
-              <a:ext uri="{FF2B5EF4-FFF2-40B4-BE49-F238E27FC236}">
-                <a16:creationId xmlns:a16="http://schemas.microsoft.com/office/drawing/2014/main" id="{D70394F3-5829-449E-864E-937762F46C13}"/>
-              </a:ext>
-            </a:extLst>
-          </p:cNvPr>
-          <p:cNvSpPr>
-            <a:spLocks xmlns:a="http://schemas.openxmlformats.org/drawingml/2006/main" noGrp="1"/>
-          </p:cNvSpPr>
-          <p:nvPr/>
-        </p:nvSpPr>
-        <p:spPr>
-          <a:xfrm xmlns:a="http://schemas.openxmlformats.org/drawingml/2006/main">
-            <a:off x="9086850" y="3886200"/>
-            <a:ext cx="95250" cy="95250"/>
-          </a:xfrm>
-          <a:prstGeom xmlns:a="http://schemas.openxmlformats.org/drawingml/2006/main" prst="rect">
-            <a:avLst/>
-          </a:prstGeom>
-          <a:solidFill xmlns:a="http://schemas.openxmlformats.org/drawingml/2006/main">
-            <a:srgbClr val="34E0B3"/>
-          </a:solidFill>
-          <a:ln xmlns:a="http://schemas.openxmlformats.org/drawingml/2006/main" w="0">
-            <a:solidFill>
-              <a:srgbClr val="000000">
-                <a:alpha val="0"/>
-              </a:srgbClr>
-            </a:solidFill>
-            <a:prstDash val="solid"/>
-          </a:ln>
-        </p:spPr>
-      </p:sp>
-      <p:sp>
-        <p:nvSpPr>
-          <p:cNvPr id="52" name="">
-            <a:extLst xmlns:a="http://schemas.openxmlformats.org/drawingml/2006/main">
-              <a:ext uri="{FF2B5EF4-FFF2-40B4-BE49-F238E27FC236}">
-                <a16:creationId xmlns:a16="http://schemas.microsoft.com/office/drawing/2014/main" id="{969AAADC-4878-4F16-8D34-08DC70E3416F}"/>
-              </a:ext>
-            </a:extLst>
-          </p:cNvPr>
-          <p:cNvSpPr>
-            <a:spLocks xmlns:a="http://schemas.openxmlformats.org/drawingml/2006/main" noGrp="1"/>
-          </p:cNvSpPr>
-          <p:nvPr/>
-        </p:nvSpPr>
-        <p:spPr>
-          <a:xfrm xmlns:a="http://schemas.openxmlformats.org/drawingml/2006/main">
-            <a:off x="9315450" y="3790950"/>
-            <a:ext cx="1314450" cy="323850"/>
-          </a:xfrm>
-          <a:prstGeom xmlns:a="http://schemas.openxmlformats.org/drawingml/2006/main" prst="rect">
-            <a:avLst/>
-          </a:prstGeom>
-          <a:solidFill xmlns:a="http://schemas.openxmlformats.org/drawingml/2006/main">
-            <a:srgbClr val="000000">
-              <a:alpha val="0"/>
-            </a:srgbClr>
-          </a:solidFill>
-          <a:ln xmlns:a="http://schemas.openxmlformats.org/drawingml/2006/main" w="0">
-            <a:solidFill>
-              <a:srgbClr val="000000">
-                <a:alpha val="0"/>
-              </a:srgbClr>
-            </a:solidFill>
-            <a:prstDash val="solid"/>
-          </a:ln>
-        </p:spPr>
-        <p:txBody>
-          <a:bodyPr xmlns:a="http://schemas.openxmlformats.org/drawingml/2006/main" lIns="0" tIns="0" rIns="0" bIns="0" anchor="t"/>
-          <a:lstStyle xmlns:a="http://schemas.openxmlformats.org/drawingml/2006/main"/>
-          <a:p xmlns:a="http://schemas.openxmlformats.org/drawingml/2006/main">
-            <a:pPr algn="l">
-              <a:defRPr sz="810" b="0">
-                <a:solidFill>
-                  <a:srgbClr val="A8B1BA"/>
-                </a:solidFill>
-                <a:latin typeface="Hiragino Sans"/>
-                <a:ea typeface="Hiragino Sans"/>
-                <a:cs typeface="Hiragino Sans"/>
-              </a:defRPr>
-            </a:pPr>
-            <a:r>
-              <a:rPr sz="810" b="0">
-                <a:solidFill>
-                  <a:srgbClr val="A8B1BA"/>
-                </a:solidFill>
-                <a:latin typeface="Hiragino Sans"/>
-                <a:ea typeface="Hiragino Sans"/>
-                <a:cs typeface="Hiragino Sans"/>
-              </a:rPr>
-              <a:t>κ_s → 戻るほど増える負荷</a:t>
-            </a:r>
-          </a:p>
-        </p:txBody>
-      </p:sp>
-      <p:sp>
-        <p:nvSpPr>
-          <p:cNvPr id="53" name="">
-            <a:extLst xmlns:a="http://schemas.openxmlformats.org/drawingml/2006/main">
-              <a:ext uri="{FF2B5EF4-FFF2-40B4-BE49-F238E27FC236}">
-                <a16:creationId xmlns:a16="http://schemas.microsoft.com/office/drawing/2014/main" id="{F4142738-2E50-42DA-BB18-447368869306}"/>
-              </a:ext>
-            </a:extLst>
-          </p:cNvPr>
-          <p:cNvSpPr>
-            <a:spLocks xmlns:a="http://schemas.openxmlformats.org/drawingml/2006/main" noGrp="1"/>
-          </p:cNvSpPr>
-          <p:nvPr/>
-        </p:nvSpPr>
-        <p:spPr>
-          <a:xfrm xmlns:a="http://schemas.openxmlformats.org/drawingml/2006/main">
-            <a:off x="9086850" y="4248150"/>
-            <a:ext cx="95250" cy="95250"/>
-          </a:xfrm>
-          <a:prstGeom xmlns:a="http://schemas.openxmlformats.org/drawingml/2006/main" prst="rect">
-            <a:avLst/>
-          </a:prstGeom>
-          <a:solidFill xmlns:a="http://schemas.openxmlformats.org/drawingml/2006/main">
-            <a:srgbClr val="6EA8FF"/>
-          </a:solidFill>
-          <a:ln xmlns:a="http://schemas.openxmlformats.org/drawingml/2006/main" w="0">
-            <a:solidFill>
-              <a:srgbClr val="000000">
-                <a:alpha val="0"/>
-              </a:srgbClr>
-            </a:solidFill>
-            <a:prstDash val="solid"/>
-          </a:ln>
-        </p:spPr>
-      </p:sp>
-      <p:sp>
-        <p:nvSpPr>
           <p:cNvPr id="54" name="">
             <a:extLst xmlns:a="http://schemas.openxmlformats.org/drawingml/2006/main">
               <a:ext uri="{FF2B5EF4-FFF2-40B4-BE49-F238E27FC236}">
-                <a16:creationId xmlns:a16="http://schemas.microsoft.com/office/drawing/2014/main" id="{4E4B3D19-C504-4033-BF2C-B53AD2097794}"/>
-              </a:ext>
-            </a:extLst>
-          </p:cNvPr>
-          <p:cNvSpPr>
-            <a:spLocks xmlns:a="http://schemas.openxmlformats.org/drawingml/2006/main" noGrp="1"/>
-          </p:cNvSpPr>
-          <p:nvPr/>
-        </p:nvSpPr>
-        <p:spPr>
-          <a:xfrm xmlns:a="http://schemas.openxmlformats.org/drawingml/2006/main">
-            <a:off x="9315450" y="4152900"/>
-            <a:ext cx="1314450" cy="323850"/>
-          </a:xfrm>
-          <a:prstGeom xmlns:a="http://schemas.openxmlformats.org/drawingml/2006/main" prst="rect">
-            <a:avLst/>
-          </a:prstGeom>
-          <a:solidFill xmlns:a="http://schemas.openxmlformats.org/drawingml/2006/main">
-            <a:srgbClr val="000000">
-              <a:alpha val="0"/>
-            </a:srgbClr>
-          </a:solidFill>
-          <a:ln xmlns:a="http://schemas.openxmlformats.org/drawingml/2006/main" w="0">
-            <a:solidFill>
-              <a:srgbClr val="000000">
-                <a:alpha val="0"/>
-              </a:srgbClr>
-            </a:solidFill>
-            <a:prstDash val="solid"/>
-          </a:ln>
-        </p:spPr>
-        <p:txBody>
-          <a:bodyPr xmlns:a="http://schemas.openxmlformats.org/drawingml/2006/main" lIns="0" tIns="0" rIns="0" bIns="0" anchor="t"/>
-          <a:lstStyle xmlns:a="http://schemas.openxmlformats.org/drawingml/2006/main"/>
-          <a:p xmlns:a="http://schemas.openxmlformats.org/drawingml/2006/main">
-            <a:pPr algn="l">
-              <a:defRPr sz="810" b="0">
-                <a:solidFill>
-                  <a:srgbClr val="A8B1BA"/>
-                </a:solidFill>
-                <a:latin typeface="Hiragino Sans"/>
-                <a:ea typeface="Hiragino Sans"/>
-                <a:cs typeface="Hiragino Sans"/>
-              </a:defRPr>
-            </a:pPr>
-            <a:r>
-              <a:rPr sz="810" b="0">
-                <a:solidFill>
-                  <a:srgbClr val="A8B1BA"/>
-                </a:solidFill>
-                <a:latin typeface="Hiragino Sans"/>
-                <a:ea typeface="Hiragino Sans"/>
-                <a:cs typeface="Hiragino Sans"/>
-              </a:rPr>
-              <a:t>n → 保持世代数</a:t>
-            </a:r>
-          </a:p>
-        </p:txBody>
-      </p:sp>
-      <p:sp>
-        <p:nvSpPr>
-          <p:cNvPr id="55" name="">
-            <a:extLst xmlns:a="http://schemas.openxmlformats.org/drawingml/2006/main">
-              <a:ext uri="{FF2B5EF4-FFF2-40B4-BE49-F238E27FC236}">
-                <a16:creationId xmlns:a16="http://schemas.microsoft.com/office/drawing/2014/main" id="{F6CBD12C-BDCA-42B6-B7E7-CBDE69E5797D}"/>
-              </a:ext>
-            </a:extLst>
-          </p:cNvPr>
-          <p:cNvSpPr>
-            <a:spLocks xmlns:a="http://schemas.openxmlformats.org/drawingml/2006/main" noGrp="1"/>
-          </p:cNvSpPr>
-          <p:nvPr/>
-        </p:nvSpPr>
-        <p:spPr>
-          <a:xfrm xmlns:a="http://schemas.openxmlformats.org/drawingml/2006/main">
-            <a:off x="1143000" y="5867400"/>
-            <a:ext cx="9906000" cy="400050"/>
-          </a:xfrm>
-          <a:prstGeom xmlns:a="http://schemas.openxmlformats.org/drawingml/2006/main" prst="rect">
-            <a:avLst/>
-          </a:prstGeom>
-          <a:solidFill xmlns:a="http://schemas.openxmlformats.org/drawingml/2006/main">
-            <a:srgbClr val="331B20"/>
-          </a:solidFill>
-          <a:ln xmlns:a="http://schemas.openxmlformats.org/drawingml/2006/main" w="13335">
-            <a:solidFill>
-              <a:srgbClr val="FF4D4A"/>
-            </a:solidFill>
-            <a:prstDash val="solid"/>
-          </a:ln>
-        </p:spPr>
-      </p:sp>
-      <p:sp>
-        <p:nvSpPr>
-          <p:cNvPr id="56" name="">
-            <a:extLst xmlns:a="http://schemas.openxmlformats.org/drawingml/2006/main">
-              <a:ext uri="{FF2B5EF4-FFF2-40B4-BE49-F238E27FC236}">
-                <a16:creationId xmlns:a16="http://schemas.microsoft.com/office/drawing/2014/main" id="{CC788459-42F6-4DDC-AEF8-5515028B58AA}"/>
-              </a:ext>
-            </a:extLst>
-          </p:cNvPr>
-          <p:cNvSpPr>
-            <a:spLocks xmlns:a="http://schemas.openxmlformats.org/drawingml/2006/main" noGrp="1"/>
-          </p:cNvSpPr>
-          <p:nvPr/>
-        </p:nvSpPr>
-        <p:spPr>
-          <a:xfrm xmlns:a="http://schemas.openxmlformats.org/drawingml/2006/main">
-            <a:off x="1371600" y="5962650"/>
-            <a:ext cx="9448800" cy="209550"/>
+                <a16:creationId xmlns:a16="http://schemas.microsoft.com/office/drawing/2014/main" id="{C14BEF8A-281C-41DA-8B03-587A7FA5FE11}"/>
+              </a:ext>
+            </a:extLst>
+          </p:cNvPr>
+          <p:cNvSpPr>
+            <a:spLocks xmlns:a="http://schemas.openxmlformats.org/drawingml/2006/main" noGrp="1"/>
+          </p:cNvSpPr>
+          <p:nvPr/>
+        </p:nvSpPr>
+        <p:spPr>
+          <a:xfrm xmlns:a="http://schemas.openxmlformats.org/drawingml/2006/main">
+            <a:off x="9124950" y="3028950"/>
+            <a:ext cx="1543050" cy="514350"/>
           </a:xfrm>
           <a:prstGeom xmlns:a="http://schemas.openxmlformats.org/drawingml/2006/main" prst="rect">
             <a:avLst/>
@@ -15302,9 +15684,9 @@
           <a:lstStyle xmlns:a="http://schemas.openxmlformats.org/drawingml/2006/main"/>
           <a:p xmlns:a="http://schemas.openxmlformats.org/drawingml/2006/main">
             <a:pPr algn="ctr">
-              <a:defRPr sz="990" b="1">
-                <a:solidFill>
-                  <a:srgbClr val="FF4D4A"/>
+              <a:defRPr sz="900" b="0">
+                <a:solidFill>
+                  <a:srgbClr val="A8B1BA"/>
                 </a:solidFill>
                 <a:latin typeface="Hiragino Sans"/>
                 <a:ea typeface="Hiragino Sans"/>
@@ -15312,25 +15694,71 @@
               </a:defRPr>
             </a:pPr>
             <a:r>
-              <a:rPr sz="990" b="1">
-                <a:solidFill>
-                  <a:srgbClr val="FF4D4A"/>
+              <a:rPr sz="900" b="0">
+                <a:solidFill>
+                  <a:srgbClr val="A8B1BA"/>
                 </a:solidFill>
                 <a:latin typeface="Hiragino Sans"/>
                 <a:ea typeface="Hiragino Sans"/>
                 <a:cs typeface="Hiragino Sans"/>
               </a:rPr>
-              <a:t>条件: L &gt; d₁τ_R + d₀、κ_s&gt;0、Δ*が許容区間内。外れる場合は端点評価と保持設計の見直し。</a:t>
+              <a:t>L &gt; d₁τ_R+d₀</a:t>
+            </a:r>
+          </a:p>
+          <a:p xmlns:a="http://schemas.openxmlformats.org/drawingml/2006/main">
+            <a:pPr algn="ctr">
+              <a:defRPr sz="900" b="0">
+                <a:solidFill>
+                  <a:srgbClr val="A8B1BA"/>
+                </a:solidFill>
+                <a:latin typeface="Hiragino Sans"/>
+                <a:ea typeface="Hiragino Sans"/>
+                <a:cs typeface="Hiragino Sans"/>
+              </a:defRPr>
+            </a:pPr>
+            <a:r>
+              <a:rPr sz="900" b="0">
+                <a:solidFill>
+                  <a:srgbClr val="A8B1BA"/>
+                </a:solidFill>
+                <a:latin typeface="Hiragino Sans"/>
+                <a:ea typeface="Hiragino Sans"/>
+                <a:cs typeface="Hiragino Sans"/>
+              </a:rPr>
+              <a:t>κ_s &gt; 0</a:t>
+            </a:r>
+          </a:p>
+          <a:p xmlns:a="http://schemas.openxmlformats.org/drawingml/2006/main">
+            <a:pPr algn="ctr">
+              <a:defRPr sz="900" b="0">
+                <a:solidFill>
+                  <a:srgbClr val="A8B1BA"/>
+                </a:solidFill>
+                <a:latin typeface="Hiragino Sans"/>
+                <a:ea typeface="Hiragino Sans"/>
+                <a:cs typeface="Hiragino Sans"/>
+              </a:defRPr>
+            </a:pPr>
+            <a:r>
+              <a:rPr sz="900" b="0">
+                <a:solidFill>
+                  <a:srgbClr val="A8B1BA"/>
+                </a:solidFill>
+                <a:latin typeface="Hiragino Sans"/>
+                <a:ea typeface="Hiragino Sans"/>
+                <a:cs typeface="Hiragino Sans"/>
+              </a:rPr>
+              <a:t>Δ* が許容区間内</a:t>
             </a:r>
           </a:p>
         </p:txBody>
       </p:sp>
       <p:sp>
         <p:nvSpPr>
-          <p:cNvPr id="57" name="">
-            <a:extLst xmlns:a="http://schemas.openxmlformats.org/drawingml/2006/main">
-              <a:ext uri="{FF2B5EF4-FFF2-40B4-BE49-F238E27FC236}">
-                <a16:creationId xmlns:a16="http://schemas.microsoft.com/office/drawing/2014/main" id="{3F6B9EE8-E402-4DF6-974E-3F20713A5256}"/>
+          <p:cNvPr id="55" name="">
+            <a:extLst xmlns:a="http://schemas.openxmlformats.org/drawingml/2006/main">
+              <a:ext uri="{FF2B5EF4-FFF2-40B4-BE49-F238E27FC236}">
+                <a16:creationId xmlns:a16="http://schemas.microsoft.com/office/drawing/2014/main" id="{E539B418-81AE-4880-9A42-63AB1233F298}"/>
               </a:ext>
             </a:extLst>
           </p:cNvPr>
@@ -15392,7 +15820,7 @@
     </p:spTree>
     <p:extLst>
       <p:ext uri="{BB962C8B-B14F-4D97-AF65-F5344CB8AC3E}">
-        <p14:creationId xmlns:p14="http://schemas.microsoft.com/office/powerpoint/2010/main" val="157804631"/>
+        <p14:creationId xmlns:p14="http://schemas.microsoft.com/office/powerpoint/2010/main" val="1911160337"/>
       </p:ext>
     </p:extLst>
   </p:cSld>
@@ -15416,7 +15844,7 @@
           <p:cNvPr id="1" name="">
             <a:extLst xmlns:a="http://schemas.openxmlformats.org/drawingml/2006/main">
               <a:ext uri="{FF2B5EF4-FFF2-40B4-BE49-F238E27FC236}">
-                <a16:creationId xmlns:a16="http://schemas.microsoft.com/office/drawing/2014/main" id="{602DC29A-D68D-49CE-B90E-76914ECD3284}"/>
+                <a16:creationId xmlns:a16="http://schemas.microsoft.com/office/drawing/2014/main" id="{C3DDF80F-7933-4517-85C0-2C883BA59F2C}"/>
               </a:ext>
             </a:extLst>
           </p:cNvPr>
@@ -15451,7 +15879,7 @@
           <p:cNvPr id="2" name="">
             <a:extLst xmlns:a="http://schemas.openxmlformats.org/drawingml/2006/main">
               <a:ext uri="{FF2B5EF4-FFF2-40B4-BE49-F238E27FC236}">
-                <a16:creationId xmlns:a16="http://schemas.microsoft.com/office/drawing/2014/main" id="{48CF8DA9-15AC-4E27-B263-5AAC103194F8}"/>
+                <a16:creationId xmlns:a16="http://schemas.microsoft.com/office/drawing/2014/main" id="{DF71EA55-733C-4D81-9D28-913DDACFC8E3}"/>
               </a:ext>
             </a:extLst>
           </p:cNvPr>
@@ -15486,7 +15914,7 @@
           <p:cNvPr id="3" name="">
             <a:extLst xmlns:a="http://schemas.openxmlformats.org/drawingml/2006/main">
               <a:ext uri="{FF2B5EF4-FFF2-40B4-BE49-F238E27FC236}">
-                <a16:creationId xmlns:a16="http://schemas.microsoft.com/office/drawing/2014/main" id="{9972316B-6863-4F29-9E82-313109FA1389}"/>
+                <a16:creationId xmlns:a16="http://schemas.microsoft.com/office/drawing/2014/main" id="{9D16B6CA-DA9B-4FD9-88D1-226CDA117400}"/>
               </a:ext>
             </a:extLst>
           </p:cNvPr>
@@ -15521,7 +15949,7 @@
           <p:cNvPr id="4" name="">
             <a:extLst xmlns:a="http://schemas.openxmlformats.org/drawingml/2006/main">
               <a:ext uri="{FF2B5EF4-FFF2-40B4-BE49-F238E27FC236}">
-                <a16:creationId xmlns:a16="http://schemas.microsoft.com/office/drawing/2014/main" id="{D05EF12C-4D61-492C-B0EA-F62D3110BF22}"/>
+                <a16:creationId xmlns:a16="http://schemas.microsoft.com/office/drawing/2014/main" id="{4E3185A5-BF4B-44B0-8AAD-F37CCDAE6F9B}"/>
               </a:ext>
             </a:extLst>
           </p:cNvPr>
@@ -15556,7 +15984,7 @@
           <p:cNvPr id="5" name="">
             <a:extLst xmlns:a="http://schemas.openxmlformats.org/drawingml/2006/main">
               <a:ext uri="{FF2B5EF4-FFF2-40B4-BE49-F238E27FC236}">
-                <a16:creationId xmlns:a16="http://schemas.microsoft.com/office/drawing/2014/main" id="{7068667A-8DA5-4F45-8663-E916FA7DF033}"/>
+                <a16:creationId xmlns:a16="http://schemas.microsoft.com/office/drawing/2014/main" id="{16A29384-2AA8-4BB5-BEA4-8DA512AE1761}"/>
               </a:ext>
             </a:extLst>
           </p:cNvPr>
@@ -15591,7 +16019,7 @@
           <p:cNvPr id="6" name="">
             <a:extLst xmlns:a="http://schemas.openxmlformats.org/drawingml/2006/main">
               <a:ext uri="{FF2B5EF4-FFF2-40B4-BE49-F238E27FC236}">
-                <a16:creationId xmlns:a16="http://schemas.microsoft.com/office/drawing/2014/main" id="{04DCE939-8264-43CB-92E4-CD003D534E26}"/>
+                <a16:creationId xmlns:a16="http://schemas.microsoft.com/office/drawing/2014/main" id="{F1F0D0B8-AD2F-48FE-A601-59A135E5DC57}"/>
               </a:ext>
             </a:extLst>
           </p:cNvPr>
@@ -15626,7 +16054,7 @@
           <p:cNvPr id="7" name="">
             <a:extLst xmlns:a="http://schemas.openxmlformats.org/drawingml/2006/main">
               <a:ext uri="{FF2B5EF4-FFF2-40B4-BE49-F238E27FC236}">
-                <a16:creationId xmlns:a16="http://schemas.microsoft.com/office/drawing/2014/main" id="{388CE983-2AE2-4C8F-861F-6E52E73F6DB0}"/>
+                <a16:creationId xmlns:a16="http://schemas.microsoft.com/office/drawing/2014/main" id="{91F4A4EB-4FC4-4BF2-8CCE-B4069E0168B2}"/>
               </a:ext>
             </a:extLst>
           </p:cNvPr>
@@ -15661,7 +16089,7 @@
           <p:cNvPr id="8" name="">
             <a:extLst xmlns:a="http://schemas.openxmlformats.org/drawingml/2006/main">
               <a:ext uri="{FF2B5EF4-FFF2-40B4-BE49-F238E27FC236}">
-                <a16:creationId xmlns:a16="http://schemas.microsoft.com/office/drawing/2014/main" id="{9F501DE7-D46F-4327-BE4B-667750574861}"/>
+                <a16:creationId xmlns:a16="http://schemas.microsoft.com/office/drawing/2014/main" id="{4311EA4B-D429-4BEE-A6C4-06F0B25EFD76}"/>
               </a:ext>
             </a:extLst>
           </p:cNvPr>
@@ -15696,7 +16124,7 @@
           <p:cNvPr id="9" name="">
             <a:extLst xmlns:a="http://schemas.openxmlformats.org/drawingml/2006/main">
               <a:ext uri="{FF2B5EF4-FFF2-40B4-BE49-F238E27FC236}">
-                <a16:creationId xmlns:a16="http://schemas.microsoft.com/office/drawing/2014/main" id="{B32C2E3F-E054-495B-AB2D-E70F83881D6A}"/>
+                <a16:creationId xmlns:a16="http://schemas.microsoft.com/office/drawing/2014/main" id="{2CDB8972-818D-42A8-A41D-EB21A4850F8A}"/>
               </a:ext>
             </a:extLst>
           </p:cNvPr>
@@ -15731,7 +16159,7 @@
           <p:cNvPr id="10" name="">
             <a:extLst xmlns:a="http://schemas.openxmlformats.org/drawingml/2006/main">
               <a:ext uri="{FF2B5EF4-FFF2-40B4-BE49-F238E27FC236}">
-                <a16:creationId xmlns:a16="http://schemas.microsoft.com/office/drawing/2014/main" id="{ADD92C35-8400-4B1D-ACDD-C652A12451AB}"/>
+                <a16:creationId xmlns:a16="http://schemas.microsoft.com/office/drawing/2014/main" id="{AE2DEC06-3626-4FAA-B44E-A479A8500AE2}"/>
               </a:ext>
             </a:extLst>
           </p:cNvPr>
@@ -15766,7 +16194,7 @@
           <p:cNvPr id="11" name="">
             <a:extLst xmlns:a="http://schemas.openxmlformats.org/drawingml/2006/main">
               <a:ext uri="{FF2B5EF4-FFF2-40B4-BE49-F238E27FC236}">
-                <a16:creationId xmlns:a16="http://schemas.microsoft.com/office/drawing/2014/main" id="{5AB9388D-2188-4E65-AF62-DF9EBD8BB354}"/>
+                <a16:creationId xmlns:a16="http://schemas.microsoft.com/office/drawing/2014/main" id="{C0CCB97B-1A51-406B-B22D-32C16638DE31}"/>
               </a:ext>
             </a:extLst>
           </p:cNvPr>
@@ -15801,7 +16229,7 @@
           <p:cNvPr id="12" name="">
             <a:extLst xmlns:a="http://schemas.openxmlformats.org/drawingml/2006/main">
               <a:ext uri="{FF2B5EF4-FFF2-40B4-BE49-F238E27FC236}">
-                <a16:creationId xmlns:a16="http://schemas.microsoft.com/office/drawing/2014/main" id="{03746313-0C15-4106-8D96-C57FDD5F7D8E}"/>
+                <a16:creationId xmlns:a16="http://schemas.microsoft.com/office/drawing/2014/main" id="{964B8EA0-CC2A-4CEE-BBEA-C1FB89BCB42E}"/>
               </a:ext>
             </a:extLst>
           </p:cNvPr>
@@ -15836,7 +16264,7 @@
           <p:cNvPr id="13" name="">
             <a:extLst xmlns:a="http://schemas.openxmlformats.org/drawingml/2006/main">
               <a:ext uri="{FF2B5EF4-FFF2-40B4-BE49-F238E27FC236}">
-                <a16:creationId xmlns:a16="http://schemas.microsoft.com/office/drawing/2014/main" id="{1BA5FB33-50C9-4C69-A382-B3499584E21A}"/>
+                <a16:creationId xmlns:a16="http://schemas.microsoft.com/office/drawing/2014/main" id="{67E7AF57-4F73-45FC-8DD9-E68C9214A9A3}"/>
               </a:ext>
             </a:extLst>
           </p:cNvPr>
@@ -15871,7 +16299,7 @@
           <p:cNvPr id="14" name="">
             <a:extLst xmlns:a="http://schemas.openxmlformats.org/drawingml/2006/main">
               <a:ext uri="{FF2B5EF4-FFF2-40B4-BE49-F238E27FC236}">
-                <a16:creationId xmlns:a16="http://schemas.microsoft.com/office/drawing/2014/main" id="{71258772-AD5D-4BD6-8392-0A99A0267ED5}"/>
+                <a16:creationId xmlns:a16="http://schemas.microsoft.com/office/drawing/2014/main" id="{0125682B-D7A0-4EF0-92C0-729F6E1614DF}"/>
               </a:ext>
             </a:extLst>
           </p:cNvPr>
@@ -15906,7 +16334,7 @@
           <p:cNvPr id="15" name="">
             <a:extLst xmlns:a="http://schemas.openxmlformats.org/drawingml/2006/main">
               <a:ext uri="{FF2B5EF4-FFF2-40B4-BE49-F238E27FC236}">
-                <a16:creationId xmlns:a16="http://schemas.microsoft.com/office/drawing/2014/main" id="{AD7019EA-B0C5-461C-B79E-21F43B29D202}"/>
+                <a16:creationId xmlns:a16="http://schemas.microsoft.com/office/drawing/2014/main" id="{2E5DC4A3-5CC8-4D99-9F01-AF24AB7CAD19}"/>
               </a:ext>
             </a:extLst>
           </p:cNvPr>
@@ -15941,7 +16369,7 @@
           <p:cNvPr id="16" name="">
             <a:extLst xmlns:a="http://schemas.openxmlformats.org/drawingml/2006/main">
               <a:ext uri="{FF2B5EF4-FFF2-40B4-BE49-F238E27FC236}">
-                <a16:creationId xmlns:a16="http://schemas.microsoft.com/office/drawing/2014/main" id="{6EE02F79-F4E8-4BEB-8599-4773197ECD61}"/>
+                <a16:creationId xmlns:a16="http://schemas.microsoft.com/office/drawing/2014/main" id="{F0FE7A41-B447-4C48-957A-8CE4EE687E56}"/>
               </a:ext>
             </a:extLst>
           </p:cNvPr>
@@ -15976,7 +16404,7 @@
           <p:cNvPr id="17" name="">
             <a:extLst xmlns:a="http://schemas.openxmlformats.org/drawingml/2006/main">
               <a:ext uri="{FF2B5EF4-FFF2-40B4-BE49-F238E27FC236}">
-                <a16:creationId xmlns:a16="http://schemas.microsoft.com/office/drawing/2014/main" id="{FF70A669-3198-4591-8149-3A229232F589}"/>
+                <a16:creationId xmlns:a16="http://schemas.microsoft.com/office/drawing/2014/main" id="{742B2CF9-E576-4A82-A0A5-3219206AFF00}"/>
               </a:ext>
             </a:extLst>
           </p:cNvPr>
@@ -16011,7 +16439,7 @@
           <p:cNvPr id="18" name="">
             <a:extLst xmlns:a="http://schemas.openxmlformats.org/drawingml/2006/main">
               <a:ext uri="{FF2B5EF4-FFF2-40B4-BE49-F238E27FC236}">
-                <a16:creationId xmlns:a16="http://schemas.microsoft.com/office/drawing/2014/main" id="{F74E06C0-AF46-4246-A219-4F20051B0FA5}"/>
+                <a16:creationId xmlns:a16="http://schemas.microsoft.com/office/drawing/2014/main" id="{B21F845E-0815-4ACB-AE4C-362F00B2280B}"/>
               </a:ext>
             </a:extLst>
           </p:cNvPr>
@@ -16046,7 +16474,7 @@
           <p:cNvPr id="19" name="">
             <a:extLst xmlns:a="http://schemas.openxmlformats.org/drawingml/2006/main">
               <a:ext uri="{FF2B5EF4-FFF2-40B4-BE49-F238E27FC236}">
-                <a16:creationId xmlns:a16="http://schemas.microsoft.com/office/drawing/2014/main" id="{E8040C0D-B71A-4686-9322-ADC506072856}"/>
+                <a16:creationId xmlns:a16="http://schemas.microsoft.com/office/drawing/2014/main" id="{B0D226E5-2B4B-49AA-BAFD-73EAC6C9EEFC}"/>
               </a:ext>
             </a:extLst>
           </p:cNvPr>
@@ -16081,7 +16509,7 @@
           <p:cNvPr id="20" name="">
             <a:extLst xmlns:a="http://schemas.openxmlformats.org/drawingml/2006/main">
               <a:ext uri="{FF2B5EF4-FFF2-40B4-BE49-F238E27FC236}">
-                <a16:creationId xmlns:a16="http://schemas.microsoft.com/office/drawing/2014/main" id="{6C0CE47B-7362-4B2C-A5D6-BB7798561C2A}"/>
+                <a16:creationId xmlns:a16="http://schemas.microsoft.com/office/drawing/2014/main" id="{88C2ECE3-8661-4804-B1B8-54866F8E4F40}"/>
               </a:ext>
             </a:extLst>
           </p:cNvPr>
@@ -16116,7 +16544,7 @@
           <p:cNvPr id="21" name="">
             <a:extLst xmlns:a="http://schemas.openxmlformats.org/drawingml/2006/main">
               <a:ext uri="{FF2B5EF4-FFF2-40B4-BE49-F238E27FC236}">
-                <a16:creationId xmlns:a16="http://schemas.microsoft.com/office/drawing/2014/main" id="{96B97B5A-43B7-48EE-AA79-460B4E03BD57}"/>
+                <a16:creationId xmlns:a16="http://schemas.microsoft.com/office/drawing/2014/main" id="{362447D6-0315-4343-9360-5BDE9F5F070D}"/>
               </a:ext>
             </a:extLst>
           </p:cNvPr>
@@ -16151,7 +16579,7 @@
           <p:cNvPr id="22" name="">
             <a:extLst xmlns:a="http://schemas.openxmlformats.org/drawingml/2006/main">
               <a:ext uri="{FF2B5EF4-FFF2-40B4-BE49-F238E27FC236}">
-                <a16:creationId xmlns:a16="http://schemas.microsoft.com/office/drawing/2014/main" id="{8DC3A411-E9C9-4A34-AB2D-8D6A8651EA0C}"/>
+                <a16:creationId xmlns:a16="http://schemas.microsoft.com/office/drawing/2014/main" id="{45627A3A-F0BC-4BCC-B272-5CC28B0F47F5}"/>
               </a:ext>
             </a:extLst>
           </p:cNvPr>
@@ -16186,7 +16614,7 @@
           <p:cNvPr id="23" name="">
             <a:extLst xmlns:a="http://schemas.openxmlformats.org/drawingml/2006/main">
               <a:ext uri="{FF2B5EF4-FFF2-40B4-BE49-F238E27FC236}">
-                <a16:creationId xmlns:a16="http://schemas.microsoft.com/office/drawing/2014/main" id="{57B5C424-9A04-41BD-9A3D-8B94BD32E835}"/>
+                <a16:creationId xmlns:a16="http://schemas.microsoft.com/office/drawing/2014/main" id="{F90BF874-871C-4447-B235-812A02C1D664}"/>
               </a:ext>
             </a:extLst>
           </p:cNvPr>
@@ -16221,7 +16649,7 @@
           <p:cNvPr id="24" name="">
             <a:extLst xmlns:a="http://schemas.openxmlformats.org/drawingml/2006/main">
               <a:ext uri="{FF2B5EF4-FFF2-40B4-BE49-F238E27FC236}">
-                <a16:creationId xmlns:a16="http://schemas.microsoft.com/office/drawing/2014/main" id="{E0A73655-D5BA-4A32-81EB-9023FA56D2AD}"/>
+                <a16:creationId xmlns:a16="http://schemas.microsoft.com/office/drawing/2014/main" id="{6024C8CE-530F-4C01-A8A4-900CFF37692E}"/>
               </a:ext>
             </a:extLst>
           </p:cNvPr>
@@ -16256,7 +16684,7 @@
           <p:cNvPr id="25" name="">
             <a:extLst xmlns:a="http://schemas.openxmlformats.org/drawingml/2006/main">
               <a:ext uri="{FF2B5EF4-FFF2-40B4-BE49-F238E27FC236}">
-                <a16:creationId xmlns:a16="http://schemas.microsoft.com/office/drawing/2014/main" id="{C99B823F-1E77-4763-866C-9C83D905E6E5}"/>
+                <a16:creationId xmlns:a16="http://schemas.microsoft.com/office/drawing/2014/main" id="{2BC28231-EA98-4A2D-B70C-790C7F074235}"/>
               </a:ext>
             </a:extLst>
           </p:cNvPr>
@@ -16291,7 +16719,7 @@
           <p:cNvPr id="26" name="">
             <a:extLst xmlns:a="http://schemas.openxmlformats.org/drawingml/2006/main">
               <a:ext uri="{FF2B5EF4-FFF2-40B4-BE49-F238E27FC236}">
-                <a16:creationId xmlns:a16="http://schemas.microsoft.com/office/drawing/2014/main" id="{E104FABB-24A4-4E30-A0EC-825F0E64A99E}"/>
+                <a16:creationId xmlns:a16="http://schemas.microsoft.com/office/drawing/2014/main" id="{87BF8E86-942A-4A12-8FDD-3B1AC35C1651}"/>
               </a:ext>
             </a:extLst>
           </p:cNvPr>
@@ -16326,7 +16754,7 @@
           <p:cNvPr id="27" name="">
             <a:extLst xmlns:a="http://schemas.openxmlformats.org/drawingml/2006/main">
               <a:ext uri="{FF2B5EF4-FFF2-40B4-BE49-F238E27FC236}">
-                <a16:creationId xmlns:a16="http://schemas.microsoft.com/office/drawing/2014/main" id="{179F3DA0-2104-4CAF-9BF3-5A39DF3C3660}"/>
+                <a16:creationId xmlns:a16="http://schemas.microsoft.com/office/drawing/2014/main" id="{4BB7524E-D634-4432-AC5F-8114FE058054}"/>
               </a:ext>
             </a:extLst>
           </p:cNvPr>
@@ -16361,7 +16789,7 @@
           <p:cNvPr id="28" name="">
             <a:extLst xmlns:a="http://schemas.openxmlformats.org/drawingml/2006/main">
               <a:ext uri="{FF2B5EF4-FFF2-40B4-BE49-F238E27FC236}">
-                <a16:creationId xmlns:a16="http://schemas.microsoft.com/office/drawing/2014/main" id="{F3C3F415-4D72-4719-9550-DA47442265E9}"/>
+                <a16:creationId xmlns:a16="http://schemas.microsoft.com/office/drawing/2014/main" id="{CD68E49C-8BBE-4CFD-A2AF-65216584480C}"/>
               </a:ext>
             </a:extLst>
           </p:cNvPr>
@@ -16396,7 +16824,7 @@
           <p:cNvPr id="29" name="">
             <a:extLst xmlns:a="http://schemas.openxmlformats.org/drawingml/2006/main">
               <a:ext uri="{FF2B5EF4-FFF2-40B4-BE49-F238E27FC236}">
-                <a16:creationId xmlns:a16="http://schemas.microsoft.com/office/drawing/2014/main" id="{A4464C82-9FDA-4817-8973-FED9159473ED}"/>
+                <a16:creationId xmlns:a16="http://schemas.microsoft.com/office/drawing/2014/main" id="{FAB8B0E4-4AA3-44F7-A13A-741D6D3A6976}"/>
               </a:ext>
             </a:extLst>
           </p:cNvPr>
@@ -16431,7 +16859,7 @@
           <p:cNvPr id="30" name="">
             <a:extLst xmlns:a="http://schemas.openxmlformats.org/drawingml/2006/main">
               <a:ext uri="{FF2B5EF4-FFF2-40B4-BE49-F238E27FC236}">
-                <a16:creationId xmlns:a16="http://schemas.microsoft.com/office/drawing/2014/main" id="{A396B7DE-FEEA-4E88-845D-664B7FAF5E8A}"/>
+                <a16:creationId xmlns:a16="http://schemas.microsoft.com/office/drawing/2014/main" id="{8E9824A5-16BE-44AF-9D0F-A35CB678AACC}"/>
               </a:ext>
             </a:extLst>
           </p:cNvPr>
@@ -16495,7 +16923,7 @@
           <p:cNvPr id="31" name="kicker-06-marker">
             <a:extLst xmlns:a="http://schemas.openxmlformats.org/drawingml/2006/main">
               <a:ext uri="{FF2B5EF4-FFF2-40B4-BE49-F238E27FC236}">
-                <a16:creationId xmlns:a16="http://schemas.microsoft.com/office/drawing/2014/main" id="{FE927438-3ADA-44EB-9254-20CDAB089AF6}"/>
+                <a16:creationId xmlns:a16="http://schemas.microsoft.com/office/drawing/2014/main" id="{D1FB8D72-5833-4D34-B1C4-684218CE861F}"/>
               </a:ext>
             </a:extLst>
           </p:cNvPr>
@@ -16530,7 +16958,7 @@
           <p:cNvPr id="32" name="kicker-06-label">
             <a:extLst xmlns:a="http://schemas.openxmlformats.org/drawingml/2006/main">
               <a:ext uri="{FF2B5EF4-FFF2-40B4-BE49-F238E27FC236}">
-                <a16:creationId xmlns:a16="http://schemas.microsoft.com/office/drawing/2014/main" id="{9E341861-32ED-4F12-9C24-F9A99CE96711}"/>
+                <a16:creationId xmlns:a16="http://schemas.microsoft.com/office/drawing/2014/main" id="{F84655AA-2EAB-4A62-9F65-2F12121D751B}"/>
               </a:ext>
             </a:extLst>
           </p:cNvPr>
@@ -16594,7 +17022,7 @@
           <p:cNvPr id="33" name="">
             <a:extLst xmlns:a="http://schemas.openxmlformats.org/drawingml/2006/main">
               <a:ext uri="{FF2B5EF4-FFF2-40B4-BE49-F238E27FC236}">
-                <a16:creationId xmlns:a16="http://schemas.microsoft.com/office/drawing/2014/main" id="{B3C3D4B5-BA96-447A-9ABF-08D3C1525DEB}"/>
+                <a16:creationId xmlns:a16="http://schemas.microsoft.com/office/drawing/2014/main" id="{4B5ECD0E-C39C-4B16-BF63-4DCAD179D7A6}"/>
               </a:ext>
             </a:extLst>
           </p:cNvPr>
@@ -16606,7 +17034,7 @@
         <p:spPr>
           <a:xfrm xmlns:a="http://schemas.openxmlformats.org/drawingml/2006/main">
             <a:off x="552450" y="781050"/>
-            <a:ext cx="7429500" cy="647700"/>
+            <a:ext cx="7429500" cy="628650"/>
           </a:xfrm>
           <a:prstGeom xmlns:a="http://schemas.openxmlformats.org/drawingml/2006/main" prst="rect">
             <a:avLst/>
@@ -16648,7 +17076,7 @@
                 <a:ea typeface="Hiragino Sans"/>
                 <a:cs typeface="Hiragino Sans"/>
               </a:rPr>
-              <a:t>式は、現場で回すランブックになる</a:t>
+              <a:t>式は、現場で使う判断手順になる</a:t>
             </a:r>
           </a:p>
         </p:txBody>
@@ -16658,7 +17086,7 @@
           <p:cNvPr id="34" name="">
             <a:extLst xmlns:a="http://schemas.openxmlformats.org/drawingml/2006/main">
               <a:ext uri="{FF2B5EF4-FFF2-40B4-BE49-F238E27FC236}">
-                <a16:creationId xmlns:a16="http://schemas.microsoft.com/office/drawing/2014/main" id="{DECF93F9-FD11-4EC5-AC29-B8E8E4CACAC9}"/>
+                <a16:creationId xmlns:a16="http://schemas.microsoft.com/office/drawing/2014/main" id="{B686AD9E-C4D0-4203-B8A6-0E7DED6D7B91}"/>
               </a:ext>
             </a:extLst>
           </p:cNvPr>
@@ -16670,7 +17098,7 @@
         <p:spPr>
           <a:xfrm xmlns:a="http://schemas.openxmlformats.org/drawingml/2006/main">
             <a:off x="590550" y="1466850"/>
-            <a:ext cx="6667500" cy="323850"/>
+            <a:ext cx="6667500" cy="342900"/>
           </a:xfrm>
           <a:prstGeom xmlns:a="http://schemas.openxmlformats.org/drawingml/2006/main" prst="rect">
             <a:avLst/>
@@ -16722,7 +17150,7 @@
           <p:cNvPr id="35" name="">
             <a:extLst xmlns:a="http://schemas.openxmlformats.org/drawingml/2006/main">
               <a:ext uri="{FF2B5EF4-FFF2-40B4-BE49-F238E27FC236}">
-                <a16:creationId xmlns:a16="http://schemas.microsoft.com/office/drawing/2014/main" id="{34496D2B-0F73-45DF-87BE-560BB65F60AF}"/>
+                <a16:creationId xmlns:a16="http://schemas.microsoft.com/office/drawing/2014/main" id="{04815E6B-72D4-407E-836B-C23D26D4E7CE}"/>
               </a:ext>
             </a:extLst>
           </p:cNvPr>
@@ -16758,7 +17186,7 @@
           <a:lstStyle xmlns:a="http://schemas.openxmlformats.org/drawingml/2006/main"/>
           <a:p xmlns:a="http://schemas.openxmlformats.org/drawingml/2006/main">
             <a:pPr algn="r">
-              <a:defRPr sz="2025" b="1">
+              <a:defRPr sz="2100" b="1">
                 <a:solidFill>
                   <a:srgbClr val="FF4D4A"/>
                 </a:solidFill>
@@ -16768,7 +17196,7 @@
               </a:defRPr>
             </a:pPr>
             <a:r>
-              <a:rPr sz="2025" b="1">
+              <a:rPr sz="2100" b="1">
                 <a:solidFill>
                   <a:srgbClr val="FF4D4A"/>
                 </a:solidFill>
@@ -16776,7 +17204,7 @@
                 <a:ea typeface="Hiragino Sans"/>
                 <a:cs typeface="Hiragino Sans"/>
               </a:rPr>
-              <a:t>RUNBOOK</a:t>
+              <a:t>判断手順</a:t>
             </a:r>
           </a:p>
         </p:txBody>
@@ -16786,7 +17214,7 @@
           <p:cNvPr id="36" name="">
             <a:extLst xmlns:a="http://schemas.openxmlformats.org/drawingml/2006/main">
               <a:ext uri="{FF2B5EF4-FFF2-40B4-BE49-F238E27FC236}">
-                <a16:creationId xmlns:a16="http://schemas.microsoft.com/office/drawing/2014/main" id="{CE0CC2D8-D475-446C-B3D7-F02CE72D87BA}"/>
+                <a16:creationId xmlns:a16="http://schemas.microsoft.com/office/drawing/2014/main" id="{03D8F56F-BDE0-4F2E-A04F-780527CDE3F0}"/>
               </a:ext>
             </a:extLst>
           </p:cNvPr>
@@ -16819,7 +17247,7 @@
           <p:cNvPr id="37" name="">
             <a:extLst xmlns:a="http://schemas.openxmlformats.org/drawingml/2006/main">
               <a:ext uri="{FF2B5EF4-FFF2-40B4-BE49-F238E27FC236}">
-                <a16:creationId xmlns:a16="http://schemas.microsoft.com/office/drawing/2014/main" id="{270CF7A2-CE99-4F93-8027-29AB0EB8AC4D}"/>
+                <a16:creationId xmlns:a16="http://schemas.microsoft.com/office/drawing/2014/main" id="{24EC01FD-1B99-4834-AFF5-D3E81C451B56}"/>
               </a:ext>
             </a:extLst>
           </p:cNvPr>
@@ -16854,7 +17282,7 @@
           <p:cNvPr id="38" name="">
             <a:extLst xmlns:a="http://schemas.openxmlformats.org/drawingml/2006/main">
               <a:ext uri="{FF2B5EF4-FFF2-40B4-BE49-F238E27FC236}">
-                <a16:creationId xmlns:a16="http://schemas.microsoft.com/office/drawing/2014/main" id="{CECC1C0B-614D-453B-B6A2-CD7FE90CA9A2}"/>
+                <a16:creationId xmlns:a16="http://schemas.microsoft.com/office/drawing/2014/main" id="{F623AC2D-22B6-413B-B3B7-19155AD96915}"/>
               </a:ext>
             </a:extLst>
           </p:cNvPr>
@@ -16918,7 +17346,7 @@
           <p:cNvPr id="39" name="">
             <a:extLst xmlns:a="http://schemas.openxmlformats.org/drawingml/2006/main">
               <a:ext uri="{FF2B5EF4-FFF2-40B4-BE49-F238E27FC236}">
-                <a16:creationId xmlns:a16="http://schemas.microsoft.com/office/drawing/2014/main" id="{CA030732-D87F-4CF0-B2DA-04827AADD6FD}"/>
+                <a16:creationId xmlns:a16="http://schemas.microsoft.com/office/drawing/2014/main" id="{F67B0B86-726B-4AD7-B478-B2F0C0D96CFB}"/>
               </a:ext>
             </a:extLst>
           </p:cNvPr>
@@ -16982,7 +17410,7 @@
           <p:cNvPr id="40" name="">
             <a:extLst xmlns:a="http://schemas.openxmlformats.org/drawingml/2006/main">
               <a:ext uri="{FF2B5EF4-FFF2-40B4-BE49-F238E27FC236}">
-                <a16:creationId xmlns:a16="http://schemas.microsoft.com/office/drawing/2014/main" id="{58415C05-5A2C-455A-85C0-B9A8B5D87EF4}"/>
+                <a16:creationId xmlns:a16="http://schemas.microsoft.com/office/drawing/2014/main" id="{029DBA84-8088-4FED-813A-DC23ECB68F29}"/>
               </a:ext>
             </a:extLst>
           </p:cNvPr>
@@ -17046,7 +17474,7 @@
           <p:cNvPr id="41" name="">
             <a:extLst xmlns:a="http://schemas.openxmlformats.org/drawingml/2006/main">
               <a:ext uri="{FF2B5EF4-FFF2-40B4-BE49-F238E27FC236}">
-                <a16:creationId xmlns:a16="http://schemas.microsoft.com/office/drawing/2014/main" id="{81F7AF9F-22E1-4BC0-82BC-0705B58A6603}"/>
+                <a16:creationId xmlns:a16="http://schemas.microsoft.com/office/drawing/2014/main" id="{4AAF64EC-30B6-43CC-9891-0876D9753535}"/>
               </a:ext>
             </a:extLst>
           </p:cNvPr>
@@ -17110,7 +17538,7 @@
           <p:cNvPr id="42" name="">
             <a:extLst xmlns:a="http://schemas.openxmlformats.org/drawingml/2006/main">
               <a:ext uri="{FF2B5EF4-FFF2-40B4-BE49-F238E27FC236}">
-                <a16:creationId xmlns:a16="http://schemas.microsoft.com/office/drawing/2014/main" id="{0D3B66F9-2B67-4AF6-B9CD-63755316193A}"/>
+                <a16:creationId xmlns:a16="http://schemas.microsoft.com/office/drawing/2014/main" id="{A1B53E25-DE83-4A5D-B143-77F711220133}"/>
               </a:ext>
             </a:extLst>
           </p:cNvPr>
@@ -17143,7 +17571,7 @@
           <p:cNvPr id="43" name="">
             <a:extLst xmlns:a="http://schemas.openxmlformats.org/drawingml/2006/main">
               <a:ext uri="{FF2B5EF4-FFF2-40B4-BE49-F238E27FC236}">
-                <a16:creationId xmlns:a16="http://schemas.microsoft.com/office/drawing/2014/main" id="{B28A73B6-0666-4136-8704-26C947174560}"/>
+                <a16:creationId xmlns:a16="http://schemas.microsoft.com/office/drawing/2014/main" id="{EF6C1F15-1895-46CD-A246-D3AC6124D9E4}"/>
               </a:ext>
             </a:extLst>
           </p:cNvPr>
@@ -17178,7 +17606,7 @@
           <p:cNvPr id="44" name="">
             <a:extLst xmlns:a="http://schemas.openxmlformats.org/drawingml/2006/main">
               <a:ext uri="{FF2B5EF4-FFF2-40B4-BE49-F238E27FC236}">
-                <a16:creationId xmlns:a16="http://schemas.microsoft.com/office/drawing/2014/main" id="{0B7D73F5-78B1-48ED-9633-66AFBEE35CB3}"/>
+                <a16:creationId xmlns:a16="http://schemas.microsoft.com/office/drawing/2014/main" id="{D467AA43-3689-4DF3-9712-CBF4BCBCFA61}"/>
               </a:ext>
             </a:extLst>
           </p:cNvPr>
@@ -17242,7 +17670,7 @@
           <p:cNvPr id="45" name="">
             <a:extLst xmlns:a="http://schemas.openxmlformats.org/drawingml/2006/main">
               <a:ext uri="{FF2B5EF4-FFF2-40B4-BE49-F238E27FC236}">
-                <a16:creationId xmlns:a16="http://schemas.microsoft.com/office/drawing/2014/main" id="{0D3E488F-06CA-4F54-ADAC-4194B21A5EA7}"/>
+                <a16:creationId xmlns:a16="http://schemas.microsoft.com/office/drawing/2014/main" id="{BCCD4E68-4F9C-487E-85C9-1E24B7FF8494}"/>
               </a:ext>
             </a:extLst>
           </p:cNvPr>
@@ -17306,7 +17734,7 @@
           <p:cNvPr id="46" name="">
             <a:extLst xmlns:a="http://schemas.openxmlformats.org/drawingml/2006/main">
               <a:ext uri="{FF2B5EF4-FFF2-40B4-BE49-F238E27FC236}">
-                <a16:creationId xmlns:a16="http://schemas.microsoft.com/office/drawing/2014/main" id="{98CF3122-80F0-4F51-B769-76474DE62A2E}"/>
+                <a16:creationId xmlns:a16="http://schemas.microsoft.com/office/drawing/2014/main" id="{6BF1864E-0EC7-4C7B-A792-8C2DA8C3F5BD}"/>
               </a:ext>
             </a:extLst>
           </p:cNvPr>
@@ -17370,7 +17798,7 @@
           <p:cNvPr id="47" name="">
             <a:extLst xmlns:a="http://schemas.openxmlformats.org/drawingml/2006/main">
               <a:ext uri="{FF2B5EF4-FFF2-40B4-BE49-F238E27FC236}">
-                <a16:creationId xmlns:a16="http://schemas.microsoft.com/office/drawing/2014/main" id="{CC2640BA-3EAE-410B-9CE0-FEF770E3EEB6}"/>
+                <a16:creationId xmlns:a16="http://schemas.microsoft.com/office/drawing/2014/main" id="{B8CF3950-E07C-4F62-8882-999D96A41AFD}"/>
               </a:ext>
             </a:extLst>
           </p:cNvPr>
@@ -17434,7 +17862,7 @@
           <p:cNvPr id="48" name="">
             <a:extLst xmlns:a="http://schemas.openxmlformats.org/drawingml/2006/main">
               <a:ext uri="{FF2B5EF4-FFF2-40B4-BE49-F238E27FC236}">
-                <a16:creationId xmlns:a16="http://schemas.microsoft.com/office/drawing/2014/main" id="{3E3AA12D-ACE2-4F28-A768-2A2C2524F4D9}"/>
+                <a16:creationId xmlns:a16="http://schemas.microsoft.com/office/drawing/2014/main" id="{F81C9690-6DE3-4FE0-898A-7F6C4C825EE4}"/>
               </a:ext>
             </a:extLst>
           </p:cNvPr>
@@ -17467,7 +17895,7 @@
           <p:cNvPr id="49" name="">
             <a:extLst xmlns:a="http://schemas.openxmlformats.org/drawingml/2006/main">
               <a:ext uri="{FF2B5EF4-FFF2-40B4-BE49-F238E27FC236}">
-                <a16:creationId xmlns:a16="http://schemas.microsoft.com/office/drawing/2014/main" id="{82036AA6-F8DC-4550-B7CC-5C89C678D141}"/>
+                <a16:creationId xmlns:a16="http://schemas.microsoft.com/office/drawing/2014/main" id="{E31F4FFF-40B2-4A14-AB6B-1646191792DE}"/>
               </a:ext>
             </a:extLst>
           </p:cNvPr>
@@ -17502,7 +17930,7 @@
           <p:cNvPr id="50" name="">
             <a:extLst xmlns:a="http://schemas.openxmlformats.org/drawingml/2006/main">
               <a:ext uri="{FF2B5EF4-FFF2-40B4-BE49-F238E27FC236}">
-                <a16:creationId xmlns:a16="http://schemas.microsoft.com/office/drawing/2014/main" id="{F133B270-ABDC-43B4-9A0E-3588DED3E1F1}"/>
+                <a16:creationId xmlns:a16="http://schemas.microsoft.com/office/drawing/2014/main" id="{A17719A7-54A4-468B-AAA8-AE34E980EF64}"/>
               </a:ext>
             </a:extLst>
           </p:cNvPr>
@@ -17566,7 +17994,7 @@
           <p:cNvPr id="51" name="">
             <a:extLst xmlns:a="http://schemas.openxmlformats.org/drawingml/2006/main">
               <a:ext uri="{FF2B5EF4-FFF2-40B4-BE49-F238E27FC236}">
-                <a16:creationId xmlns:a16="http://schemas.microsoft.com/office/drawing/2014/main" id="{4B2A0F8F-1E5B-4B95-8643-CB5547F5ECD3}"/>
+                <a16:creationId xmlns:a16="http://schemas.microsoft.com/office/drawing/2014/main" id="{9C8239AE-91F5-4CB0-8F78-9B48C91CDC01}"/>
               </a:ext>
             </a:extLst>
           </p:cNvPr>
@@ -17630,7 +18058,7 @@
           <p:cNvPr id="52" name="">
             <a:extLst xmlns:a="http://schemas.openxmlformats.org/drawingml/2006/main">
               <a:ext uri="{FF2B5EF4-FFF2-40B4-BE49-F238E27FC236}">
-                <a16:creationId xmlns:a16="http://schemas.microsoft.com/office/drawing/2014/main" id="{8BFE09EE-E5F8-441E-A154-A4440D53FA4E}"/>
+                <a16:creationId xmlns:a16="http://schemas.microsoft.com/office/drawing/2014/main" id="{20752351-766C-4A48-AA51-0B15836F02D9}"/>
               </a:ext>
             </a:extLst>
           </p:cNvPr>
@@ -17694,7 +18122,7 @@
           <p:cNvPr id="53" name="">
             <a:extLst xmlns:a="http://schemas.openxmlformats.org/drawingml/2006/main">
               <a:ext uri="{FF2B5EF4-FFF2-40B4-BE49-F238E27FC236}">
-                <a16:creationId xmlns:a16="http://schemas.microsoft.com/office/drawing/2014/main" id="{AE446875-3C33-4372-B8B3-90C6B8BC04B6}"/>
+                <a16:creationId xmlns:a16="http://schemas.microsoft.com/office/drawing/2014/main" id="{02049167-28EF-4BAE-999E-420B93EADE5F}"/>
               </a:ext>
             </a:extLst>
           </p:cNvPr>
@@ -17758,7 +18186,7 @@
           <p:cNvPr id="54" name="">
             <a:extLst xmlns:a="http://schemas.openxmlformats.org/drawingml/2006/main">
               <a:ext uri="{FF2B5EF4-FFF2-40B4-BE49-F238E27FC236}">
-                <a16:creationId xmlns:a16="http://schemas.microsoft.com/office/drawing/2014/main" id="{F5CBA1FF-CD3D-4991-89D3-AE3D81878CA4}"/>
+                <a16:creationId xmlns:a16="http://schemas.microsoft.com/office/drawing/2014/main" id="{64159AC6-B1CD-42AD-8D99-41853C78B8D5}"/>
               </a:ext>
             </a:extLst>
           </p:cNvPr>
@@ -17791,7 +18219,7 @@
           <p:cNvPr id="55" name="">
             <a:extLst xmlns:a="http://schemas.openxmlformats.org/drawingml/2006/main">
               <a:ext uri="{FF2B5EF4-FFF2-40B4-BE49-F238E27FC236}">
-                <a16:creationId xmlns:a16="http://schemas.microsoft.com/office/drawing/2014/main" id="{4EBE3DF1-64FC-4663-A705-B3DF8C72DA0C}"/>
+                <a16:creationId xmlns:a16="http://schemas.microsoft.com/office/drawing/2014/main" id="{6B7E6C79-050C-4679-9451-B9FB575E342F}"/>
               </a:ext>
             </a:extLst>
           </p:cNvPr>
@@ -17826,7 +18254,7 @@
           <p:cNvPr id="56" name="">
             <a:extLst xmlns:a="http://schemas.openxmlformats.org/drawingml/2006/main">
               <a:ext uri="{FF2B5EF4-FFF2-40B4-BE49-F238E27FC236}">
-                <a16:creationId xmlns:a16="http://schemas.microsoft.com/office/drawing/2014/main" id="{0A81E372-5F6E-4AE0-B24A-E025738944DF}"/>
+                <a16:creationId xmlns:a16="http://schemas.microsoft.com/office/drawing/2014/main" id="{6002965E-F124-4624-BAB5-559010AC6B94}"/>
               </a:ext>
             </a:extLst>
           </p:cNvPr>
@@ -17890,7 +18318,7 @@
           <p:cNvPr id="57" name="">
             <a:extLst xmlns:a="http://schemas.openxmlformats.org/drawingml/2006/main">
               <a:ext uri="{FF2B5EF4-FFF2-40B4-BE49-F238E27FC236}">
-                <a16:creationId xmlns:a16="http://schemas.microsoft.com/office/drawing/2014/main" id="{B3AC502A-050D-40AF-BC57-C4CD4246A953}"/>
+                <a16:creationId xmlns:a16="http://schemas.microsoft.com/office/drawing/2014/main" id="{5E85D86D-56EA-4E20-B29C-4EDEAE9E232F}"/>
               </a:ext>
             </a:extLst>
           </p:cNvPr>
@@ -17954,7 +18382,7 @@
           <p:cNvPr id="58" name="">
             <a:extLst xmlns:a="http://schemas.openxmlformats.org/drawingml/2006/main">
               <a:ext uri="{FF2B5EF4-FFF2-40B4-BE49-F238E27FC236}">
-                <a16:creationId xmlns:a16="http://schemas.microsoft.com/office/drawing/2014/main" id="{04F87997-9EC5-4DD9-AE87-7E2E78D8B23C}"/>
+                <a16:creationId xmlns:a16="http://schemas.microsoft.com/office/drawing/2014/main" id="{71B04632-6D3E-4A6A-A7AF-97A7C1B5B590}"/>
               </a:ext>
             </a:extLst>
           </p:cNvPr>
@@ -18018,7 +18446,7 @@
           <p:cNvPr id="59" name="">
             <a:extLst xmlns:a="http://schemas.openxmlformats.org/drawingml/2006/main">
               <a:ext uri="{FF2B5EF4-FFF2-40B4-BE49-F238E27FC236}">
-                <a16:creationId xmlns:a16="http://schemas.microsoft.com/office/drawing/2014/main" id="{FC890CDD-C44A-4D24-83EE-4BD2E29159C2}"/>
+                <a16:creationId xmlns:a16="http://schemas.microsoft.com/office/drawing/2014/main" id="{3F1B649B-EB04-4874-A91D-46BBAD200BA0}"/>
               </a:ext>
             </a:extLst>
           </p:cNvPr>
@@ -18053,7 +18481,7 @@
           <p:cNvPr id="60" name="">
             <a:extLst xmlns:a="http://schemas.openxmlformats.org/drawingml/2006/main">
               <a:ext uri="{FF2B5EF4-FFF2-40B4-BE49-F238E27FC236}">
-                <a16:creationId xmlns:a16="http://schemas.microsoft.com/office/drawing/2014/main" id="{F333D1AC-0613-4DE8-B2A6-F6180B3AFF0E}"/>
+                <a16:creationId xmlns:a16="http://schemas.microsoft.com/office/drawing/2014/main" id="{57CEF4B8-3943-4554-820F-C86D220CC62D}"/>
               </a:ext>
             </a:extLst>
           </p:cNvPr>
@@ -18117,19 +18545,19 @@
           <p:cNvPr id="61" name="">
             <a:extLst xmlns:a="http://schemas.openxmlformats.org/drawingml/2006/main">
               <a:ext uri="{FF2B5EF4-FFF2-40B4-BE49-F238E27FC236}">
-                <a16:creationId xmlns:a16="http://schemas.microsoft.com/office/drawing/2014/main" id="{55958734-BA6F-496D-AA71-4BD46565AED3}"/>
-              </a:ext>
-            </a:extLst>
-          </p:cNvPr>
-          <p:cNvSpPr>
-            <a:spLocks xmlns:a="http://schemas.openxmlformats.org/drawingml/2006/main" noGrp="1"/>
-          </p:cNvSpPr>
-          <p:nvPr/>
-        </p:nvSpPr>
-        <p:spPr>
-          <a:xfrm xmlns:a="http://schemas.openxmlformats.org/drawingml/2006/main">
-            <a:off x="2971800" y="5314950"/>
-            <a:ext cx="1466850" cy="285750"/>
+                <a16:creationId xmlns:a16="http://schemas.microsoft.com/office/drawing/2014/main" id="{500E20B7-FD7C-4B3C-8FB6-8A3CBBC8A717}"/>
+              </a:ext>
+            </a:extLst>
+          </p:cNvPr>
+          <p:cNvSpPr>
+            <a:spLocks xmlns:a="http://schemas.openxmlformats.org/drawingml/2006/main" noGrp="1"/>
+          </p:cNvSpPr>
+          <p:nvPr/>
+        </p:nvSpPr>
+        <p:spPr>
+          <a:xfrm xmlns:a="http://schemas.openxmlformats.org/drawingml/2006/main">
+            <a:off x="3143250" y="5314950"/>
+            <a:ext cx="1200150" cy="285750"/>
           </a:xfrm>
           <a:prstGeom xmlns:a="http://schemas.openxmlformats.org/drawingml/2006/main" prst="rect">
             <a:avLst/>
@@ -18152,19 +18580,19 @@
           <p:cNvPr id="62" name="">
             <a:extLst xmlns:a="http://schemas.openxmlformats.org/drawingml/2006/main">
               <a:ext uri="{FF2B5EF4-FFF2-40B4-BE49-F238E27FC236}">
-                <a16:creationId xmlns:a16="http://schemas.microsoft.com/office/drawing/2014/main" id="{883A8F5D-1C7E-49CB-BC56-F70915B595CE}"/>
-              </a:ext>
-            </a:extLst>
-          </p:cNvPr>
-          <p:cNvSpPr>
-            <a:spLocks xmlns:a="http://schemas.openxmlformats.org/drawingml/2006/main" noGrp="1"/>
-          </p:cNvSpPr>
-          <p:nvPr/>
-        </p:nvSpPr>
-        <p:spPr>
-          <a:xfrm xmlns:a="http://schemas.openxmlformats.org/drawingml/2006/main">
-            <a:off x="3067050" y="5343525"/>
-            <a:ext cx="1276350" cy="228600"/>
+                <a16:creationId xmlns:a16="http://schemas.microsoft.com/office/drawing/2014/main" id="{94FB5D9C-0573-41C3-8D44-1A77F0172759}"/>
+              </a:ext>
+            </a:extLst>
+          </p:cNvPr>
+          <p:cNvSpPr>
+            <a:spLocks xmlns:a="http://schemas.openxmlformats.org/drawingml/2006/main" noGrp="1"/>
+          </p:cNvSpPr>
+          <p:nvPr/>
+        </p:nvSpPr>
+        <p:spPr>
+          <a:xfrm xmlns:a="http://schemas.openxmlformats.org/drawingml/2006/main">
+            <a:off x="3238500" y="5343525"/>
+            <a:ext cx="1009650" cy="228600"/>
           </a:xfrm>
           <a:prstGeom xmlns:a="http://schemas.openxmlformats.org/drawingml/2006/main" prst="rect">
             <a:avLst/>
@@ -18206,7 +18634,7 @@
                 <a:ea typeface="Hiragino Sans"/>
                 <a:cs typeface="Hiragino Sans"/>
               </a:rPr>
-              <a:t>追加保持費用</a:t>
+              <a:t>保存費用</a:t>
             </a:r>
           </a:p>
         </p:txBody>
@@ -18216,18 +18644,18 @@
           <p:cNvPr id="63" name="">
             <a:extLst xmlns:a="http://schemas.openxmlformats.org/drawingml/2006/main">
               <a:ext uri="{FF2B5EF4-FFF2-40B4-BE49-F238E27FC236}">
-                <a16:creationId xmlns:a16="http://schemas.microsoft.com/office/drawing/2014/main" id="{8B32D9AE-2A99-403E-BD18-28982E386B44}"/>
-              </a:ext>
-            </a:extLst>
-          </p:cNvPr>
-          <p:cNvSpPr>
-            <a:spLocks xmlns:a="http://schemas.openxmlformats.org/drawingml/2006/main" noGrp="1"/>
-          </p:cNvSpPr>
-          <p:nvPr/>
-        </p:nvSpPr>
-        <p:spPr>
-          <a:xfrm xmlns:a="http://schemas.openxmlformats.org/drawingml/2006/main">
-            <a:off x="4667250" y="5334000"/>
+                <a16:creationId xmlns:a16="http://schemas.microsoft.com/office/drawing/2014/main" id="{7817D045-CDBD-49FC-8134-B2228F5EA424}"/>
+              </a:ext>
+            </a:extLst>
+          </p:cNvPr>
+          <p:cNvSpPr>
+            <a:spLocks xmlns:a="http://schemas.openxmlformats.org/drawingml/2006/main" noGrp="1"/>
+          </p:cNvSpPr>
+          <p:nvPr/>
+        </p:nvSpPr>
+        <p:spPr>
+          <a:xfrm xmlns:a="http://schemas.openxmlformats.org/drawingml/2006/main">
+            <a:off x="4591050" y="5334000"/>
             <a:ext cx="266700" cy="247650"/>
           </a:xfrm>
           <a:prstGeom xmlns:a="http://schemas.openxmlformats.org/drawingml/2006/main" prst="rect">
@@ -18280,19 +18708,19 @@
           <p:cNvPr id="64" name="">
             <a:extLst xmlns:a="http://schemas.openxmlformats.org/drawingml/2006/main">
               <a:ext uri="{FF2B5EF4-FFF2-40B4-BE49-F238E27FC236}">
-                <a16:creationId xmlns:a16="http://schemas.microsoft.com/office/drawing/2014/main" id="{AFC807B4-42B5-4024-898A-8E9252FBFE92}"/>
-              </a:ext>
-            </a:extLst>
-          </p:cNvPr>
-          <p:cNvSpPr>
-            <a:spLocks xmlns:a="http://schemas.openxmlformats.org/drawingml/2006/main" noGrp="1"/>
-          </p:cNvSpPr>
-          <p:nvPr/>
-        </p:nvSpPr>
-        <p:spPr>
-          <a:xfrm xmlns:a="http://schemas.openxmlformats.org/drawingml/2006/main">
-            <a:off x="5200650" y="5314950"/>
-            <a:ext cx="1905000" cy="285750"/>
+                <a16:creationId xmlns:a16="http://schemas.microsoft.com/office/drawing/2014/main" id="{DCF1DD8E-113D-4C52-9360-831F2799DAC5}"/>
+              </a:ext>
+            </a:extLst>
+          </p:cNvPr>
+          <p:cNvSpPr>
+            <a:spLocks xmlns:a="http://schemas.openxmlformats.org/drawingml/2006/main" noGrp="1"/>
+          </p:cNvSpPr>
+          <p:nvPr/>
+        </p:nvSpPr>
+        <p:spPr>
+          <a:xfrm xmlns:a="http://schemas.openxmlformats.org/drawingml/2006/main">
+            <a:off x="5105400" y="5314950"/>
+            <a:ext cx="1885950" cy="285750"/>
           </a:xfrm>
           <a:prstGeom xmlns:a="http://schemas.openxmlformats.org/drawingml/2006/main" prst="rect">
             <a:avLst/>
@@ -18315,19 +18743,19 @@
           <p:cNvPr id="65" name="">
             <a:extLst xmlns:a="http://schemas.openxmlformats.org/drawingml/2006/main">
               <a:ext uri="{FF2B5EF4-FFF2-40B4-BE49-F238E27FC236}">
-                <a16:creationId xmlns:a16="http://schemas.microsoft.com/office/drawing/2014/main" id="{C08CB645-B239-4D93-A71F-D40476D1354B}"/>
-              </a:ext>
-            </a:extLst>
-          </p:cNvPr>
-          <p:cNvSpPr>
-            <a:spLocks xmlns:a="http://schemas.openxmlformats.org/drawingml/2006/main" noGrp="1"/>
-          </p:cNvSpPr>
-          <p:nvPr/>
-        </p:nvSpPr>
-        <p:spPr>
-          <a:xfrm xmlns:a="http://schemas.openxmlformats.org/drawingml/2006/main">
-            <a:off x="5295900" y="5343525"/>
-            <a:ext cx="1714500" cy="228600"/>
+                <a16:creationId xmlns:a16="http://schemas.microsoft.com/office/drawing/2014/main" id="{415F1D8D-BC78-407F-B85B-AD3427F6609B}"/>
+              </a:ext>
+            </a:extLst>
+          </p:cNvPr>
+          <p:cNvSpPr>
+            <a:spLocks xmlns:a="http://schemas.openxmlformats.org/drawingml/2006/main" noGrp="1"/>
+          </p:cNvSpPr>
+          <p:nvPr/>
+        </p:nvSpPr>
+        <p:spPr>
+          <a:xfrm xmlns:a="http://schemas.openxmlformats.org/drawingml/2006/main">
+            <a:off x="5200650" y="5343525"/>
+            <a:ext cx="1695450" cy="228600"/>
           </a:xfrm>
           <a:prstGeom xmlns:a="http://schemas.openxmlformats.org/drawingml/2006/main" prst="rect">
             <a:avLst/>
@@ -18369,7 +18797,7 @@
                 <a:ea typeface="Hiragino Sans"/>
                 <a:cs typeface="Hiragino Sans"/>
               </a:rPr>
-              <a:t>復旧不能ペナルティ</a:t>
+              <a:t>復旧できない損失</a:t>
             </a:r>
           </a:p>
         </p:txBody>
@@ -18379,19 +18807,19 @@
           <p:cNvPr id="66" name="">
             <a:extLst xmlns:a="http://schemas.openxmlformats.org/drawingml/2006/main">
               <a:ext uri="{FF2B5EF4-FFF2-40B4-BE49-F238E27FC236}">
-                <a16:creationId xmlns:a16="http://schemas.microsoft.com/office/drawing/2014/main" id="{F5B980F3-FBEB-4E3D-BA13-348C2B972279}"/>
-              </a:ext>
-            </a:extLst>
-          </p:cNvPr>
-          <p:cNvSpPr>
-            <a:spLocks xmlns:a="http://schemas.openxmlformats.org/drawingml/2006/main" noGrp="1"/>
-          </p:cNvSpPr>
-          <p:nvPr/>
-        </p:nvSpPr>
-        <p:spPr>
-          <a:xfrm xmlns:a="http://schemas.openxmlformats.org/drawingml/2006/main">
-            <a:off x="7448550" y="5353050"/>
-            <a:ext cx="2667000" cy="209550"/>
+                <a16:creationId xmlns:a16="http://schemas.microsoft.com/office/drawing/2014/main" id="{C557EB13-51E5-4F22-BEA5-7BDDCECF71D1}"/>
+              </a:ext>
+            </a:extLst>
+          </p:cNvPr>
+          <p:cNvSpPr>
+            <a:spLocks xmlns:a="http://schemas.openxmlformats.org/drawingml/2006/main" noGrp="1"/>
+          </p:cNvSpPr>
+          <p:nvPr/>
+        </p:nvSpPr>
+        <p:spPr>
+          <a:xfrm xmlns:a="http://schemas.openxmlformats.org/drawingml/2006/main">
+            <a:off x="7334250" y="5353050"/>
+            <a:ext cx="3143250" cy="209550"/>
           </a:xfrm>
           <a:prstGeom xmlns:a="http://schemas.openxmlformats.org/drawingml/2006/main" prst="rect">
             <a:avLst/>
@@ -18433,7 +18861,7 @@
                 <a:ea typeface="Hiragino Sans"/>
                 <a:cs typeface="Hiragino Sans"/>
               </a:rPr>
-              <a:t>を置いて、追加保持世代を評価する</a:t>
+              <a:t>を比べて、追加で何世代残すかを決める</a:t>
             </a:r>
           </a:p>
         </p:txBody>
@@ -18443,19 +18871,19 @@
           <p:cNvPr id="67" name="">
             <a:extLst xmlns:a="http://schemas.openxmlformats.org/drawingml/2006/main">
               <a:ext uri="{FF2B5EF4-FFF2-40B4-BE49-F238E27FC236}">
-                <a16:creationId xmlns:a16="http://schemas.microsoft.com/office/drawing/2014/main" id="{1CCFA9A5-BF99-46AA-AD62-5F88BAA85CB5}"/>
-              </a:ext>
-            </a:extLst>
-          </p:cNvPr>
-          <p:cNvSpPr>
-            <a:spLocks xmlns:a="http://schemas.openxmlformats.org/drawingml/2006/main" noGrp="1"/>
-          </p:cNvSpPr>
-          <p:nvPr/>
-        </p:nvSpPr>
-        <p:spPr>
-          <a:xfrm xmlns:a="http://schemas.openxmlformats.org/drawingml/2006/main">
-            <a:off x="2305050" y="5886450"/>
-            <a:ext cx="7581900" cy="228600"/>
+                <a16:creationId xmlns:a16="http://schemas.microsoft.com/office/drawing/2014/main" id="{E7226BC5-BD7A-4DBD-988B-EF5B5E133683}"/>
+              </a:ext>
+            </a:extLst>
+          </p:cNvPr>
+          <p:cNvSpPr>
+            <a:spLocks xmlns:a="http://schemas.openxmlformats.org/drawingml/2006/main" noGrp="1"/>
+          </p:cNvSpPr>
+          <p:nvPr/>
+        </p:nvSpPr>
+        <p:spPr>
+          <a:xfrm xmlns:a="http://schemas.openxmlformats.org/drawingml/2006/main">
+            <a:off x="2476500" y="5886450"/>
+            <a:ext cx="7239000" cy="228600"/>
           </a:xfrm>
           <a:prstGeom xmlns:a="http://schemas.openxmlformats.org/drawingml/2006/main" prst="rect">
             <a:avLst/>
@@ -18497,7 +18925,7 @@
                 <a:ea typeface="Hiragino Sans"/>
                 <a:cs typeface="Hiragino Sans"/>
               </a:rPr>
-              <a:t>追加保持は「保存費用」と「清浄復旧に失敗する損失」を並べる小さな整数評価にする</a:t>
+              <a:t>ここでも見るのは式そのものではなく「費用を増やす価値があるか」</a:t>
             </a:r>
           </a:p>
         </p:txBody>
@@ -18507,7 +18935,7 @@
           <p:cNvPr id="68" name="">
             <a:extLst xmlns:a="http://schemas.openxmlformats.org/drawingml/2006/main">
               <a:ext uri="{FF2B5EF4-FFF2-40B4-BE49-F238E27FC236}">
-                <a16:creationId xmlns:a16="http://schemas.microsoft.com/office/drawing/2014/main" id="{B8EBD8B4-984E-4E04-ABBC-6356296BAA5B}"/>
+                <a16:creationId xmlns:a16="http://schemas.microsoft.com/office/drawing/2014/main" id="{CF3662C4-EACE-41C4-BEA2-B4728E2A8077}"/>
               </a:ext>
             </a:extLst>
           </p:cNvPr>
@@ -18569,7 +18997,7 @@
     </p:spTree>
     <p:extLst>
       <p:ext uri="{BB962C8B-B14F-4D97-AF65-F5344CB8AC3E}">
-        <p14:creationId xmlns:p14="http://schemas.microsoft.com/office/powerpoint/2010/main" val="1273613156"/>
+        <p14:creationId xmlns:p14="http://schemas.microsoft.com/office/powerpoint/2010/main" val="1587341129"/>
       </p:ext>
     </p:extLst>
   </p:cSld>
